--- a/docs/slides/Modulo 4/dia_6.pptx
+++ b/docs/slides/Modulo 4/dia_6.pptx
@@ -5,30 +5,30 @@
     <p:sldMasterId id="2147483648" r:id="rId1"/>
   </p:sldMasterIdLst>
   <p:sldIdLst>
-    <p:sldId id="256" r:id="rId7"/>
-    <p:sldId id="257" r:id="rId8"/>
-    <p:sldId id="258" r:id="rId9"/>
-    <p:sldId id="259" r:id="rId10"/>
-    <p:sldId id="260" r:id="rId11"/>
-    <p:sldId id="261" r:id="rId12"/>
-    <p:sldId id="262" r:id="rId13"/>
-    <p:sldId id="263" r:id="rId14"/>
-    <p:sldId id="264" r:id="rId15"/>
-    <p:sldId id="265" r:id="rId16"/>
-    <p:sldId id="266" r:id="rId17"/>
-    <p:sldId id="267" r:id="rId18"/>
-    <p:sldId id="268" r:id="rId19"/>
-    <p:sldId id="269" r:id="rId20"/>
-    <p:sldId id="270" r:id="rId21"/>
-    <p:sldId id="271" r:id="rId22"/>
-    <p:sldId id="272" r:id="rId23"/>
-    <p:sldId id="273" r:id="rId24"/>
-    <p:sldId id="274" r:id="rId25"/>
-    <p:sldId id="275" r:id="rId26"/>
-    <p:sldId id="276" r:id="rId27"/>
-    <p:sldId id="277" r:id="rId28"/>
+    <p:sldId id="256" r:id="rId2"/>
+    <p:sldId id="257" r:id="rId3"/>
+    <p:sldId id="258" r:id="rId4"/>
+    <p:sldId id="259" r:id="rId5"/>
+    <p:sldId id="260" r:id="rId6"/>
+    <p:sldId id="261" r:id="rId7"/>
+    <p:sldId id="262" r:id="rId8"/>
+    <p:sldId id="263" r:id="rId9"/>
+    <p:sldId id="264" r:id="rId10"/>
+    <p:sldId id="265" r:id="rId11"/>
+    <p:sldId id="266" r:id="rId12"/>
+    <p:sldId id="267" r:id="rId13"/>
+    <p:sldId id="268" r:id="rId14"/>
+    <p:sldId id="269" r:id="rId15"/>
+    <p:sldId id="270" r:id="rId16"/>
+    <p:sldId id="271" r:id="rId17"/>
+    <p:sldId id="272" r:id="rId18"/>
+    <p:sldId id="273" r:id="rId19"/>
+    <p:sldId id="274" r:id="rId20"/>
+    <p:sldId id="275" r:id="rId21"/>
+    <p:sldId id="276" r:id="rId22"/>
+    <p:sldId id="277" r:id="rId23"/>
   </p:sldIdLst>
-  <p:sldSz cx="12188952" cy="6858000" type="screen4x3"/>
+  <p:sldSz cx="12188825" cy="6858000"/>
   <p:notesSz cx="6858000" cy="9144000"/>
   <p:defaultTextStyle>
     <a:defPPr>
@@ -125,6 +125,22 @@
       </a:defRPr>
     </a:lvl9pPr>
   </p:defaultTextStyle>
+  <p:extLst>
+    <p:ext uri="{EFAFB233-063F-42B5-8137-9DF3F51BA10A}">
+      <p15:sldGuideLst xmlns:p15="http://schemas.microsoft.com/office/powerpoint/2012/main">
+        <p15:guide id="1" orient="horz" pos="2160">
+          <p15:clr>
+            <a:srgbClr val="A4A3A4"/>
+          </p15:clr>
+        </p15:guide>
+        <p15:guide id="2" pos="2880">
+          <p15:clr>
+            <a:srgbClr val="A4A3A4"/>
+          </p15:clr>
+        </p15:guide>
+      </p15:sldGuideLst>
+    </p:ext>
+  </p:extLst>
 </p:presentation>
 </file>
 
@@ -166,10 +182,9 @@
           <a:lstStyle/>
           <a:p>
             <a:r>
-              <a:rPr lang="en-US" smtClean="0"/>
+              <a:rPr lang="en-US"/>
               <a:t>Click to edit Master title style</a:t>
             </a:r>
-            <a:endParaRPr lang="en-US"/>
           </a:p>
         </p:txBody>
       </p:sp>
@@ -285,10 +300,9 @@
           </a:lstStyle>
           <a:p>
             <a:r>
-              <a:rPr lang="en-US" smtClean="0"/>
+              <a:rPr lang="en-US"/>
               <a:t>Click to edit Master subtitle style</a:t>
             </a:r>
-            <a:endParaRPr lang="en-US"/>
           </a:p>
         </p:txBody>
       </p:sp>
@@ -309,7 +323,7 @@
           <a:p>
             <a:fld id="{5BCAD085-E8A6-8845-BD4E-CB4CCA059FC4}" type="datetimeFigureOut">
               <a:rPr lang="en-US" smtClean="0"/>
-              <a:t>1/27/13</a:t>
+              <a:t>4/23/2026</a:t>
             </a:fld>
             <a:endParaRPr lang="en-US"/>
           </a:p>
@@ -351,7 +365,7 @@
           <a:p>
             <a:fld id="{C1FF6DA9-008F-8B48-92A6-B652298478BF}" type="slidenum">
               <a:rPr lang="en-US" smtClean="0"/>
-              <a:t>‹#›</a:t>
+              <a:t>‹Nº›</a:t>
             </a:fld>
             <a:endParaRPr lang="en-US"/>
           </a:p>
@@ -403,10 +417,9 @@
           <a:lstStyle/>
           <a:p>
             <a:r>
-              <a:rPr lang="en-US" smtClean="0"/>
+              <a:rPr lang="en-US"/>
               <a:t>Click to edit Master title style</a:t>
             </a:r>
-            <a:endParaRPr lang="en-US"/>
           </a:p>
         </p:txBody>
       </p:sp>
@@ -427,38 +440,37 @@
           <a:p>
             <a:pPr lvl="0"/>
             <a:r>
-              <a:rPr lang="en-US" smtClean="0"/>
+              <a:rPr lang="en-US"/>
               <a:t>Click to edit Master text styles</a:t>
             </a:r>
           </a:p>
           <a:p>
             <a:pPr lvl="1"/>
             <a:r>
-              <a:rPr lang="en-US" smtClean="0"/>
+              <a:rPr lang="en-US"/>
               <a:t>Second level</a:t>
             </a:r>
           </a:p>
           <a:p>
             <a:pPr lvl="2"/>
             <a:r>
-              <a:rPr lang="en-US" smtClean="0"/>
+              <a:rPr lang="en-US"/>
               <a:t>Third level</a:t>
             </a:r>
           </a:p>
           <a:p>
             <a:pPr lvl="3"/>
             <a:r>
-              <a:rPr lang="en-US" smtClean="0"/>
+              <a:rPr lang="en-US"/>
               <a:t>Fourth level</a:t>
             </a:r>
           </a:p>
           <a:p>
             <a:pPr lvl="4"/>
             <a:r>
-              <a:rPr lang="en-US" smtClean="0"/>
+              <a:rPr lang="en-US"/>
               <a:t>Fifth level</a:t>
             </a:r>
-            <a:endParaRPr lang="en-US"/>
           </a:p>
         </p:txBody>
       </p:sp>
@@ -479,7 +491,7 @@
           <a:p>
             <a:fld id="{5BCAD085-E8A6-8845-BD4E-CB4CCA059FC4}" type="datetimeFigureOut">
               <a:rPr lang="en-US" smtClean="0"/>
-              <a:t>1/27/13</a:t>
+              <a:t>4/23/2026</a:t>
             </a:fld>
             <a:endParaRPr lang="en-US"/>
           </a:p>
@@ -521,7 +533,7 @@
           <a:p>
             <a:fld id="{C1FF6DA9-008F-8B48-92A6-B652298478BF}" type="slidenum">
               <a:rPr lang="en-US" smtClean="0"/>
-              <a:t>‹#›</a:t>
+              <a:t>‹Nº›</a:t>
             </a:fld>
             <a:endParaRPr lang="en-US"/>
           </a:p>
@@ -578,10 +590,9 @@
           <a:lstStyle/>
           <a:p>
             <a:r>
-              <a:rPr lang="en-US" smtClean="0"/>
+              <a:rPr lang="en-US"/>
               <a:t>Click to edit Master title style</a:t>
             </a:r>
-            <a:endParaRPr lang="en-US"/>
           </a:p>
         </p:txBody>
       </p:sp>
@@ -607,38 +618,37 @@
           <a:p>
             <a:pPr lvl="0"/>
             <a:r>
-              <a:rPr lang="en-US" smtClean="0"/>
+              <a:rPr lang="en-US"/>
               <a:t>Click to edit Master text styles</a:t>
             </a:r>
           </a:p>
           <a:p>
             <a:pPr lvl="1"/>
             <a:r>
-              <a:rPr lang="en-US" smtClean="0"/>
+              <a:rPr lang="en-US"/>
               <a:t>Second level</a:t>
             </a:r>
           </a:p>
           <a:p>
             <a:pPr lvl="2"/>
             <a:r>
-              <a:rPr lang="en-US" smtClean="0"/>
+              <a:rPr lang="en-US"/>
               <a:t>Third level</a:t>
             </a:r>
           </a:p>
           <a:p>
             <a:pPr lvl="3"/>
             <a:r>
-              <a:rPr lang="en-US" smtClean="0"/>
+              <a:rPr lang="en-US"/>
               <a:t>Fourth level</a:t>
             </a:r>
           </a:p>
           <a:p>
             <a:pPr lvl="4"/>
             <a:r>
-              <a:rPr lang="en-US" smtClean="0"/>
+              <a:rPr lang="en-US"/>
               <a:t>Fifth level</a:t>
             </a:r>
-            <a:endParaRPr lang="en-US"/>
           </a:p>
         </p:txBody>
       </p:sp>
@@ -659,7 +669,7 @@
           <a:p>
             <a:fld id="{5BCAD085-E8A6-8845-BD4E-CB4CCA059FC4}" type="datetimeFigureOut">
               <a:rPr lang="en-US" smtClean="0"/>
-              <a:t>1/27/13</a:t>
+              <a:t>4/23/2026</a:t>
             </a:fld>
             <a:endParaRPr lang="en-US"/>
           </a:p>
@@ -701,7 +711,7 @@
           <a:p>
             <a:fld id="{C1FF6DA9-008F-8B48-92A6-B652298478BF}" type="slidenum">
               <a:rPr lang="en-US" smtClean="0"/>
-              <a:t>‹#›</a:t>
+              <a:t>‹Nº›</a:t>
             </a:fld>
             <a:endParaRPr lang="en-US"/>
           </a:p>
@@ -753,10 +763,9 @@
           <a:lstStyle/>
           <a:p>
             <a:r>
-              <a:rPr lang="en-US" smtClean="0"/>
+              <a:rPr lang="en-US"/>
               <a:t>Click to edit Master title style</a:t>
             </a:r>
-            <a:endParaRPr lang="en-US"/>
           </a:p>
         </p:txBody>
       </p:sp>
@@ -777,38 +786,37 @@
           <a:p>
             <a:pPr lvl="0"/>
             <a:r>
-              <a:rPr lang="en-US" smtClean="0"/>
+              <a:rPr lang="en-US"/>
               <a:t>Click to edit Master text styles</a:t>
             </a:r>
           </a:p>
           <a:p>
             <a:pPr lvl="1"/>
             <a:r>
-              <a:rPr lang="en-US" smtClean="0"/>
+              <a:rPr lang="en-US"/>
               <a:t>Second level</a:t>
             </a:r>
           </a:p>
           <a:p>
             <a:pPr lvl="2"/>
             <a:r>
-              <a:rPr lang="en-US" smtClean="0"/>
+              <a:rPr lang="en-US"/>
               <a:t>Third level</a:t>
             </a:r>
           </a:p>
           <a:p>
             <a:pPr lvl="3"/>
             <a:r>
-              <a:rPr lang="en-US" smtClean="0"/>
+              <a:rPr lang="en-US"/>
               <a:t>Fourth level</a:t>
             </a:r>
           </a:p>
           <a:p>
             <a:pPr lvl="4"/>
             <a:r>
-              <a:rPr lang="en-US" smtClean="0"/>
+              <a:rPr lang="en-US"/>
               <a:t>Fifth level</a:t>
             </a:r>
-            <a:endParaRPr lang="en-US"/>
           </a:p>
         </p:txBody>
       </p:sp>
@@ -829,7 +837,7 @@
           <a:p>
             <a:fld id="{5BCAD085-E8A6-8845-BD4E-CB4CCA059FC4}" type="datetimeFigureOut">
               <a:rPr lang="en-US" smtClean="0"/>
-              <a:t>1/27/13</a:t>
+              <a:t>4/23/2026</a:t>
             </a:fld>
             <a:endParaRPr lang="en-US"/>
           </a:p>
@@ -871,7 +879,7 @@
           <a:p>
             <a:fld id="{C1FF6DA9-008F-8B48-92A6-B652298478BF}" type="slidenum">
               <a:rPr lang="en-US" smtClean="0"/>
-              <a:t>‹#›</a:t>
+              <a:t>‹Nº›</a:t>
             </a:fld>
             <a:endParaRPr lang="en-US"/>
           </a:p>
@@ -932,10 +940,9 @@
           </a:lstStyle>
           <a:p>
             <a:r>
-              <a:rPr lang="en-US" smtClean="0"/>
+              <a:rPr lang="en-US"/>
               <a:t>Click to edit Master title style</a:t>
             </a:r>
-            <a:endParaRPr lang="en-US"/>
           </a:p>
         </p:txBody>
       </p:sp>
@@ -1052,7 +1059,7 @@
           <a:p>
             <a:pPr lvl="0"/>
             <a:r>
-              <a:rPr lang="en-US" smtClean="0"/>
+              <a:rPr lang="en-US"/>
               <a:t>Click to edit Master text styles</a:t>
             </a:r>
           </a:p>
@@ -1075,7 +1082,7 @@
           <a:p>
             <a:fld id="{5BCAD085-E8A6-8845-BD4E-CB4CCA059FC4}" type="datetimeFigureOut">
               <a:rPr lang="en-US" smtClean="0"/>
-              <a:t>1/27/13</a:t>
+              <a:t>4/23/2026</a:t>
             </a:fld>
             <a:endParaRPr lang="en-US"/>
           </a:p>
@@ -1117,7 +1124,7 @@
           <a:p>
             <a:fld id="{C1FF6DA9-008F-8B48-92A6-B652298478BF}" type="slidenum">
               <a:rPr lang="en-US" smtClean="0"/>
-              <a:t>‹#›</a:t>
+              <a:t>‹Nº›</a:t>
             </a:fld>
             <a:endParaRPr lang="en-US"/>
           </a:p>
@@ -1169,10 +1176,9 @@
           <a:lstStyle/>
           <a:p>
             <a:r>
-              <a:rPr lang="en-US" smtClean="0"/>
+              <a:rPr lang="en-US"/>
               <a:t>Click to edit Master title style</a:t>
             </a:r>
-            <a:endParaRPr lang="en-US"/>
           </a:p>
         </p:txBody>
       </p:sp>
@@ -1226,38 +1232,37 @@
           <a:p>
             <a:pPr lvl="0"/>
             <a:r>
-              <a:rPr lang="en-US" smtClean="0"/>
+              <a:rPr lang="en-US"/>
               <a:t>Click to edit Master text styles</a:t>
             </a:r>
           </a:p>
           <a:p>
             <a:pPr lvl="1"/>
             <a:r>
-              <a:rPr lang="en-US" smtClean="0"/>
+              <a:rPr lang="en-US"/>
               <a:t>Second level</a:t>
             </a:r>
           </a:p>
           <a:p>
             <a:pPr lvl="2"/>
             <a:r>
-              <a:rPr lang="en-US" smtClean="0"/>
+              <a:rPr lang="en-US"/>
               <a:t>Third level</a:t>
             </a:r>
           </a:p>
           <a:p>
             <a:pPr lvl="3"/>
             <a:r>
-              <a:rPr lang="en-US" smtClean="0"/>
+              <a:rPr lang="en-US"/>
               <a:t>Fourth level</a:t>
             </a:r>
           </a:p>
           <a:p>
             <a:pPr lvl="4"/>
             <a:r>
-              <a:rPr lang="en-US" smtClean="0"/>
+              <a:rPr lang="en-US"/>
               <a:t>Fifth level</a:t>
             </a:r>
-            <a:endParaRPr lang="en-US"/>
           </a:p>
         </p:txBody>
       </p:sp>
@@ -1311,38 +1316,37 @@
           <a:p>
             <a:pPr lvl="0"/>
             <a:r>
-              <a:rPr lang="en-US" smtClean="0"/>
+              <a:rPr lang="en-US"/>
               <a:t>Click to edit Master text styles</a:t>
             </a:r>
           </a:p>
           <a:p>
             <a:pPr lvl="1"/>
             <a:r>
-              <a:rPr lang="en-US" smtClean="0"/>
+              <a:rPr lang="en-US"/>
               <a:t>Second level</a:t>
             </a:r>
           </a:p>
           <a:p>
             <a:pPr lvl="2"/>
             <a:r>
-              <a:rPr lang="en-US" smtClean="0"/>
+              <a:rPr lang="en-US"/>
               <a:t>Third level</a:t>
             </a:r>
           </a:p>
           <a:p>
             <a:pPr lvl="3"/>
             <a:r>
-              <a:rPr lang="en-US" smtClean="0"/>
+              <a:rPr lang="en-US"/>
               <a:t>Fourth level</a:t>
             </a:r>
           </a:p>
           <a:p>
             <a:pPr lvl="4"/>
             <a:r>
-              <a:rPr lang="en-US" smtClean="0"/>
+              <a:rPr lang="en-US"/>
               <a:t>Fifth level</a:t>
             </a:r>
-            <a:endParaRPr lang="en-US"/>
           </a:p>
         </p:txBody>
       </p:sp>
@@ -1363,7 +1367,7 @@
           <a:p>
             <a:fld id="{5BCAD085-E8A6-8845-BD4E-CB4CCA059FC4}" type="datetimeFigureOut">
               <a:rPr lang="en-US" smtClean="0"/>
-              <a:t>1/27/13</a:t>
+              <a:t>4/23/2026</a:t>
             </a:fld>
             <a:endParaRPr lang="en-US"/>
           </a:p>
@@ -1405,7 +1409,7 @@
           <a:p>
             <a:fld id="{C1FF6DA9-008F-8B48-92A6-B652298478BF}" type="slidenum">
               <a:rPr lang="en-US" smtClean="0"/>
-              <a:t>‹#›</a:t>
+              <a:t>‹Nº›</a:t>
             </a:fld>
             <a:endParaRPr lang="en-US"/>
           </a:p>
@@ -1461,10 +1465,9 @@
           </a:lstStyle>
           <a:p>
             <a:r>
-              <a:rPr lang="en-US" smtClean="0"/>
+              <a:rPr lang="en-US"/>
               <a:t>Click to edit Master title style</a:t>
             </a:r>
-            <a:endParaRPr lang="en-US"/>
           </a:p>
         </p:txBody>
       </p:sp>
@@ -1527,7 +1530,7 @@
           <a:p>
             <a:pPr lvl="0"/>
             <a:r>
-              <a:rPr lang="en-US" smtClean="0"/>
+              <a:rPr lang="en-US"/>
               <a:t>Click to edit Master text styles</a:t>
             </a:r>
           </a:p>
@@ -1583,38 +1586,37 @@
           <a:p>
             <a:pPr lvl="0"/>
             <a:r>
-              <a:rPr lang="en-US" smtClean="0"/>
+              <a:rPr lang="en-US"/>
               <a:t>Click to edit Master text styles</a:t>
             </a:r>
           </a:p>
           <a:p>
             <a:pPr lvl="1"/>
             <a:r>
-              <a:rPr lang="en-US" smtClean="0"/>
+              <a:rPr lang="en-US"/>
               <a:t>Second level</a:t>
             </a:r>
           </a:p>
           <a:p>
             <a:pPr lvl="2"/>
             <a:r>
-              <a:rPr lang="en-US" smtClean="0"/>
+              <a:rPr lang="en-US"/>
               <a:t>Third level</a:t>
             </a:r>
           </a:p>
           <a:p>
             <a:pPr lvl="3"/>
             <a:r>
-              <a:rPr lang="en-US" smtClean="0"/>
+              <a:rPr lang="en-US"/>
               <a:t>Fourth level</a:t>
             </a:r>
           </a:p>
           <a:p>
             <a:pPr lvl="4"/>
             <a:r>
-              <a:rPr lang="en-US" smtClean="0"/>
+              <a:rPr lang="en-US"/>
               <a:t>Fifth level</a:t>
             </a:r>
-            <a:endParaRPr lang="en-US"/>
           </a:p>
         </p:txBody>
       </p:sp>
@@ -1677,7 +1679,7 @@
           <a:p>
             <a:pPr lvl="0"/>
             <a:r>
-              <a:rPr lang="en-US" smtClean="0"/>
+              <a:rPr lang="en-US"/>
               <a:t>Click to edit Master text styles</a:t>
             </a:r>
           </a:p>
@@ -1733,38 +1735,37 @@
           <a:p>
             <a:pPr lvl="0"/>
             <a:r>
-              <a:rPr lang="en-US" smtClean="0"/>
+              <a:rPr lang="en-US"/>
               <a:t>Click to edit Master text styles</a:t>
             </a:r>
           </a:p>
           <a:p>
             <a:pPr lvl="1"/>
             <a:r>
-              <a:rPr lang="en-US" smtClean="0"/>
+              <a:rPr lang="en-US"/>
               <a:t>Second level</a:t>
             </a:r>
           </a:p>
           <a:p>
             <a:pPr lvl="2"/>
             <a:r>
-              <a:rPr lang="en-US" smtClean="0"/>
+              <a:rPr lang="en-US"/>
               <a:t>Third level</a:t>
             </a:r>
           </a:p>
           <a:p>
             <a:pPr lvl="3"/>
             <a:r>
-              <a:rPr lang="en-US" smtClean="0"/>
+              <a:rPr lang="en-US"/>
               <a:t>Fourth level</a:t>
             </a:r>
           </a:p>
           <a:p>
             <a:pPr lvl="4"/>
             <a:r>
-              <a:rPr lang="en-US" smtClean="0"/>
+              <a:rPr lang="en-US"/>
               <a:t>Fifth level</a:t>
             </a:r>
-            <a:endParaRPr lang="en-US"/>
           </a:p>
         </p:txBody>
       </p:sp>
@@ -1785,7 +1786,7 @@
           <a:p>
             <a:fld id="{5BCAD085-E8A6-8845-BD4E-CB4CCA059FC4}" type="datetimeFigureOut">
               <a:rPr lang="en-US" smtClean="0"/>
-              <a:t>1/27/13</a:t>
+              <a:t>4/23/2026</a:t>
             </a:fld>
             <a:endParaRPr lang="en-US"/>
           </a:p>
@@ -1827,7 +1828,7 @@
           <a:p>
             <a:fld id="{C1FF6DA9-008F-8B48-92A6-B652298478BF}" type="slidenum">
               <a:rPr lang="en-US" smtClean="0"/>
-              <a:t>‹#›</a:t>
+              <a:t>‹Nº›</a:t>
             </a:fld>
             <a:endParaRPr lang="en-US"/>
           </a:p>
@@ -1879,10 +1880,9 @@
           <a:lstStyle/>
           <a:p>
             <a:r>
-              <a:rPr lang="en-US" smtClean="0"/>
+              <a:rPr lang="en-US"/>
               <a:t>Click to edit Master title style</a:t>
             </a:r>
-            <a:endParaRPr lang="en-US"/>
           </a:p>
         </p:txBody>
       </p:sp>
@@ -1903,7 +1903,7 @@
           <a:p>
             <a:fld id="{5BCAD085-E8A6-8845-BD4E-CB4CCA059FC4}" type="datetimeFigureOut">
               <a:rPr lang="en-US" smtClean="0"/>
-              <a:t>1/27/13</a:t>
+              <a:t>4/23/2026</a:t>
             </a:fld>
             <a:endParaRPr lang="en-US"/>
           </a:p>
@@ -1945,7 +1945,7 @@
           <a:p>
             <a:fld id="{C1FF6DA9-008F-8B48-92A6-B652298478BF}" type="slidenum">
               <a:rPr lang="en-US" smtClean="0"/>
-              <a:t>‹#›</a:t>
+              <a:t>‹Nº›</a:t>
             </a:fld>
             <a:endParaRPr lang="en-US"/>
           </a:p>
@@ -1998,7 +1998,7 @@
           <a:p>
             <a:fld id="{5BCAD085-E8A6-8845-BD4E-CB4CCA059FC4}" type="datetimeFigureOut">
               <a:rPr lang="en-US" smtClean="0"/>
-              <a:t>1/27/13</a:t>
+              <a:t>4/23/2026</a:t>
             </a:fld>
             <a:endParaRPr lang="en-US"/>
           </a:p>
@@ -2040,7 +2040,7 @@
           <a:p>
             <a:fld id="{C1FF6DA9-008F-8B48-92A6-B652298478BF}" type="slidenum">
               <a:rPr lang="en-US" smtClean="0"/>
-              <a:t>‹#›</a:t>
+              <a:t>‹Nº›</a:t>
             </a:fld>
             <a:endParaRPr lang="en-US"/>
           </a:p>
@@ -2101,10 +2101,9 @@
           </a:lstStyle>
           <a:p>
             <a:r>
-              <a:rPr lang="en-US" smtClean="0"/>
+              <a:rPr lang="en-US"/>
               <a:t>Click to edit Master title style</a:t>
             </a:r>
-            <a:endParaRPr lang="en-US"/>
           </a:p>
         </p:txBody>
       </p:sp>
@@ -2158,38 +2157,37 @@
           <a:p>
             <a:pPr lvl="0"/>
             <a:r>
-              <a:rPr lang="en-US" smtClean="0"/>
+              <a:rPr lang="en-US"/>
               <a:t>Click to edit Master text styles</a:t>
             </a:r>
           </a:p>
           <a:p>
             <a:pPr lvl="1"/>
             <a:r>
-              <a:rPr lang="en-US" smtClean="0"/>
+              <a:rPr lang="en-US"/>
               <a:t>Second level</a:t>
             </a:r>
           </a:p>
           <a:p>
             <a:pPr lvl="2"/>
             <a:r>
-              <a:rPr lang="en-US" smtClean="0"/>
+              <a:rPr lang="en-US"/>
               <a:t>Third level</a:t>
             </a:r>
           </a:p>
           <a:p>
             <a:pPr lvl="3"/>
             <a:r>
-              <a:rPr lang="en-US" smtClean="0"/>
+              <a:rPr lang="en-US"/>
               <a:t>Fourth level</a:t>
             </a:r>
           </a:p>
           <a:p>
             <a:pPr lvl="4"/>
             <a:r>
-              <a:rPr lang="en-US" smtClean="0"/>
+              <a:rPr lang="en-US"/>
               <a:t>Fifth level</a:t>
             </a:r>
-            <a:endParaRPr lang="en-US"/>
           </a:p>
         </p:txBody>
       </p:sp>
@@ -2252,7 +2250,7 @@
           <a:p>
             <a:pPr lvl="0"/>
             <a:r>
-              <a:rPr lang="en-US" smtClean="0"/>
+              <a:rPr lang="en-US"/>
               <a:t>Click to edit Master text styles</a:t>
             </a:r>
           </a:p>
@@ -2275,7 +2273,7 @@
           <a:p>
             <a:fld id="{5BCAD085-E8A6-8845-BD4E-CB4CCA059FC4}" type="datetimeFigureOut">
               <a:rPr lang="en-US" smtClean="0"/>
-              <a:t>1/27/13</a:t>
+              <a:t>4/23/2026</a:t>
             </a:fld>
             <a:endParaRPr lang="en-US"/>
           </a:p>
@@ -2317,7 +2315,7 @@
           <a:p>
             <a:fld id="{C1FF6DA9-008F-8B48-92A6-B652298478BF}" type="slidenum">
               <a:rPr lang="en-US" smtClean="0"/>
-              <a:t>‹#›</a:t>
+              <a:t>‹Nº›</a:t>
             </a:fld>
             <a:endParaRPr lang="en-US"/>
           </a:p>
@@ -2378,10 +2376,9 @@
           </a:lstStyle>
           <a:p>
             <a:r>
-              <a:rPr lang="en-US" smtClean="0"/>
+              <a:rPr lang="en-US"/>
               <a:t>Click to edit Master title style</a:t>
             </a:r>
-            <a:endParaRPr lang="en-US"/>
           </a:p>
         </p:txBody>
       </p:sp>
@@ -2505,7 +2502,7 @@
           <a:p>
             <a:pPr lvl="0"/>
             <a:r>
-              <a:rPr lang="en-US" smtClean="0"/>
+              <a:rPr lang="en-US"/>
               <a:t>Click to edit Master text styles</a:t>
             </a:r>
           </a:p>
@@ -2528,7 +2525,7 @@
           <a:p>
             <a:fld id="{5BCAD085-E8A6-8845-BD4E-CB4CCA059FC4}" type="datetimeFigureOut">
               <a:rPr lang="en-US" smtClean="0"/>
-              <a:t>1/27/13</a:t>
+              <a:t>4/23/2026</a:t>
             </a:fld>
             <a:endParaRPr lang="en-US"/>
           </a:p>
@@ -2570,7 +2567,7 @@
           <a:p>
             <a:fld id="{C1FF6DA9-008F-8B48-92A6-B652298478BF}" type="slidenum">
               <a:rPr lang="en-US" smtClean="0"/>
-              <a:t>‹#›</a:t>
+              <a:t>‹Nº›</a:t>
             </a:fld>
             <a:endParaRPr lang="en-US"/>
           </a:p>
@@ -2637,10 +2634,9 @@
           <a:lstStyle/>
           <a:p>
             <a:r>
-              <a:rPr lang="en-US" smtClean="0"/>
+              <a:rPr lang="en-US"/>
               <a:t>Click to edit Master title style</a:t>
             </a:r>
-            <a:endParaRPr lang="en-US"/>
           </a:p>
         </p:txBody>
       </p:sp>
@@ -2671,38 +2667,37 @@
           <a:p>
             <a:pPr lvl="0"/>
             <a:r>
-              <a:rPr lang="en-US" smtClean="0"/>
+              <a:rPr lang="en-US"/>
               <a:t>Click to edit Master text styles</a:t>
             </a:r>
           </a:p>
           <a:p>
             <a:pPr lvl="1"/>
             <a:r>
-              <a:rPr lang="en-US" smtClean="0"/>
+              <a:rPr lang="en-US"/>
               <a:t>Second level</a:t>
             </a:r>
           </a:p>
           <a:p>
             <a:pPr lvl="2"/>
             <a:r>
-              <a:rPr lang="en-US" smtClean="0"/>
+              <a:rPr lang="en-US"/>
               <a:t>Third level</a:t>
             </a:r>
           </a:p>
           <a:p>
             <a:pPr lvl="3"/>
             <a:r>
-              <a:rPr lang="en-US" smtClean="0"/>
+              <a:rPr lang="en-US"/>
               <a:t>Fourth level</a:t>
             </a:r>
           </a:p>
           <a:p>
             <a:pPr lvl="4"/>
             <a:r>
-              <a:rPr lang="en-US" smtClean="0"/>
+              <a:rPr lang="en-US"/>
               <a:t>Fifth level</a:t>
             </a:r>
-            <a:endParaRPr lang="en-US"/>
           </a:p>
         </p:txBody>
       </p:sp>
@@ -2741,7 +2736,7 @@
           <a:p>
             <a:fld id="{5BCAD085-E8A6-8845-BD4E-CB4CCA059FC4}" type="datetimeFigureOut">
               <a:rPr lang="en-US" smtClean="0"/>
-              <a:t>1/27/13</a:t>
+              <a:t>4/23/2026</a:t>
             </a:fld>
             <a:endParaRPr lang="en-US"/>
           </a:p>
@@ -2819,7 +2814,7 @@
           <a:p>
             <a:fld id="{C1FF6DA9-008F-8B48-92A6-B652298478BF}" type="slidenum">
               <a:rPr lang="en-US" smtClean="0"/>
-              <a:t>‹#›</a:t>
+              <a:t>‹Nº›</a:t>
             </a:fld>
             <a:endParaRPr lang="en-US"/>
           </a:p>
@@ -3100,7 +3095,7 @@
 </file>
 
 <file path=ppt/slides/slide1.xml><?xml version="1.0" encoding="utf-8"?>
-<p:sld xmlns:a="http://schemas.openxmlformats.org/drawingml/2006/main" xmlns:p="http://schemas.openxmlformats.org/presentationml/2006/main" xmlns:r="http://schemas.openxmlformats.org/officeDocument/2006/relationships">
+<p:sld xmlns:a="http://schemas.openxmlformats.org/drawingml/2006/main" xmlns:r="http://schemas.openxmlformats.org/officeDocument/2006/relationships" xmlns:p="http://schemas.openxmlformats.org/presentationml/2006/main">
   <p:cSld>
     <p:spTree>
       <p:nvGrpSpPr>
@@ -3108,7 +3103,14 @@
         <p:cNvGrpSpPr/>
         <p:nvPr/>
       </p:nvGrpSpPr>
-      <p:grpSpPr/>
+      <p:grpSpPr>
+        <a:xfrm>
+          <a:off x="0" y="0"/>
+          <a:ext cx="0" cy="0"/>
+          <a:chOff x="0" y="0"/>
+          <a:chExt cx="0" cy="0"/>
+        </a:xfrm>
+      </p:grpSpPr>
       <p:sp>
         <p:nvSpPr>
           <p:cNvPr id="2" name="Rectangle 1"/>
@@ -3149,6 +3151,7 @@
           <a:lstStyle/>
           <a:p>
             <a:pPr algn="ctr"/>
+            <a:endParaRPr/>
           </a:p>
         </p:txBody>
       </p:sp>
@@ -3192,6 +3195,7 @@
           <a:lstStyle/>
           <a:p>
             <a:pPr algn="ctr"/>
+            <a:endParaRPr/>
           </a:p>
         </p:txBody>
       </p:sp>
@@ -3310,7 +3314,7 @@
 </file>
 
 <file path=ppt/slides/slide10.xml><?xml version="1.0" encoding="utf-8"?>
-<p:sld xmlns:a="http://schemas.openxmlformats.org/drawingml/2006/main" xmlns:p="http://schemas.openxmlformats.org/presentationml/2006/main" xmlns:r="http://schemas.openxmlformats.org/officeDocument/2006/relationships">
+<p:sld xmlns:a="http://schemas.openxmlformats.org/drawingml/2006/main" xmlns:r="http://schemas.openxmlformats.org/officeDocument/2006/relationships" xmlns:p="http://schemas.openxmlformats.org/presentationml/2006/main">
   <p:cSld>
     <p:spTree>
       <p:nvGrpSpPr>
@@ -3318,7 +3322,14 @@
         <p:cNvGrpSpPr/>
         <p:nvPr/>
       </p:nvGrpSpPr>
-      <p:grpSpPr/>
+      <p:grpSpPr>
+        <a:xfrm>
+          <a:off x="0" y="0"/>
+          <a:ext cx="0" cy="0"/>
+          <a:chOff x="0" y="0"/>
+          <a:chExt cx="0" cy="0"/>
+        </a:xfrm>
+      </p:grpSpPr>
       <p:sp>
         <p:nvSpPr>
           <p:cNvPr id="2" name="Rectangle 1"/>
@@ -3359,6 +3370,7 @@
           <a:lstStyle/>
           <a:p>
             <a:pPr algn="ctr"/>
+            <a:endParaRPr/>
           </a:p>
         </p:txBody>
       </p:sp>
@@ -3436,197 +3448,40 @@
           <a:lstStyle/>
           <a:p>
             <a:pPr algn="ctr"/>
-          </a:p>
-        </p:txBody>
-      </p:sp>
-      <p:sp>
-        <p:nvSpPr>
-          <p:cNvPr id="5" name="Rectangle 4"/>
-          <p:cNvSpPr/>
+            <a:endParaRPr/>
+          </a:p>
+        </p:txBody>
+      </p:sp>
+      <p:pic>
+        <p:nvPicPr>
+          <p:cNvPr id="11" name="Imagen 10">
+            <a:extLst>
+              <a:ext uri="{FF2B5EF4-FFF2-40B4-BE49-F238E27FC236}">
+                <a16:creationId xmlns:a16="http://schemas.microsoft.com/office/drawing/2014/main" id="{1A89F988-6C24-1F8F-E7E3-0466C9DFBDF9}"/>
+              </a:ext>
+            </a:extLst>
+          </p:cNvPr>
+          <p:cNvPicPr>
+            <a:picLocks noChangeAspect="1"/>
+          </p:cNvPicPr>
           <p:nvPr/>
-        </p:nvSpPr>
+        </p:nvPicPr>
+        <p:blipFill>
+          <a:blip r:embed="rId2"/>
+          <a:stretch>
+            <a:fillRect/>
+          </a:stretch>
+        </p:blipFill>
         <p:spPr>
           <a:xfrm>
-            <a:off x="1371600" y="1371600"/>
-            <a:ext cx="9418320" cy="4114800"/>
+            <a:off x="2275390" y="1448242"/>
+            <a:ext cx="7638044" cy="5135438"/>
           </a:xfrm>
           <a:prstGeom prst="rect">
             <a:avLst/>
           </a:prstGeom>
-          <a:solidFill>
-            <a:srgbClr val="F2F2F2"/>
-          </a:solidFill>
-          <a:ln>
-            <a:noFill/>
-          </a:ln>
         </p:spPr>
-        <p:style>
-          <a:lnRef idx="1">
-            <a:schemeClr val="accent1"/>
-          </a:lnRef>
-          <a:fillRef idx="3">
-            <a:schemeClr val="accent1"/>
-          </a:fillRef>
-          <a:effectRef idx="2">
-            <a:schemeClr val="accent1"/>
-          </a:effectRef>
-          <a:fontRef idx="minor">
-            <a:schemeClr val="lt1"/>
-          </a:fontRef>
-        </p:style>
-        <p:txBody>
-          <a:bodyPr rtlCol="0" anchor="ctr"/>
-          <a:lstStyle/>
-          <a:p>
-            <a:pPr algn="ctr"/>
-          </a:p>
-        </p:txBody>
-      </p:sp>
-      <p:sp>
-        <p:nvSpPr>
-          <p:cNvPr id="6" name="TextBox 5"/>
-          <p:cNvSpPr txBox="1"/>
-          <p:nvPr/>
-        </p:nvSpPr>
-        <p:spPr>
-          <a:xfrm>
-            <a:off x="1828800" y="2286000"/>
-            <a:ext cx="8503920" cy="1371600"/>
-          </a:xfrm>
-          <a:prstGeom prst="rect">
-            <a:avLst/>
-          </a:prstGeom>
-          <a:noFill/>
-        </p:spPr>
-        <p:txBody>
-          <a:bodyPr wrap="square"/>
-          <a:lstStyle/>
-          <a:p>
-            <a:pPr algn="ctr">
-              <a:defRPr sz="2400" b="0">
-                <a:solidFill>
-                  <a:srgbClr val="999999"/>
-                </a:solidFill>
-                <a:latin typeface="Calibri"/>
-              </a:defRPr>
-            </a:pPr>
-            <a:r>
-              <a:t>[Diagrama: App -&gt; Wallet -&gt; Gateway -&gt; Peer -&gt; Chaincode -&gt; World State]</a:t>
-            </a:r>
-          </a:p>
-        </p:txBody>
-      </p:sp>
-      <p:sp>
-        <p:nvSpPr>
-          <p:cNvPr id="7" name="Rectangle 6"/>
-          <p:cNvSpPr/>
-          <p:nvPr/>
-        </p:nvSpPr>
-        <p:spPr>
-          <a:xfrm>
-            <a:off x="1371600" y="3840480"/>
-            <a:ext cx="9418320" cy="320040"/>
-          </a:xfrm>
-          <a:prstGeom prst="rect">
-            <a:avLst/>
-          </a:prstGeom>
-          <a:solidFill>
-            <a:srgbClr val="7C3AED"/>
-          </a:solidFill>
-          <a:ln>
-            <a:noFill/>
-          </a:ln>
-        </p:spPr>
-        <p:style>
-          <a:lnRef idx="1">
-            <a:schemeClr val="accent1"/>
-          </a:lnRef>
-          <a:fillRef idx="3">
-            <a:schemeClr val="accent1"/>
-          </a:fillRef>
-          <a:effectRef idx="2">
-            <a:schemeClr val="accent1"/>
-          </a:effectRef>
-          <a:fontRef idx="minor">
-            <a:schemeClr val="lt1"/>
-          </a:fontRef>
-        </p:style>
-        <p:txBody>
-          <a:bodyPr rtlCol="0" anchor="ctr"/>
-          <a:lstStyle/>
-          <a:p>
-            <a:pPr algn="ctr"/>
-          </a:p>
-        </p:txBody>
-      </p:sp>
-      <p:sp>
-        <p:nvSpPr>
-          <p:cNvPr id="8" name="TextBox 7"/>
-          <p:cNvSpPr txBox="1"/>
-          <p:nvPr/>
-        </p:nvSpPr>
-        <p:spPr>
-          <a:xfrm>
-            <a:off x="1371600" y="3840480"/>
-            <a:ext cx="9418320" cy="320040"/>
-          </a:xfrm>
-          <a:prstGeom prst="rect">
-            <a:avLst/>
-          </a:prstGeom>
-          <a:noFill/>
-        </p:spPr>
-        <p:txBody>
-          <a:bodyPr wrap="square"/>
-          <a:lstStyle/>
-          <a:p>
-            <a:pPr algn="ctr">
-              <a:defRPr sz="1300" b="1">
-                <a:solidFill>
-                  <a:srgbClr val="FFFFFF"/>
-                </a:solidFill>
-                <a:latin typeface="Calibri"/>
-              </a:defRPr>
-            </a:pPr>
-            <a:r>
-              <a:t>Prompt para IA generativa:</a:t>
-            </a:r>
-          </a:p>
-        </p:txBody>
-      </p:sp>
-      <p:sp>
-        <p:nvSpPr>
-          <p:cNvPr id="9" name="TextBox 8"/>
-          <p:cNvSpPr txBox="1"/>
-          <p:nvPr/>
-        </p:nvSpPr>
-        <p:spPr>
-          <a:xfrm>
-            <a:off x="1645920" y="4297680"/>
-            <a:ext cx="8869680" cy="914400"/>
-          </a:xfrm>
-          <a:prstGeom prst="rect">
-            <a:avLst/>
-          </a:prstGeom>
-          <a:noFill/>
-        </p:spPr>
-        <p:txBody>
-          <a:bodyPr wrap="square"/>
-          <a:lstStyle/>
-          <a:p>
-            <a:pPr algn="l">
-              <a:defRPr sz="1400" b="0">
-                <a:solidFill>
-                  <a:srgbClr val="7C3AED"/>
-                </a:solidFill>
-                <a:latin typeface="Consolas"/>
-              </a:defRPr>
-            </a:pPr>
-            <a:r>
-              <a:t>Architecture diagram showing complete Fabric application flow: Client App loads identity from Wallet, connects through Gateway to Peer node, Peer executes Chaincode which reads/writes World State. Include Orderer for transaction ordering. Clean flat design, teal color scheme, labeled arrows showing data flow.</a:t>
-            </a:r>
-          </a:p>
-        </p:txBody>
-      </p:sp>
+      </p:pic>
     </p:spTree>
   </p:cSld>
   <p:clrMapOvr>
@@ -3636,7 +3491,7 @@
 </file>
 
 <file path=ppt/slides/slide11.xml><?xml version="1.0" encoding="utf-8"?>
-<p:sld xmlns:a="http://schemas.openxmlformats.org/drawingml/2006/main" xmlns:p="http://schemas.openxmlformats.org/presentationml/2006/main" xmlns:r="http://schemas.openxmlformats.org/officeDocument/2006/relationships">
+<p:sld xmlns:a="http://schemas.openxmlformats.org/drawingml/2006/main" xmlns:r="http://schemas.openxmlformats.org/officeDocument/2006/relationships" xmlns:p="http://schemas.openxmlformats.org/presentationml/2006/main">
   <p:cSld>
     <p:spTree>
       <p:nvGrpSpPr>
@@ -3644,7 +3499,14 @@
         <p:cNvGrpSpPr/>
         <p:nvPr/>
       </p:nvGrpSpPr>
-      <p:grpSpPr/>
+      <p:grpSpPr>
+        <a:xfrm>
+          <a:off x="0" y="0"/>
+          <a:ext cx="0" cy="0"/>
+          <a:chOff x="0" y="0"/>
+          <a:chExt cx="0" cy="0"/>
+        </a:xfrm>
+      </p:grpSpPr>
       <p:sp>
         <p:nvSpPr>
           <p:cNvPr id="2" name="Rectangle 1"/>
@@ -3685,6 +3547,7 @@
           <a:lstStyle/>
           <a:p>
             <a:pPr algn="ctr"/>
+            <a:endParaRPr/>
           </a:p>
         </p:txBody>
       </p:sp>
@@ -3765,7 +3628,7 @@
 </file>
 
 <file path=ppt/slides/slide12.xml><?xml version="1.0" encoding="utf-8"?>
-<p:sld xmlns:a="http://schemas.openxmlformats.org/drawingml/2006/main" xmlns:p="http://schemas.openxmlformats.org/presentationml/2006/main" xmlns:r="http://schemas.openxmlformats.org/officeDocument/2006/relationships">
+<p:sld xmlns:a="http://schemas.openxmlformats.org/drawingml/2006/main" xmlns:r="http://schemas.openxmlformats.org/officeDocument/2006/relationships" xmlns:p="http://schemas.openxmlformats.org/presentationml/2006/main">
   <p:cSld>
     <p:spTree>
       <p:nvGrpSpPr>
@@ -3773,7 +3636,14 @@
         <p:cNvGrpSpPr/>
         <p:nvPr/>
       </p:nvGrpSpPr>
-      <p:grpSpPr/>
+      <p:grpSpPr>
+        <a:xfrm>
+          <a:off x="0" y="0"/>
+          <a:ext cx="0" cy="0"/>
+          <a:chOff x="0" y="0"/>
+          <a:chExt cx="0" cy="0"/>
+        </a:xfrm>
+      </p:grpSpPr>
       <p:sp>
         <p:nvSpPr>
           <p:cNvPr id="2" name="Rectangle 1"/>
@@ -3814,6 +3684,7 @@
           <a:lstStyle/>
           <a:p>
             <a:pPr algn="ctr"/>
+            <a:endParaRPr/>
           </a:p>
         </p:txBody>
       </p:sp>
@@ -3891,6 +3762,7 @@
           <a:lstStyle/>
           <a:p>
             <a:pPr algn="ctr"/>
+            <a:endParaRPr/>
           </a:p>
         </p:txBody>
       </p:sp>
@@ -4070,7 +3942,7 @@
 </file>
 
 <file path=ppt/slides/slide13.xml><?xml version="1.0" encoding="utf-8"?>
-<p:sld xmlns:a="http://schemas.openxmlformats.org/drawingml/2006/main" xmlns:p="http://schemas.openxmlformats.org/presentationml/2006/main" xmlns:r="http://schemas.openxmlformats.org/officeDocument/2006/relationships">
+<p:sld xmlns:a="http://schemas.openxmlformats.org/drawingml/2006/main" xmlns:r="http://schemas.openxmlformats.org/officeDocument/2006/relationships" xmlns:p="http://schemas.openxmlformats.org/presentationml/2006/main">
   <p:cSld>
     <p:spTree>
       <p:nvGrpSpPr>
@@ -4078,7 +3950,14 @@
         <p:cNvGrpSpPr/>
         <p:nvPr/>
       </p:nvGrpSpPr>
-      <p:grpSpPr/>
+      <p:grpSpPr>
+        <a:xfrm>
+          <a:off x="0" y="0"/>
+          <a:ext cx="0" cy="0"/>
+          <a:chOff x="0" y="0"/>
+          <a:chExt cx="0" cy="0"/>
+        </a:xfrm>
+      </p:grpSpPr>
       <p:sp>
         <p:nvSpPr>
           <p:cNvPr id="2" name="Rectangle 1"/>
@@ -4119,6 +3998,7 @@
           <a:lstStyle/>
           <a:p>
             <a:pPr algn="ctr"/>
+            <a:endParaRPr/>
           </a:p>
         </p:txBody>
       </p:sp>
@@ -4230,6 +4110,7 @@
           <a:lstStyle/>
           <a:p>
             <a:pPr algn="ctr"/>
+            <a:endParaRPr/>
           </a:p>
         </p:txBody>
       </p:sp>
@@ -4307,6 +4188,7 @@
           <a:lstStyle/>
           <a:p>
             <a:pPr algn="ctr"/>
+            <a:endParaRPr/>
           </a:p>
         </p:txBody>
       </p:sp>
@@ -4319,7 +4201,7 @@
         <p:spPr>
           <a:xfrm>
             <a:off x="731520" y="1600200"/>
-            <a:ext cx="10698480" cy="4754880"/>
+            <a:ext cx="4654519" cy="4754880"/>
           </a:xfrm>
           <a:prstGeom prst="rect">
             <a:avLst/>
@@ -4330,106 +4212,1413 @@
           <a:bodyPr wrap="square"/>
           <a:lstStyle/>
           <a:p>
-            <a:br/>
-            <a:pPr algn="l">
-              <a:defRPr sz="1500" b="0">
-                <a:solidFill>
-                  <a:srgbClr val="D4D4D4"/>
-                </a:solidFill>
-                <a:latin typeface="Consolas"/>
-              </a:defRPr>
-            </a:pPr>
-            <a:r>
-              <a:t>func TestCreateProperty(t *testing.T) {</a:t>
-            </a:r>
-            <a:br/>
-            <a:r>
-              <a:t>    // Crear mock del TransactionContext y del Stub</a:t>
-            </a:r>
-            <a:br/>
-            <a:r>
-              <a:t>    mockCtx := new(mocks.TransactionContext)</a:t>
-            </a:r>
-            <a:br/>
-            <a:r>
-              <a:t>    mockStub := new(mocks.ChaincodeStub)</a:t>
-            </a:r>
-            <a:br/>
-            <a:r>
-              <a:t>    mockIdentity := new(mocks.ClientIdentity)</a:t>
-            </a:r>
-            <a:br/>
-            <a:br/>
-            <a:r>
-              <a:t>    mockCtx.On("GetStub").Return(mockStub)</a:t>
-            </a:r>
-            <a:br/>
-            <a:r>
-              <a:t>    mockCtx.On("GetClientIdentity").Return(mockIdentity)</a:t>
-            </a:r>
-            <a:br/>
-            <a:r>
-              <a:t>    mockIdentity.On("GetMSPID").Return("Org1MSP", nil)</a:t>
-            </a:r>
-            <a:br/>
-            <a:r>
-              <a:t>    mockIdentity.On("AssertAttributeValue", "role", "registrador").</a:t>
-            </a:r>
-            <a:br/>
-            <a:r>
+            <a:br>
+              <a:rPr sz="1600" dirty="0">
+                <a:solidFill>
+                  <a:schemeClr val="bg1">
+                    <a:lumMod val="95000"/>
+                  </a:schemeClr>
+                </a:solidFill>
+              </a:rPr>
+            </a:br>
+            <a:r>
+              <a:rPr sz="1600" dirty="0" err="1">
+                <a:solidFill>
+                  <a:schemeClr val="bg1">
+                    <a:lumMod val="95000"/>
+                  </a:schemeClr>
+                </a:solidFill>
+              </a:rPr>
+              <a:t>func</a:t>
+            </a:r>
+            <a:r>
+              <a:rPr sz="1600" dirty="0">
+                <a:solidFill>
+                  <a:schemeClr val="bg1">
+                    <a:lumMod val="95000"/>
+                  </a:schemeClr>
+                </a:solidFill>
+              </a:rPr>
+              <a:t> </a:t>
+            </a:r>
+            <a:r>
+              <a:rPr sz="1600" dirty="0" err="1">
+                <a:solidFill>
+                  <a:schemeClr val="bg1">
+                    <a:lumMod val="95000"/>
+                  </a:schemeClr>
+                </a:solidFill>
+              </a:rPr>
+              <a:t>TestCreateProperty</a:t>
+            </a:r>
+            <a:r>
+              <a:rPr sz="1600" dirty="0">
+                <a:solidFill>
+                  <a:schemeClr val="bg1">
+                    <a:lumMod val="95000"/>
+                  </a:schemeClr>
+                </a:solidFill>
+              </a:rPr>
+              <a:t>(t *</a:t>
+            </a:r>
+            <a:r>
+              <a:rPr sz="1600" dirty="0" err="1">
+                <a:solidFill>
+                  <a:schemeClr val="bg1">
+                    <a:lumMod val="95000"/>
+                  </a:schemeClr>
+                </a:solidFill>
+              </a:rPr>
+              <a:t>testing.T</a:t>
+            </a:r>
+            <a:r>
+              <a:rPr sz="1600" dirty="0">
+                <a:solidFill>
+                  <a:schemeClr val="bg1">
+                    <a:lumMod val="95000"/>
+                  </a:schemeClr>
+                </a:solidFill>
+              </a:rPr>
+              <a:t>) {</a:t>
+            </a:r>
+            <a:br>
+              <a:rPr sz="1600" dirty="0">
+                <a:solidFill>
+                  <a:schemeClr val="bg1">
+                    <a:lumMod val="95000"/>
+                  </a:schemeClr>
+                </a:solidFill>
+              </a:rPr>
+            </a:br>
+            <a:r>
+              <a:rPr sz="1600" dirty="0">
+                <a:solidFill>
+                  <a:schemeClr val="bg1">
+                    <a:lumMod val="95000"/>
+                  </a:schemeClr>
+                </a:solidFill>
+              </a:rPr>
+              <a:t>    // Crear mock del </a:t>
+            </a:r>
+            <a:r>
+              <a:rPr sz="1600" dirty="0" err="1">
+                <a:solidFill>
+                  <a:schemeClr val="bg1">
+                    <a:lumMod val="95000"/>
+                  </a:schemeClr>
+                </a:solidFill>
+              </a:rPr>
+              <a:t>TransactionContext</a:t>
+            </a:r>
+            <a:r>
+              <a:rPr sz="1600" dirty="0">
+                <a:solidFill>
+                  <a:schemeClr val="bg1">
+                    <a:lumMod val="95000"/>
+                  </a:schemeClr>
+                </a:solidFill>
+              </a:rPr>
+              <a:t> y del Stub</a:t>
+            </a:r>
+            <a:br>
+              <a:rPr sz="1600" dirty="0">
+                <a:solidFill>
+                  <a:schemeClr val="bg1">
+                    <a:lumMod val="95000"/>
+                  </a:schemeClr>
+                </a:solidFill>
+              </a:rPr>
+            </a:br>
+            <a:r>
+              <a:rPr sz="1600" dirty="0">
+                <a:solidFill>
+                  <a:schemeClr val="bg1">
+                    <a:lumMod val="95000"/>
+                  </a:schemeClr>
+                </a:solidFill>
+              </a:rPr>
+              <a:t>    </a:t>
+            </a:r>
+            <a:r>
+              <a:rPr sz="1600" dirty="0" err="1">
+                <a:solidFill>
+                  <a:schemeClr val="bg1">
+                    <a:lumMod val="95000"/>
+                  </a:schemeClr>
+                </a:solidFill>
+              </a:rPr>
+              <a:t>mockCtx</a:t>
+            </a:r>
+            <a:r>
+              <a:rPr sz="1600" dirty="0">
+                <a:solidFill>
+                  <a:schemeClr val="bg1">
+                    <a:lumMod val="95000"/>
+                  </a:schemeClr>
+                </a:solidFill>
+              </a:rPr>
+              <a:t> := new(</a:t>
+            </a:r>
+            <a:r>
+              <a:rPr sz="1600" dirty="0" err="1">
+                <a:solidFill>
+                  <a:schemeClr val="bg1">
+                    <a:lumMod val="95000"/>
+                  </a:schemeClr>
+                </a:solidFill>
+              </a:rPr>
+              <a:t>mocks.TransactionContext</a:t>
+            </a:r>
+            <a:r>
+              <a:rPr sz="1600" dirty="0">
+                <a:solidFill>
+                  <a:schemeClr val="bg1">
+                    <a:lumMod val="95000"/>
+                  </a:schemeClr>
+                </a:solidFill>
+              </a:rPr>
+              <a:t>)</a:t>
+            </a:r>
+            <a:br>
+              <a:rPr sz="1600" dirty="0">
+                <a:solidFill>
+                  <a:schemeClr val="bg1">
+                    <a:lumMod val="95000"/>
+                  </a:schemeClr>
+                </a:solidFill>
+              </a:rPr>
+            </a:br>
+            <a:r>
+              <a:rPr sz="1600" dirty="0">
+                <a:solidFill>
+                  <a:schemeClr val="bg1">
+                    <a:lumMod val="95000"/>
+                  </a:schemeClr>
+                </a:solidFill>
+              </a:rPr>
+              <a:t>    </a:t>
+            </a:r>
+            <a:r>
+              <a:rPr sz="1600" dirty="0" err="1">
+                <a:solidFill>
+                  <a:schemeClr val="bg1">
+                    <a:lumMod val="95000"/>
+                  </a:schemeClr>
+                </a:solidFill>
+              </a:rPr>
+              <a:t>mockStub</a:t>
+            </a:r>
+            <a:r>
+              <a:rPr sz="1600" dirty="0">
+                <a:solidFill>
+                  <a:schemeClr val="bg1">
+                    <a:lumMod val="95000"/>
+                  </a:schemeClr>
+                </a:solidFill>
+              </a:rPr>
+              <a:t> := new(</a:t>
+            </a:r>
+            <a:r>
+              <a:rPr sz="1600" dirty="0" err="1">
+                <a:solidFill>
+                  <a:schemeClr val="bg1">
+                    <a:lumMod val="95000"/>
+                  </a:schemeClr>
+                </a:solidFill>
+              </a:rPr>
+              <a:t>mocks.ChaincodeStub</a:t>
+            </a:r>
+            <a:r>
+              <a:rPr sz="1600" dirty="0">
+                <a:solidFill>
+                  <a:schemeClr val="bg1">
+                    <a:lumMod val="95000"/>
+                  </a:schemeClr>
+                </a:solidFill>
+              </a:rPr>
+              <a:t>)</a:t>
+            </a:r>
+            <a:br>
+              <a:rPr sz="1600" dirty="0">
+                <a:solidFill>
+                  <a:schemeClr val="bg1">
+                    <a:lumMod val="95000"/>
+                  </a:schemeClr>
+                </a:solidFill>
+              </a:rPr>
+            </a:br>
+            <a:r>
+              <a:rPr sz="1600" dirty="0">
+                <a:solidFill>
+                  <a:schemeClr val="bg1">
+                    <a:lumMod val="95000"/>
+                  </a:schemeClr>
+                </a:solidFill>
+              </a:rPr>
+              <a:t>    </a:t>
+            </a:r>
+            <a:r>
+              <a:rPr sz="1600" dirty="0" err="1">
+                <a:solidFill>
+                  <a:schemeClr val="bg1">
+                    <a:lumMod val="95000"/>
+                  </a:schemeClr>
+                </a:solidFill>
+              </a:rPr>
+              <a:t>mockIdentity</a:t>
+            </a:r>
+            <a:r>
+              <a:rPr sz="1600" dirty="0">
+                <a:solidFill>
+                  <a:schemeClr val="bg1">
+                    <a:lumMod val="95000"/>
+                  </a:schemeClr>
+                </a:solidFill>
+              </a:rPr>
+              <a:t> := new(</a:t>
+            </a:r>
+            <a:r>
+              <a:rPr sz="1600" dirty="0" err="1">
+                <a:solidFill>
+                  <a:schemeClr val="bg1">
+                    <a:lumMod val="95000"/>
+                  </a:schemeClr>
+                </a:solidFill>
+              </a:rPr>
+              <a:t>mocks.ClientIdentity</a:t>
+            </a:r>
+            <a:r>
+              <a:rPr sz="1600" dirty="0">
+                <a:solidFill>
+                  <a:schemeClr val="bg1">
+                    <a:lumMod val="95000"/>
+                  </a:schemeClr>
+                </a:solidFill>
+              </a:rPr>
+              <a:t>)</a:t>
+            </a:r>
+            <a:br>
+              <a:rPr sz="1600" dirty="0">
+                <a:solidFill>
+                  <a:schemeClr val="bg1">
+                    <a:lumMod val="95000"/>
+                  </a:schemeClr>
+                </a:solidFill>
+              </a:rPr>
+            </a:br>
+            <a:br>
+              <a:rPr sz="1600" dirty="0">
+                <a:solidFill>
+                  <a:schemeClr val="bg1">
+                    <a:lumMod val="95000"/>
+                  </a:schemeClr>
+                </a:solidFill>
+              </a:rPr>
+            </a:br>
+            <a:r>
+              <a:rPr sz="1600" dirty="0">
+                <a:solidFill>
+                  <a:schemeClr val="bg1">
+                    <a:lumMod val="95000"/>
+                  </a:schemeClr>
+                </a:solidFill>
+              </a:rPr>
+              <a:t>    </a:t>
+            </a:r>
+            <a:r>
+              <a:rPr sz="1600" dirty="0" err="1">
+                <a:solidFill>
+                  <a:schemeClr val="bg1">
+                    <a:lumMod val="95000"/>
+                  </a:schemeClr>
+                </a:solidFill>
+              </a:rPr>
+              <a:t>mockCtx.On</a:t>
+            </a:r>
+            <a:r>
+              <a:rPr sz="1600" dirty="0">
+                <a:solidFill>
+                  <a:schemeClr val="bg1">
+                    <a:lumMod val="95000"/>
+                  </a:schemeClr>
+                </a:solidFill>
+              </a:rPr>
+              <a:t>("</a:t>
+            </a:r>
+            <a:r>
+              <a:rPr sz="1600" dirty="0" err="1">
+                <a:solidFill>
+                  <a:schemeClr val="bg1">
+                    <a:lumMod val="95000"/>
+                  </a:schemeClr>
+                </a:solidFill>
+              </a:rPr>
+              <a:t>GetStub</a:t>
+            </a:r>
+            <a:r>
+              <a:rPr sz="1600" dirty="0">
+                <a:solidFill>
+                  <a:schemeClr val="bg1">
+                    <a:lumMod val="95000"/>
+                  </a:schemeClr>
+                </a:solidFill>
+              </a:rPr>
+              <a:t>").Return(</a:t>
+            </a:r>
+            <a:r>
+              <a:rPr sz="1600" dirty="0" err="1">
+                <a:solidFill>
+                  <a:schemeClr val="bg1">
+                    <a:lumMod val="95000"/>
+                  </a:schemeClr>
+                </a:solidFill>
+              </a:rPr>
+              <a:t>mockStub</a:t>
+            </a:r>
+            <a:r>
+              <a:rPr sz="1600" dirty="0">
+                <a:solidFill>
+                  <a:schemeClr val="bg1">
+                    <a:lumMod val="95000"/>
+                  </a:schemeClr>
+                </a:solidFill>
+              </a:rPr>
+              <a:t>)</a:t>
+            </a:r>
+            <a:br>
+              <a:rPr sz="1600" dirty="0">
+                <a:solidFill>
+                  <a:schemeClr val="bg1">
+                    <a:lumMod val="95000"/>
+                  </a:schemeClr>
+                </a:solidFill>
+              </a:rPr>
+            </a:br>
+            <a:r>
+              <a:rPr sz="1600" dirty="0">
+                <a:solidFill>
+                  <a:schemeClr val="bg1">
+                    <a:lumMod val="95000"/>
+                  </a:schemeClr>
+                </a:solidFill>
+              </a:rPr>
+              <a:t>    </a:t>
+            </a:r>
+            <a:r>
+              <a:rPr sz="1600" dirty="0" err="1">
+                <a:solidFill>
+                  <a:schemeClr val="bg1">
+                    <a:lumMod val="95000"/>
+                  </a:schemeClr>
+                </a:solidFill>
+              </a:rPr>
+              <a:t>mockCtx.On</a:t>
+            </a:r>
+            <a:r>
+              <a:rPr sz="1600" dirty="0">
+                <a:solidFill>
+                  <a:schemeClr val="bg1">
+                    <a:lumMod val="95000"/>
+                  </a:schemeClr>
+                </a:solidFill>
+              </a:rPr>
+              <a:t>("</a:t>
+            </a:r>
+            <a:r>
+              <a:rPr sz="1600" dirty="0" err="1">
+                <a:solidFill>
+                  <a:schemeClr val="bg1">
+                    <a:lumMod val="95000"/>
+                  </a:schemeClr>
+                </a:solidFill>
+              </a:rPr>
+              <a:t>GetClientIdentity</a:t>
+            </a:r>
+            <a:r>
+              <a:rPr sz="1600" dirty="0">
+                <a:solidFill>
+                  <a:schemeClr val="bg1">
+                    <a:lumMod val="95000"/>
+                  </a:schemeClr>
+                </a:solidFill>
+              </a:rPr>
+              <a:t>").Return(</a:t>
+            </a:r>
+            <a:r>
+              <a:rPr sz="1600" dirty="0" err="1">
+                <a:solidFill>
+                  <a:schemeClr val="bg1">
+                    <a:lumMod val="95000"/>
+                  </a:schemeClr>
+                </a:solidFill>
+              </a:rPr>
+              <a:t>mockIdentity</a:t>
+            </a:r>
+            <a:r>
+              <a:rPr sz="1600" dirty="0">
+                <a:solidFill>
+                  <a:schemeClr val="bg1">
+                    <a:lumMod val="95000"/>
+                  </a:schemeClr>
+                </a:solidFill>
+              </a:rPr>
+              <a:t>)</a:t>
+            </a:r>
+            <a:br>
+              <a:rPr sz="1600" dirty="0">
+                <a:solidFill>
+                  <a:schemeClr val="bg1">
+                    <a:lumMod val="95000"/>
+                  </a:schemeClr>
+                </a:solidFill>
+              </a:rPr>
+            </a:br>
+            <a:r>
+              <a:rPr sz="1600" dirty="0">
+                <a:solidFill>
+                  <a:schemeClr val="bg1">
+                    <a:lumMod val="95000"/>
+                  </a:schemeClr>
+                </a:solidFill>
+              </a:rPr>
+              <a:t>    </a:t>
+            </a:r>
+            <a:r>
+              <a:rPr sz="1600" dirty="0" err="1">
+                <a:solidFill>
+                  <a:schemeClr val="bg1">
+                    <a:lumMod val="95000"/>
+                  </a:schemeClr>
+                </a:solidFill>
+              </a:rPr>
+              <a:t>mockIdentity.On</a:t>
+            </a:r>
+            <a:r>
+              <a:rPr sz="1600" dirty="0">
+                <a:solidFill>
+                  <a:schemeClr val="bg1">
+                    <a:lumMod val="95000"/>
+                  </a:schemeClr>
+                </a:solidFill>
+              </a:rPr>
+              <a:t>("</a:t>
+            </a:r>
+            <a:r>
+              <a:rPr sz="1600" dirty="0" err="1">
+                <a:solidFill>
+                  <a:schemeClr val="bg1">
+                    <a:lumMod val="95000"/>
+                  </a:schemeClr>
+                </a:solidFill>
+              </a:rPr>
+              <a:t>GetMSPID</a:t>
+            </a:r>
+            <a:r>
+              <a:rPr sz="1600" dirty="0">
+                <a:solidFill>
+                  <a:schemeClr val="bg1">
+                    <a:lumMod val="95000"/>
+                  </a:schemeClr>
+                </a:solidFill>
+              </a:rPr>
+              <a:t>").Return("Org1MSP", nil)</a:t>
+            </a:r>
+            <a:br>
+              <a:rPr sz="1600" dirty="0">
+                <a:solidFill>
+                  <a:schemeClr val="bg1">
+                    <a:lumMod val="95000"/>
+                  </a:schemeClr>
+                </a:solidFill>
+              </a:rPr>
+            </a:br>
+            <a:r>
+              <a:rPr sz="1600" dirty="0">
+                <a:solidFill>
+                  <a:schemeClr val="bg1">
+                    <a:lumMod val="95000"/>
+                  </a:schemeClr>
+                </a:solidFill>
+              </a:rPr>
+              <a:t>    </a:t>
+            </a:r>
+            <a:r>
+              <a:rPr sz="1600" dirty="0" err="1">
+                <a:solidFill>
+                  <a:schemeClr val="bg1">
+                    <a:lumMod val="95000"/>
+                  </a:schemeClr>
+                </a:solidFill>
+              </a:rPr>
+              <a:t>mockIdentity.On</a:t>
+            </a:r>
+            <a:r>
+              <a:rPr sz="1600" dirty="0">
+                <a:solidFill>
+                  <a:schemeClr val="bg1">
+                    <a:lumMod val="95000"/>
+                  </a:schemeClr>
+                </a:solidFill>
+              </a:rPr>
+              <a:t>("AssertAttributeValue", "role", "</a:t>
+            </a:r>
+            <a:r>
+              <a:rPr sz="1600" dirty="0" err="1">
+                <a:solidFill>
+                  <a:schemeClr val="bg1">
+                    <a:lumMod val="95000"/>
+                  </a:schemeClr>
+                </a:solidFill>
+              </a:rPr>
+              <a:t>registrador</a:t>
+            </a:r>
+            <a:r>
+              <a:rPr sz="1600" dirty="0">
+                <a:solidFill>
+                  <a:schemeClr val="bg1">
+                    <a:lumMod val="95000"/>
+                  </a:schemeClr>
+                </a:solidFill>
+              </a:rPr>
+              <a:t>").</a:t>
+            </a:r>
+            <a:br>
+              <a:rPr sz="1600" dirty="0">
+                <a:solidFill>
+                  <a:schemeClr val="bg1">
+                    <a:lumMod val="95000"/>
+                  </a:schemeClr>
+                </a:solidFill>
+              </a:rPr>
+            </a:br>
+            <a:r>
+              <a:rPr sz="1600" dirty="0">
+                <a:solidFill>
+                  <a:schemeClr val="bg1">
+                    <a:lumMod val="95000"/>
+                  </a:schemeClr>
+                </a:solidFill>
+              </a:rPr>
               <a:t>        Return(nil)</a:t>
             </a:r>
-            <a:br/>
-            <a:br/>
-            <a:r>
-              <a:t>    // GetState devuelve nil (propiedad no existe)</a:t>
-            </a:r>
-            <a:br/>
-            <a:r>
-              <a:t>    mockStub.On("GetState", "PROP001").Return(nil, nil)</a:t>
-            </a:r>
-            <a:br/>
-            <a:r>
-              <a:t>    // PutState acepta cualquier valor</a:t>
-            </a:r>
-            <a:br/>
-            <a:r>
-              <a:t>    mockStub.On("PutState", "PROP001", mock.Anything).Return(nil)</a:t>
-            </a:r>
-            <a:br/>
-            <a:br/>
-            <a:r>
+            <a:br>
+              <a:rPr sz="1600" dirty="0">
+                <a:solidFill>
+                  <a:schemeClr val="bg1">
+                    <a:lumMod val="95000"/>
+                  </a:schemeClr>
+                </a:solidFill>
+              </a:rPr>
+            </a:br>
+            <a:endParaRPr sz="1600" dirty="0">
+              <a:solidFill>
+                <a:schemeClr val="bg1">
+                  <a:lumMod val="95000"/>
+                </a:schemeClr>
+              </a:solidFill>
+            </a:endParaRPr>
+          </a:p>
+        </p:txBody>
+      </p:sp>
+      <p:sp>
+        <p:nvSpPr>
+          <p:cNvPr id="10" name="CuadroTexto 9">
+            <a:extLst>
+              <a:ext uri="{FF2B5EF4-FFF2-40B4-BE49-F238E27FC236}">
+                <a16:creationId xmlns:a16="http://schemas.microsoft.com/office/drawing/2014/main" id="{541FE579-ABF3-C3C7-0FFC-F9CBC6D90917}"/>
+              </a:ext>
+            </a:extLst>
+          </p:cNvPr>
+          <p:cNvSpPr txBox="1"/>
+          <p:nvPr/>
+        </p:nvSpPr>
+        <p:spPr>
+          <a:xfrm>
+            <a:off x="6608182" y="1599037"/>
+            <a:ext cx="5123443" cy="4524315"/>
+          </a:xfrm>
+          <a:prstGeom prst="rect">
+            <a:avLst/>
+          </a:prstGeom>
+          <a:noFill/>
+        </p:spPr>
+        <p:txBody>
+          <a:bodyPr wrap="square">
+            <a:spAutoFit/>
+          </a:bodyPr>
+          <a:lstStyle/>
+          <a:p>
+            <a:br>
+              <a:rPr lang="es-ES" sz="1600" dirty="0">
+                <a:solidFill>
+                  <a:schemeClr val="bg1">
+                    <a:lumMod val="95000"/>
+                  </a:schemeClr>
+                </a:solidFill>
+              </a:rPr>
+            </a:br>
+            <a:r>
+              <a:rPr lang="es-ES" sz="1600" dirty="0">
+                <a:solidFill>
+                  <a:schemeClr val="bg1">
+                    <a:lumMod val="95000"/>
+                  </a:schemeClr>
+                </a:solidFill>
+              </a:rPr>
+              <a:t>    // </a:t>
+            </a:r>
+            <a:r>
+              <a:rPr lang="es-ES" sz="1600" dirty="0" err="1">
+                <a:solidFill>
+                  <a:schemeClr val="bg1">
+                    <a:lumMod val="95000"/>
+                  </a:schemeClr>
+                </a:solidFill>
+              </a:rPr>
+              <a:t>GetState</a:t>
+            </a:r>
+            <a:r>
+              <a:rPr lang="es-ES" sz="1600" dirty="0">
+                <a:solidFill>
+                  <a:schemeClr val="bg1">
+                    <a:lumMod val="95000"/>
+                  </a:schemeClr>
+                </a:solidFill>
+              </a:rPr>
+              <a:t> devuelve </a:t>
+            </a:r>
+            <a:r>
+              <a:rPr lang="es-ES" sz="1600" dirty="0" err="1">
+                <a:solidFill>
+                  <a:schemeClr val="bg1">
+                    <a:lumMod val="95000"/>
+                  </a:schemeClr>
+                </a:solidFill>
+              </a:rPr>
+              <a:t>nil</a:t>
+            </a:r>
+            <a:r>
+              <a:rPr lang="es-ES" sz="1600" dirty="0">
+                <a:solidFill>
+                  <a:schemeClr val="bg1">
+                    <a:lumMod val="95000"/>
+                  </a:schemeClr>
+                </a:solidFill>
+              </a:rPr>
+              <a:t> (propiedad no existe)</a:t>
+            </a:r>
+            <a:br>
+              <a:rPr lang="es-ES" sz="1600" dirty="0">
+                <a:solidFill>
+                  <a:schemeClr val="bg1">
+                    <a:lumMod val="95000"/>
+                  </a:schemeClr>
+                </a:solidFill>
+              </a:rPr>
+            </a:br>
+            <a:r>
+              <a:rPr lang="es-ES" sz="1600" dirty="0">
+                <a:solidFill>
+                  <a:schemeClr val="bg1">
+                    <a:lumMod val="95000"/>
+                  </a:schemeClr>
+                </a:solidFill>
+              </a:rPr>
+              <a:t>    </a:t>
+            </a:r>
+            <a:r>
+              <a:rPr lang="es-ES" sz="1600" dirty="0" err="1">
+                <a:solidFill>
+                  <a:schemeClr val="bg1">
+                    <a:lumMod val="95000"/>
+                  </a:schemeClr>
+                </a:solidFill>
+              </a:rPr>
+              <a:t>mockStub.On</a:t>
+            </a:r>
+            <a:r>
+              <a:rPr lang="es-ES" sz="1600" dirty="0">
+                <a:solidFill>
+                  <a:schemeClr val="bg1">
+                    <a:lumMod val="95000"/>
+                  </a:schemeClr>
+                </a:solidFill>
+              </a:rPr>
+              <a:t>("</a:t>
+            </a:r>
+            <a:r>
+              <a:rPr lang="es-ES" sz="1600" dirty="0" err="1">
+                <a:solidFill>
+                  <a:schemeClr val="bg1">
+                    <a:lumMod val="95000"/>
+                  </a:schemeClr>
+                </a:solidFill>
+              </a:rPr>
+              <a:t>GetState</a:t>
+            </a:r>
+            <a:r>
+              <a:rPr lang="es-ES" sz="1600" dirty="0">
+                <a:solidFill>
+                  <a:schemeClr val="bg1">
+                    <a:lumMod val="95000"/>
+                  </a:schemeClr>
+                </a:solidFill>
+              </a:rPr>
+              <a:t>", "PROP001").</a:t>
+            </a:r>
+            <a:r>
+              <a:rPr lang="es-ES" sz="1600" dirty="0" err="1">
+                <a:solidFill>
+                  <a:schemeClr val="bg1">
+                    <a:lumMod val="95000"/>
+                  </a:schemeClr>
+                </a:solidFill>
+              </a:rPr>
+              <a:t>Return</a:t>
+            </a:r>
+            <a:r>
+              <a:rPr lang="es-ES" sz="1600" dirty="0">
+                <a:solidFill>
+                  <a:schemeClr val="bg1">
+                    <a:lumMod val="95000"/>
+                  </a:schemeClr>
+                </a:solidFill>
+              </a:rPr>
+              <a:t>(</a:t>
+            </a:r>
+            <a:r>
+              <a:rPr lang="es-ES" sz="1600" dirty="0" err="1">
+                <a:solidFill>
+                  <a:schemeClr val="bg1">
+                    <a:lumMod val="95000"/>
+                  </a:schemeClr>
+                </a:solidFill>
+              </a:rPr>
+              <a:t>nil</a:t>
+            </a:r>
+            <a:r>
+              <a:rPr lang="es-ES" sz="1600" dirty="0">
+                <a:solidFill>
+                  <a:schemeClr val="bg1">
+                    <a:lumMod val="95000"/>
+                  </a:schemeClr>
+                </a:solidFill>
+              </a:rPr>
+              <a:t>, </a:t>
+            </a:r>
+            <a:r>
+              <a:rPr lang="es-ES" sz="1600" dirty="0" err="1">
+                <a:solidFill>
+                  <a:schemeClr val="bg1">
+                    <a:lumMod val="95000"/>
+                  </a:schemeClr>
+                </a:solidFill>
+              </a:rPr>
+              <a:t>nil</a:t>
+            </a:r>
+            <a:r>
+              <a:rPr lang="es-ES" sz="1600" dirty="0">
+                <a:solidFill>
+                  <a:schemeClr val="bg1">
+                    <a:lumMod val="95000"/>
+                  </a:schemeClr>
+                </a:solidFill>
+              </a:rPr>
+              <a:t>)</a:t>
+            </a:r>
+            <a:br>
+              <a:rPr lang="es-ES" sz="1600" dirty="0">
+                <a:solidFill>
+                  <a:schemeClr val="bg1">
+                    <a:lumMod val="95000"/>
+                  </a:schemeClr>
+                </a:solidFill>
+              </a:rPr>
+            </a:br>
+            <a:r>
+              <a:rPr lang="es-ES" sz="1600" dirty="0">
+                <a:solidFill>
+                  <a:schemeClr val="bg1">
+                    <a:lumMod val="95000"/>
+                  </a:schemeClr>
+                </a:solidFill>
+              </a:rPr>
+              <a:t>    // </a:t>
+            </a:r>
+            <a:r>
+              <a:rPr lang="es-ES" sz="1600" dirty="0" err="1">
+                <a:solidFill>
+                  <a:schemeClr val="bg1">
+                    <a:lumMod val="95000"/>
+                  </a:schemeClr>
+                </a:solidFill>
+              </a:rPr>
+              <a:t>PutState</a:t>
+            </a:r>
+            <a:r>
+              <a:rPr lang="es-ES" sz="1600" dirty="0">
+                <a:solidFill>
+                  <a:schemeClr val="bg1">
+                    <a:lumMod val="95000"/>
+                  </a:schemeClr>
+                </a:solidFill>
+              </a:rPr>
+              <a:t> acepta cualquier valor</a:t>
+            </a:r>
+            <a:br>
+              <a:rPr lang="es-ES" sz="1600" dirty="0">
+                <a:solidFill>
+                  <a:schemeClr val="bg1">
+                    <a:lumMod val="95000"/>
+                  </a:schemeClr>
+                </a:solidFill>
+              </a:rPr>
+            </a:br>
+            <a:r>
+              <a:rPr lang="es-ES" sz="1600" dirty="0">
+                <a:solidFill>
+                  <a:schemeClr val="bg1">
+                    <a:lumMod val="95000"/>
+                  </a:schemeClr>
+                </a:solidFill>
+              </a:rPr>
+              <a:t>    </a:t>
+            </a:r>
+            <a:r>
+              <a:rPr lang="es-ES" sz="1600" dirty="0" err="1">
+                <a:solidFill>
+                  <a:schemeClr val="bg1">
+                    <a:lumMod val="95000"/>
+                  </a:schemeClr>
+                </a:solidFill>
+              </a:rPr>
+              <a:t>mockStub.On</a:t>
+            </a:r>
+            <a:r>
+              <a:rPr lang="es-ES" sz="1600" dirty="0">
+                <a:solidFill>
+                  <a:schemeClr val="bg1">
+                    <a:lumMod val="95000"/>
+                  </a:schemeClr>
+                </a:solidFill>
+              </a:rPr>
+              <a:t>("</a:t>
+            </a:r>
+            <a:r>
+              <a:rPr lang="es-ES" sz="1600" dirty="0" err="1">
+                <a:solidFill>
+                  <a:schemeClr val="bg1">
+                    <a:lumMod val="95000"/>
+                  </a:schemeClr>
+                </a:solidFill>
+              </a:rPr>
+              <a:t>PutState</a:t>
+            </a:r>
+            <a:r>
+              <a:rPr lang="es-ES" sz="1600" dirty="0">
+                <a:solidFill>
+                  <a:schemeClr val="bg1">
+                    <a:lumMod val="95000"/>
+                  </a:schemeClr>
+                </a:solidFill>
+              </a:rPr>
+              <a:t>", "PROP001", </a:t>
+            </a:r>
+            <a:r>
+              <a:rPr lang="es-ES" sz="1600" dirty="0" err="1">
+                <a:solidFill>
+                  <a:schemeClr val="bg1">
+                    <a:lumMod val="95000"/>
+                  </a:schemeClr>
+                </a:solidFill>
+              </a:rPr>
+              <a:t>mock.Anything</a:t>
+            </a:r>
+            <a:r>
+              <a:rPr lang="es-ES" sz="1600" dirty="0">
+                <a:solidFill>
+                  <a:schemeClr val="bg1">
+                    <a:lumMod val="95000"/>
+                  </a:schemeClr>
+                </a:solidFill>
+              </a:rPr>
+              <a:t>).</a:t>
+            </a:r>
+            <a:r>
+              <a:rPr lang="es-ES" sz="1600" dirty="0" err="1">
+                <a:solidFill>
+                  <a:schemeClr val="bg1">
+                    <a:lumMod val="95000"/>
+                  </a:schemeClr>
+                </a:solidFill>
+              </a:rPr>
+              <a:t>Return</a:t>
+            </a:r>
+            <a:r>
+              <a:rPr lang="es-ES" sz="1600" dirty="0">
+                <a:solidFill>
+                  <a:schemeClr val="bg1">
+                    <a:lumMod val="95000"/>
+                  </a:schemeClr>
+                </a:solidFill>
+              </a:rPr>
+              <a:t>(</a:t>
+            </a:r>
+            <a:r>
+              <a:rPr lang="es-ES" sz="1600" dirty="0" err="1">
+                <a:solidFill>
+                  <a:schemeClr val="bg1">
+                    <a:lumMod val="95000"/>
+                  </a:schemeClr>
+                </a:solidFill>
+              </a:rPr>
+              <a:t>nil</a:t>
+            </a:r>
+            <a:r>
+              <a:rPr lang="es-ES" sz="1600" dirty="0">
+                <a:solidFill>
+                  <a:schemeClr val="bg1">
+                    <a:lumMod val="95000"/>
+                  </a:schemeClr>
+                </a:solidFill>
+              </a:rPr>
+              <a:t>)</a:t>
+            </a:r>
+            <a:br>
+              <a:rPr lang="es-ES" sz="1600" dirty="0">
+                <a:solidFill>
+                  <a:schemeClr val="bg1">
+                    <a:lumMod val="95000"/>
+                  </a:schemeClr>
+                </a:solidFill>
+              </a:rPr>
+            </a:br>
+            <a:br>
+              <a:rPr lang="es-ES" sz="1600" dirty="0">
+                <a:solidFill>
+                  <a:schemeClr val="bg1">
+                    <a:lumMod val="95000"/>
+                  </a:schemeClr>
+                </a:solidFill>
+              </a:rPr>
+            </a:br>
+            <a:r>
+              <a:rPr lang="es-ES" sz="1600" dirty="0">
+                <a:solidFill>
+                  <a:schemeClr val="bg1">
+                    <a:lumMod val="95000"/>
+                  </a:schemeClr>
+                </a:solidFill>
+              </a:rPr>
               <a:t>    // Ejecutar</a:t>
             </a:r>
-            <a:br/>
-            <a:r>
-              <a:t>    contract := SmartContract{}</a:t>
-            </a:r>
-            <a:br/>
-            <a:r>
-              <a:t>    err := contract.CreateProperty(mockCtx,</a:t>
-            </a:r>
-            <a:br/>
-            <a:r>
-              <a:t>        "PROP001", "Calle Mayor 1", "Org1MSP", 120, "apartment", 250000)</a:t>
-            </a:r>
-            <a:br/>
-            <a:br/>
-            <a:r>
+            <a:br>
+              <a:rPr lang="es-ES" sz="1600" dirty="0">
+                <a:solidFill>
+                  <a:schemeClr val="bg1">
+                    <a:lumMod val="95000"/>
+                  </a:schemeClr>
+                </a:solidFill>
+              </a:rPr>
+            </a:br>
+            <a:r>
+              <a:rPr lang="es-ES" sz="1600" dirty="0">
+                <a:solidFill>
+                  <a:schemeClr val="bg1">
+                    <a:lumMod val="95000"/>
+                  </a:schemeClr>
+                </a:solidFill>
+              </a:rPr>
+              <a:t>    </a:t>
+            </a:r>
+            <a:r>
+              <a:rPr lang="es-ES" sz="1600" dirty="0" err="1">
+                <a:solidFill>
+                  <a:schemeClr val="bg1">
+                    <a:lumMod val="95000"/>
+                  </a:schemeClr>
+                </a:solidFill>
+              </a:rPr>
+              <a:t>contract</a:t>
+            </a:r>
+            <a:r>
+              <a:rPr lang="es-ES" sz="1600" dirty="0">
+                <a:solidFill>
+                  <a:schemeClr val="bg1">
+                    <a:lumMod val="95000"/>
+                  </a:schemeClr>
+                </a:solidFill>
+              </a:rPr>
+              <a:t> := </a:t>
+            </a:r>
+            <a:r>
+              <a:rPr lang="es-ES" sz="1600" dirty="0" err="1">
+                <a:solidFill>
+                  <a:schemeClr val="bg1">
+                    <a:lumMod val="95000"/>
+                  </a:schemeClr>
+                </a:solidFill>
+              </a:rPr>
+              <a:t>SmartContract</a:t>
+            </a:r>
+            <a:r>
+              <a:rPr lang="es-ES" sz="1600" dirty="0">
+                <a:solidFill>
+                  <a:schemeClr val="bg1">
+                    <a:lumMod val="95000"/>
+                  </a:schemeClr>
+                </a:solidFill>
+              </a:rPr>
+              <a:t>{}</a:t>
+            </a:r>
+            <a:br>
+              <a:rPr lang="es-ES" sz="1600" dirty="0">
+                <a:solidFill>
+                  <a:schemeClr val="bg1">
+                    <a:lumMod val="95000"/>
+                  </a:schemeClr>
+                </a:solidFill>
+              </a:rPr>
+            </a:br>
+            <a:r>
+              <a:rPr lang="es-ES" sz="1600" dirty="0">
+                <a:solidFill>
+                  <a:schemeClr val="bg1">
+                    <a:lumMod val="95000"/>
+                  </a:schemeClr>
+                </a:solidFill>
+              </a:rPr>
+              <a:t>    </a:t>
+            </a:r>
+            <a:r>
+              <a:rPr lang="es-ES" sz="1600" dirty="0" err="1">
+                <a:solidFill>
+                  <a:schemeClr val="bg1">
+                    <a:lumMod val="95000"/>
+                  </a:schemeClr>
+                </a:solidFill>
+              </a:rPr>
+              <a:t>err</a:t>
+            </a:r>
+            <a:r>
+              <a:rPr lang="es-ES" sz="1600" dirty="0">
+                <a:solidFill>
+                  <a:schemeClr val="bg1">
+                    <a:lumMod val="95000"/>
+                  </a:schemeClr>
+                </a:solidFill>
+              </a:rPr>
+              <a:t> := </a:t>
+            </a:r>
+            <a:r>
+              <a:rPr lang="es-ES" sz="1600" dirty="0" err="1">
+                <a:solidFill>
+                  <a:schemeClr val="bg1">
+                    <a:lumMod val="95000"/>
+                  </a:schemeClr>
+                </a:solidFill>
+              </a:rPr>
+              <a:t>contract.CreateProperty</a:t>
+            </a:r>
+            <a:r>
+              <a:rPr lang="es-ES" sz="1600" dirty="0">
+                <a:solidFill>
+                  <a:schemeClr val="bg1">
+                    <a:lumMod val="95000"/>
+                  </a:schemeClr>
+                </a:solidFill>
+              </a:rPr>
+              <a:t>(</a:t>
+            </a:r>
+            <a:r>
+              <a:rPr lang="es-ES" sz="1600" dirty="0" err="1">
+                <a:solidFill>
+                  <a:schemeClr val="bg1">
+                    <a:lumMod val="95000"/>
+                  </a:schemeClr>
+                </a:solidFill>
+              </a:rPr>
+              <a:t>mockCtx</a:t>
+            </a:r>
+            <a:r>
+              <a:rPr lang="es-ES" sz="1600" dirty="0">
+                <a:solidFill>
+                  <a:schemeClr val="bg1">
+                    <a:lumMod val="95000"/>
+                  </a:schemeClr>
+                </a:solidFill>
+              </a:rPr>
+              <a:t>,</a:t>
+            </a:r>
+            <a:br>
+              <a:rPr lang="es-ES" sz="1600" dirty="0">
+                <a:solidFill>
+                  <a:schemeClr val="bg1">
+                    <a:lumMod val="95000"/>
+                  </a:schemeClr>
+                </a:solidFill>
+              </a:rPr>
+            </a:br>
+            <a:r>
+              <a:rPr lang="es-ES" sz="1600" dirty="0">
+                <a:solidFill>
+                  <a:schemeClr val="bg1">
+                    <a:lumMod val="95000"/>
+                  </a:schemeClr>
+                </a:solidFill>
+              </a:rPr>
+              <a:t>        "PROP001", "Calle Mayor 1", "Org1MSP", 120, "</a:t>
+            </a:r>
+            <a:r>
+              <a:rPr lang="es-ES" sz="1600" dirty="0" err="1">
+                <a:solidFill>
+                  <a:schemeClr val="bg1">
+                    <a:lumMod val="95000"/>
+                  </a:schemeClr>
+                </a:solidFill>
+              </a:rPr>
+              <a:t>apartment</a:t>
+            </a:r>
+            <a:r>
+              <a:rPr lang="es-ES" sz="1600" dirty="0">
+                <a:solidFill>
+                  <a:schemeClr val="bg1">
+                    <a:lumMod val="95000"/>
+                  </a:schemeClr>
+                </a:solidFill>
+              </a:rPr>
+              <a:t>", 250000)</a:t>
+            </a:r>
+            <a:br>
+              <a:rPr lang="es-ES" sz="1600" dirty="0">
+                <a:solidFill>
+                  <a:schemeClr val="bg1">
+                    <a:lumMod val="95000"/>
+                  </a:schemeClr>
+                </a:solidFill>
+              </a:rPr>
+            </a:br>
+            <a:br>
+              <a:rPr lang="es-ES" sz="1600" dirty="0">
+                <a:solidFill>
+                  <a:schemeClr val="bg1">
+                    <a:lumMod val="95000"/>
+                  </a:schemeClr>
+                </a:solidFill>
+              </a:rPr>
+            </a:br>
+            <a:r>
+              <a:rPr lang="es-ES" sz="1600" dirty="0">
+                <a:solidFill>
+                  <a:schemeClr val="bg1">
+                    <a:lumMod val="95000"/>
+                  </a:schemeClr>
+                </a:solidFill>
+              </a:rPr>
               <a:t>    // Verificar</a:t>
             </a:r>
-            <a:br/>
-            <a:r>
-              <a:t>    assert.NoError(t, err)</a:t>
-            </a:r>
-            <a:br/>
-            <a:r>
-              <a:t>    mockStub.AssertCalled(t, "PutState", "PROP001", mock.Anything)</a:t>
-            </a:r>
-            <a:br/>
-            <a:r>
+            <a:br>
+              <a:rPr lang="es-ES" sz="1600" dirty="0">
+                <a:solidFill>
+                  <a:schemeClr val="bg1">
+                    <a:lumMod val="95000"/>
+                  </a:schemeClr>
+                </a:solidFill>
+              </a:rPr>
+            </a:br>
+            <a:r>
+              <a:rPr lang="es-ES" sz="1600" dirty="0">
+                <a:solidFill>
+                  <a:schemeClr val="bg1">
+                    <a:lumMod val="95000"/>
+                  </a:schemeClr>
+                </a:solidFill>
+              </a:rPr>
+              <a:t>    </a:t>
+            </a:r>
+            <a:r>
+              <a:rPr lang="es-ES" sz="1600" dirty="0" err="1">
+                <a:solidFill>
+                  <a:schemeClr val="bg1">
+                    <a:lumMod val="95000"/>
+                  </a:schemeClr>
+                </a:solidFill>
+              </a:rPr>
+              <a:t>assert.NoError</a:t>
+            </a:r>
+            <a:r>
+              <a:rPr lang="es-ES" sz="1600" dirty="0">
+                <a:solidFill>
+                  <a:schemeClr val="bg1">
+                    <a:lumMod val="95000"/>
+                  </a:schemeClr>
+                </a:solidFill>
+              </a:rPr>
+              <a:t>(t, </a:t>
+            </a:r>
+            <a:r>
+              <a:rPr lang="es-ES" sz="1600" dirty="0" err="1">
+                <a:solidFill>
+                  <a:schemeClr val="bg1">
+                    <a:lumMod val="95000"/>
+                  </a:schemeClr>
+                </a:solidFill>
+              </a:rPr>
+              <a:t>err</a:t>
+            </a:r>
+            <a:r>
+              <a:rPr lang="es-ES" sz="1600" dirty="0">
+                <a:solidFill>
+                  <a:schemeClr val="bg1">
+                    <a:lumMod val="95000"/>
+                  </a:schemeClr>
+                </a:solidFill>
+              </a:rPr>
+              <a:t>)</a:t>
+            </a:r>
+            <a:br>
+              <a:rPr lang="es-ES" sz="1600" dirty="0">
+                <a:solidFill>
+                  <a:schemeClr val="bg1">
+                    <a:lumMod val="95000"/>
+                  </a:schemeClr>
+                </a:solidFill>
+              </a:rPr>
+            </a:br>
+            <a:r>
+              <a:rPr lang="es-ES" sz="1600" dirty="0">
+                <a:solidFill>
+                  <a:schemeClr val="bg1">
+                    <a:lumMod val="95000"/>
+                  </a:schemeClr>
+                </a:solidFill>
+              </a:rPr>
+              <a:t>    </a:t>
+            </a:r>
+            <a:r>
+              <a:rPr lang="es-ES" sz="1600" dirty="0" err="1">
+                <a:solidFill>
+                  <a:schemeClr val="bg1">
+                    <a:lumMod val="95000"/>
+                  </a:schemeClr>
+                </a:solidFill>
+              </a:rPr>
+              <a:t>mockStub.AssertCalled</a:t>
+            </a:r>
+            <a:r>
+              <a:rPr lang="es-ES" sz="1600" dirty="0">
+                <a:solidFill>
+                  <a:schemeClr val="bg1">
+                    <a:lumMod val="95000"/>
+                  </a:schemeClr>
+                </a:solidFill>
+              </a:rPr>
+              <a:t>(t, "</a:t>
+            </a:r>
+            <a:r>
+              <a:rPr lang="es-ES" sz="1600" dirty="0" err="1">
+                <a:solidFill>
+                  <a:schemeClr val="bg1">
+                    <a:lumMod val="95000"/>
+                  </a:schemeClr>
+                </a:solidFill>
+              </a:rPr>
+              <a:t>PutState</a:t>
+            </a:r>
+            <a:r>
+              <a:rPr lang="es-ES" sz="1600" dirty="0">
+                <a:solidFill>
+                  <a:schemeClr val="bg1">
+                    <a:lumMod val="95000"/>
+                  </a:schemeClr>
+                </a:solidFill>
+              </a:rPr>
+              <a:t>", "PROP001", </a:t>
+            </a:r>
+            <a:r>
+              <a:rPr lang="es-ES" sz="1600" dirty="0" err="1">
+                <a:solidFill>
+                  <a:schemeClr val="bg1">
+                    <a:lumMod val="95000"/>
+                  </a:schemeClr>
+                </a:solidFill>
+              </a:rPr>
+              <a:t>mock.Anything</a:t>
+            </a:r>
+            <a:r>
+              <a:rPr lang="es-ES" sz="1600" dirty="0">
+                <a:solidFill>
+                  <a:schemeClr val="bg1">
+                    <a:lumMod val="95000"/>
+                  </a:schemeClr>
+                </a:solidFill>
+              </a:rPr>
+              <a:t>)</a:t>
+            </a:r>
+            <a:br>
+              <a:rPr lang="es-ES" sz="1600" dirty="0">
+                <a:solidFill>
+                  <a:schemeClr val="bg1">
+                    <a:lumMod val="95000"/>
+                  </a:schemeClr>
+                </a:solidFill>
+              </a:rPr>
+            </a:br>
+            <a:r>
+              <a:rPr lang="es-ES" sz="1600" dirty="0">
+                <a:solidFill>
+                  <a:schemeClr val="bg1">
+                    <a:lumMod val="95000"/>
+                  </a:schemeClr>
+                </a:solidFill>
+              </a:rPr>
               <a:t>}</a:t>
             </a:r>
+            <a:endParaRPr lang="es-ES" sz="1600" dirty="0"/>
+          </a:p>
+        </p:txBody>
+      </p:sp>
+      <p:sp>
+        <p:nvSpPr>
+          <p:cNvPr id="11" name="Rectángulo 10">
+            <a:extLst>
+              <a:ext uri="{FF2B5EF4-FFF2-40B4-BE49-F238E27FC236}">
+                <a16:creationId xmlns:a16="http://schemas.microsoft.com/office/drawing/2014/main" id="{5479E319-6AB0-1C61-545D-3CEF54ACFD76}"/>
+              </a:ext>
+            </a:extLst>
+          </p:cNvPr>
+          <p:cNvSpPr/>
+          <p:nvPr/>
+        </p:nvSpPr>
+        <p:spPr>
+          <a:xfrm>
+            <a:off x="6080760" y="1417320"/>
+            <a:ext cx="45719" cy="5120640"/>
+          </a:xfrm>
+          <a:prstGeom prst="rect">
+            <a:avLst/>
+          </a:prstGeom>
+        </p:spPr>
+        <p:style>
+          <a:lnRef idx="1">
+            <a:schemeClr val="accent1"/>
+          </a:lnRef>
+          <a:fillRef idx="3">
+            <a:schemeClr val="accent1"/>
+          </a:fillRef>
+          <a:effectRef idx="2">
+            <a:schemeClr val="accent1"/>
+          </a:effectRef>
+          <a:fontRef idx="minor">
+            <a:schemeClr val="lt1"/>
+          </a:fontRef>
+        </p:style>
+        <p:txBody>
+          <a:bodyPr rtlCol="0" anchor="ctr"/>
+          <a:lstStyle/>
+          <a:p>
+            <a:pPr algn="ctr"/>
+            <a:endParaRPr lang="es-ES"/>
           </a:p>
         </p:txBody>
       </p:sp>
@@ -4442,7 +5631,7 @@
 </file>
 
 <file path=ppt/slides/slide14.xml><?xml version="1.0" encoding="utf-8"?>
-<p:sld xmlns:a="http://schemas.openxmlformats.org/drawingml/2006/main" xmlns:p="http://schemas.openxmlformats.org/presentationml/2006/main" xmlns:r="http://schemas.openxmlformats.org/officeDocument/2006/relationships">
+<p:sld xmlns:a="http://schemas.openxmlformats.org/drawingml/2006/main" xmlns:r="http://schemas.openxmlformats.org/officeDocument/2006/relationships" xmlns:p="http://schemas.openxmlformats.org/presentationml/2006/main">
   <p:cSld>
     <p:spTree>
       <p:nvGrpSpPr>
@@ -4450,7 +5639,14 @@
         <p:cNvGrpSpPr/>
         <p:nvPr/>
       </p:nvGrpSpPr>
-      <p:grpSpPr/>
+      <p:grpSpPr>
+        <a:xfrm>
+          <a:off x="0" y="0"/>
+          <a:ext cx="0" cy="0"/>
+          <a:chOff x="0" y="0"/>
+          <a:chExt cx="0" cy="0"/>
+        </a:xfrm>
+      </p:grpSpPr>
       <p:sp>
         <p:nvSpPr>
           <p:cNvPr id="2" name="Rectangle 1"/>
@@ -4491,6 +5687,7 @@
           <a:lstStyle/>
           <a:p>
             <a:pPr algn="ctr"/>
+            <a:endParaRPr/>
           </a:p>
         </p:txBody>
       </p:sp>
@@ -4602,6 +5799,7 @@
           <a:lstStyle/>
           <a:p>
             <a:pPr algn="ctr"/>
+            <a:endParaRPr/>
           </a:p>
         </p:txBody>
       </p:sp>
@@ -4679,6 +5877,7 @@
           <a:lstStyle/>
           <a:p>
             <a:pPr algn="ctr"/>
+            <a:endParaRPr/>
           </a:p>
         </p:txBody>
       </p:sp>
@@ -4690,8 +5889,8 @@
         </p:nvSpPr>
         <p:spPr>
           <a:xfrm>
-            <a:off x="731520" y="1600200"/>
-            <a:ext cx="10698480" cy="4754880"/>
+            <a:off x="731520" y="1455237"/>
+            <a:ext cx="6126480" cy="4754880"/>
           </a:xfrm>
           <a:prstGeom prst="rect">
             <a:avLst/>
@@ -4702,138 +5901,1541 @@
           <a:bodyPr wrap="square"/>
           <a:lstStyle/>
           <a:p>
-            <a:br/>
-            <a:pPr algn="l">
-              <a:defRPr sz="1500" b="0">
-                <a:solidFill>
-                  <a:srgbClr val="D4D4D4"/>
-                </a:solidFill>
-                <a:latin typeface="Consolas"/>
-              </a:defRPr>
-            </a:pPr>
-            <a:r>
+            <a:r>
+              <a:rPr sz="1600" dirty="0">
+                <a:solidFill>
+                  <a:schemeClr val="bg1">
+                    <a:lumMod val="95000"/>
+                  </a:schemeClr>
+                </a:solidFill>
+              </a:rPr>
               <a:t>const { expect } = require('chai');</a:t>
             </a:r>
-            <a:br/>
-            <a:r>
-              <a:t>const sinon = require('sinon');</a:t>
-            </a:r>
-            <a:br/>
-            <a:r>
-              <a:t>const { AssetContract } = require('../lib/assetContract');</a:t>
-            </a:r>
-            <a:br/>
-            <a:br/>
-            <a:r>
-              <a:t>describe('AssetContract', () =&gt; {</a:t>
-            </a:r>
-            <a:br/>
-            <a:r>
+            <a:br>
+              <a:rPr sz="1600" dirty="0">
+                <a:solidFill>
+                  <a:schemeClr val="bg1">
+                    <a:lumMod val="95000"/>
+                  </a:schemeClr>
+                </a:solidFill>
+              </a:rPr>
+            </a:br>
+            <a:r>
+              <a:rPr sz="1600" dirty="0">
+                <a:solidFill>
+                  <a:schemeClr val="bg1">
+                    <a:lumMod val="95000"/>
+                  </a:schemeClr>
+                </a:solidFill>
+              </a:rPr>
+              <a:t>const </a:t>
+            </a:r>
+            <a:r>
+              <a:rPr sz="1600" dirty="0" err="1">
+                <a:solidFill>
+                  <a:schemeClr val="bg1">
+                    <a:lumMod val="95000"/>
+                  </a:schemeClr>
+                </a:solidFill>
+              </a:rPr>
+              <a:t>sinon</a:t>
+            </a:r>
+            <a:r>
+              <a:rPr sz="1600" dirty="0">
+                <a:solidFill>
+                  <a:schemeClr val="bg1">
+                    <a:lumMod val="95000"/>
+                  </a:schemeClr>
+                </a:solidFill>
+              </a:rPr>
+              <a:t> = require('</a:t>
+            </a:r>
+            <a:r>
+              <a:rPr sz="1600" dirty="0" err="1">
+                <a:solidFill>
+                  <a:schemeClr val="bg1">
+                    <a:lumMod val="95000"/>
+                  </a:schemeClr>
+                </a:solidFill>
+              </a:rPr>
+              <a:t>sinon</a:t>
+            </a:r>
+            <a:r>
+              <a:rPr sz="1600" dirty="0">
+                <a:solidFill>
+                  <a:schemeClr val="bg1">
+                    <a:lumMod val="95000"/>
+                  </a:schemeClr>
+                </a:solidFill>
+              </a:rPr>
+              <a:t>');</a:t>
+            </a:r>
+            <a:br>
+              <a:rPr sz="1600" dirty="0">
+                <a:solidFill>
+                  <a:schemeClr val="bg1">
+                    <a:lumMod val="95000"/>
+                  </a:schemeClr>
+                </a:solidFill>
+              </a:rPr>
+            </a:br>
+            <a:r>
+              <a:rPr sz="1600" dirty="0">
+                <a:solidFill>
+                  <a:schemeClr val="bg1">
+                    <a:lumMod val="95000"/>
+                  </a:schemeClr>
+                </a:solidFill>
+              </a:rPr>
+              <a:t>const { </a:t>
+            </a:r>
+            <a:r>
+              <a:rPr sz="1600" dirty="0" err="1">
+                <a:solidFill>
+                  <a:schemeClr val="bg1">
+                    <a:lumMod val="95000"/>
+                  </a:schemeClr>
+                </a:solidFill>
+              </a:rPr>
+              <a:t>AssetContract</a:t>
+            </a:r>
+            <a:r>
+              <a:rPr sz="1600" dirty="0">
+                <a:solidFill>
+                  <a:schemeClr val="bg1">
+                    <a:lumMod val="95000"/>
+                  </a:schemeClr>
+                </a:solidFill>
+              </a:rPr>
+              <a:t> } = require('../lib/</a:t>
+            </a:r>
+            <a:r>
+              <a:rPr sz="1600" dirty="0" err="1">
+                <a:solidFill>
+                  <a:schemeClr val="bg1">
+                    <a:lumMod val="95000"/>
+                  </a:schemeClr>
+                </a:solidFill>
+              </a:rPr>
+              <a:t>assetContract</a:t>
+            </a:r>
+            <a:r>
+              <a:rPr sz="1600" dirty="0">
+                <a:solidFill>
+                  <a:schemeClr val="bg1">
+                    <a:lumMod val="95000"/>
+                  </a:schemeClr>
+                </a:solidFill>
+              </a:rPr>
+              <a:t>');</a:t>
+            </a:r>
+            <a:br>
+              <a:rPr sz="1600" dirty="0">
+                <a:solidFill>
+                  <a:schemeClr val="bg1">
+                    <a:lumMod val="95000"/>
+                  </a:schemeClr>
+                </a:solidFill>
+              </a:rPr>
+            </a:br>
+            <a:r>
+              <a:rPr sz="1600" dirty="0">
+                <a:solidFill>
+                  <a:schemeClr val="bg1">
+                    <a:lumMod val="95000"/>
+                  </a:schemeClr>
+                </a:solidFill>
+              </a:rPr>
+              <a:t>describe('</a:t>
+            </a:r>
+            <a:r>
+              <a:rPr sz="1600" dirty="0" err="1">
+                <a:solidFill>
+                  <a:schemeClr val="bg1">
+                    <a:lumMod val="95000"/>
+                  </a:schemeClr>
+                </a:solidFill>
+              </a:rPr>
+              <a:t>AssetContract</a:t>
+            </a:r>
+            <a:r>
+              <a:rPr sz="1600" dirty="0">
+                <a:solidFill>
+                  <a:schemeClr val="bg1">
+                    <a:lumMod val="95000"/>
+                  </a:schemeClr>
+                </a:solidFill>
+              </a:rPr>
+              <a:t>', () =&gt; {</a:t>
+            </a:r>
+            <a:br>
+              <a:rPr sz="1600" dirty="0">
+                <a:solidFill>
+                  <a:schemeClr val="bg1">
+                    <a:lumMod val="95000"/>
+                  </a:schemeClr>
+                </a:solidFill>
+              </a:rPr>
+            </a:br>
+            <a:r>
+              <a:rPr sz="1600" dirty="0">
+                <a:solidFill>
+                  <a:schemeClr val="bg1">
+                    <a:lumMod val="95000"/>
+                  </a:schemeClr>
+                </a:solidFill>
+              </a:rPr>
               <a:t>    let contract;</a:t>
             </a:r>
-            <a:br/>
-            <a:r>
-              <a:t>    let ctx;</a:t>
-            </a:r>
-            <a:br/>
-            <a:br/>
-            <a:r>
-              <a:t>    beforeEach(() =&gt; {</a:t>
-            </a:r>
-            <a:br/>
-            <a:r>
-              <a:t>        contract = new AssetContract();</a:t>
-            </a:r>
-            <a:br/>
-            <a:r>
-              <a:t>        ctx = {</a:t>
-            </a:r>
-            <a:br/>
-            <a:r>
+            <a:br>
+              <a:rPr sz="1600" dirty="0">
+                <a:solidFill>
+                  <a:schemeClr val="bg1">
+                    <a:lumMod val="95000"/>
+                  </a:schemeClr>
+                </a:solidFill>
+              </a:rPr>
+            </a:br>
+            <a:r>
+              <a:rPr sz="1600" dirty="0">
+                <a:solidFill>
+                  <a:schemeClr val="bg1">
+                    <a:lumMod val="95000"/>
+                  </a:schemeClr>
+                </a:solidFill>
+              </a:rPr>
+              <a:t>    let </a:t>
+            </a:r>
+            <a:r>
+              <a:rPr sz="1600" dirty="0" err="1">
+                <a:solidFill>
+                  <a:schemeClr val="bg1">
+                    <a:lumMod val="95000"/>
+                  </a:schemeClr>
+                </a:solidFill>
+              </a:rPr>
+              <a:t>ctx</a:t>
+            </a:r>
+            <a:r>
+              <a:rPr sz="1600" dirty="0">
+                <a:solidFill>
+                  <a:schemeClr val="bg1">
+                    <a:lumMod val="95000"/>
+                  </a:schemeClr>
+                </a:solidFill>
+              </a:rPr>
+              <a:t>;</a:t>
+            </a:r>
+            <a:br>
+              <a:rPr sz="1600" dirty="0">
+                <a:solidFill>
+                  <a:schemeClr val="bg1">
+                    <a:lumMod val="95000"/>
+                  </a:schemeClr>
+                </a:solidFill>
+              </a:rPr>
+            </a:br>
+            <a:r>
+              <a:rPr sz="1600" dirty="0">
+                <a:solidFill>
+                  <a:schemeClr val="bg1">
+                    <a:lumMod val="95000"/>
+                  </a:schemeClr>
+                </a:solidFill>
+              </a:rPr>
+              <a:t>    </a:t>
+            </a:r>
+            <a:r>
+              <a:rPr sz="1600" dirty="0" err="1">
+                <a:solidFill>
+                  <a:schemeClr val="bg1">
+                    <a:lumMod val="95000"/>
+                  </a:schemeClr>
+                </a:solidFill>
+              </a:rPr>
+              <a:t>beforeEach</a:t>
+            </a:r>
+            <a:r>
+              <a:rPr sz="1600" dirty="0">
+                <a:solidFill>
+                  <a:schemeClr val="bg1">
+                    <a:lumMod val="95000"/>
+                  </a:schemeClr>
+                </a:solidFill>
+              </a:rPr>
+              <a:t>(() =&gt; {</a:t>
+            </a:r>
+            <a:br>
+              <a:rPr sz="1600" dirty="0">
+                <a:solidFill>
+                  <a:schemeClr val="bg1">
+                    <a:lumMod val="95000"/>
+                  </a:schemeClr>
+                </a:solidFill>
+              </a:rPr>
+            </a:br>
+            <a:r>
+              <a:rPr sz="1600" dirty="0">
+                <a:solidFill>
+                  <a:schemeClr val="bg1">
+                    <a:lumMod val="95000"/>
+                  </a:schemeClr>
+                </a:solidFill>
+              </a:rPr>
+              <a:t>        contract = new </a:t>
+            </a:r>
+            <a:r>
+              <a:rPr sz="1600" dirty="0" err="1">
+                <a:solidFill>
+                  <a:schemeClr val="bg1">
+                    <a:lumMod val="95000"/>
+                  </a:schemeClr>
+                </a:solidFill>
+              </a:rPr>
+              <a:t>AssetContract</a:t>
+            </a:r>
+            <a:r>
+              <a:rPr sz="1600" dirty="0">
+                <a:solidFill>
+                  <a:schemeClr val="bg1">
+                    <a:lumMod val="95000"/>
+                  </a:schemeClr>
+                </a:solidFill>
+              </a:rPr>
+              <a:t>();</a:t>
+            </a:r>
+            <a:br>
+              <a:rPr sz="1600" dirty="0">
+                <a:solidFill>
+                  <a:schemeClr val="bg1">
+                    <a:lumMod val="95000"/>
+                  </a:schemeClr>
+                </a:solidFill>
+              </a:rPr>
+            </a:br>
+            <a:r>
+              <a:rPr sz="1600" dirty="0">
+                <a:solidFill>
+                  <a:schemeClr val="bg1">
+                    <a:lumMod val="95000"/>
+                  </a:schemeClr>
+                </a:solidFill>
+              </a:rPr>
+              <a:t>        </a:t>
+            </a:r>
+            <a:r>
+              <a:rPr sz="1600" dirty="0" err="1">
+                <a:solidFill>
+                  <a:schemeClr val="bg1">
+                    <a:lumMod val="95000"/>
+                  </a:schemeClr>
+                </a:solidFill>
+              </a:rPr>
+              <a:t>ctx</a:t>
+            </a:r>
+            <a:r>
+              <a:rPr sz="1600" dirty="0">
+                <a:solidFill>
+                  <a:schemeClr val="bg1">
+                    <a:lumMod val="95000"/>
+                  </a:schemeClr>
+                </a:solidFill>
+              </a:rPr>
+              <a:t> = {</a:t>
+            </a:r>
+            <a:br>
+              <a:rPr sz="1600" dirty="0">
+                <a:solidFill>
+                  <a:schemeClr val="bg1">
+                    <a:lumMod val="95000"/>
+                  </a:schemeClr>
+                </a:solidFill>
+              </a:rPr>
+            </a:br>
+            <a:r>
+              <a:rPr sz="1600" dirty="0">
+                <a:solidFill>
+                  <a:schemeClr val="bg1">
+                    <a:lumMod val="95000"/>
+                  </a:schemeClr>
+                </a:solidFill>
+              </a:rPr>
               <a:t>            stub: {</a:t>
             </a:r>
-            <a:br/>
-            <a:r>
-              <a:t>                getState: sinon.stub(),</a:t>
-            </a:r>
-            <a:br/>
-            <a:r>
-              <a:t>                putState: sinon.stub(),</a:t>
-            </a:r>
-            <a:br/>
-            <a:r>
-              <a:t>                setEvent: sinon.stub(),</a:t>
-            </a:r>
-            <a:br/>
-            <a:r>
+            <a:br>
+              <a:rPr sz="1600" dirty="0">
+                <a:solidFill>
+                  <a:schemeClr val="bg1">
+                    <a:lumMod val="95000"/>
+                  </a:schemeClr>
+                </a:solidFill>
+              </a:rPr>
+            </a:br>
+            <a:r>
+              <a:rPr sz="1600" dirty="0">
+                <a:solidFill>
+                  <a:schemeClr val="bg1">
+                    <a:lumMod val="95000"/>
+                  </a:schemeClr>
+                </a:solidFill>
+              </a:rPr>
+              <a:t>                </a:t>
+            </a:r>
+            <a:r>
+              <a:rPr sz="1600" dirty="0" err="1">
+                <a:solidFill>
+                  <a:schemeClr val="bg1">
+                    <a:lumMod val="95000"/>
+                  </a:schemeClr>
+                </a:solidFill>
+              </a:rPr>
+              <a:t>getState</a:t>
+            </a:r>
+            <a:r>
+              <a:rPr sz="1600" dirty="0">
+                <a:solidFill>
+                  <a:schemeClr val="bg1">
+                    <a:lumMod val="95000"/>
+                  </a:schemeClr>
+                </a:solidFill>
+              </a:rPr>
+              <a:t>: </a:t>
+            </a:r>
+            <a:r>
+              <a:rPr sz="1600" dirty="0" err="1">
+                <a:solidFill>
+                  <a:schemeClr val="bg1">
+                    <a:lumMod val="95000"/>
+                  </a:schemeClr>
+                </a:solidFill>
+              </a:rPr>
+              <a:t>sinon.stub</a:t>
+            </a:r>
+            <a:r>
+              <a:rPr sz="1600" dirty="0">
+                <a:solidFill>
+                  <a:schemeClr val="bg1">
+                    <a:lumMod val="95000"/>
+                  </a:schemeClr>
+                </a:solidFill>
+              </a:rPr>
+              <a:t>(),</a:t>
+            </a:r>
+            <a:br>
+              <a:rPr sz="1600" dirty="0">
+                <a:solidFill>
+                  <a:schemeClr val="bg1">
+                    <a:lumMod val="95000"/>
+                  </a:schemeClr>
+                </a:solidFill>
+              </a:rPr>
+            </a:br>
+            <a:r>
+              <a:rPr sz="1600" dirty="0">
+                <a:solidFill>
+                  <a:schemeClr val="bg1">
+                    <a:lumMod val="95000"/>
+                  </a:schemeClr>
+                </a:solidFill>
+              </a:rPr>
+              <a:t>                </a:t>
+            </a:r>
+            <a:r>
+              <a:rPr sz="1600" dirty="0" err="1">
+                <a:solidFill>
+                  <a:schemeClr val="bg1">
+                    <a:lumMod val="95000"/>
+                  </a:schemeClr>
+                </a:solidFill>
+              </a:rPr>
+              <a:t>putState</a:t>
+            </a:r>
+            <a:r>
+              <a:rPr sz="1600" dirty="0">
+                <a:solidFill>
+                  <a:schemeClr val="bg1">
+                    <a:lumMod val="95000"/>
+                  </a:schemeClr>
+                </a:solidFill>
+              </a:rPr>
+              <a:t>: </a:t>
+            </a:r>
+            <a:r>
+              <a:rPr sz="1600" dirty="0" err="1">
+                <a:solidFill>
+                  <a:schemeClr val="bg1">
+                    <a:lumMod val="95000"/>
+                  </a:schemeClr>
+                </a:solidFill>
+              </a:rPr>
+              <a:t>sinon.stub</a:t>
+            </a:r>
+            <a:r>
+              <a:rPr sz="1600" dirty="0">
+                <a:solidFill>
+                  <a:schemeClr val="bg1">
+                    <a:lumMod val="95000"/>
+                  </a:schemeClr>
+                </a:solidFill>
+              </a:rPr>
+              <a:t>(),</a:t>
+            </a:r>
+            <a:br>
+              <a:rPr sz="1600" dirty="0">
+                <a:solidFill>
+                  <a:schemeClr val="bg1">
+                    <a:lumMod val="95000"/>
+                  </a:schemeClr>
+                </a:solidFill>
+              </a:rPr>
+            </a:br>
+            <a:r>
+              <a:rPr sz="1600" dirty="0">
+                <a:solidFill>
+                  <a:schemeClr val="bg1">
+                    <a:lumMod val="95000"/>
+                  </a:schemeClr>
+                </a:solidFill>
+              </a:rPr>
+              <a:t>                </a:t>
+            </a:r>
+            <a:r>
+              <a:rPr sz="1600" dirty="0" err="1">
+                <a:solidFill>
+                  <a:schemeClr val="bg1">
+                    <a:lumMod val="95000"/>
+                  </a:schemeClr>
+                </a:solidFill>
+              </a:rPr>
+              <a:t>setEvent</a:t>
+            </a:r>
+            <a:r>
+              <a:rPr sz="1600" dirty="0">
+                <a:solidFill>
+                  <a:schemeClr val="bg1">
+                    <a:lumMod val="95000"/>
+                  </a:schemeClr>
+                </a:solidFill>
+              </a:rPr>
+              <a:t>: </a:t>
+            </a:r>
+            <a:r>
+              <a:rPr sz="1600" dirty="0" err="1">
+                <a:solidFill>
+                  <a:schemeClr val="bg1">
+                    <a:lumMod val="95000"/>
+                  </a:schemeClr>
+                </a:solidFill>
+              </a:rPr>
+              <a:t>sinon.stub</a:t>
+            </a:r>
+            <a:r>
+              <a:rPr sz="1600" dirty="0">
+                <a:solidFill>
+                  <a:schemeClr val="bg1">
+                    <a:lumMod val="95000"/>
+                  </a:schemeClr>
+                </a:solidFill>
+              </a:rPr>
+              <a:t>(),</a:t>
+            </a:r>
+            <a:br>
+              <a:rPr sz="1600" dirty="0">
+                <a:solidFill>
+                  <a:schemeClr val="bg1">
+                    <a:lumMod val="95000"/>
+                  </a:schemeClr>
+                </a:solidFill>
+              </a:rPr>
+            </a:br>
+            <a:r>
+              <a:rPr sz="1600" dirty="0">
+                <a:solidFill>
+                  <a:schemeClr val="bg1">
+                    <a:lumMod val="95000"/>
+                  </a:schemeClr>
+                </a:solidFill>
+              </a:rPr>
               <a:t>            },</a:t>
             </a:r>
-            <a:br/>
-            <a:r>
-              <a:t>            clientIdentity: {</a:t>
-            </a:r>
-            <a:br/>
-            <a:r>
-              <a:t>                getMSPID: sinon.stub().returns('Org1MSP'),</a:t>
-            </a:r>
-            <a:br/>
-            <a:r>
-              <a:t>                getID: sinon.stub().returns('user1'),</a:t>
-            </a:r>
-            <a:br/>
-            <a:r>
-              <a:t>                getAttributeValue: sinon.stub().returns(['registrador', true]),</a:t>
-            </a:r>
-            <a:br/>
-            <a:r>
+            <a:br>
+              <a:rPr sz="1600" dirty="0">
+                <a:solidFill>
+                  <a:schemeClr val="bg1">
+                    <a:lumMod val="95000"/>
+                  </a:schemeClr>
+                </a:solidFill>
+              </a:rPr>
+            </a:br>
+            <a:r>
+              <a:rPr sz="1600" dirty="0">
+                <a:solidFill>
+                  <a:schemeClr val="bg1">
+                    <a:lumMod val="95000"/>
+                  </a:schemeClr>
+                </a:solidFill>
+              </a:rPr>
+              <a:t>            </a:t>
+            </a:r>
+            <a:r>
+              <a:rPr sz="1600" dirty="0" err="1">
+                <a:solidFill>
+                  <a:schemeClr val="bg1">
+                    <a:lumMod val="95000"/>
+                  </a:schemeClr>
+                </a:solidFill>
+              </a:rPr>
+              <a:t>clientIdentity</a:t>
+            </a:r>
+            <a:r>
+              <a:rPr sz="1600" dirty="0">
+                <a:solidFill>
+                  <a:schemeClr val="bg1">
+                    <a:lumMod val="95000"/>
+                  </a:schemeClr>
+                </a:solidFill>
+              </a:rPr>
+              <a:t>: {</a:t>
+            </a:r>
+            <a:br>
+              <a:rPr sz="1600" dirty="0">
+                <a:solidFill>
+                  <a:schemeClr val="bg1">
+                    <a:lumMod val="95000"/>
+                  </a:schemeClr>
+                </a:solidFill>
+              </a:rPr>
+            </a:br>
+            <a:r>
+              <a:rPr sz="1600" dirty="0">
+                <a:solidFill>
+                  <a:schemeClr val="bg1">
+                    <a:lumMod val="95000"/>
+                  </a:schemeClr>
+                </a:solidFill>
+              </a:rPr>
+              <a:t>                </a:t>
+            </a:r>
+            <a:r>
+              <a:rPr sz="1600" dirty="0" err="1">
+                <a:solidFill>
+                  <a:schemeClr val="bg1">
+                    <a:lumMod val="95000"/>
+                  </a:schemeClr>
+                </a:solidFill>
+              </a:rPr>
+              <a:t>getMSPID</a:t>
+            </a:r>
+            <a:r>
+              <a:rPr sz="1600" dirty="0">
+                <a:solidFill>
+                  <a:schemeClr val="bg1">
+                    <a:lumMod val="95000"/>
+                  </a:schemeClr>
+                </a:solidFill>
+              </a:rPr>
+              <a:t>: </a:t>
+            </a:r>
+            <a:r>
+              <a:rPr sz="1600" dirty="0" err="1">
+                <a:solidFill>
+                  <a:schemeClr val="bg1">
+                    <a:lumMod val="95000"/>
+                  </a:schemeClr>
+                </a:solidFill>
+              </a:rPr>
+              <a:t>sinon.stub</a:t>
+            </a:r>
+            <a:r>
+              <a:rPr sz="1600" dirty="0">
+                <a:solidFill>
+                  <a:schemeClr val="bg1">
+                    <a:lumMod val="95000"/>
+                  </a:schemeClr>
+                </a:solidFill>
+              </a:rPr>
+              <a:t>().returns('Org1MSP'),</a:t>
+            </a:r>
+            <a:br>
+              <a:rPr sz="1600" dirty="0">
+                <a:solidFill>
+                  <a:schemeClr val="bg1">
+                    <a:lumMod val="95000"/>
+                  </a:schemeClr>
+                </a:solidFill>
+              </a:rPr>
+            </a:br>
+            <a:r>
+              <a:rPr sz="1600" dirty="0">
+                <a:solidFill>
+                  <a:schemeClr val="bg1">
+                    <a:lumMod val="95000"/>
+                  </a:schemeClr>
+                </a:solidFill>
+              </a:rPr>
+              <a:t>                </a:t>
+            </a:r>
+            <a:r>
+              <a:rPr sz="1600" dirty="0" err="1">
+                <a:solidFill>
+                  <a:schemeClr val="bg1">
+                    <a:lumMod val="95000"/>
+                  </a:schemeClr>
+                </a:solidFill>
+              </a:rPr>
+              <a:t>getID</a:t>
+            </a:r>
+            <a:r>
+              <a:rPr sz="1600" dirty="0">
+                <a:solidFill>
+                  <a:schemeClr val="bg1">
+                    <a:lumMod val="95000"/>
+                  </a:schemeClr>
+                </a:solidFill>
+              </a:rPr>
+              <a:t>: </a:t>
+            </a:r>
+            <a:r>
+              <a:rPr sz="1600" dirty="0" err="1">
+                <a:solidFill>
+                  <a:schemeClr val="bg1">
+                    <a:lumMod val="95000"/>
+                  </a:schemeClr>
+                </a:solidFill>
+              </a:rPr>
+              <a:t>sinon.stub</a:t>
+            </a:r>
+            <a:r>
+              <a:rPr sz="1600" dirty="0">
+                <a:solidFill>
+                  <a:schemeClr val="bg1">
+                    <a:lumMod val="95000"/>
+                  </a:schemeClr>
+                </a:solidFill>
+              </a:rPr>
+              <a:t>().returns('user1'),</a:t>
+            </a:r>
+            <a:br>
+              <a:rPr sz="1600" dirty="0">
+                <a:solidFill>
+                  <a:schemeClr val="bg1">
+                    <a:lumMod val="95000"/>
+                  </a:schemeClr>
+                </a:solidFill>
+              </a:rPr>
+            </a:br>
+            <a:r>
+              <a:rPr sz="1600" dirty="0">
+                <a:solidFill>
+                  <a:schemeClr val="bg1">
+                    <a:lumMod val="95000"/>
+                  </a:schemeClr>
+                </a:solidFill>
+              </a:rPr>
+              <a:t>                </a:t>
+            </a:r>
+            <a:r>
+              <a:rPr sz="1600" dirty="0" err="1">
+                <a:solidFill>
+                  <a:schemeClr val="bg1">
+                    <a:lumMod val="95000"/>
+                  </a:schemeClr>
+                </a:solidFill>
+              </a:rPr>
+              <a:t>getAttributeValue</a:t>
+            </a:r>
+            <a:r>
+              <a:rPr sz="1600" dirty="0">
+                <a:solidFill>
+                  <a:schemeClr val="bg1">
+                    <a:lumMod val="95000"/>
+                  </a:schemeClr>
+                </a:solidFill>
+              </a:rPr>
+              <a:t>: </a:t>
+            </a:r>
+            <a:r>
+              <a:rPr sz="1600" dirty="0" err="1">
+                <a:solidFill>
+                  <a:schemeClr val="bg1">
+                    <a:lumMod val="95000"/>
+                  </a:schemeClr>
+                </a:solidFill>
+              </a:rPr>
+              <a:t>sinon.stub</a:t>
+            </a:r>
+            <a:r>
+              <a:rPr sz="1600" dirty="0">
+                <a:solidFill>
+                  <a:schemeClr val="bg1">
+                    <a:lumMod val="95000"/>
+                  </a:schemeClr>
+                </a:solidFill>
+              </a:rPr>
+              <a:t>().returns(['</a:t>
+            </a:r>
+            <a:r>
+              <a:rPr sz="1600" dirty="0" err="1">
+                <a:solidFill>
+                  <a:schemeClr val="bg1">
+                    <a:lumMod val="95000"/>
+                  </a:schemeClr>
+                </a:solidFill>
+              </a:rPr>
+              <a:t>registrador</a:t>
+            </a:r>
+            <a:r>
+              <a:rPr sz="1600" dirty="0">
+                <a:solidFill>
+                  <a:schemeClr val="bg1">
+                    <a:lumMod val="95000"/>
+                  </a:schemeClr>
+                </a:solidFill>
+              </a:rPr>
+              <a:t>', true]),</a:t>
+            </a:r>
+            <a:br>
+              <a:rPr sz="1600" dirty="0">
+                <a:solidFill>
+                  <a:schemeClr val="bg1">
+                    <a:lumMod val="95000"/>
+                  </a:schemeClr>
+                </a:solidFill>
+              </a:rPr>
+            </a:br>
+            <a:r>
+              <a:rPr sz="1600" dirty="0">
+                <a:solidFill>
+                  <a:schemeClr val="bg1">
+                    <a:lumMod val="95000"/>
+                  </a:schemeClr>
+                </a:solidFill>
+              </a:rPr>
               <a:t>            },</a:t>
             </a:r>
-            <a:br/>
-            <a:r>
+            <a:br>
+              <a:rPr sz="1600" dirty="0">
+                <a:solidFill>
+                  <a:schemeClr val="bg1">
+                    <a:lumMod val="95000"/>
+                  </a:schemeClr>
+                </a:solidFill>
+              </a:rPr>
+            </a:br>
+            <a:r>
+              <a:rPr sz="1600" dirty="0">
+                <a:solidFill>
+                  <a:schemeClr val="bg1">
+                    <a:lumMod val="95000"/>
+                  </a:schemeClr>
+                </a:solidFill>
+              </a:rPr>
               <a:t>        };</a:t>
             </a:r>
-            <a:br/>
-            <a:r>
+          </a:p>
+        </p:txBody>
+      </p:sp>
+      <p:sp>
+        <p:nvSpPr>
+          <p:cNvPr id="10" name="CuadroTexto 9">
+            <a:extLst>
+              <a:ext uri="{FF2B5EF4-FFF2-40B4-BE49-F238E27FC236}">
+                <a16:creationId xmlns:a16="http://schemas.microsoft.com/office/drawing/2014/main" id="{5822AC8E-626F-48B5-EE8E-DB8EA96F67F0}"/>
+              </a:ext>
+            </a:extLst>
+          </p:cNvPr>
+          <p:cNvSpPr txBox="1"/>
+          <p:nvPr/>
+        </p:nvSpPr>
+        <p:spPr>
+          <a:xfrm>
+            <a:off x="7230466" y="1645920"/>
+            <a:ext cx="4473854" cy="4031873"/>
+          </a:xfrm>
+          <a:prstGeom prst="rect">
+            <a:avLst/>
+          </a:prstGeom>
+          <a:noFill/>
+        </p:spPr>
+        <p:txBody>
+          <a:bodyPr wrap="square">
+            <a:spAutoFit/>
+          </a:bodyPr>
+          <a:lstStyle/>
+          <a:p>
+            <a:br>
+              <a:rPr lang="es-ES" sz="1600" dirty="0">
+                <a:solidFill>
+                  <a:schemeClr val="bg1">
+                    <a:lumMod val="95000"/>
+                  </a:schemeClr>
+                </a:solidFill>
+              </a:rPr>
+            </a:br>
+            <a:r>
+              <a:rPr lang="es-ES" sz="1600" dirty="0">
+                <a:solidFill>
+                  <a:schemeClr val="bg1">
+                    <a:lumMod val="95000"/>
+                  </a:schemeClr>
+                </a:solidFill>
+              </a:rPr>
               <a:t>    });</a:t>
             </a:r>
-            <a:br/>
-            <a:br/>
-            <a:r>
-              <a:t>    it('should create a property', async () =&gt; {</a:t>
-            </a:r>
-            <a:br/>
-            <a:r>
-              <a:t>        ctx.stub.getState.resolves(null); // No existe</a:t>
-            </a:r>
-            <a:br/>
-            <a:r>
-              <a:t>        await contract.CreateProperty(ctx,</a:t>
-            </a:r>
-            <a:br/>
-            <a:r>
-              <a:t>            'PROP001', 'Calle Mayor 1', 'Org1MSP', '120', 'apartment', '250000');</a:t>
-            </a:r>
-            <a:br/>
-            <a:br/>
-            <a:r>
-              <a:t>        expect(ctx.stub.putState.calledOnce).to.be.true;</a:t>
-            </a:r>
-            <a:br/>
-            <a:r>
-              <a:t>        const savedData = JSON.parse(ctx.stub.putState.firstCall.args[1]);</a:t>
-            </a:r>
-            <a:br/>
-            <a:r>
-              <a:t>        expect(savedData.id).to.equal('PROP001');</a:t>
-            </a:r>
-            <a:br/>
-            <a:r>
+            <a:br>
+              <a:rPr lang="es-ES" sz="1600" dirty="0">
+                <a:solidFill>
+                  <a:schemeClr val="bg1">
+                    <a:lumMod val="95000"/>
+                  </a:schemeClr>
+                </a:solidFill>
+              </a:rPr>
+            </a:br>
+            <a:br>
+              <a:rPr lang="es-ES" sz="1600" dirty="0">
+                <a:solidFill>
+                  <a:schemeClr val="bg1">
+                    <a:lumMod val="95000"/>
+                  </a:schemeClr>
+                </a:solidFill>
+              </a:rPr>
+            </a:br>
+            <a:r>
+              <a:rPr lang="es-ES" sz="1600" dirty="0">
+                <a:solidFill>
+                  <a:schemeClr val="bg1">
+                    <a:lumMod val="95000"/>
+                  </a:schemeClr>
+                </a:solidFill>
+              </a:rPr>
+              <a:t>    </a:t>
+            </a:r>
+            <a:r>
+              <a:rPr lang="es-ES" sz="1600" dirty="0" err="1">
+                <a:solidFill>
+                  <a:schemeClr val="bg1">
+                    <a:lumMod val="95000"/>
+                  </a:schemeClr>
+                </a:solidFill>
+              </a:rPr>
+              <a:t>it</a:t>
+            </a:r>
+            <a:r>
+              <a:rPr lang="es-ES" sz="1600" dirty="0">
+                <a:solidFill>
+                  <a:schemeClr val="bg1">
+                    <a:lumMod val="95000"/>
+                  </a:schemeClr>
+                </a:solidFill>
+              </a:rPr>
+              <a:t>('</a:t>
+            </a:r>
+            <a:r>
+              <a:rPr lang="es-ES" sz="1600" dirty="0" err="1">
+                <a:solidFill>
+                  <a:schemeClr val="bg1">
+                    <a:lumMod val="95000"/>
+                  </a:schemeClr>
+                </a:solidFill>
+              </a:rPr>
+              <a:t>should</a:t>
+            </a:r>
+            <a:r>
+              <a:rPr lang="es-ES" sz="1600" dirty="0">
+                <a:solidFill>
+                  <a:schemeClr val="bg1">
+                    <a:lumMod val="95000"/>
+                  </a:schemeClr>
+                </a:solidFill>
+              </a:rPr>
+              <a:t> </a:t>
+            </a:r>
+            <a:r>
+              <a:rPr lang="es-ES" sz="1600" dirty="0" err="1">
+                <a:solidFill>
+                  <a:schemeClr val="bg1">
+                    <a:lumMod val="95000"/>
+                  </a:schemeClr>
+                </a:solidFill>
+              </a:rPr>
+              <a:t>create</a:t>
+            </a:r>
+            <a:r>
+              <a:rPr lang="es-ES" sz="1600" dirty="0">
+                <a:solidFill>
+                  <a:schemeClr val="bg1">
+                    <a:lumMod val="95000"/>
+                  </a:schemeClr>
+                </a:solidFill>
+              </a:rPr>
+              <a:t> a </a:t>
+            </a:r>
+            <a:r>
+              <a:rPr lang="es-ES" sz="1600" dirty="0" err="1">
+                <a:solidFill>
+                  <a:schemeClr val="bg1">
+                    <a:lumMod val="95000"/>
+                  </a:schemeClr>
+                </a:solidFill>
+              </a:rPr>
+              <a:t>property</a:t>
+            </a:r>
+            <a:r>
+              <a:rPr lang="es-ES" sz="1600" dirty="0">
+                <a:solidFill>
+                  <a:schemeClr val="bg1">
+                    <a:lumMod val="95000"/>
+                  </a:schemeClr>
+                </a:solidFill>
+              </a:rPr>
+              <a:t>', </a:t>
+            </a:r>
+            <a:r>
+              <a:rPr lang="es-ES" sz="1600" dirty="0" err="1">
+                <a:solidFill>
+                  <a:schemeClr val="bg1">
+                    <a:lumMod val="95000"/>
+                  </a:schemeClr>
+                </a:solidFill>
+              </a:rPr>
+              <a:t>async</a:t>
+            </a:r>
+            <a:r>
+              <a:rPr lang="es-ES" sz="1600" dirty="0">
+                <a:solidFill>
+                  <a:schemeClr val="bg1">
+                    <a:lumMod val="95000"/>
+                  </a:schemeClr>
+                </a:solidFill>
+              </a:rPr>
+              <a:t> () =&gt; {</a:t>
+            </a:r>
+            <a:br>
+              <a:rPr lang="es-ES" sz="1600" dirty="0">
+                <a:solidFill>
+                  <a:schemeClr val="bg1">
+                    <a:lumMod val="95000"/>
+                  </a:schemeClr>
+                </a:solidFill>
+              </a:rPr>
+            </a:br>
+            <a:r>
+              <a:rPr lang="es-ES" sz="1600" dirty="0">
+                <a:solidFill>
+                  <a:schemeClr val="bg1">
+                    <a:lumMod val="95000"/>
+                  </a:schemeClr>
+                </a:solidFill>
+              </a:rPr>
+              <a:t>        </a:t>
+            </a:r>
+            <a:r>
+              <a:rPr lang="es-ES" sz="1600" dirty="0" err="1">
+                <a:solidFill>
+                  <a:schemeClr val="bg1">
+                    <a:lumMod val="95000"/>
+                  </a:schemeClr>
+                </a:solidFill>
+              </a:rPr>
+              <a:t>ctx.stub.getState.resolves</a:t>
+            </a:r>
+            <a:r>
+              <a:rPr lang="es-ES" sz="1600" dirty="0">
+                <a:solidFill>
+                  <a:schemeClr val="bg1">
+                    <a:lumMod val="95000"/>
+                  </a:schemeClr>
+                </a:solidFill>
+              </a:rPr>
+              <a:t>(</a:t>
+            </a:r>
+            <a:r>
+              <a:rPr lang="es-ES" sz="1600" dirty="0" err="1">
+                <a:solidFill>
+                  <a:schemeClr val="bg1">
+                    <a:lumMod val="95000"/>
+                  </a:schemeClr>
+                </a:solidFill>
+              </a:rPr>
+              <a:t>null</a:t>
+            </a:r>
+            <a:r>
+              <a:rPr lang="es-ES" sz="1600" dirty="0">
+                <a:solidFill>
+                  <a:schemeClr val="bg1">
+                    <a:lumMod val="95000"/>
+                  </a:schemeClr>
+                </a:solidFill>
+              </a:rPr>
+              <a:t>); // No existe</a:t>
+            </a:r>
+            <a:br>
+              <a:rPr lang="es-ES" sz="1600" dirty="0">
+                <a:solidFill>
+                  <a:schemeClr val="bg1">
+                    <a:lumMod val="95000"/>
+                  </a:schemeClr>
+                </a:solidFill>
+              </a:rPr>
+            </a:br>
+            <a:r>
+              <a:rPr lang="es-ES" sz="1600" dirty="0">
+                <a:solidFill>
+                  <a:schemeClr val="bg1">
+                    <a:lumMod val="95000"/>
+                  </a:schemeClr>
+                </a:solidFill>
+              </a:rPr>
+              <a:t>        </a:t>
+            </a:r>
+            <a:r>
+              <a:rPr lang="es-ES" sz="1600" dirty="0" err="1">
+                <a:solidFill>
+                  <a:schemeClr val="bg1">
+                    <a:lumMod val="95000"/>
+                  </a:schemeClr>
+                </a:solidFill>
+              </a:rPr>
+              <a:t>await</a:t>
+            </a:r>
+            <a:r>
+              <a:rPr lang="es-ES" sz="1600" dirty="0">
+                <a:solidFill>
+                  <a:schemeClr val="bg1">
+                    <a:lumMod val="95000"/>
+                  </a:schemeClr>
+                </a:solidFill>
+              </a:rPr>
+              <a:t> </a:t>
+            </a:r>
+            <a:r>
+              <a:rPr lang="es-ES" sz="1600" dirty="0" err="1">
+                <a:solidFill>
+                  <a:schemeClr val="bg1">
+                    <a:lumMod val="95000"/>
+                  </a:schemeClr>
+                </a:solidFill>
+              </a:rPr>
+              <a:t>contract.CreateProperty</a:t>
+            </a:r>
+            <a:r>
+              <a:rPr lang="es-ES" sz="1600" dirty="0">
+                <a:solidFill>
+                  <a:schemeClr val="bg1">
+                    <a:lumMod val="95000"/>
+                  </a:schemeClr>
+                </a:solidFill>
+              </a:rPr>
+              <a:t>(</a:t>
+            </a:r>
+            <a:r>
+              <a:rPr lang="es-ES" sz="1600" dirty="0" err="1">
+                <a:solidFill>
+                  <a:schemeClr val="bg1">
+                    <a:lumMod val="95000"/>
+                  </a:schemeClr>
+                </a:solidFill>
+              </a:rPr>
+              <a:t>ctx</a:t>
+            </a:r>
+            <a:r>
+              <a:rPr lang="es-ES" sz="1600" dirty="0">
+                <a:solidFill>
+                  <a:schemeClr val="bg1">
+                    <a:lumMod val="95000"/>
+                  </a:schemeClr>
+                </a:solidFill>
+              </a:rPr>
+              <a:t>,</a:t>
+            </a:r>
+            <a:br>
+              <a:rPr lang="es-ES" sz="1600" dirty="0">
+                <a:solidFill>
+                  <a:schemeClr val="bg1">
+                    <a:lumMod val="95000"/>
+                  </a:schemeClr>
+                </a:solidFill>
+              </a:rPr>
+            </a:br>
+            <a:r>
+              <a:rPr lang="es-ES" sz="1600" dirty="0">
+                <a:solidFill>
+                  <a:schemeClr val="bg1">
+                    <a:lumMod val="95000"/>
+                  </a:schemeClr>
+                </a:solidFill>
+              </a:rPr>
+              <a:t>            'PROP001', 'Calle Mayor 1', 'Org1MSP', '120', '</a:t>
+            </a:r>
+            <a:r>
+              <a:rPr lang="es-ES" sz="1600" dirty="0" err="1">
+                <a:solidFill>
+                  <a:schemeClr val="bg1">
+                    <a:lumMod val="95000"/>
+                  </a:schemeClr>
+                </a:solidFill>
+              </a:rPr>
+              <a:t>apartment</a:t>
+            </a:r>
+            <a:r>
+              <a:rPr lang="es-ES" sz="1600" dirty="0">
+                <a:solidFill>
+                  <a:schemeClr val="bg1">
+                    <a:lumMod val="95000"/>
+                  </a:schemeClr>
+                </a:solidFill>
+              </a:rPr>
+              <a:t>', '250000');</a:t>
+            </a:r>
+            <a:br>
+              <a:rPr lang="es-ES" sz="1600" dirty="0">
+                <a:solidFill>
+                  <a:schemeClr val="bg1">
+                    <a:lumMod val="95000"/>
+                  </a:schemeClr>
+                </a:solidFill>
+              </a:rPr>
+            </a:br>
+            <a:br>
+              <a:rPr lang="es-ES" sz="1600" dirty="0">
+                <a:solidFill>
+                  <a:schemeClr val="bg1">
+                    <a:lumMod val="95000"/>
+                  </a:schemeClr>
+                </a:solidFill>
+              </a:rPr>
+            </a:br>
+            <a:r>
+              <a:rPr lang="es-ES" sz="1600" dirty="0">
+                <a:solidFill>
+                  <a:schemeClr val="bg1">
+                    <a:lumMod val="95000"/>
+                  </a:schemeClr>
+                </a:solidFill>
+              </a:rPr>
+              <a:t>        </a:t>
+            </a:r>
+            <a:r>
+              <a:rPr lang="es-ES" sz="1600" dirty="0" err="1">
+                <a:solidFill>
+                  <a:schemeClr val="bg1">
+                    <a:lumMod val="95000"/>
+                  </a:schemeClr>
+                </a:solidFill>
+              </a:rPr>
+              <a:t>expect</a:t>
+            </a:r>
+            <a:r>
+              <a:rPr lang="es-ES" sz="1600" dirty="0">
+                <a:solidFill>
+                  <a:schemeClr val="bg1">
+                    <a:lumMod val="95000"/>
+                  </a:schemeClr>
+                </a:solidFill>
+              </a:rPr>
+              <a:t>(</a:t>
+            </a:r>
+            <a:r>
+              <a:rPr lang="es-ES" sz="1600" dirty="0" err="1">
+                <a:solidFill>
+                  <a:schemeClr val="bg1">
+                    <a:lumMod val="95000"/>
+                  </a:schemeClr>
+                </a:solidFill>
+              </a:rPr>
+              <a:t>ctx.stub.putState.calledOnce</a:t>
+            </a:r>
+            <a:r>
+              <a:rPr lang="es-ES" sz="1600" dirty="0">
+                <a:solidFill>
+                  <a:schemeClr val="bg1">
+                    <a:lumMod val="95000"/>
+                  </a:schemeClr>
+                </a:solidFill>
+              </a:rPr>
+              <a:t>).</a:t>
+            </a:r>
+            <a:r>
+              <a:rPr lang="es-ES" sz="1600" dirty="0" err="1">
+                <a:solidFill>
+                  <a:schemeClr val="bg1">
+                    <a:lumMod val="95000"/>
+                  </a:schemeClr>
+                </a:solidFill>
+              </a:rPr>
+              <a:t>to.be.true</a:t>
+            </a:r>
+            <a:r>
+              <a:rPr lang="es-ES" sz="1600" dirty="0">
+                <a:solidFill>
+                  <a:schemeClr val="bg1">
+                    <a:lumMod val="95000"/>
+                  </a:schemeClr>
+                </a:solidFill>
+              </a:rPr>
+              <a:t>;</a:t>
+            </a:r>
+            <a:br>
+              <a:rPr lang="es-ES" sz="1600" dirty="0">
+                <a:solidFill>
+                  <a:schemeClr val="bg1">
+                    <a:lumMod val="95000"/>
+                  </a:schemeClr>
+                </a:solidFill>
+              </a:rPr>
+            </a:br>
+            <a:r>
+              <a:rPr lang="es-ES" sz="1600" dirty="0">
+                <a:solidFill>
+                  <a:schemeClr val="bg1">
+                    <a:lumMod val="95000"/>
+                  </a:schemeClr>
+                </a:solidFill>
+              </a:rPr>
+              <a:t>        </a:t>
+            </a:r>
+            <a:r>
+              <a:rPr lang="es-ES" sz="1600" dirty="0" err="1">
+                <a:solidFill>
+                  <a:schemeClr val="bg1">
+                    <a:lumMod val="95000"/>
+                  </a:schemeClr>
+                </a:solidFill>
+              </a:rPr>
+              <a:t>const</a:t>
+            </a:r>
+            <a:r>
+              <a:rPr lang="es-ES" sz="1600" dirty="0">
+                <a:solidFill>
+                  <a:schemeClr val="bg1">
+                    <a:lumMod val="95000"/>
+                  </a:schemeClr>
+                </a:solidFill>
+              </a:rPr>
+              <a:t> </a:t>
+            </a:r>
+            <a:r>
+              <a:rPr lang="es-ES" sz="1600" dirty="0" err="1">
+                <a:solidFill>
+                  <a:schemeClr val="bg1">
+                    <a:lumMod val="95000"/>
+                  </a:schemeClr>
+                </a:solidFill>
+              </a:rPr>
+              <a:t>savedData</a:t>
+            </a:r>
+            <a:r>
+              <a:rPr lang="es-ES" sz="1600" dirty="0">
+                <a:solidFill>
+                  <a:schemeClr val="bg1">
+                    <a:lumMod val="95000"/>
+                  </a:schemeClr>
+                </a:solidFill>
+              </a:rPr>
+              <a:t> = </a:t>
+            </a:r>
+            <a:r>
+              <a:rPr lang="es-ES" sz="1600" dirty="0" err="1">
+                <a:solidFill>
+                  <a:schemeClr val="bg1">
+                    <a:lumMod val="95000"/>
+                  </a:schemeClr>
+                </a:solidFill>
+              </a:rPr>
+              <a:t>JSON.parse</a:t>
+            </a:r>
+            <a:r>
+              <a:rPr lang="es-ES" sz="1600" dirty="0">
+                <a:solidFill>
+                  <a:schemeClr val="bg1">
+                    <a:lumMod val="95000"/>
+                  </a:schemeClr>
+                </a:solidFill>
+              </a:rPr>
+              <a:t>(</a:t>
+            </a:r>
+            <a:r>
+              <a:rPr lang="es-ES" sz="1600" dirty="0" err="1">
+                <a:solidFill>
+                  <a:schemeClr val="bg1">
+                    <a:lumMod val="95000"/>
+                  </a:schemeClr>
+                </a:solidFill>
+              </a:rPr>
+              <a:t>ctx.stub.putState.firstCall.args</a:t>
+            </a:r>
+            <a:r>
+              <a:rPr lang="es-ES" sz="1600" dirty="0">
+                <a:solidFill>
+                  <a:schemeClr val="bg1">
+                    <a:lumMod val="95000"/>
+                  </a:schemeClr>
+                </a:solidFill>
+              </a:rPr>
+              <a:t>[1]);</a:t>
+            </a:r>
+            <a:br>
+              <a:rPr lang="es-ES" sz="1600" dirty="0">
+                <a:solidFill>
+                  <a:schemeClr val="bg1">
+                    <a:lumMod val="95000"/>
+                  </a:schemeClr>
+                </a:solidFill>
+              </a:rPr>
+            </a:br>
+            <a:r>
+              <a:rPr lang="es-ES" sz="1600" dirty="0">
+                <a:solidFill>
+                  <a:schemeClr val="bg1">
+                    <a:lumMod val="95000"/>
+                  </a:schemeClr>
+                </a:solidFill>
+              </a:rPr>
+              <a:t>        </a:t>
+            </a:r>
+            <a:r>
+              <a:rPr lang="es-ES" sz="1600" dirty="0" err="1">
+                <a:solidFill>
+                  <a:schemeClr val="bg1">
+                    <a:lumMod val="95000"/>
+                  </a:schemeClr>
+                </a:solidFill>
+              </a:rPr>
+              <a:t>expect</a:t>
+            </a:r>
+            <a:r>
+              <a:rPr lang="es-ES" sz="1600" dirty="0">
+                <a:solidFill>
+                  <a:schemeClr val="bg1">
+                    <a:lumMod val="95000"/>
+                  </a:schemeClr>
+                </a:solidFill>
+              </a:rPr>
+              <a:t>(</a:t>
+            </a:r>
+            <a:r>
+              <a:rPr lang="es-ES" sz="1600" dirty="0" err="1">
+                <a:solidFill>
+                  <a:schemeClr val="bg1">
+                    <a:lumMod val="95000"/>
+                  </a:schemeClr>
+                </a:solidFill>
+              </a:rPr>
+              <a:t>savedData.id</a:t>
+            </a:r>
+            <a:r>
+              <a:rPr lang="es-ES" sz="1600" dirty="0">
+                <a:solidFill>
+                  <a:schemeClr val="bg1">
+                    <a:lumMod val="95000"/>
+                  </a:schemeClr>
+                </a:solidFill>
+              </a:rPr>
+              <a:t>).</a:t>
+            </a:r>
+            <a:r>
+              <a:rPr lang="es-ES" sz="1600" dirty="0" err="1">
+                <a:solidFill>
+                  <a:schemeClr val="bg1">
+                    <a:lumMod val="95000"/>
+                  </a:schemeClr>
+                </a:solidFill>
+              </a:rPr>
+              <a:t>to.equal</a:t>
+            </a:r>
+            <a:r>
+              <a:rPr lang="es-ES" sz="1600" dirty="0">
+                <a:solidFill>
+                  <a:schemeClr val="bg1">
+                    <a:lumMod val="95000"/>
+                  </a:schemeClr>
+                </a:solidFill>
+              </a:rPr>
+              <a:t>('PROP001');</a:t>
+            </a:r>
+            <a:br>
+              <a:rPr lang="es-ES" sz="1600" dirty="0">
+                <a:solidFill>
+                  <a:schemeClr val="bg1">
+                    <a:lumMod val="95000"/>
+                  </a:schemeClr>
+                </a:solidFill>
+              </a:rPr>
+            </a:br>
+            <a:r>
+              <a:rPr lang="es-ES" sz="1600" dirty="0">
+                <a:solidFill>
+                  <a:schemeClr val="bg1">
+                    <a:lumMod val="95000"/>
+                  </a:schemeClr>
+                </a:solidFill>
+              </a:rPr>
               <a:t>    });</a:t>
             </a:r>
-            <a:br/>
-            <a:r>
+            <a:br>
+              <a:rPr lang="es-ES" sz="1600" dirty="0">
+                <a:solidFill>
+                  <a:schemeClr val="bg1">
+                    <a:lumMod val="95000"/>
+                  </a:schemeClr>
+                </a:solidFill>
+              </a:rPr>
+            </a:br>
+            <a:r>
+              <a:rPr lang="es-ES" sz="1600" dirty="0">
+                <a:solidFill>
+                  <a:schemeClr val="bg1">
+                    <a:lumMod val="95000"/>
+                  </a:schemeClr>
+                </a:solidFill>
+              </a:rPr>
               <a:t>});</a:t>
             </a:r>
+            <a:endParaRPr lang="es-ES" sz="1600" dirty="0"/>
+          </a:p>
+        </p:txBody>
+      </p:sp>
+      <p:sp>
+        <p:nvSpPr>
+          <p:cNvPr id="11" name="Rectángulo 10">
+            <a:extLst>
+              <a:ext uri="{FF2B5EF4-FFF2-40B4-BE49-F238E27FC236}">
+                <a16:creationId xmlns:a16="http://schemas.microsoft.com/office/drawing/2014/main" id="{E0DF1237-4538-898A-AD98-306F9BB6BFC7}"/>
+              </a:ext>
+            </a:extLst>
+          </p:cNvPr>
+          <p:cNvSpPr/>
+          <p:nvPr/>
+        </p:nvSpPr>
+        <p:spPr>
+          <a:xfrm>
+            <a:off x="6679580" y="1417320"/>
+            <a:ext cx="45719" cy="5120640"/>
+          </a:xfrm>
+          <a:prstGeom prst="rect">
+            <a:avLst/>
+          </a:prstGeom>
+        </p:spPr>
+        <p:style>
+          <a:lnRef idx="1">
+            <a:schemeClr val="accent1"/>
+          </a:lnRef>
+          <a:fillRef idx="3">
+            <a:schemeClr val="accent1"/>
+          </a:fillRef>
+          <a:effectRef idx="2">
+            <a:schemeClr val="accent1"/>
+          </a:effectRef>
+          <a:fontRef idx="minor">
+            <a:schemeClr val="lt1"/>
+          </a:fontRef>
+        </p:style>
+        <p:txBody>
+          <a:bodyPr rtlCol="0" anchor="ctr"/>
+          <a:lstStyle/>
+          <a:p>
+            <a:pPr algn="ctr"/>
+            <a:endParaRPr lang="es-ES"/>
           </a:p>
         </p:txBody>
       </p:sp>
@@ -4846,7 +7448,7 @@
 </file>
 
 <file path=ppt/slides/slide15.xml><?xml version="1.0" encoding="utf-8"?>
-<p:sld xmlns:a="http://schemas.openxmlformats.org/drawingml/2006/main" xmlns:p="http://schemas.openxmlformats.org/presentationml/2006/main" xmlns:r="http://schemas.openxmlformats.org/officeDocument/2006/relationships">
+<p:sld xmlns:a="http://schemas.openxmlformats.org/drawingml/2006/main" xmlns:r="http://schemas.openxmlformats.org/officeDocument/2006/relationships" xmlns:p="http://schemas.openxmlformats.org/presentationml/2006/main">
   <p:cSld>
     <p:spTree>
       <p:nvGrpSpPr>
@@ -4854,7 +7456,14 @@
         <p:cNvGrpSpPr/>
         <p:nvPr/>
       </p:nvGrpSpPr>
-      <p:grpSpPr/>
+      <p:grpSpPr>
+        <a:xfrm>
+          <a:off x="0" y="0"/>
+          <a:ext cx="0" cy="0"/>
+          <a:chOff x="0" y="0"/>
+          <a:chExt cx="0" cy="0"/>
+        </a:xfrm>
+      </p:grpSpPr>
       <p:sp>
         <p:nvSpPr>
           <p:cNvPr id="2" name="Rectangle 1"/>
@@ -4895,6 +7504,7 @@
           <a:lstStyle/>
           <a:p>
             <a:pPr algn="ctr"/>
+            <a:endParaRPr/>
           </a:p>
         </p:txBody>
       </p:sp>
@@ -4972,6 +7582,7 @@
           <a:lstStyle/>
           <a:p>
             <a:pPr algn="ctr"/>
+            <a:endParaRPr/>
           </a:p>
         </p:txBody>
       </p:sp>
@@ -5015,6 +7626,7 @@
           <a:lstStyle/>
           <a:p>
             <a:pPr algn="ctr"/>
+            <a:endParaRPr/>
           </a:p>
         </p:txBody>
       </p:sp>
@@ -5092,6 +7704,7 @@
           <a:lstStyle/>
           <a:p>
             <a:pPr algn="ctr"/>
+            <a:endParaRPr/>
           </a:p>
         </p:txBody>
       </p:sp>
@@ -5202,7 +7815,7 @@
 </file>
 
 <file path=ppt/slides/slide16.xml><?xml version="1.0" encoding="utf-8"?>
-<p:sld xmlns:a="http://schemas.openxmlformats.org/drawingml/2006/main" xmlns:p="http://schemas.openxmlformats.org/presentationml/2006/main" xmlns:r="http://schemas.openxmlformats.org/officeDocument/2006/relationships">
+<p:sld xmlns:a="http://schemas.openxmlformats.org/drawingml/2006/main" xmlns:r="http://schemas.openxmlformats.org/officeDocument/2006/relationships" xmlns:p="http://schemas.openxmlformats.org/presentationml/2006/main">
   <p:cSld>
     <p:spTree>
       <p:nvGrpSpPr>
@@ -5210,7 +7823,14 @@
         <p:cNvGrpSpPr/>
         <p:nvPr/>
       </p:nvGrpSpPr>
-      <p:grpSpPr/>
+      <p:grpSpPr>
+        <a:xfrm>
+          <a:off x="0" y="0"/>
+          <a:ext cx="0" cy="0"/>
+          <a:chOff x="0" y="0"/>
+          <a:chExt cx="0" cy="0"/>
+        </a:xfrm>
+      </p:grpSpPr>
       <p:sp>
         <p:nvSpPr>
           <p:cNvPr id="2" name="Rectangle 1"/>
@@ -5251,6 +7871,7 @@
           <a:lstStyle/>
           <a:p>
             <a:pPr algn="ctr"/>
+            <a:endParaRPr/>
           </a:p>
         </p:txBody>
       </p:sp>
@@ -5335,7 +7956,7 @@
 </file>
 
 <file path=ppt/slides/slide17.xml><?xml version="1.0" encoding="utf-8"?>
-<p:sld xmlns:a="http://schemas.openxmlformats.org/drawingml/2006/main" xmlns:p="http://schemas.openxmlformats.org/presentationml/2006/main" xmlns:r="http://schemas.openxmlformats.org/officeDocument/2006/relationships">
+<p:sld xmlns:a="http://schemas.openxmlformats.org/drawingml/2006/main" xmlns:r="http://schemas.openxmlformats.org/officeDocument/2006/relationships" xmlns:p="http://schemas.openxmlformats.org/presentationml/2006/main">
   <p:cSld>
     <p:spTree>
       <p:nvGrpSpPr>
@@ -5343,7 +7964,14 @@
         <p:cNvGrpSpPr/>
         <p:nvPr/>
       </p:nvGrpSpPr>
-      <p:grpSpPr/>
+      <p:grpSpPr>
+        <a:xfrm>
+          <a:off x="0" y="0"/>
+          <a:ext cx="0" cy="0"/>
+          <a:chOff x="0" y="0"/>
+          <a:chExt cx="0" cy="0"/>
+        </a:xfrm>
+      </p:grpSpPr>
       <p:sp>
         <p:nvSpPr>
           <p:cNvPr id="2" name="Rectangle 1"/>
@@ -5384,6 +8012,7 @@
           <a:lstStyle/>
           <a:p>
             <a:pPr algn="ctr"/>
+            <a:endParaRPr/>
           </a:p>
         </p:txBody>
       </p:sp>
@@ -5461,6 +8090,7 @@
           <a:lstStyle/>
           <a:p>
             <a:pPr algn="ctr"/>
+            <a:endParaRPr/>
           </a:p>
         </p:txBody>
       </p:sp>
@@ -5672,7 +8302,7 @@
 </file>
 
 <file path=ppt/slides/slide18.xml><?xml version="1.0" encoding="utf-8"?>
-<p:sld xmlns:a="http://schemas.openxmlformats.org/drawingml/2006/main" xmlns:p="http://schemas.openxmlformats.org/presentationml/2006/main" xmlns:r="http://schemas.openxmlformats.org/officeDocument/2006/relationships">
+<p:sld xmlns:a="http://schemas.openxmlformats.org/drawingml/2006/main" xmlns:r="http://schemas.openxmlformats.org/officeDocument/2006/relationships" xmlns:p="http://schemas.openxmlformats.org/presentationml/2006/main">
   <p:cSld>
     <p:spTree>
       <p:nvGrpSpPr>
@@ -5680,7 +8310,14 @@
         <p:cNvGrpSpPr/>
         <p:nvPr/>
       </p:nvGrpSpPr>
-      <p:grpSpPr/>
+      <p:grpSpPr>
+        <a:xfrm>
+          <a:off x="0" y="0"/>
+          <a:ext cx="0" cy="0"/>
+          <a:chOff x="0" y="0"/>
+          <a:chExt cx="0" cy="0"/>
+        </a:xfrm>
+      </p:grpSpPr>
       <p:sp>
         <p:nvSpPr>
           <p:cNvPr id="2" name="Rectangle 1"/>
@@ -5721,6 +8358,7 @@
           <a:lstStyle/>
           <a:p>
             <a:pPr algn="ctr"/>
+            <a:endParaRPr/>
           </a:p>
         </p:txBody>
       </p:sp>
@@ -5764,6 +8402,7 @@
           <a:lstStyle/>
           <a:p>
             <a:pPr algn="ctr"/>
+            <a:endParaRPr/>
           </a:p>
         </p:txBody>
       </p:sp>
@@ -5875,6 +8514,7 @@
           <a:lstStyle/>
           <a:p>
             <a:pPr algn="ctr"/>
+            <a:endParaRPr/>
           </a:p>
         </p:txBody>
       </p:sp>
@@ -5975,6 +8615,7 @@
                 <a:latin typeface="Calibri"/>
               </a:defRPr>
             </a:pPr>
+            <a:endParaRPr/>
           </a:p>
           <a:p>
             <a:pPr>
@@ -6052,6 +8693,7 @@
                 <a:latin typeface="Calibri"/>
               </a:defRPr>
             </a:pPr>
+            <a:endParaRPr/>
           </a:p>
           <a:p>
             <a:pPr>
@@ -6128,7 +8770,7 @@
 </file>
 
 <file path=ppt/slides/slide19.xml><?xml version="1.0" encoding="utf-8"?>
-<p:sld xmlns:a="http://schemas.openxmlformats.org/drawingml/2006/main" xmlns:p="http://schemas.openxmlformats.org/presentationml/2006/main" xmlns:r="http://schemas.openxmlformats.org/officeDocument/2006/relationships">
+<p:sld xmlns:a="http://schemas.openxmlformats.org/drawingml/2006/main" xmlns:r="http://schemas.openxmlformats.org/officeDocument/2006/relationships" xmlns:p="http://schemas.openxmlformats.org/presentationml/2006/main">
   <p:cSld>
     <p:spTree>
       <p:nvGrpSpPr>
@@ -6136,7 +8778,14 @@
         <p:cNvGrpSpPr/>
         <p:nvPr/>
       </p:nvGrpSpPr>
-      <p:grpSpPr/>
+      <p:grpSpPr>
+        <a:xfrm>
+          <a:off x="0" y="0"/>
+          <a:ext cx="0" cy="0"/>
+          <a:chOff x="0" y="0"/>
+          <a:chExt cx="0" cy="0"/>
+        </a:xfrm>
+      </p:grpSpPr>
       <p:sp>
         <p:nvSpPr>
           <p:cNvPr id="2" name="Rectangle 1"/>
@@ -6177,6 +8826,7 @@
           <a:lstStyle/>
           <a:p>
             <a:pPr algn="ctr"/>
+            <a:endParaRPr/>
           </a:p>
         </p:txBody>
       </p:sp>
@@ -6220,6 +8870,7 @@
           <a:lstStyle/>
           <a:p>
             <a:pPr algn="ctr"/>
+            <a:endParaRPr/>
           </a:p>
         </p:txBody>
       </p:sp>
@@ -6331,6 +8982,7 @@
           <a:lstStyle/>
           <a:p>
             <a:pPr algn="ctr"/>
+            <a:endParaRPr/>
           </a:p>
         </p:txBody>
       </p:sp>
@@ -6415,6 +9067,7 @@
                 <a:latin typeface="Calibri"/>
               </a:defRPr>
             </a:pPr>
+            <a:endParaRPr/>
           </a:p>
           <a:p>
             <a:pPr>
@@ -6556,6 +9209,7 @@
                 <a:latin typeface="Calibri"/>
               </a:defRPr>
             </a:pPr>
+            <a:endParaRPr/>
           </a:p>
           <a:p>
             <a:pPr>
@@ -6584,7 +9238,7 @@
 </file>
 
 <file path=ppt/slides/slide2.xml><?xml version="1.0" encoding="utf-8"?>
-<p:sld xmlns:a="http://schemas.openxmlformats.org/drawingml/2006/main" xmlns:p="http://schemas.openxmlformats.org/presentationml/2006/main" xmlns:r="http://schemas.openxmlformats.org/officeDocument/2006/relationships">
+<p:sld xmlns:a="http://schemas.openxmlformats.org/drawingml/2006/main" xmlns:r="http://schemas.openxmlformats.org/officeDocument/2006/relationships" xmlns:p="http://schemas.openxmlformats.org/presentationml/2006/main">
   <p:cSld>
     <p:spTree>
       <p:nvGrpSpPr>
@@ -6592,7 +9246,14 @@
         <p:cNvGrpSpPr/>
         <p:nvPr/>
       </p:nvGrpSpPr>
-      <p:grpSpPr/>
+      <p:grpSpPr>
+        <a:xfrm>
+          <a:off x="0" y="0"/>
+          <a:ext cx="0" cy="0"/>
+          <a:chOff x="0" y="0"/>
+          <a:chExt cx="0" cy="0"/>
+        </a:xfrm>
+      </p:grpSpPr>
       <p:sp>
         <p:nvSpPr>
           <p:cNvPr id="2" name="Rectangle 1"/>
@@ -6633,6 +9294,7 @@
           <a:lstStyle/>
           <a:p>
             <a:pPr algn="ctr"/>
+            <a:endParaRPr/>
           </a:p>
         </p:txBody>
       </p:sp>
@@ -6710,6 +9372,7 @@
           <a:lstStyle/>
           <a:p>
             <a:pPr algn="ctr"/>
+            <a:endParaRPr/>
           </a:p>
         </p:txBody>
       </p:sp>
@@ -6809,7 +9472,7 @@
 </file>
 
 <file path=ppt/slides/slide20.xml><?xml version="1.0" encoding="utf-8"?>
-<p:sld xmlns:a="http://schemas.openxmlformats.org/drawingml/2006/main" xmlns:p="http://schemas.openxmlformats.org/presentationml/2006/main" xmlns:r="http://schemas.openxmlformats.org/officeDocument/2006/relationships">
+<p:sld xmlns:a="http://schemas.openxmlformats.org/drawingml/2006/main" xmlns:r="http://schemas.openxmlformats.org/officeDocument/2006/relationships" xmlns:p="http://schemas.openxmlformats.org/presentationml/2006/main">
   <p:cSld>
     <p:spTree>
       <p:nvGrpSpPr>
@@ -6817,7 +9480,14 @@
         <p:cNvGrpSpPr/>
         <p:nvPr/>
       </p:nvGrpSpPr>
-      <p:grpSpPr/>
+      <p:grpSpPr>
+        <a:xfrm>
+          <a:off x="0" y="0"/>
+          <a:ext cx="0" cy="0"/>
+          <a:chOff x="0" y="0"/>
+          <a:chExt cx="0" cy="0"/>
+        </a:xfrm>
+      </p:grpSpPr>
       <p:sp>
         <p:nvSpPr>
           <p:cNvPr id="2" name="Rectangle 1"/>
@@ -6858,6 +9528,7 @@
           <a:lstStyle/>
           <a:p>
             <a:pPr algn="ctr"/>
+            <a:endParaRPr/>
           </a:p>
         </p:txBody>
       </p:sp>
@@ -6935,6 +9606,7 @@
           <a:lstStyle/>
           <a:p>
             <a:pPr algn="ctr"/>
+            <a:endParaRPr/>
           </a:p>
         </p:txBody>
       </p:sp>
@@ -6978,6 +9650,7 @@
           <a:lstStyle/>
           <a:p>
             <a:pPr algn="ctr"/>
+            <a:endParaRPr/>
           </a:p>
         </p:txBody>
       </p:sp>
@@ -7055,6 +9728,7 @@
           <a:lstStyle/>
           <a:p>
             <a:pPr algn="ctr"/>
+            <a:endParaRPr/>
           </a:p>
         </p:txBody>
       </p:sp>
@@ -7163,7 +9837,7 @@
 </file>
 
 <file path=ppt/slides/slide21.xml><?xml version="1.0" encoding="utf-8"?>
-<p:sld xmlns:a="http://schemas.openxmlformats.org/drawingml/2006/main" xmlns:p="http://schemas.openxmlformats.org/presentationml/2006/main" xmlns:r="http://schemas.openxmlformats.org/officeDocument/2006/relationships">
+<p:sld xmlns:a="http://schemas.openxmlformats.org/drawingml/2006/main" xmlns:r="http://schemas.openxmlformats.org/officeDocument/2006/relationships" xmlns:p="http://schemas.openxmlformats.org/presentationml/2006/main">
   <p:cSld>
     <p:spTree>
       <p:nvGrpSpPr>
@@ -7171,7 +9845,14 @@
         <p:cNvGrpSpPr/>
         <p:nvPr/>
       </p:nvGrpSpPr>
-      <p:grpSpPr/>
+      <p:grpSpPr>
+        <a:xfrm>
+          <a:off x="0" y="0"/>
+          <a:ext cx="0" cy="0"/>
+          <a:chOff x="0" y="0"/>
+          <a:chExt cx="0" cy="0"/>
+        </a:xfrm>
+      </p:grpSpPr>
       <p:sp>
         <p:nvSpPr>
           <p:cNvPr id="2" name="Rectangle 1"/>
@@ -7212,6 +9893,7 @@
           <a:lstStyle/>
           <a:p>
             <a:pPr algn="ctr"/>
+            <a:endParaRPr/>
           </a:p>
         </p:txBody>
       </p:sp>
@@ -7255,6 +9937,7 @@
           <a:lstStyle/>
           <a:p>
             <a:pPr algn="ctr"/>
+            <a:endParaRPr/>
           </a:p>
         </p:txBody>
       </p:sp>
@@ -7366,6 +10049,7 @@
           <a:lstStyle/>
           <a:p>
             <a:pPr algn="ctr"/>
+            <a:endParaRPr/>
           </a:p>
         </p:txBody>
       </p:sp>
@@ -7481,7 +10165,7 @@
 </file>
 
 <file path=ppt/slides/slide22.xml><?xml version="1.0" encoding="utf-8"?>
-<p:sld xmlns:a="http://schemas.openxmlformats.org/drawingml/2006/main" xmlns:p="http://schemas.openxmlformats.org/presentationml/2006/main" xmlns:r="http://schemas.openxmlformats.org/officeDocument/2006/relationships">
+<p:sld xmlns:a="http://schemas.openxmlformats.org/drawingml/2006/main" xmlns:r="http://schemas.openxmlformats.org/officeDocument/2006/relationships" xmlns:p="http://schemas.openxmlformats.org/presentationml/2006/main">
   <p:cSld>
     <p:spTree>
       <p:nvGrpSpPr>
@@ -7489,7 +10173,14 @@
         <p:cNvGrpSpPr/>
         <p:nvPr/>
       </p:nvGrpSpPr>
-      <p:grpSpPr/>
+      <p:grpSpPr>
+        <a:xfrm>
+          <a:off x="0" y="0"/>
+          <a:ext cx="0" cy="0"/>
+          <a:chOff x="0" y="0"/>
+          <a:chExt cx="0" cy="0"/>
+        </a:xfrm>
+      </p:grpSpPr>
       <p:sp>
         <p:nvSpPr>
           <p:cNvPr id="2" name="Rectangle 1"/>
@@ -7530,6 +10221,7 @@
           <a:lstStyle/>
           <a:p>
             <a:pPr algn="ctr"/>
+            <a:endParaRPr/>
           </a:p>
         </p:txBody>
       </p:sp>
@@ -7607,6 +10299,7 @@
           <a:lstStyle/>
           <a:p>
             <a:pPr algn="ctr"/>
+            <a:endParaRPr/>
           </a:p>
         </p:txBody>
       </p:sp>
@@ -7802,7 +10495,7 @@
 </file>
 
 <file path=ppt/slides/slide3.xml><?xml version="1.0" encoding="utf-8"?>
-<p:sld xmlns:a="http://schemas.openxmlformats.org/drawingml/2006/main" xmlns:p="http://schemas.openxmlformats.org/presentationml/2006/main" xmlns:r="http://schemas.openxmlformats.org/officeDocument/2006/relationships">
+<p:sld xmlns:a="http://schemas.openxmlformats.org/drawingml/2006/main" xmlns:r="http://schemas.openxmlformats.org/officeDocument/2006/relationships" xmlns:p="http://schemas.openxmlformats.org/presentationml/2006/main">
   <p:cSld>
     <p:spTree>
       <p:nvGrpSpPr>
@@ -7810,7 +10503,14 @@
         <p:cNvGrpSpPr/>
         <p:nvPr/>
       </p:nvGrpSpPr>
-      <p:grpSpPr/>
+      <p:grpSpPr>
+        <a:xfrm>
+          <a:off x="0" y="0"/>
+          <a:ext cx="0" cy="0"/>
+          <a:chOff x="0" y="0"/>
+          <a:chExt cx="0" cy="0"/>
+        </a:xfrm>
+      </p:grpSpPr>
       <p:sp>
         <p:nvSpPr>
           <p:cNvPr id="2" name="Rectangle 1"/>
@@ -7851,6 +10551,7 @@
           <a:lstStyle/>
           <a:p>
             <a:pPr algn="ctr"/>
+            <a:endParaRPr/>
           </a:p>
         </p:txBody>
       </p:sp>
@@ -7894,6 +10595,7 @@
           <a:lstStyle/>
           <a:p>
             <a:pPr algn="ctr"/>
+            <a:endParaRPr/>
           </a:p>
         </p:txBody>
       </p:sp>
@@ -8005,6 +10707,7 @@
           <a:lstStyle/>
           <a:p>
             <a:pPr algn="ctr"/>
+            <a:endParaRPr/>
           </a:p>
         </p:txBody>
       </p:sp>
@@ -8089,6 +10792,7 @@
                 <a:latin typeface="Calibri"/>
               </a:defRPr>
             </a:pPr>
+            <a:endParaRPr/>
           </a:p>
           <a:p>
             <a:pPr>
@@ -8134,6 +10838,7 @@
                 <a:latin typeface="Calibri"/>
               </a:defRPr>
             </a:pPr>
+            <a:endParaRPr/>
           </a:p>
           <a:p>
             <a:pPr>
@@ -8210,7 +10915,7 @@
 </file>
 
 <file path=ppt/slides/slide4.xml><?xml version="1.0" encoding="utf-8"?>
-<p:sld xmlns:a="http://schemas.openxmlformats.org/drawingml/2006/main" xmlns:p="http://schemas.openxmlformats.org/presentationml/2006/main" xmlns:r="http://schemas.openxmlformats.org/officeDocument/2006/relationships">
+<p:sld xmlns:a="http://schemas.openxmlformats.org/drawingml/2006/main" xmlns:r="http://schemas.openxmlformats.org/officeDocument/2006/relationships" xmlns:p="http://schemas.openxmlformats.org/presentationml/2006/main">
   <p:cSld>
     <p:spTree>
       <p:nvGrpSpPr>
@@ -8218,7 +10923,14 @@
         <p:cNvGrpSpPr/>
         <p:nvPr/>
       </p:nvGrpSpPr>
-      <p:grpSpPr/>
+      <p:grpSpPr>
+        <a:xfrm>
+          <a:off x="0" y="0"/>
+          <a:ext cx="0" cy="0"/>
+          <a:chOff x="0" y="0"/>
+          <a:chExt cx="0" cy="0"/>
+        </a:xfrm>
+      </p:grpSpPr>
       <p:sp>
         <p:nvSpPr>
           <p:cNvPr id="2" name="Rectangle 1"/>
@@ -8259,6 +10971,7 @@
           <a:lstStyle/>
           <a:p>
             <a:pPr algn="ctr"/>
+            <a:endParaRPr/>
           </a:p>
         </p:txBody>
       </p:sp>
@@ -8339,7 +11052,7 @@
 </file>
 
 <file path=ppt/slides/slide5.xml><?xml version="1.0" encoding="utf-8"?>
-<p:sld xmlns:a="http://schemas.openxmlformats.org/drawingml/2006/main" xmlns:p="http://schemas.openxmlformats.org/presentationml/2006/main" xmlns:r="http://schemas.openxmlformats.org/officeDocument/2006/relationships">
+<p:sld xmlns:a="http://schemas.openxmlformats.org/drawingml/2006/main" xmlns:r="http://schemas.openxmlformats.org/officeDocument/2006/relationships" xmlns:p="http://schemas.openxmlformats.org/presentationml/2006/main">
   <p:cSld>
     <p:spTree>
       <p:nvGrpSpPr>
@@ -8347,7 +11060,14 @@
         <p:cNvGrpSpPr/>
         <p:nvPr/>
       </p:nvGrpSpPr>
-      <p:grpSpPr/>
+      <p:grpSpPr>
+        <a:xfrm>
+          <a:off x="0" y="0"/>
+          <a:ext cx="0" cy="0"/>
+          <a:chOff x="0" y="0"/>
+          <a:chExt cx="0" cy="0"/>
+        </a:xfrm>
+      </p:grpSpPr>
       <p:sp>
         <p:nvSpPr>
           <p:cNvPr id="2" name="Rectangle 1"/>
@@ -8388,6 +11108,7 @@
           <a:lstStyle/>
           <a:p>
             <a:pPr algn="ctr"/>
+            <a:endParaRPr/>
           </a:p>
         </p:txBody>
       </p:sp>
@@ -8465,6 +11186,7 @@
           <a:lstStyle/>
           <a:p>
             <a:pPr algn="ctr"/>
+            <a:endParaRPr/>
           </a:p>
         </p:txBody>
       </p:sp>
@@ -8660,7 +11382,7 @@
 </file>
 
 <file path=ppt/slides/slide6.xml><?xml version="1.0" encoding="utf-8"?>
-<p:sld xmlns:a="http://schemas.openxmlformats.org/drawingml/2006/main" xmlns:p="http://schemas.openxmlformats.org/presentationml/2006/main" xmlns:r="http://schemas.openxmlformats.org/officeDocument/2006/relationships">
+<p:sld xmlns:a="http://schemas.openxmlformats.org/drawingml/2006/main" xmlns:r="http://schemas.openxmlformats.org/officeDocument/2006/relationships" xmlns:p="http://schemas.openxmlformats.org/presentationml/2006/main">
   <p:cSld>
     <p:spTree>
       <p:nvGrpSpPr>
@@ -8668,7 +11390,14 @@
         <p:cNvGrpSpPr/>
         <p:nvPr/>
       </p:nvGrpSpPr>
-      <p:grpSpPr/>
+      <p:grpSpPr>
+        <a:xfrm>
+          <a:off x="0" y="0"/>
+          <a:ext cx="0" cy="0"/>
+          <a:chOff x="0" y="0"/>
+          <a:chExt cx="0" cy="0"/>
+        </a:xfrm>
+      </p:grpSpPr>
       <p:sp>
         <p:nvSpPr>
           <p:cNvPr id="2" name="Rectangle 1"/>
@@ -8709,6 +11438,7 @@
           <a:lstStyle/>
           <a:p>
             <a:pPr algn="ctr"/>
+            <a:endParaRPr/>
           </a:p>
         </p:txBody>
       </p:sp>
@@ -8820,6 +11550,7 @@
           <a:lstStyle/>
           <a:p>
             <a:pPr algn="ctr"/>
+            <a:endParaRPr/>
           </a:p>
         </p:txBody>
       </p:sp>
@@ -8897,6 +11628,7 @@
           <a:lstStyle/>
           <a:p>
             <a:pPr algn="ctr"/>
+            <a:endParaRPr/>
           </a:p>
         </p:txBody>
       </p:sp>
@@ -8909,7 +11641,7 @@
         <p:spPr>
           <a:xfrm>
             <a:off x="731520" y="1600200"/>
-            <a:ext cx="10698480" cy="4754880"/>
+            <a:ext cx="5362892" cy="4754880"/>
           </a:xfrm>
           <a:prstGeom prst="rect">
             <a:avLst/>
@@ -8920,120 +11652,1518 @@
           <a:bodyPr wrap="square"/>
           <a:lstStyle/>
           <a:p>
-            <a:br/>
-            <a:pPr algn="l">
-              <a:defRPr sz="1500" b="0">
-                <a:solidFill>
-                  <a:srgbClr val="D4D4D4"/>
-                </a:solidFill>
-                <a:latin typeface="Consolas"/>
-              </a:defRPr>
-            </a:pPr>
-            <a:r>
+            <a:br>
+              <a:rPr sz="1600" dirty="0">
+                <a:solidFill>
+                  <a:schemeClr val="bg1">
+                    <a:lumMod val="95000"/>
+                  </a:schemeClr>
+                </a:solidFill>
+              </a:rPr>
+            </a:br>
+            <a:r>
+              <a:rPr sz="1600" dirty="0">
+                <a:solidFill>
+                  <a:schemeClr val="bg1">
+                    <a:lumMod val="95000"/>
+                  </a:schemeClr>
+                </a:solidFill>
+              </a:rPr>
               <a:t>const { Gateway, Wallets } = require('fabric-network');</a:t>
             </a:r>
-            <a:br/>
-            <a:r>
+            <a:br>
+              <a:rPr sz="1600" dirty="0">
+                <a:solidFill>
+                  <a:schemeClr val="bg1">
+                    <a:lumMod val="95000"/>
+                  </a:schemeClr>
+                </a:solidFill>
+              </a:rPr>
+            </a:br>
+            <a:r>
+              <a:rPr sz="1600" dirty="0">
+                <a:solidFill>
+                  <a:schemeClr val="bg1">
+                    <a:lumMod val="95000"/>
+                  </a:schemeClr>
+                </a:solidFill>
+              </a:rPr>
               <a:t>const path = require('path');</a:t>
             </a:r>
-            <a:br/>
-            <a:r>
-              <a:t>const fs = require('fs');</a:t>
-            </a:r>
-            <a:br/>
-            <a:br/>
-            <a:r>
+            <a:br>
+              <a:rPr sz="1600" dirty="0">
+                <a:solidFill>
+                  <a:schemeClr val="bg1">
+                    <a:lumMod val="95000"/>
+                  </a:schemeClr>
+                </a:solidFill>
+              </a:rPr>
+            </a:br>
+            <a:r>
+              <a:rPr sz="1600" dirty="0">
+                <a:solidFill>
+                  <a:schemeClr val="bg1">
+                    <a:lumMod val="95000"/>
+                  </a:schemeClr>
+                </a:solidFill>
+              </a:rPr>
+              <a:t>const fs = require('</a:t>
+            </a:r>
+            <a:r>
+              <a:rPr sz="1600" dirty="0" err="1">
+                <a:solidFill>
+                  <a:schemeClr val="bg1">
+                    <a:lumMod val="95000"/>
+                  </a:schemeClr>
+                </a:solidFill>
+              </a:rPr>
+              <a:t>fs'</a:t>
+            </a:r>
+            <a:r>
+              <a:rPr sz="1600" dirty="0">
+                <a:solidFill>
+                  <a:schemeClr val="bg1">
+                    <a:lumMod val="95000"/>
+                  </a:schemeClr>
+                </a:solidFill>
+              </a:rPr>
+              <a:t>);</a:t>
+            </a:r>
+            <a:br>
+              <a:rPr sz="1600" dirty="0">
+                <a:solidFill>
+                  <a:schemeClr val="bg1">
+                    <a:lumMod val="95000"/>
+                  </a:schemeClr>
+                </a:solidFill>
+              </a:rPr>
+            </a:br>
+            <a:br>
+              <a:rPr sz="1600" dirty="0">
+                <a:solidFill>
+                  <a:schemeClr val="bg1">
+                    <a:lumMod val="95000"/>
+                  </a:schemeClr>
+                </a:solidFill>
+              </a:rPr>
+            </a:br>
+            <a:r>
+              <a:rPr sz="1600" dirty="0">
+                <a:solidFill>
+                  <a:schemeClr val="bg1">
+                    <a:lumMod val="95000"/>
+                  </a:schemeClr>
+                </a:solidFill>
+              </a:rPr>
               <a:t>async function main() {</a:t>
             </a:r>
-            <a:br/>
-            <a:r>
-              <a:t>    // 1. Cargar connection profile</a:t>
-            </a:r>
-            <a:br/>
-            <a:r>
-              <a:t>    const ccpPath = path.resolve(__dirname, 'connection-org1.json');</a:t>
-            </a:r>
-            <a:br/>
-            <a:r>
-              <a:t>    const ccp = JSON.parse(fs.readFileSync(ccpPath, 'utf8'));</a:t>
-            </a:r>
-            <a:br/>
-            <a:br/>
-            <a:r>
-              <a:t>    // 2. Cargar identidad desde wallet</a:t>
-            </a:r>
-            <a:br/>
-            <a:r>
-              <a:t>    const walletPath = path.join(__dirname, 'wallet');</a:t>
-            </a:r>
-            <a:br/>
-            <a:r>
-              <a:t>    const wallet = await Wallets.newFileSystemWallet(walletPath);</a:t>
-            </a:r>
-            <a:br/>
-            <a:br/>
-            <a:r>
-              <a:t>    // 3. Conectar al Gateway</a:t>
-            </a:r>
-            <a:br/>
-            <a:r>
-              <a:t>    const gateway = new Gateway();</a:t>
-            </a:r>
-            <a:br/>
-            <a:r>
-              <a:t>    await gateway.connect(ccp, {</a:t>
-            </a:r>
-            <a:br/>
-            <a:r>
-              <a:t>        wallet,</a:t>
-            </a:r>
-            <a:br/>
-            <a:r>
-              <a:t>        identity: 'appUser',</a:t>
-            </a:r>
-            <a:br/>
-            <a:r>
-              <a:t>        discovery: { enabled: true, asLocalhost: true }</a:t>
-            </a:r>
-            <a:br/>
-            <a:r>
+            <a:br>
+              <a:rPr sz="1600" dirty="0">
+                <a:solidFill>
+                  <a:schemeClr val="bg1">
+                    <a:lumMod val="95000"/>
+                  </a:schemeClr>
+                </a:solidFill>
+              </a:rPr>
+            </a:br>
+            <a:r>
+              <a:rPr sz="1600" dirty="0">
+                <a:solidFill>
+                  <a:schemeClr val="bg1">
+                    <a:lumMod val="95000"/>
+                  </a:schemeClr>
+                </a:solidFill>
+              </a:rPr>
+              <a:t>    // 1. </a:t>
+            </a:r>
+            <a:r>
+              <a:rPr sz="1600" dirty="0" err="1">
+                <a:solidFill>
+                  <a:schemeClr val="bg1">
+                    <a:lumMod val="95000"/>
+                  </a:schemeClr>
+                </a:solidFill>
+              </a:rPr>
+              <a:t>Cargar</a:t>
+            </a:r>
+            <a:r>
+              <a:rPr sz="1600" dirty="0">
+                <a:solidFill>
+                  <a:schemeClr val="bg1">
+                    <a:lumMod val="95000"/>
+                  </a:schemeClr>
+                </a:solidFill>
+              </a:rPr>
+              <a:t> connection profile</a:t>
+            </a:r>
+            <a:br>
+              <a:rPr sz="1600" dirty="0">
+                <a:solidFill>
+                  <a:schemeClr val="bg1">
+                    <a:lumMod val="95000"/>
+                  </a:schemeClr>
+                </a:solidFill>
+              </a:rPr>
+            </a:br>
+            <a:r>
+              <a:rPr sz="1600" dirty="0">
+                <a:solidFill>
+                  <a:schemeClr val="bg1">
+                    <a:lumMod val="95000"/>
+                  </a:schemeClr>
+                </a:solidFill>
+              </a:rPr>
+              <a:t>    const </a:t>
+            </a:r>
+            <a:r>
+              <a:rPr sz="1600" dirty="0" err="1">
+                <a:solidFill>
+                  <a:schemeClr val="bg1">
+                    <a:lumMod val="95000"/>
+                  </a:schemeClr>
+                </a:solidFill>
+              </a:rPr>
+              <a:t>ccpPath</a:t>
+            </a:r>
+            <a:r>
+              <a:rPr sz="1600" dirty="0">
+                <a:solidFill>
+                  <a:schemeClr val="bg1">
+                    <a:lumMod val="95000"/>
+                  </a:schemeClr>
+                </a:solidFill>
+              </a:rPr>
+              <a:t> = </a:t>
+            </a:r>
+            <a:r>
+              <a:rPr sz="1600" dirty="0" err="1">
+                <a:solidFill>
+                  <a:schemeClr val="bg1">
+                    <a:lumMod val="95000"/>
+                  </a:schemeClr>
+                </a:solidFill>
+              </a:rPr>
+              <a:t>path.resolve</a:t>
+            </a:r>
+            <a:r>
+              <a:rPr sz="1600" dirty="0">
+                <a:solidFill>
+                  <a:schemeClr val="bg1">
+                    <a:lumMod val="95000"/>
+                  </a:schemeClr>
+                </a:solidFill>
+              </a:rPr>
+              <a:t>(__</a:t>
+            </a:r>
+            <a:r>
+              <a:rPr sz="1600" dirty="0" err="1">
+                <a:solidFill>
+                  <a:schemeClr val="bg1">
+                    <a:lumMod val="95000"/>
+                  </a:schemeClr>
+                </a:solidFill>
+              </a:rPr>
+              <a:t>dirname</a:t>
+            </a:r>
+            <a:r>
+              <a:rPr sz="1600" dirty="0">
+                <a:solidFill>
+                  <a:schemeClr val="bg1">
+                    <a:lumMod val="95000"/>
+                  </a:schemeClr>
+                </a:solidFill>
+              </a:rPr>
+              <a:t>, 'connection-org1.json');</a:t>
+            </a:r>
+            <a:br>
+              <a:rPr sz="1600" dirty="0">
+                <a:solidFill>
+                  <a:schemeClr val="bg1">
+                    <a:lumMod val="95000"/>
+                  </a:schemeClr>
+                </a:solidFill>
+              </a:rPr>
+            </a:br>
+            <a:r>
+              <a:rPr sz="1600" dirty="0">
+                <a:solidFill>
+                  <a:schemeClr val="bg1">
+                    <a:lumMod val="95000"/>
+                  </a:schemeClr>
+                </a:solidFill>
+              </a:rPr>
+              <a:t>    const </a:t>
+            </a:r>
+            <a:r>
+              <a:rPr sz="1600" dirty="0" err="1">
+                <a:solidFill>
+                  <a:schemeClr val="bg1">
+                    <a:lumMod val="95000"/>
+                  </a:schemeClr>
+                </a:solidFill>
+              </a:rPr>
+              <a:t>ccp</a:t>
+            </a:r>
+            <a:r>
+              <a:rPr sz="1600" dirty="0">
+                <a:solidFill>
+                  <a:schemeClr val="bg1">
+                    <a:lumMod val="95000"/>
+                  </a:schemeClr>
+                </a:solidFill>
+              </a:rPr>
+              <a:t> = </a:t>
+            </a:r>
+            <a:r>
+              <a:rPr sz="1600" dirty="0" err="1">
+                <a:solidFill>
+                  <a:schemeClr val="bg1">
+                    <a:lumMod val="95000"/>
+                  </a:schemeClr>
+                </a:solidFill>
+              </a:rPr>
+              <a:t>JSON.parse</a:t>
+            </a:r>
+            <a:r>
+              <a:rPr sz="1600" dirty="0">
+                <a:solidFill>
+                  <a:schemeClr val="bg1">
+                    <a:lumMod val="95000"/>
+                  </a:schemeClr>
+                </a:solidFill>
+              </a:rPr>
+              <a:t>(</a:t>
+            </a:r>
+            <a:r>
+              <a:rPr sz="1600" dirty="0" err="1">
+                <a:solidFill>
+                  <a:schemeClr val="bg1">
+                    <a:lumMod val="95000"/>
+                  </a:schemeClr>
+                </a:solidFill>
+              </a:rPr>
+              <a:t>fs.readFileSync</a:t>
+            </a:r>
+            <a:r>
+              <a:rPr sz="1600" dirty="0">
+                <a:solidFill>
+                  <a:schemeClr val="bg1">
+                    <a:lumMod val="95000"/>
+                  </a:schemeClr>
+                </a:solidFill>
+              </a:rPr>
+              <a:t>(</a:t>
+            </a:r>
+            <a:r>
+              <a:rPr sz="1600" dirty="0" err="1">
+                <a:solidFill>
+                  <a:schemeClr val="bg1">
+                    <a:lumMod val="95000"/>
+                  </a:schemeClr>
+                </a:solidFill>
+              </a:rPr>
+              <a:t>ccpPath</a:t>
+            </a:r>
+            <a:r>
+              <a:rPr sz="1600" dirty="0">
+                <a:solidFill>
+                  <a:schemeClr val="bg1">
+                    <a:lumMod val="95000"/>
+                  </a:schemeClr>
+                </a:solidFill>
+              </a:rPr>
+              <a:t>, 'utf8'));</a:t>
+            </a:r>
+            <a:br>
+              <a:rPr sz="1600" dirty="0">
+                <a:solidFill>
+                  <a:schemeClr val="bg1">
+                    <a:lumMod val="95000"/>
+                  </a:schemeClr>
+                </a:solidFill>
+              </a:rPr>
+            </a:br>
+            <a:br>
+              <a:rPr sz="1600" dirty="0">
+                <a:solidFill>
+                  <a:schemeClr val="bg1">
+                    <a:lumMod val="95000"/>
+                  </a:schemeClr>
+                </a:solidFill>
+              </a:rPr>
+            </a:br>
+            <a:r>
+              <a:rPr sz="1600" dirty="0">
+                <a:solidFill>
+                  <a:schemeClr val="bg1">
+                    <a:lumMod val="95000"/>
+                  </a:schemeClr>
+                </a:solidFill>
+              </a:rPr>
+              <a:t>    // 2. </a:t>
+            </a:r>
+            <a:r>
+              <a:rPr sz="1600" dirty="0" err="1">
+                <a:solidFill>
+                  <a:schemeClr val="bg1">
+                    <a:lumMod val="95000"/>
+                  </a:schemeClr>
+                </a:solidFill>
+              </a:rPr>
+              <a:t>Cargar</a:t>
+            </a:r>
+            <a:r>
+              <a:rPr sz="1600" dirty="0">
+                <a:solidFill>
+                  <a:schemeClr val="bg1">
+                    <a:lumMod val="95000"/>
+                  </a:schemeClr>
+                </a:solidFill>
+              </a:rPr>
+              <a:t> </a:t>
+            </a:r>
+            <a:r>
+              <a:rPr sz="1600" dirty="0" err="1">
+                <a:solidFill>
+                  <a:schemeClr val="bg1">
+                    <a:lumMod val="95000"/>
+                  </a:schemeClr>
+                </a:solidFill>
+              </a:rPr>
+              <a:t>identidad</a:t>
+            </a:r>
+            <a:r>
+              <a:rPr sz="1600" dirty="0">
+                <a:solidFill>
+                  <a:schemeClr val="bg1">
+                    <a:lumMod val="95000"/>
+                  </a:schemeClr>
+                </a:solidFill>
+              </a:rPr>
+              <a:t> </a:t>
+            </a:r>
+            <a:r>
+              <a:rPr sz="1600" dirty="0" err="1">
+                <a:solidFill>
+                  <a:schemeClr val="bg1">
+                    <a:lumMod val="95000"/>
+                  </a:schemeClr>
+                </a:solidFill>
+              </a:rPr>
+              <a:t>desde</a:t>
+            </a:r>
+            <a:r>
+              <a:rPr sz="1600" dirty="0">
+                <a:solidFill>
+                  <a:schemeClr val="bg1">
+                    <a:lumMod val="95000"/>
+                  </a:schemeClr>
+                </a:solidFill>
+              </a:rPr>
+              <a:t> wallet</a:t>
+            </a:r>
+            <a:br>
+              <a:rPr sz="1600" dirty="0">
+                <a:solidFill>
+                  <a:schemeClr val="bg1">
+                    <a:lumMod val="95000"/>
+                  </a:schemeClr>
+                </a:solidFill>
+              </a:rPr>
+            </a:br>
+            <a:r>
+              <a:rPr sz="1600" dirty="0">
+                <a:solidFill>
+                  <a:schemeClr val="bg1">
+                    <a:lumMod val="95000"/>
+                  </a:schemeClr>
+                </a:solidFill>
+              </a:rPr>
+              <a:t>    const </a:t>
+            </a:r>
+            <a:r>
+              <a:rPr sz="1600" dirty="0" err="1">
+                <a:solidFill>
+                  <a:schemeClr val="bg1">
+                    <a:lumMod val="95000"/>
+                  </a:schemeClr>
+                </a:solidFill>
+              </a:rPr>
+              <a:t>walletPath</a:t>
+            </a:r>
+            <a:r>
+              <a:rPr sz="1600" dirty="0">
+                <a:solidFill>
+                  <a:schemeClr val="bg1">
+                    <a:lumMod val="95000"/>
+                  </a:schemeClr>
+                </a:solidFill>
+              </a:rPr>
+              <a:t> = </a:t>
+            </a:r>
+            <a:r>
+              <a:rPr sz="1600" dirty="0" err="1">
+                <a:solidFill>
+                  <a:schemeClr val="bg1">
+                    <a:lumMod val="95000"/>
+                  </a:schemeClr>
+                </a:solidFill>
+              </a:rPr>
+              <a:t>path.join</a:t>
+            </a:r>
+            <a:r>
+              <a:rPr sz="1600" dirty="0">
+                <a:solidFill>
+                  <a:schemeClr val="bg1">
+                    <a:lumMod val="95000"/>
+                  </a:schemeClr>
+                </a:solidFill>
+              </a:rPr>
+              <a:t>(__</a:t>
+            </a:r>
+            <a:r>
+              <a:rPr sz="1600" dirty="0" err="1">
+                <a:solidFill>
+                  <a:schemeClr val="bg1">
+                    <a:lumMod val="95000"/>
+                  </a:schemeClr>
+                </a:solidFill>
+              </a:rPr>
+              <a:t>dirname</a:t>
+            </a:r>
+            <a:r>
+              <a:rPr sz="1600" dirty="0">
+                <a:solidFill>
+                  <a:schemeClr val="bg1">
+                    <a:lumMod val="95000"/>
+                  </a:schemeClr>
+                </a:solidFill>
+              </a:rPr>
+              <a:t>, 'wallet');</a:t>
+            </a:r>
+            <a:br>
+              <a:rPr sz="1600" dirty="0">
+                <a:solidFill>
+                  <a:schemeClr val="bg1">
+                    <a:lumMod val="95000"/>
+                  </a:schemeClr>
+                </a:solidFill>
+              </a:rPr>
+            </a:br>
+            <a:r>
+              <a:rPr sz="1600" dirty="0">
+                <a:solidFill>
+                  <a:schemeClr val="bg1">
+                    <a:lumMod val="95000"/>
+                  </a:schemeClr>
+                </a:solidFill>
+              </a:rPr>
+              <a:t>    const wallet = await </a:t>
+            </a:r>
+            <a:r>
+              <a:rPr sz="1600" dirty="0" err="1">
+                <a:solidFill>
+                  <a:schemeClr val="bg1">
+                    <a:lumMod val="95000"/>
+                  </a:schemeClr>
+                </a:solidFill>
+              </a:rPr>
+              <a:t>Wallets.newFileSystemWallet</a:t>
+            </a:r>
+            <a:r>
+              <a:rPr sz="1600" dirty="0">
+                <a:solidFill>
+                  <a:schemeClr val="bg1">
+                    <a:lumMod val="95000"/>
+                  </a:schemeClr>
+                </a:solidFill>
+              </a:rPr>
+              <a:t>(</a:t>
+            </a:r>
+            <a:r>
+              <a:rPr sz="1600" dirty="0" err="1">
+                <a:solidFill>
+                  <a:schemeClr val="bg1">
+                    <a:lumMod val="95000"/>
+                  </a:schemeClr>
+                </a:solidFill>
+              </a:rPr>
+              <a:t>walletPath</a:t>
+            </a:r>
+            <a:r>
+              <a:rPr sz="1600" dirty="0">
+                <a:solidFill>
+                  <a:schemeClr val="bg1">
+                    <a:lumMod val="95000"/>
+                  </a:schemeClr>
+                </a:solidFill>
+              </a:rPr>
+              <a:t>);</a:t>
+            </a:r>
+            <a:br>
+              <a:rPr sz="1600" dirty="0">
+                <a:solidFill>
+                  <a:schemeClr val="bg1">
+                    <a:lumMod val="95000"/>
+                  </a:schemeClr>
+                </a:solidFill>
+              </a:rPr>
+            </a:br>
+            <a:br>
+              <a:rPr sz="1600" dirty="0">
+                <a:solidFill>
+                  <a:schemeClr val="bg1">
+                    <a:lumMod val="95000"/>
+                  </a:schemeClr>
+                </a:solidFill>
+              </a:rPr>
+            </a:br>
+            <a:endParaRPr sz="1600" dirty="0">
+              <a:solidFill>
+                <a:schemeClr val="bg1">
+                  <a:lumMod val="95000"/>
+                </a:schemeClr>
+              </a:solidFill>
+            </a:endParaRPr>
+          </a:p>
+        </p:txBody>
+      </p:sp>
+      <p:sp>
+        <p:nvSpPr>
+          <p:cNvPr id="10" name="CuadroTexto 9">
+            <a:extLst>
+              <a:ext uri="{FF2B5EF4-FFF2-40B4-BE49-F238E27FC236}">
+                <a16:creationId xmlns:a16="http://schemas.microsoft.com/office/drawing/2014/main" id="{CB478E5A-3019-09DC-3026-C1DBE3896630}"/>
+              </a:ext>
+            </a:extLst>
+          </p:cNvPr>
+          <p:cNvSpPr txBox="1"/>
+          <p:nvPr/>
+        </p:nvSpPr>
+        <p:spPr>
+          <a:xfrm>
+            <a:off x="6531827" y="1731784"/>
+            <a:ext cx="5362893" cy="4770537"/>
+          </a:xfrm>
+          <a:prstGeom prst="rect">
+            <a:avLst/>
+          </a:prstGeom>
+          <a:noFill/>
+        </p:spPr>
+        <p:txBody>
+          <a:bodyPr wrap="square">
+            <a:spAutoFit/>
+          </a:bodyPr>
+          <a:lstStyle/>
+          <a:p>
+            <a:r>
+              <a:rPr lang="es-ES" sz="1600" dirty="0">
+                <a:solidFill>
+                  <a:schemeClr val="bg1">
+                    <a:lumMod val="95000"/>
+                  </a:schemeClr>
+                </a:solidFill>
+              </a:rPr>
+              <a:t> // 3. Conectar al Gateway</a:t>
+            </a:r>
+            <a:br>
+              <a:rPr lang="es-ES" sz="1600" dirty="0">
+                <a:solidFill>
+                  <a:schemeClr val="bg1">
+                    <a:lumMod val="95000"/>
+                  </a:schemeClr>
+                </a:solidFill>
+              </a:rPr>
+            </a:br>
+            <a:r>
+              <a:rPr lang="es-ES" sz="1600" dirty="0">
+                <a:solidFill>
+                  <a:schemeClr val="bg1">
+                    <a:lumMod val="95000"/>
+                  </a:schemeClr>
+                </a:solidFill>
+              </a:rPr>
+              <a:t>    </a:t>
+            </a:r>
+            <a:r>
+              <a:rPr lang="es-ES" sz="1600" dirty="0" err="1">
+                <a:solidFill>
+                  <a:schemeClr val="bg1">
+                    <a:lumMod val="95000"/>
+                  </a:schemeClr>
+                </a:solidFill>
+              </a:rPr>
+              <a:t>const</a:t>
+            </a:r>
+            <a:r>
+              <a:rPr lang="es-ES" sz="1600" dirty="0">
+                <a:solidFill>
+                  <a:schemeClr val="bg1">
+                    <a:lumMod val="95000"/>
+                  </a:schemeClr>
+                </a:solidFill>
+              </a:rPr>
+              <a:t> </a:t>
+            </a:r>
+            <a:r>
+              <a:rPr lang="es-ES" sz="1600" dirty="0" err="1">
+                <a:solidFill>
+                  <a:schemeClr val="bg1">
+                    <a:lumMod val="95000"/>
+                  </a:schemeClr>
+                </a:solidFill>
+              </a:rPr>
+              <a:t>gateway</a:t>
+            </a:r>
+            <a:r>
+              <a:rPr lang="es-ES" sz="1600" dirty="0">
+                <a:solidFill>
+                  <a:schemeClr val="bg1">
+                    <a:lumMod val="95000"/>
+                  </a:schemeClr>
+                </a:solidFill>
+              </a:rPr>
+              <a:t> = new Gateway();</a:t>
+            </a:r>
+            <a:br>
+              <a:rPr lang="es-ES" sz="1600" dirty="0">
+                <a:solidFill>
+                  <a:schemeClr val="bg1">
+                    <a:lumMod val="95000"/>
+                  </a:schemeClr>
+                </a:solidFill>
+              </a:rPr>
+            </a:br>
+            <a:r>
+              <a:rPr lang="es-ES" sz="1600" dirty="0">
+                <a:solidFill>
+                  <a:schemeClr val="bg1">
+                    <a:lumMod val="95000"/>
+                  </a:schemeClr>
+                </a:solidFill>
+              </a:rPr>
+              <a:t>    </a:t>
+            </a:r>
+            <a:r>
+              <a:rPr lang="es-ES" sz="1600" dirty="0" err="1">
+                <a:solidFill>
+                  <a:schemeClr val="bg1">
+                    <a:lumMod val="95000"/>
+                  </a:schemeClr>
+                </a:solidFill>
+              </a:rPr>
+              <a:t>await</a:t>
+            </a:r>
+            <a:r>
+              <a:rPr lang="es-ES" sz="1600" dirty="0">
+                <a:solidFill>
+                  <a:schemeClr val="bg1">
+                    <a:lumMod val="95000"/>
+                  </a:schemeClr>
+                </a:solidFill>
+              </a:rPr>
+              <a:t> </a:t>
+            </a:r>
+            <a:r>
+              <a:rPr lang="es-ES" sz="1600" dirty="0" err="1">
+                <a:solidFill>
+                  <a:schemeClr val="bg1">
+                    <a:lumMod val="95000"/>
+                  </a:schemeClr>
+                </a:solidFill>
+              </a:rPr>
+              <a:t>gateway.connect</a:t>
+            </a:r>
+            <a:r>
+              <a:rPr lang="es-ES" sz="1600" dirty="0">
+                <a:solidFill>
+                  <a:schemeClr val="bg1">
+                    <a:lumMod val="95000"/>
+                  </a:schemeClr>
+                </a:solidFill>
+              </a:rPr>
+              <a:t>(</a:t>
+            </a:r>
+            <a:r>
+              <a:rPr lang="es-ES" sz="1600" dirty="0" err="1">
+                <a:solidFill>
+                  <a:schemeClr val="bg1">
+                    <a:lumMod val="95000"/>
+                  </a:schemeClr>
+                </a:solidFill>
+              </a:rPr>
+              <a:t>ccp</a:t>
+            </a:r>
+            <a:r>
+              <a:rPr lang="es-ES" sz="1600" dirty="0">
+                <a:solidFill>
+                  <a:schemeClr val="bg1">
+                    <a:lumMod val="95000"/>
+                  </a:schemeClr>
+                </a:solidFill>
+              </a:rPr>
+              <a:t>, {</a:t>
+            </a:r>
+            <a:br>
+              <a:rPr lang="es-ES" sz="1600" dirty="0">
+                <a:solidFill>
+                  <a:schemeClr val="bg1">
+                    <a:lumMod val="95000"/>
+                  </a:schemeClr>
+                </a:solidFill>
+              </a:rPr>
+            </a:br>
+            <a:r>
+              <a:rPr lang="es-ES" sz="1600" dirty="0">
+                <a:solidFill>
+                  <a:schemeClr val="bg1">
+                    <a:lumMod val="95000"/>
+                  </a:schemeClr>
+                </a:solidFill>
+              </a:rPr>
+              <a:t>        </a:t>
+            </a:r>
+            <a:r>
+              <a:rPr lang="es-ES" sz="1600" dirty="0" err="1">
+                <a:solidFill>
+                  <a:schemeClr val="bg1">
+                    <a:lumMod val="95000"/>
+                  </a:schemeClr>
+                </a:solidFill>
+              </a:rPr>
+              <a:t>wallet</a:t>
+            </a:r>
+            <a:r>
+              <a:rPr lang="es-ES" sz="1600" dirty="0">
+                <a:solidFill>
+                  <a:schemeClr val="bg1">
+                    <a:lumMod val="95000"/>
+                  </a:schemeClr>
+                </a:solidFill>
+              </a:rPr>
+              <a:t>,</a:t>
+            </a:r>
+            <a:br>
+              <a:rPr lang="es-ES" sz="1600" dirty="0">
+                <a:solidFill>
+                  <a:schemeClr val="bg1">
+                    <a:lumMod val="95000"/>
+                  </a:schemeClr>
+                </a:solidFill>
+              </a:rPr>
+            </a:br>
+            <a:r>
+              <a:rPr lang="es-ES" sz="1600" dirty="0">
+                <a:solidFill>
+                  <a:schemeClr val="bg1">
+                    <a:lumMod val="95000"/>
+                  </a:schemeClr>
+                </a:solidFill>
+              </a:rPr>
+              <a:t>        </a:t>
+            </a:r>
+            <a:r>
+              <a:rPr lang="es-ES" sz="1600" dirty="0" err="1">
+                <a:solidFill>
+                  <a:schemeClr val="bg1">
+                    <a:lumMod val="95000"/>
+                  </a:schemeClr>
+                </a:solidFill>
+              </a:rPr>
+              <a:t>identity</a:t>
+            </a:r>
+            <a:r>
+              <a:rPr lang="es-ES" sz="1600" dirty="0">
+                <a:solidFill>
+                  <a:schemeClr val="bg1">
+                    <a:lumMod val="95000"/>
+                  </a:schemeClr>
+                </a:solidFill>
+              </a:rPr>
+              <a:t>: '</a:t>
+            </a:r>
+            <a:r>
+              <a:rPr lang="es-ES" sz="1600" dirty="0" err="1">
+                <a:solidFill>
+                  <a:schemeClr val="bg1">
+                    <a:lumMod val="95000"/>
+                  </a:schemeClr>
+                </a:solidFill>
+              </a:rPr>
+              <a:t>appUser</a:t>
+            </a:r>
+            <a:r>
+              <a:rPr lang="es-ES" sz="1600" dirty="0">
+                <a:solidFill>
+                  <a:schemeClr val="bg1">
+                    <a:lumMod val="95000"/>
+                  </a:schemeClr>
+                </a:solidFill>
+              </a:rPr>
+              <a:t>',</a:t>
+            </a:r>
+            <a:br>
+              <a:rPr lang="es-ES" sz="1600" dirty="0">
+                <a:solidFill>
+                  <a:schemeClr val="bg1">
+                    <a:lumMod val="95000"/>
+                  </a:schemeClr>
+                </a:solidFill>
+              </a:rPr>
+            </a:br>
+            <a:r>
+              <a:rPr lang="es-ES" sz="1600" dirty="0">
+                <a:solidFill>
+                  <a:schemeClr val="bg1">
+                    <a:lumMod val="95000"/>
+                  </a:schemeClr>
+                </a:solidFill>
+              </a:rPr>
+              <a:t>        </a:t>
+            </a:r>
+            <a:r>
+              <a:rPr lang="es-ES" sz="1600" dirty="0" err="1">
+                <a:solidFill>
+                  <a:schemeClr val="bg1">
+                    <a:lumMod val="95000"/>
+                  </a:schemeClr>
+                </a:solidFill>
+              </a:rPr>
+              <a:t>discovery</a:t>
+            </a:r>
+            <a:r>
+              <a:rPr lang="es-ES" sz="1600" dirty="0">
+                <a:solidFill>
+                  <a:schemeClr val="bg1">
+                    <a:lumMod val="95000"/>
+                  </a:schemeClr>
+                </a:solidFill>
+              </a:rPr>
+              <a:t>: { </a:t>
+            </a:r>
+            <a:r>
+              <a:rPr lang="es-ES" sz="1600" dirty="0" err="1">
+                <a:solidFill>
+                  <a:schemeClr val="bg1">
+                    <a:lumMod val="95000"/>
+                  </a:schemeClr>
+                </a:solidFill>
+              </a:rPr>
+              <a:t>enabled</a:t>
+            </a:r>
+            <a:r>
+              <a:rPr lang="es-ES" sz="1600" dirty="0">
+                <a:solidFill>
+                  <a:schemeClr val="bg1">
+                    <a:lumMod val="95000"/>
+                  </a:schemeClr>
+                </a:solidFill>
+              </a:rPr>
+              <a:t>: true, </a:t>
+            </a:r>
+            <a:r>
+              <a:rPr lang="es-ES" sz="1600" dirty="0" err="1">
+                <a:solidFill>
+                  <a:schemeClr val="bg1">
+                    <a:lumMod val="95000"/>
+                  </a:schemeClr>
+                </a:solidFill>
+              </a:rPr>
+              <a:t>asLocalhost</a:t>
+            </a:r>
+            <a:r>
+              <a:rPr lang="es-ES" sz="1600" dirty="0">
+                <a:solidFill>
+                  <a:schemeClr val="bg1">
+                    <a:lumMod val="95000"/>
+                  </a:schemeClr>
+                </a:solidFill>
+              </a:rPr>
+              <a:t>: true }</a:t>
+            </a:r>
+            <a:br>
+              <a:rPr lang="es-ES" sz="1600" dirty="0">
+                <a:solidFill>
+                  <a:schemeClr val="bg1">
+                    <a:lumMod val="95000"/>
+                  </a:schemeClr>
+                </a:solidFill>
+              </a:rPr>
+            </a:br>
+            <a:r>
+              <a:rPr lang="es-ES" sz="1600" dirty="0">
+                <a:solidFill>
+                  <a:schemeClr val="bg1">
+                    <a:lumMod val="95000"/>
+                  </a:schemeClr>
+                </a:solidFill>
+              </a:rPr>
               <a:t>    });</a:t>
             </a:r>
-            <a:br/>
-            <a:br/>
-            <a:r>
+            <a:br>
+              <a:rPr lang="es-ES" sz="1600" dirty="0">
+                <a:solidFill>
+                  <a:schemeClr val="bg1">
+                    <a:lumMod val="95000"/>
+                  </a:schemeClr>
+                </a:solidFill>
+              </a:rPr>
+            </a:br>
+            <a:br>
+              <a:rPr lang="es-ES" sz="1600" dirty="0">
+                <a:solidFill>
+                  <a:schemeClr val="bg1">
+                    <a:lumMod val="95000"/>
+                  </a:schemeClr>
+                </a:solidFill>
+              </a:rPr>
+            </a:br>
+            <a:r>
+              <a:rPr lang="es-ES" sz="1600" dirty="0">
+                <a:solidFill>
+                  <a:schemeClr val="bg1">
+                    <a:lumMod val="95000"/>
+                  </a:schemeClr>
+                </a:solidFill>
+              </a:rPr>
               <a:t>    // 4. Obtener canal y contrato</a:t>
             </a:r>
-            <a:br/>
-            <a:r>
-              <a:t>    const network = await gateway.getNetwork('mychannel');</a:t>
-            </a:r>
-            <a:br/>
-            <a:r>
-              <a:t>    const contract = network.getContract('foodtrace');</a:t>
-            </a:r>
-            <a:br/>
-            <a:br/>
-            <a:r>
+            <a:br>
+              <a:rPr lang="es-ES" sz="1600" dirty="0">
+                <a:solidFill>
+                  <a:schemeClr val="bg1">
+                    <a:lumMod val="95000"/>
+                  </a:schemeClr>
+                </a:solidFill>
+              </a:rPr>
+            </a:br>
+            <a:r>
+              <a:rPr lang="es-ES" sz="1600" dirty="0">
+                <a:solidFill>
+                  <a:schemeClr val="bg1">
+                    <a:lumMod val="95000"/>
+                  </a:schemeClr>
+                </a:solidFill>
+              </a:rPr>
+              <a:t>    </a:t>
+            </a:r>
+            <a:r>
+              <a:rPr lang="es-ES" sz="1600" dirty="0" err="1">
+                <a:solidFill>
+                  <a:schemeClr val="bg1">
+                    <a:lumMod val="95000"/>
+                  </a:schemeClr>
+                </a:solidFill>
+              </a:rPr>
+              <a:t>const</a:t>
+            </a:r>
+            <a:r>
+              <a:rPr lang="es-ES" sz="1600" dirty="0">
+                <a:solidFill>
+                  <a:schemeClr val="bg1">
+                    <a:lumMod val="95000"/>
+                  </a:schemeClr>
+                </a:solidFill>
+              </a:rPr>
+              <a:t> </a:t>
+            </a:r>
+            <a:r>
+              <a:rPr lang="es-ES" sz="1600" dirty="0" err="1">
+                <a:solidFill>
+                  <a:schemeClr val="bg1">
+                    <a:lumMod val="95000"/>
+                  </a:schemeClr>
+                </a:solidFill>
+              </a:rPr>
+              <a:t>network</a:t>
+            </a:r>
+            <a:r>
+              <a:rPr lang="es-ES" sz="1600" dirty="0">
+                <a:solidFill>
+                  <a:schemeClr val="bg1">
+                    <a:lumMod val="95000"/>
+                  </a:schemeClr>
+                </a:solidFill>
+              </a:rPr>
+              <a:t> = </a:t>
+            </a:r>
+            <a:r>
+              <a:rPr lang="es-ES" sz="1600" dirty="0" err="1">
+                <a:solidFill>
+                  <a:schemeClr val="bg1">
+                    <a:lumMod val="95000"/>
+                  </a:schemeClr>
+                </a:solidFill>
+              </a:rPr>
+              <a:t>await</a:t>
+            </a:r>
+            <a:r>
+              <a:rPr lang="es-ES" sz="1600" dirty="0">
+                <a:solidFill>
+                  <a:schemeClr val="bg1">
+                    <a:lumMod val="95000"/>
+                  </a:schemeClr>
+                </a:solidFill>
+              </a:rPr>
+              <a:t> </a:t>
+            </a:r>
+            <a:r>
+              <a:rPr lang="es-ES" sz="1600" dirty="0" err="1">
+                <a:solidFill>
+                  <a:schemeClr val="bg1">
+                    <a:lumMod val="95000"/>
+                  </a:schemeClr>
+                </a:solidFill>
+              </a:rPr>
+              <a:t>gateway.getNetwork</a:t>
+            </a:r>
+            <a:r>
+              <a:rPr lang="es-ES" sz="1600" dirty="0">
+                <a:solidFill>
+                  <a:schemeClr val="bg1">
+                    <a:lumMod val="95000"/>
+                  </a:schemeClr>
+                </a:solidFill>
+              </a:rPr>
+              <a:t>('</a:t>
+            </a:r>
+            <a:r>
+              <a:rPr lang="es-ES" sz="1600" dirty="0" err="1">
+                <a:solidFill>
+                  <a:schemeClr val="bg1">
+                    <a:lumMod val="95000"/>
+                  </a:schemeClr>
+                </a:solidFill>
+              </a:rPr>
+              <a:t>mychannel</a:t>
+            </a:r>
+            <a:r>
+              <a:rPr lang="es-ES" sz="1600" dirty="0">
+                <a:solidFill>
+                  <a:schemeClr val="bg1">
+                    <a:lumMod val="95000"/>
+                  </a:schemeClr>
+                </a:solidFill>
+              </a:rPr>
+              <a:t>');</a:t>
+            </a:r>
+            <a:br>
+              <a:rPr lang="es-ES" sz="1600" dirty="0">
+                <a:solidFill>
+                  <a:schemeClr val="bg1">
+                    <a:lumMod val="95000"/>
+                  </a:schemeClr>
+                </a:solidFill>
+              </a:rPr>
+            </a:br>
+            <a:r>
+              <a:rPr lang="es-ES" sz="1600" dirty="0">
+                <a:solidFill>
+                  <a:schemeClr val="bg1">
+                    <a:lumMod val="95000"/>
+                  </a:schemeClr>
+                </a:solidFill>
+              </a:rPr>
+              <a:t>    </a:t>
+            </a:r>
+            <a:r>
+              <a:rPr lang="es-ES" sz="1600" dirty="0" err="1">
+                <a:solidFill>
+                  <a:schemeClr val="bg1">
+                    <a:lumMod val="95000"/>
+                  </a:schemeClr>
+                </a:solidFill>
+              </a:rPr>
+              <a:t>const</a:t>
+            </a:r>
+            <a:r>
+              <a:rPr lang="es-ES" sz="1600" dirty="0">
+                <a:solidFill>
+                  <a:schemeClr val="bg1">
+                    <a:lumMod val="95000"/>
+                  </a:schemeClr>
+                </a:solidFill>
+              </a:rPr>
+              <a:t> </a:t>
+            </a:r>
+            <a:r>
+              <a:rPr lang="es-ES" sz="1600" dirty="0" err="1">
+                <a:solidFill>
+                  <a:schemeClr val="bg1">
+                    <a:lumMod val="95000"/>
+                  </a:schemeClr>
+                </a:solidFill>
+              </a:rPr>
+              <a:t>contract</a:t>
+            </a:r>
+            <a:r>
+              <a:rPr lang="es-ES" sz="1600" dirty="0">
+                <a:solidFill>
+                  <a:schemeClr val="bg1">
+                    <a:lumMod val="95000"/>
+                  </a:schemeClr>
+                </a:solidFill>
+              </a:rPr>
+              <a:t> = </a:t>
+            </a:r>
+            <a:r>
+              <a:rPr lang="es-ES" sz="1600" dirty="0" err="1">
+                <a:solidFill>
+                  <a:schemeClr val="bg1">
+                    <a:lumMod val="95000"/>
+                  </a:schemeClr>
+                </a:solidFill>
+              </a:rPr>
+              <a:t>network.getContract</a:t>
+            </a:r>
+            <a:r>
+              <a:rPr lang="es-ES" sz="1600" dirty="0">
+                <a:solidFill>
+                  <a:schemeClr val="bg1">
+                    <a:lumMod val="95000"/>
+                  </a:schemeClr>
+                </a:solidFill>
+              </a:rPr>
+              <a:t>('</a:t>
+            </a:r>
+            <a:r>
+              <a:rPr lang="es-ES" sz="1600" dirty="0" err="1">
+                <a:solidFill>
+                  <a:schemeClr val="bg1">
+                    <a:lumMod val="95000"/>
+                  </a:schemeClr>
+                </a:solidFill>
+              </a:rPr>
+              <a:t>foodtrace</a:t>
+            </a:r>
+            <a:r>
+              <a:rPr lang="es-ES" sz="1600" dirty="0">
+                <a:solidFill>
+                  <a:schemeClr val="bg1">
+                    <a:lumMod val="95000"/>
+                  </a:schemeClr>
+                </a:solidFill>
+              </a:rPr>
+              <a:t>');</a:t>
+            </a:r>
+            <a:br>
+              <a:rPr lang="es-ES" sz="1600" dirty="0">
+                <a:solidFill>
+                  <a:schemeClr val="bg1">
+                    <a:lumMod val="95000"/>
+                  </a:schemeClr>
+                </a:solidFill>
+              </a:rPr>
+            </a:br>
+            <a:br>
+              <a:rPr lang="es-ES" sz="1600" dirty="0">
+                <a:solidFill>
+                  <a:schemeClr val="bg1">
+                    <a:lumMod val="95000"/>
+                  </a:schemeClr>
+                </a:solidFill>
+              </a:rPr>
+            </a:br>
+            <a:r>
+              <a:rPr lang="es-ES" sz="1600" dirty="0">
+                <a:solidFill>
+                  <a:schemeClr val="bg1">
+                    <a:lumMod val="95000"/>
+                  </a:schemeClr>
+                </a:solidFill>
+              </a:rPr>
               <a:t>    // 5. Invocar funciones</a:t>
             </a:r>
-            <a:br/>
-            <a:r>
-              <a:t>    const result = await contract.evaluateTransaction('GetAllLots');</a:t>
-            </a:r>
-            <a:br/>
-            <a:r>
-              <a:t>    console.log(JSON.parse(result.toString()));</a:t>
-            </a:r>
-            <a:br/>
-            <a:br/>
-            <a:r>
-              <a:t>    gateway.disconnect();</a:t>
-            </a:r>
-            <a:br/>
-            <a:r>
+            <a:br>
+              <a:rPr lang="es-ES" sz="1600" dirty="0">
+                <a:solidFill>
+                  <a:schemeClr val="bg1">
+                    <a:lumMod val="95000"/>
+                  </a:schemeClr>
+                </a:solidFill>
+              </a:rPr>
+            </a:br>
+            <a:r>
+              <a:rPr lang="es-ES" sz="1600" dirty="0">
+                <a:solidFill>
+                  <a:schemeClr val="bg1">
+                    <a:lumMod val="95000"/>
+                  </a:schemeClr>
+                </a:solidFill>
+              </a:rPr>
+              <a:t>    </a:t>
+            </a:r>
+            <a:r>
+              <a:rPr lang="es-ES" sz="1600" dirty="0" err="1">
+                <a:solidFill>
+                  <a:schemeClr val="bg1">
+                    <a:lumMod val="95000"/>
+                  </a:schemeClr>
+                </a:solidFill>
+              </a:rPr>
+              <a:t>const</a:t>
+            </a:r>
+            <a:r>
+              <a:rPr lang="es-ES" sz="1600" dirty="0">
+                <a:solidFill>
+                  <a:schemeClr val="bg1">
+                    <a:lumMod val="95000"/>
+                  </a:schemeClr>
+                </a:solidFill>
+              </a:rPr>
+              <a:t> </a:t>
+            </a:r>
+            <a:r>
+              <a:rPr lang="es-ES" sz="1600" dirty="0" err="1">
+                <a:solidFill>
+                  <a:schemeClr val="bg1">
+                    <a:lumMod val="95000"/>
+                  </a:schemeClr>
+                </a:solidFill>
+              </a:rPr>
+              <a:t>result</a:t>
+            </a:r>
+            <a:r>
+              <a:rPr lang="es-ES" sz="1600" dirty="0">
+                <a:solidFill>
+                  <a:schemeClr val="bg1">
+                    <a:lumMod val="95000"/>
+                  </a:schemeClr>
+                </a:solidFill>
+              </a:rPr>
+              <a:t> = </a:t>
+            </a:r>
+            <a:r>
+              <a:rPr lang="es-ES" sz="1600" dirty="0" err="1">
+                <a:solidFill>
+                  <a:schemeClr val="bg1">
+                    <a:lumMod val="95000"/>
+                  </a:schemeClr>
+                </a:solidFill>
+              </a:rPr>
+              <a:t>await</a:t>
+            </a:r>
+            <a:r>
+              <a:rPr lang="es-ES" sz="1600" dirty="0">
+                <a:solidFill>
+                  <a:schemeClr val="bg1">
+                    <a:lumMod val="95000"/>
+                  </a:schemeClr>
+                </a:solidFill>
+              </a:rPr>
+              <a:t> </a:t>
+            </a:r>
+            <a:r>
+              <a:rPr lang="es-ES" sz="1600" dirty="0" err="1">
+                <a:solidFill>
+                  <a:schemeClr val="bg1">
+                    <a:lumMod val="95000"/>
+                  </a:schemeClr>
+                </a:solidFill>
+              </a:rPr>
+              <a:t>contract.evaluateTransaction</a:t>
+            </a:r>
+            <a:r>
+              <a:rPr lang="es-ES" sz="1600" dirty="0">
+                <a:solidFill>
+                  <a:schemeClr val="bg1">
+                    <a:lumMod val="95000"/>
+                  </a:schemeClr>
+                </a:solidFill>
+              </a:rPr>
+              <a:t>('</a:t>
+            </a:r>
+            <a:r>
+              <a:rPr lang="es-ES" sz="1600" dirty="0" err="1">
+                <a:solidFill>
+                  <a:schemeClr val="bg1">
+                    <a:lumMod val="95000"/>
+                  </a:schemeClr>
+                </a:solidFill>
+              </a:rPr>
+              <a:t>GetAllLots</a:t>
+            </a:r>
+            <a:r>
+              <a:rPr lang="es-ES" sz="1600" dirty="0">
+                <a:solidFill>
+                  <a:schemeClr val="bg1">
+                    <a:lumMod val="95000"/>
+                  </a:schemeClr>
+                </a:solidFill>
+              </a:rPr>
+              <a:t>');</a:t>
+            </a:r>
+            <a:br>
+              <a:rPr lang="es-ES" sz="1600" dirty="0">
+                <a:solidFill>
+                  <a:schemeClr val="bg1">
+                    <a:lumMod val="95000"/>
+                  </a:schemeClr>
+                </a:solidFill>
+              </a:rPr>
+            </a:br>
+            <a:r>
+              <a:rPr lang="es-ES" sz="1600" dirty="0">
+                <a:solidFill>
+                  <a:schemeClr val="bg1">
+                    <a:lumMod val="95000"/>
+                  </a:schemeClr>
+                </a:solidFill>
+              </a:rPr>
+              <a:t>    console.log(</a:t>
+            </a:r>
+            <a:r>
+              <a:rPr lang="es-ES" sz="1600" dirty="0" err="1">
+                <a:solidFill>
+                  <a:schemeClr val="bg1">
+                    <a:lumMod val="95000"/>
+                  </a:schemeClr>
+                </a:solidFill>
+              </a:rPr>
+              <a:t>JSON.parse</a:t>
+            </a:r>
+            <a:r>
+              <a:rPr lang="es-ES" sz="1600" dirty="0">
+                <a:solidFill>
+                  <a:schemeClr val="bg1">
+                    <a:lumMod val="95000"/>
+                  </a:schemeClr>
+                </a:solidFill>
+              </a:rPr>
+              <a:t>(</a:t>
+            </a:r>
+            <a:r>
+              <a:rPr lang="es-ES" sz="1600" dirty="0" err="1">
+                <a:solidFill>
+                  <a:schemeClr val="bg1">
+                    <a:lumMod val="95000"/>
+                  </a:schemeClr>
+                </a:solidFill>
+              </a:rPr>
+              <a:t>result.toString</a:t>
+            </a:r>
+            <a:r>
+              <a:rPr lang="es-ES" sz="1600" dirty="0">
+                <a:solidFill>
+                  <a:schemeClr val="bg1">
+                    <a:lumMod val="95000"/>
+                  </a:schemeClr>
+                </a:solidFill>
+              </a:rPr>
+              <a:t>()));</a:t>
+            </a:r>
+            <a:br>
+              <a:rPr lang="es-ES" sz="1600" dirty="0">
+                <a:solidFill>
+                  <a:schemeClr val="bg1">
+                    <a:lumMod val="95000"/>
+                  </a:schemeClr>
+                </a:solidFill>
+              </a:rPr>
+            </a:br>
+            <a:br>
+              <a:rPr lang="es-ES" sz="1600" dirty="0">
+                <a:solidFill>
+                  <a:schemeClr val="bg1">
+                    <a:lumMod val="95000"/>
+                  </a:schemeClr>
+                </a:solidFill>
+              </a:rPr>
+            </a:br>
+            <a:r>
+              <a:rPr lang="es-ES" sz="1600" dirty="0">
+                <a:solidFill>
+                  <a:schemeClr val="bg1">
+                    <a:lumMod val="95000"/>
+                  </a:schemeClr>
+                </a:solidFill>
+              </a:rPr>
+              <a:t>    </a:t>
+            </a:r>
+            <a:r>
+              <a:rPr lang="es-ES" sz="1600" dirty="0" err="1">
+                <a:solidFill>
+                  <a:schemeClr val="bg1">
+                    <a:lumMod val="95000"/>
+                  </a:schemeClr>
+                </a:solidFill>
+              </a:rPr>
+              <a:t>gateway.disconnect</a:t>
+            </a:r>
+            <a:r>
+              <a:rPr lang="es-ES" sz="1600" dirty="0">
+                <a:solidFill>
+                  <a:schemeClr val="bg1">
+                    <a:lumMod val="95000"/>
+                  </a:schemeClr>
+                </a:solidFill>
+              </a:rPr>
+              <a:t>();</a:t>
+            </a:r>
+            <a:br>
+              <a:rPr lang="es-ES" sz="1600" dirty="0">
+                <a:solidFill>
+                  <a:schemeClr val="bg1">
+                    <a:lumMod val="95000"/>
+                  </a:schemeClr>
+                </a:solidFill>
+              </a:rPr>
+            </a:br>
+            <a:r>
+              <a:rPr lang="es-ES" sz="1600" dirty="0">
+                <a:solidFill>
+                  <a:schemeClr val="bg1">
+                    <a:lumMod val="95000"/>
+                  </a:schemeClr>
+                </a:solidFill>
+              </a:rPr>
               <a:t>}</a:t>
             </a:r>
+            <a:endParaRPr lang="es-ES" sz="1600" dirty="0"/>
+          </a:p>
+        </p:txBody>
+      </p:sp>
+      <p:sp>
+        <p:nvSpPr>
+          <p:cNvPr id="11" name="Rectángulo 10">
+            <a:extLst>
+              <a:ext uri="{FF2B5EF4-FFF2-40B4-BE49-F238E27FC236}">
+                <a16:creationId xmlns:a16="http://schemas.microsoft.com/office/drawing/2014/main" id="{D4E72BB4-52E7-3914-0A2D-C1005D28A053}"/>
+              </a:ext>
+            </a:extLst>
+          </p:cNvPr>
+          <p:cNvSpPr/>
+          <p:nvPr/>
+        </p:nvSpPr>
+        <p:spPr>
+          <a:xfrm>
+            <a:off x="5954751" y="1417320"/>
+            <a:ext cx="45719" cy="5085001"/>
+          </a:xfrm>
+          <a:prstGeom prst="rect">
+            <a:avLst/>
+          </a:prstGeom>
+        </p:spPr>
+        <p:style>
+          <a:lnRef idx="1">
+            <a:schemeClr val="accent1"/>
+          </a:lnRef>
+          <a:fillRef idx="3">
+            <a:schemeClr val="accent1"/>
+          </a:fillRef>
+          <a:effectRef idx="2">
+            <a:schemeClr val="accent1"/>
+          </a:effectRef>
+          <a:fontRef idx="minor">
+            <a:schemeClr val="lt1"/>
+          </a:fontRef>
+        </p:style>
+        <p:txBody>
+          <a:bodyPr rtlCol="0" anchor="ctr"/>
+          <a:lstStyle/>
+          <a:p>
+            <a:pPr algn="ctr"/>
+            <a:endParaRPr lang="es-ES"/>
           </a:p>
         </p:txBody>
       </p:sp>
@@ -9046,7 +13176,7 @@
 </file>
 
 <file path=ppt/slides/slide7.xml><?xml version="1.0" encoding="utf-8"?>
-<p:sld xmlns:a="http://schemas.openxmlformats.org/drawingml/2006/main" xmlns:p="http://schemas.openxmlformats.org/presentationml/2006/main" xmlns:r="http://schemas.openxmlformats.org/officeDocument/2006/relationships">
+<p:sld xmlns:a="http://schemas.openxmlformats.org/drawingml/2006/main" xmlns:r="http://schemas.openxmlformats.org/officeDocument/2006/relationships" xmlns:p="http://schemas.openxmlformats.org/presentationml/2006/main">
   <p:cSld>
     <p:spTree>
       <p:nvGrpSpPr>
@@ -9054,7 +13184,14 @@
         <p:cNvGrpSpPr/>
         <p:nvPr/>
       </p:nvGrpSpPr>
-      <p:grpSpPr/>
+      <p:grpSpPr>
+        <a:xfrm>
+          <a:off x="0" y="0"/>
+          <a:ext cx="0" cy="0"/>
+          <a:chOff x="0" y="0"/>
+          <a:chExt cx="0" cy="0"/>
+        </a:xfrm>
+      </p:grpSpPr>
       <p:sp>
         <p:nvSpPr>
           <p:cNvPr id="2" name="Rectangle 1"/>
@@ -9095,6 +13232,7 @@
           <a:lstStyle/>
           <a:p>
             <a:pPr algn="ctr"/>
+            <a:endParaRPr/>
           </a:p>
         </p:txBody>
       </p:sp>
@@ -9206,6 +13344,7 @@
           <a:lstStyle/>
           <a:p>
             <a:pPr algn="ctr"/>
+            <a:endParaRPr/>
           </a:p>
         </p:txBody>
       </p:sp>
@@ -9283,6 +13422,7 @@
           <a:lstStyle/>
           <a:p>
             <a:pPr algn="ctr"/>
+            <a:endParaRPr/>
           </a:p>
         </p:txBody>
       </p:sp>
@@ -9295,7 +13435,7 @@
         <p:spPr>
           <a:xfrm>
             <a:off x="731520" y="1600200"/>
-            <a:ext cx="10698480" cy="4754880"/>
+            <a:ext cx="5613524" cy="4754880"/>
           </a:xfrm>
           <a:prstGeom prst="rect">
             <a:avLst/>
@@ -9306,101 +13446,1148 @@
           <a:bodyPr wrap="square"/>
           <a:lstStyle/>
           <a:p>
-            <a:br/>
-            <a:pPr algn="l">
-              <a:defRPr sz="1500" b="0">
-                <a:solidFill>
-                  <a:srgbClr val="D4D4D4"/>
-                </a:solidFill>
-                <a:latin typeface="Consolas"/>
-              </a:defRPr>
-            </a:pPr>
-            <a:r>
-              <a:t>// EVALUATE: solo lectura, no genera transaccion en el ledger</a:t>
-            </a:r>
-            <a:br/>
-            <a:r>
-              <a:t>// Se ejecuta en UN solo peer (rapido)</a:t>
-            </a:r>
-            <a:br/>
-            <a:r>
-              <a:t>const result = await contract.evaluateTransaction('ReadProperty', 'PROP001');</a:t>
-            </a:r>
-            <a:br/>
-            <a:r>
-              <a:t>const property = JSON.parse(result.toString());</a:t>
-            </a:r>
-            <a:br/>
-            <a:r>
+            <a:br>
+              <a:rPr sz="1600" dirty="0">
+                <a:solidFill>
+                  <a:schemeClr val="bg1">
+                    <a:lumMod val="95000"/>
+                  </a:schemeClr>
+                </a:solidFill>
+              </a:rPr>
+            </a:br>
+            <a:r>
+              <a:rPr sz="1600" dirty="0">
+                <a:solidFill>
+                  <a:schemeClr val="bg1">
+                    <a:lumMod val="95000"/>
+                  </a:schemeClr>
+                </a:solidFill>
+              </a:rPr>
+              <a:t>// EVALUATE: solo </a:t>
+            </a:r>
+            <a:r>
+              <a:rPr sz="1600" dirty="0" err="1">
+                <a:solidFill>
+                  <a:schemeClr val="bg1">
+                    <a:lumMod val="95000"/>
+                  </a:schemeClr>
+                </a:solidFill>
+              </a:rPr>
+              <a:t>lectura</a:t>
+            </a:r>
+            <a:r>
+              <a:rPr sz="1600" dirty="0">
+                <a:solidFill>
+                  <a:schemeClr val="bg1">
+                    <a:lumMod val="95000"/>
+                  </a:schemeClr>
+                </a:solidFill>
+              </a:rPr>
+              <a:t>, no genera </a:t>
+            </a:r>
+            <a:r>
+              <a:rPr sz="1600" dirty="0" err="1">
+                <a:solidFill>
+                  <a:schemeClr val="bg1">
+                    <a:lumMod val="95000"/>
+                  </a:schemeClr>
+                </a:solidFill>
+              </a:rPr>
+              <a:t>transaccion</a:t>
+            </a:r>
+            <a:r>
+              <a:rPr sz="1600" dirty="0">
+                <a:solidFill>
+                  <a:schemeClr val="bg1">
+                    <a:lumMod val="95000"/>
+                  </a:schemeClr>
+                </a:solidFill>
+              </a:rPr>
+              <a:t> </a:t>
+            </a:r>
+            <a:r>
+              <a:rPr sz="1600" dirty="0" err="1">
+                <a:solidFill>
+                  <a:schemeClr val="bg1">
+                    <a:lumMod val="95000"/>
+                  </a:schemeClr>
+                </a:solidFill>
+              </a:rPr>
+              <a:t>en</a:t>
+            </a:r>
+            <a:r>
+              <a:rPr sz="1600" dirty="0">
+                <a:solidFill>
+                  <a:schemeClr val="bg1">
+                    <a:lumMod val="95000"/>
+                  </a:schemeClr>
+                </a:solidFill>
+              </a:rPr>
+              <a:t> </a:t>
+            </a:r>
+            <a:r>
+              <a:rPr sz="1600" dirty="0" err="1">
+                <a:solidFill>
+                  <a:schemeClr val="bg1">
+                    <a:lumMod val="95000"/>
+                  </a:schemeClr>
+                </a:solidFill>
+              </a:rPr>
+              <a:t>el</a:t>
+            </a:r>
+            <a:r>
+              <a:rPr sz="1600" dirty="0">
+                <a:solidFill>
+                  <a:schemeClr val="bg1">
+                    <a:lumMod val="95000"/>
+                  </a:schemeClr>
+                </a:solidFill>
+              </a:rPr>
+              <a:t> ledger</a:t>
+            </a:r>
+            <a:br>
+              <a:rPr sz="1600" dirty="0">
+                <a:solidFill>
+                  <a:schemeClr val="bg1">
+                    <a:lumMod val="95000"/>
+                  </a:schemeClr>
+                </a:solidFill>
+              </a:rPr>
+            </a:br>
+            <a:r>
+              <a:rPr sz="1600" dirty="0">
+                <a:solidFill>
+                  <a:schemeClr val="bg1">
+                    <a:lumMod val="95000"/>
+                  </a:schemeClr>
+                </a:solidFill>
+              </a:rPr>
+              <a:t>// Se </a:t>
+            </a:r>
+            <a:r>
+              <a:rPr sz="1600" dirty="0" err="1">
+                <a:solidFill>
+                  <a:schemeClr val="bg1">
+                    <a:lumMod val="95000"/>
+                  </a:schemeClr>
+                </a:solidFill>
+              </a:rPr>
+              <a:t>ejecuta</a:t>
+            </a:r>
+            <a:r>
+              <a:rPr sz="1600" dirty="0">
+                <a:solidFill>
+                  <a:schemeClr val="bg1">
+                    <a:lumMod val="95000"/>
+                  </a:schemeClr>
+                </a:solidFill>
+              </a:rPr>
+              <a:t> </a:t>
+            </a:r>
+            <a:r>
+              <a:rPr sz="1600" dirty="0" err="1">
+                <a:solidFill>
+                  <a:schemeClr val="bg1">
+                    <a:lumMod val="95000"/>
+                  </a:schemeClr>
+                </a:solidFill>
+              </a:rPr>
+              <a:t>en</a:t>
+            </a:r>
+            <a:r>
+              <a:rPr sz="1600" dirty="0">
+                <a:solidFill>
+                  <a:schemeClr val="bg1">
+                    <a:lumMod val="95000"/>
+                  </a:schemeClr>
+                </a:solidFill>
+              </a:rPr>
+              <a:t> UN solo peer (</a:t>
+            </a:r>
+            <a:r>
+              <a:rPr sz="1600" dirty="0" err="1">
+                <a:solidFill>
+                  <a:schemeClr val="bg1">
+                    <a:lumMod val="95000"/>
+                  </a:schemeClr>
+                </a:solidFill>
+              </a:rPr>
+              <a:t>rapido</a:t>
+            </a:r>
+            <a:r>
+              <a:rPr sz="1600" dirty="0">
+                <a:solidFill>
+                  <a:schemeClr val="bg1">
+                    <a:lumMod val="95000"/>
+                  </a:schemeClr>
+                </a:solidFill>
+              </a:rPr>
+              <a:t>)</a:t>
+            </a:r>
+            <a:br>
+              <a:rPr sz="1600" dirty="0">
+                <a:solidFill>
+                  <a:schemeClr val="bg1">
+                    <a:lumMod val="95000"/>
+                  </a:schemeClr>
+                </a:solidFill>
+              </a:rPr>
+            </a:br>
+            <a:r>
+              <a:rPr sz="1600" dirty="0">
+                <a:solidFill>
+                  <a:schemeClr val="bg1">
+                    <a:lumMod val="95000"/>
+                  </a:schemeClr>
+                </a:solidFill>
+              </a:rPr>
+              <a:t>const result = await </a:t>
+            </a:r>
+            <a:r>
+              <a:rPr sz="1600" dirty="0" err="1">
+                <a:solidFill>
+                  <a:schemeClr val="bg1">
+                    <a:lumMod val="95000"/>
+                  </a:schemeClr>
+                </a:solidFill>
+              </a:rPr>
+              <a:t>contract.evaluateTransaction</a:t>
+            </a:r>
+            <a:r>
+              <a:rPr sz="1600" dirty="0">
+                <a:solidFill>
+                  <a:schemeClr val="bg1">
+                    <a:lumMod val="95000"/>
+                  </a:schemeClr>
+                </a:solidFill>
+              </a:rPr>
+              <a:t>('</a:t>
+            </a:r>
+            <a:r>
+              <a:rPr sz="1600" dirty="0" err="1">
+                <a:solidFill>
+                  <a:schemeClr val="bg1">
+                    <a:lumMod val="95000"/>
+                  </a:schemeClr>
+                </a:solidFill>
+              </a:rPr>
+              <a:t>ReadProperty</a:t>
+            </a:r>
+            <a:r>
+              <a:rPr sz="1600" dirty="0">
+                <a:solidFill>
+                  <a:schemeClr val="bg1">
+                    <a:lumMod val="95000"/>
+                  </a:schemeClr>
+                </a:solidFill>
+              </a:rPr>
+              <a:t>', 'PROP001');</a:t>
+            </a:r>
+            <a:br>
+              <a:rPr sz="1600" dirty="0">
+                <a:solidFill>
+                  <a:schemeClr val="bg1">
+                    <a:lumMod val="95000"/>
+                  </a:schemeClr>
+                </a:solidFill>
+              </a:rPr>
+            </a:br>
+            <a:r>
+              <a:rPr sz="1600" dirty="0">
+                <a:solidFill>
+                  <a:schemeClr val="bg1">
+                    <a:lumMod val="95000"/>
+                  </a:schemeClr>
+                </a:solidFill>
+              </a:rPr>
+              <a:t>const property = </a:t>
+            </a:r>
+            <a:r>
+              <a:rPr sz="1600" dirty="0" err="1">
+                <a:solidFill>
+                  <a:schemeClr val="bg1">
+                    <a:lumMod val="95000"/>
+                  </a:schemeClr>
+                </a:solidFill>
+              </a:rPr>
+              <a:t>JSON.parse</a:t>
+            </a:r>
+            <a:r>
+              <a:rPr sz="1600" dirty="0">
+                <a:solidFill>
+                  <a:schemeClr val="bg1">
+                    <a:lumMod val="95000"/>
+                  </a:schemeClr>
+                </a:solidFill>
+              </a:rPr>
+              <a:t>(</a:t>
+            </a:r>
+            <a:r>
+              <a:rPr sz="1600" dirty="0" err="1">
+                <a:solidFill>
+                  <a:schemeClr val="bg1">
+                    <a:lumMod val="95000"/>
+                  </a:schemeClr>
+                </a:solidFill>
+              </a:rPr>
+              <a:t>result.toString</a:t>
+            </a:r>
+            <a:r>
+              <a:rPr sz="1600" dirty="0">
+                <a:solidFill>
+                  <a:schemeClr val="bg1">
+                    <a:lumMod val="95000"/>
+                  </a:schemeClr>
+                </a:solidFill>
+              </a:rPr>
+              <a:t>());</a:t>
+            </a:r>
+            <a:br>
+              <a:rPr sz="1600" dirty="0">
+                <a:solidFill>
+                  <a:schemeClr val="bg1">
+                    <a:lumMod val="95000"/>
+                  </a:schemeClr>
+                </a:solidFill>
+              </a:rPr>
+            </a:br>
+            <a:r>
+              <a:rPr sz="1600" dirty="0">
+                <a:solidFill>
+                  <a:schemeClr val="bg1">
+                    <a:lumMod val="95000"/>
+                  </a:schemeClr>
+                </a:solidFill>
+              </a:rPr>
               <a:t>console.log(property);</a:t>
             </a:r>
-            <a:br/>
-            <a:br/>
-            <a:r>
-              <a:t>// SUBMIT: escritura, genera transaccion completa</a:t>
-            </a:r>
-            <a:br/>
-            <a:r>
-              <a:t>// Endorse -&gt; Order -&gt; Commit (mas lento, modifica el ledger)</a:t>
-            </a:r>
-            <a:br/>
-            <a:r>
-              <a:t>await contract.submitTransaction('CreateProperty',</a:t>
-            </a:r>
-            <a:br/>
-            <a:r>
+            <a:br>
+              <a:rPr sz="1600" dirty="0">
+                <a:solidFill>
+                  <a:schemeClr val="bg1">
+                    <a:lumMod val="95000"/>
+                  </a:schemeClr>
+                </a:solidFill>
+              </a:rPr>
+            </a:br>
+            <a:br>
+              <a:rPr sz="1600" dirty="0">
+                <a:solidFill>
+                  <a:schemeClr val="bg1">
+                    <a:lumMod val="95000"/>
+                  </a:schemeClr>
+                </a:solidFill>
+              </a:rPr>
+            </a:br>
+            <a:r>
+              <a:rPr sz="1600" dirty="0">
+                <a:solidFill>
+                  <a:schemeClr val="bg1">
+                    <a:lumMod val="95000"/>
+                  </a:schemeClr>
+                </a:solidFill>
+              </a:rPr>
+              <a:t>// SUBMIT: </a:t>
+            </a:r>
+            <a:r>
+              <a:rPr sz="1600" dirty="0" err="1">
+                <a:solidFill>
+                  <a:schemeClr val="bg1">
+                    <a:lumMod val="95000"/>
+                  </a:schemeClr>
+                </a:solidFill>
+              </a:rPr>
+              <a:t>escritura</a:t>
+            </a:r>
+            <a:r>
+              <a:rPr sz="1600" dirty="0">
+                <a:solidFill>
+                  <a:schemeClr val="bg1">
+                    <a:lumMod val="95000"/>
+                  </a:schemeClr>
+                </a:solidFill>
+              </a:rPr>
+              <a:t>, genera </a:t>
+            </a:r>
+            <a:r>
+              <a:rPr sz="1600" dirty="0" err="1">
+                <a:solidFill>
+                  <a:schemeClr val="bg1">
+                    <a:lumMod val="95000"/>
+                  </a:schemeClr>
+                </a:solidFill>
+              </a:rPr>
+              <a:t>transaccion</a:t>
+            </a:r>
+            <a:r>
+              <a:rPr sz="1600" dirty="0">
+                <a:solidFill>
+                  <a:schemeClr val="bg1">
+                    <a:lumMod val="95000"/>
+                  </a:schemeClr>
+                </a:solidFill>
+              </a:rPr>
+              <a:t> completa</a:t>
+            </a:r>
+            <a:br>
+              <a:rPr sz="1600" dirty="0">
+                <a:solidFill>
+                  <a:schemeClr val="bg1">
+                    <a:lumMod val="95000"/>
+                  </a:schemeClr>
+                </a:solidFill>
+              </a:rPr>
+            </a:br>
+            <a:r>
+              <a:rPr sz="1600" dirty="0">
+                <a:solidFill>
+                  <a:schemeClr val="bg1">
+                    <a:lumMod val="95000"/>
+                  </a:schemeClr>
+                </a:solidFill>
+              </a:rPr>
+              <a:t>// Endorse -&gt; Order -&gt; Commit (mas lento, </a:t>
+            </a:r>
+            <a:r>
+              <a:rPr sz="1600" dirty="0" err="1">
+                <a:solidFill>
+                  <a:schemeClr val="bg1">
+                    <a:lumMod val="95000"/>
+                  </a:schemeClr>
+                </a:solidFill>
+              </a:rPr>
+              <a:t>modifica</a:t>
+            </a:r>
+            <a:r>
+              <a:rPr sz="1600" dirty="0">
+                <a:solidFill>
+                  <a:schemeClr val="bg1">
+                    <a:lumMod val="95000"/>
+                  </a:schemeClr>
+                </a:solidFill>
+              </a:rPr>
+              <a:t> </a:t>
+            </a:r>
+            <a:r>
+              <a:rPr sz="1600" dirty="0" err="1">
+                <a:solidFill>
+                  <a:schemeClr val="bg1">
+                    <a:lumMod val="95000"/>
+                  </a:schemeClr>
+                </a:solidFill>
+              </a:rPr>
+              <a:t>el</a:t>
+            </a:r>
+            <a:r>
+              <a:rPr sz="1600" dirty="0">
+                <a:solidFill>
+                  <a:schemeClr val="bg1">
+                    <a:lumMod val="95000"/>
+                  </a:schemeClr>
+                </a:solidFill>
+              </a:rPr>
+              <a:t> ledger)</a:t>
+            </a:r>
+            <a:br>
+              <a:rPr sz="1600" dirty="0">
+                <a:solidFill>
+                  <a:schemeClr val="bg1">
+                    <a:lumMod val="95000"/>
+                  </a:schemeClr>
+                </a:solidFill>
+              </a:rPr>
+            </a:br>
+            <a:r>
+              <a:rPr sz="1600" dirty="0">
+                <a:solidFill>
+                  <a:schemeClr val="bg1">
+                    <a:lumMod val="95000"/>
+                  </a:schemeClr>
+                </a:solidFill>
+              </a:rPr>
+              <a:t>await </a:t>
+            </a:r>
+            <a:r>
+              <a:rPr sz="1600" dirty="0" err="1">
+                <a:solidFill>
+                  <a:schemeClr val="bg1">
+                    <a:lumMod val="95000"/>
+                  </a:schemeClr>
+                </a:solidFill>
+              </a:rPr>
+              <a:t>contract.submitTransaction</a:t>
+            </a:r>
+            <a:r>
+              <a:rPr sz="1600" dirty="0">
+                <a:solidFill>
+                  <a:schemeClr val="bg1">
+                    <a:lumMod val="95000"/>
+                  </a:schemeClr>
+                </a:solidFill>
+              </a:rPr>
+              <a:t>('</a:t>
+            </a:r>
+            <a:r>
+              <a:rPr sz="1600" dirty="0" err="1">
+                <a:solidFill>
+                  <a:schemeClr val="bg1">
+                    <a:lumMod val="95000"/>
+                  </a:schemeClr>
+                </a:solidFill>
+              </a:rPr>
+              <a:t>CreateProperty</a:t>
+            </a:r>
+            <a:r>
+              <a:rPr sz="1600" dirty="0">
+                <a:solidFill>
+                  <a:schemeClr val="bg1">
+                    <a:lumMod val="95000"/>
+                  </a:schemeClr>
+                </a:solidFill>
+              </a:rPr>
+              <a:t>',</a:t>
+            </a:r>
+            <a:br>
+              <a:rPr sz="1600" dirty="0">
+                <a:solidFill>
+                  <a:schemeClr val="bg1">
+                    <a:lumMod val="95000"/>
+                  </a:schemeClr>
+                </a:solidFill>
+              </a:rPr>
+            </a:br>
+            <a:r>
+              <a:rPr sz="1600" dirty="0">
+                <a:solidFill>
+                  <a:schemeClr val="bg1">
+                    <a:lumMod val="95000"/>
+                  </a:schemeClr>
+                </a:solidFill>
+              </a:rPr>
               <a:t>    'PROP002', 'Calle Mayor 1', 'Org1MSP', '120', 'apartment', '250000');</a:t>
             </a:r>
-            <a:br/>
-            <a:br/>
-            <a:r>
+            <a:br>
+              <a:rPr sz="1600" dirty="0">
+                <a:solidFill>
+                  <a:schemeClr val="bg1">
+                    <a:lumMod val="95000"/>
+                  </a:schemeClr>
+                </a:solidFill>
+              </a:rPr>
+            </a:br>
+            <a:br>
+              <a:rPr sz="1600" dirty="0">
+                <a:solidFill>
+                  <a:schemeClr val="bg1">
+                    <a:lumMod val="95000"/>
+                  </a:schemeClr>
+                </a:solidFill>
+              </a:rPr>
+            </a:br>
+            <a:r>
+              <a:rPr sz="1600" dirty="0">
+                <a:solidFill>
+                  <a:schemeClr val="bg1">
+                    <a:lumMod val="95000"/>
+                  </a:schemeClr>
+                </a:solidFill>
+              </a:rPr>
               <a:t>// SUBMIT con transient data (para Private Data)</a:t>
             </a:r>
-            <a:br/>
-            <a:r>
-              <a:t>const transientData = {</a:t>
-            </a:r>
-            <a:br/>
-            <a:r>
-              <a:t>    price: Buffer.from(JSON.stringify({ amount: 350000, currency: 'EUR' }))</a:t>
-            </a:r>
-            <a:br/>
-            <a:r>
+            <a:br>
+              <a:rPr sz="1600" dirty="0">
+                <a:solidFill>
+                  <a:schemeClr val="bg1">
+                    <a:lumMod val="95000"/>
+                  </a:schemeClr>
+                </a:solidFill>
+              </a:rPr>
+            </a:br>
+            <a:r>
+              <a:rPr sz="1600" dirty="0">
+                <a:solidFill>
+                  <a:schemeClr val="bg1">
+                    <a:lumMod val="95000"/>
+                  </a:schemeClr>
+                </a:solidFill>
+              </a:rPr>
+              <a:t>const </a:t>
+            </a:r>
+            <a:r>
+              <a:rPr sz="1600" dirty="0" err="1">
+                <a:solidFill>
+                  <a:schemeClr val="bg1">
+                    <a:lumMod val="95000"/>
+                  </a:schemeClr>
+                </a:solidFill>
+              </a:rPr>
+              <a:t>transientData</a:t>
+            </a:r>
+            <a:r>
+              <a:rPr sz="1600" dirty="0">
+                <a:solidFill>
+                  <a:schemeClr val="bg1">
+                    <a:lumMod val="95000"/>
+                  </a:schemeClr>
+                </a:solidFill>
+              </a:rPr>
+              <a:t> = {</a:t>
+            </a:r>
+            <a:br>
+              <a:rPr sz="1600" dirty="0">
+                <a:solidFill>
+                  <a:schemeClr val="bg1">
+                    <a:lumMod val="95000"/>
+                  </a:schemeClr>
+                </a:solidFill>
+              </a:rPr>
+            </a:br>
+            <a:r>
+              <a:rPr sz="1600" dirty="0">
+                <a:solidFill>
+                  <a:schemeClr val="bg1">
+                    <a:lumMod val="95000"/>
+                  </a:schemeClr>
+                </a:solidFill>
+              </a:rPr>
+              <a:t>    price: </a:t>
+            </a:r>
+            <a:r>
+              <a:rPr sz="1600" dirty="0" err="1">
+                <a:solidFill>
+                  <a:schemeClr val="bg1">
+                    <a:lumMod val="95000"/>
+                  </a:schemeClr>
+                </a:solidFill>
+              </a:rPr>
+              <a:t>Buffer.from</a:t>
+            </a:r>
+            <a:r>
+              <a:rPr sz="1600" dirty="0">
+                <a:solidFill>
+                  <a:schemeClr val="bg1">
+                    <a:lumMod val="95000"/>
+                  </a:schemeClr>
+                </a:solidFill>
+              </a:rPr>
+              <a:t>(</a:t>
+            </a:r>
+            <a:r>
+              <a:rPr sz="1600" dirty="0" err="1">
+                <a:solidFill>
+                  <a:schemeClr val="bg1">
+                    <a:lumMod val="95000"/>
+                  </a:schemeClr>
+                </a:solidFill>
+              </a:rPr>
+              <a:t>JSON.stringify</a:t>
+            </a:r>
+            <a:r>
+              <a:rPr sz="1600" dirty="0">
+                <a:solidFill>
+                  <a:schemeClr val="bg1">
+                    <a:lumMod val="95000"/>
+                  </a:schemeClr>
+                </a:solidFill>
+              </a:rPr>
+              <a:t>({ amount: 350000, currency: 'EUR' }))</a:t>
+            </a:r>
+            <a:br>
+              <a:rPr sz="1600" dirty="0">
+                <a:solidFill>
+                  <a:schemeClr val="bg1">
+                    <a:lumMod val="95000"/>
+                  </a:schemeClr>
+                </a:solidFill>
+              </a:rPr>
+            </a:br>
+            <a:r>
+              <a:rPr sz="1600" dirty="0">
+                <a:solidFill>
+                  <a:schemeClr val="bg1">
+                    <a:lumMod val="95000"/>
+                  </a:schemeClr>
+                </a:solidFill>
+              </a:rPr>
               <a:t>};</a:t>
             </a:r>
-            <a:br/>
-            <a:r>
-              <a:t>await contract.createTransaction('SetPrivatePrice')</a:t>
-            </a:r>
-            <a:br/>
-            <a:r>
-              <a:t>    .setTransient(transientData)</a:t>
-            </a:r>
-            <a:br/>
-            <a:r>
-              <a:t>    .submit('PROP001');</a:t>
-            </a:r>
-            <a:br/>
-            <a:br/>
-            <a:r>
+          </a:p>
+        </p:txBody>
+      </p:sp>
+      <p:sp>
+        <p:nvSpPr>
+          <p:cNvPr id="10" name="CuadroTexto 9">
+            <a:extLst>
+              <a:ext uri="{FF2B5EF4-FFF2-40B4-BE49-F238E27FC236}">
+                <a16:creationId xmlns:a16="http://schemas.microsoft.com/office/drawing/2014/main" id="{D28C29F8-48FE-B39E-0CBC-302D25D6E187}"/>
+              </a:ext>
+            </a:extLst>
+          </p:cNvPr>
+          <p:cNvSpPr txBox="1"/>
+          <p:nvPr/>
+        </p:nvSpPr>
+        <p:spPr>
+          <a:xfrm>
+            <a:off x="6987355" y="1645920"/>
+            <a:ext cx="4565309" cy="2800767"/>
+          </a:xfrm>
+          <a:prstGeom prst="rect">
+            <a:avLst/>
+          </a:prstGeom>
+          <a:noFill/>
+        </p:spPr>
+        <p:txBody>
+          <a:bodyPr wrap="square">
+            <a:spAutoFit/>
+          </a:bodyPr>
+          <a:lstStyle/>
+          <a:p>
+            <a:br>
+              <a:rPr lang="es-ES" sz="1600" dirty="0">
+                <a:solidFill>
+                  <a:schemeClr val="bg1">
+                    <a:lumMod val="95000"/>
+                  </a:schemeClr>
+                </a:solidFill>
+              </a:rPr>
+            </a:br>
+            <a:r>
+              <a:rPr lang="es-ES" sz="1600" dirty="0" err="1">
+                <a:solidFill>
+                  <a:schemeClr val="bg1">
+                    <a:lumMod val="95000"/>
+                  </a:schemeClr>
+                </a:solidFill>
+              </a:rPr>
+              <a:t>await</a:t>
+            </a:r>
+            <a:r>
+              <a:rPr lang="es-ES" sz="1600" dirty="0">
+                <a:solidFill>
+                  <a:schemeClr val="bg1">
+                    <a:lumMod val="95000"/>
+                  </a:schemeClr>
+                </a:solidFill>
+              </a:rPr>
+              <a:t> </a:t>
+            </a:r>
+            <a:r>
+              <a:rPr lang="es-ES" sz="1600" dirty="0" err="1">
+                <a:solidFill>
+                  <a:schemeClr val="bg1">
+                    <a:lumMod val="95000"/>
+                  </a:schemeClr>
+                </a:solidFill>
+              </a:rPr>
+              <a:t>contract.createTransaction</a:t>
+            </a:r>
+            <a:r>
+              <a:rPr lang="es-ES" sz="1600" dirty="0">
+                <a:solidFill>
+                  <a:schemeClr val="bg1">
+                    <a:lumMod val="95000"/>
+                  </a:schemeClr>
+                </a:solidFill>
+              </a:rPr>
+              <a:t>('</a:t>
+            </a:r>
+            <a:r>
+              <a:rPr lang="es-ES" sz="1600" dirty="0" err="1">
+                <a:solidFill>
+                  <a:schemeClr val="bg1">
+                    <a:lumMod val="95000"/>
+                  </a:schemeClr>
+                </a:solidFill>
+              </a:rPr>
+              <a:t>SetPrivatePrice</a:t>
+            </a:r>
+            <a:r>
+              <a:rPr lang="es-ES" sz="1600" dirty="0">
+                <a:solidFill>
+                  <a:schemeClr val="bg1">
+                    <a:lumMod val="95000"/>
+                  </a:schemeClr>
+                </a:solidFill>
+              </a:rPr>
+              <a:t>')</a:t>
+            </a:r>
+            <a:br>
+              <a:rPr lang="es-ES" sz="1600" dirty="0">
+                <a:solidFill>
+                  <a:schemeClr val="bg1">
+                    <a:lumMod val="95000"/>
+                  </a:schemeClr>
+                </a:solidFill>
+              </a:rPr>
+            </a:br>
+            <a:r>
+              <a:rPr lang="es-ES" sz="1600" dirty="0">
+                <a:solidFill>
+                  <a:schemeClr val="bg1">
+                    <a:lumMod val="95000"/>
+                  </a:schemeClr>
+                </a:solidFill>
+              </a:rPr>
+              <a:t>    .</a:t>
+            </a:r>
+            <a:r>
+              <a:rPr lang="es-ES" sz="1600" dirty="0" err="1">
+                <a:solidFill>
+                  <a:schemeClr val="bg1">
+                    <a:lumMod val="95000"/>
+                  </a:schemeClr>
+                </a:solidFill>
+              </a:rPr>
+              <a:t>setTransient</a:t>
+            </a:r>
+            <a:r>
+              <a:rPr lang="es-ES" sz="1600" dirty="0">
+                <a:solidFill>
+                  <a:schemeClr val="bg1">
+                    <a:lumMod val="95000"/>
+                  </a:schemeClr>
+                </a:solidFill>
+              </a:rPr>
+              <a:t>(</a:t>
+            </a:r>
+            <a:r>
+              <a:rPr lang="es-ES" sz="1600" dirty="0" err="1">
+                <a:solidFill>
+                  <a:schemeClr val="bg1">
+                    <a:lumMod val="95000"/>
+                  </a:schemeClr>
+                </a:solidFill>
+              </a:rPr>
+              <a:t>transientData</a:t>
+            </a:r>
+            <a:r>
+              <a:rPr lang="es-ES" sz="1600" dirty="0">
+                <a:solidFill>
+                  <a:schemeClr val="bg1">
+                    <a:lumMod val="95000"/>
+                  </a:schemeClr>
+                </a:solidFill>
+              </a:rPr>
+              <a:t>)</a:t>
+            </a:r>
+            <a:br>
+              <a:rPr lang="es-ES" sz="1600" dirty="0">
+                <a:solidFill>
+                  <a:schemeClr val="bg1">
+                    <a:lumMod val="95000"/>
+                  </a:schemeClr>
+                </a:solidFill>
+              </a:rPr>
+            </a:br>
+            <a:r>
+              <a:rPr lang="es-ES" sz="1600" dirty="0">
+                <a:solidFill>
+                  <a:schemeClr val="bg1">
+                    <a:lumMod val="95000"/>
+                  </a:schemeClr>
+                </a:solidFill>
+              </a:rPr>
+              <a:t>    .</a:t>
+            </a:r>
+            <a:r>
+              <a:rPr lang="es-ES" sz="1600" dirty="0" err="1">
+                <a:solidFill>
+                  <a:schemeClr val="bg1">
+                    <a:lumMod val="95000"/>
+                  </a:schemeClr>
+                </a:solidFill>
+              </a:rPr>
+              <a:t>submit</a:t>
+            </a:r>
+            <a:r>
+              <a:rPr lang="es-ES" sz="1600" dirty="0">
+                <a:solidFill>
+                  <a:schemeClr val="bg1">
+                    <a:lumMod val="95000"/>
+                  </a:schemeClr>
+                </a:solidFill>
+              </a:rPr>
+              <a:t>('PROP001');</a:t>
+            </a:r>
+            <a:br>
+              <a:rPr lang="es-ES" sz="1600" dirty="0">
+                <a:solidFill>
+                  <a:schemeClr val="bg1">
+                    <a:lumMod val="95000"/>
+                  </a:schemeClr>
+                </a:solidFill>
+              </a:rPr>
+            </a:br>
+            <a:br>
+              <a:rPr lang="es-ES" sz="1600" dirty="0">
+                <a:solidFill>
+                  <a:schemeClr val="bg1">
+                    <a:lumMod val="95000"/>
+                  </a:schemeClr>
+                </a:solidFill>
+              </a:rPr>
+            </a:br>
+            <a:r>
+              <a:rPr lang="es-ES" sz="1600" dirty="0">
+                <a:solidFill>
+                  <a:schemeClr val="bg1">
+                    <a:lumMod val="95000"/>
+                  </a:schemeClr>
+                </a:solidFill>
+              </a:rPr>
               <a:t>// Escuchar eventos</a:t>
             </a:r>
-            <a:br/>
-            <a:r>
-              <a:t>await contract.addContractListener(async (event) =&gt; {</a:t>
-            </a:r>
-            <a:br/>
-            <a:r>
-              <a:t>    console.log(`Evento: ${event.eventName}`);</a:t>
-            </a:r>
-            <a:br/>
-            <a:r>
-              <a:t>    console.log(`Payload: ${event.payload.toString()}`);</a:t>
-            </a:r>
-            <a:br/>
-            <a:r>
+            <a:br>
+              <a:rPr lang="es-ES" sz="1600" dirty="0">
+                <a:solidFill>
+                  <a:schemeClr val="bg1">
+                    <a:lumMod val="95000"/>
+                  </a:schemeClr>
+                </a:solidFill>
+              </a:rPr>
+            </a:br>
+            <a:r>
+              <a:rPr lang="es-ES" sz="1600" dirty="0" err="1">
+                <a:solidFill>
+                  <a:schemeClr val="bg1">
+                    <a:lumMod val="95000"/>
+                  </a:schemeClr>
+                </a:solidFill>
+              </a:rPr>
+              <a:t>await</a:t>
+            </a:r>
+            <a:r>
+              <a:rPr lang="es-ES" sz="1600" dirty="0">
+                <a:solidFill>
+                  <a:schemeClr val="bg1">
+                    <a:lumMod val="95000"/>
+                  </a:schemeClr>
+                </a:solidFill>
+              </a:rPr>
+              <a:t> </a:t>
+            </a:r>
+            <a:r>
+              <a:rPr lang="es-ES" sz="1600" dirty="0" err="1">
+                <a:solidFill>
+                  <a:schemeClr val="bg1">
+                    <a:lumMod val="95000"/>
+                  </a:schemeClr>
+                </a:solidFill>
+              </a:rPr>
+              <a:t>contract.addContractListener</a:t>
+            </a:r>
+            <a:r>
+              <a:rPr lang="es-ES" sz="1600" dirty="0">
+                <a:solidFill>
+                  <a:schemeClr val="bg1">
+                    <a:lumMod val="95000"/>
+                  </a:schemeClr>
+                </a:solidFill>
+              </a:rPr>
+              <a:t>(</a:t>
+            </a:r>
+            <a:r>
+              <a:rPr lang="es-ES" sz="1600" dirty="0" err="1">
+                <a:solidFill>
+                  <a:schemeClr val="bg1">
+                    <a:lumMod val="95000"/>
+                  </a:schemeClr>
+                </a:solidFill>
+              </a:rPr>
+              <a:t>async</a:t>
+            </a:r>
+            <a:r>
+              <a:rPr lang="es-ES" sz="1600" dirty="0">
+                <a:solidFill>
+                  <a:schemeClr val="bg1">
+                    <a:lumMod val="95000"/>
+                  </a:schemeClr>
+                </a:solidFill>
+              </a:rPr>
+              <a:t> (</a:t>
+            </a:r>
+            <a:r>
+              <a:rPr lang="es-ES" sz="1600" dirty="0" err="1">
+                <a:solidFill>
+                  <a:schemeClr val="bg1">
+                    <a:lumMod val="95000"/>
+                  </a:schemeClr>
+                </a:solidFill>
+              </a:rPr>
+              <a:t>event</a:t>
+            </a:r>
+            <a:r>
+              <a:rPr lang="es-ES" sz="1600" dirty="0">
+                <a:solidFill>
+                  <a:schemeClr val="bg1">
+                    <a:lumMod val="95000"/>
+                  </a:schemeClr>
+                </a:solidFill>
+              </a:rPr>
+              <a:t>) =&gt; {</a:t>
+            </a:r>
+            <a:br>
+              <a:rPr lang="es-ES" sz="1600" dirty="0">
+                <a:solidFill>
+                  <a:schemeClr val="bg1">
+                    <a:lumMod val="95000"/>
+                  </a:schemeClr>
+                </a:solidFill>
+              </a:rPr>
+            </a:br>
+            <a:r>
+              <a:rPr lang="es-ES" sz="1600" dirty="0">
+                <a:solidFill>
+                  <a:schemeClr val="bg1">
+                    <a:lumMod val="95000"/>
+                  </a:schemeClr>
+                </a:solidFill>
+              </a:rPr>
+              <a:t>    console.log(`Evento: ${</a:t>
+            </a:r>
+            <a:r>
+              <a:rPr lang="es-ES" sz="1600" dirty="0" err="1">
+                <a:solidFill>
+                  <a:schemeClr val="bg1">
+                    <a:lumMod val="95000"/>
+                  </a:schemeClr>
+                </a:solidFill>
+              </a:rPr>
+              <a:t>event.eventName</a:t>
+            </a:r>
+            <a:r>
+              <a:rPr lang="es-ES" sz="1600" dirty="0">
+                <a:solidFill>
+                  <a:schemeClr val="bg1">
+                    <a:lumMod val="95000"/>
+                  </a:schemeClr>
+                </a:solidFill>
+              </a:rPr>
+              <a:t>}`);</a:t>
+            </a:r>
+            <a:br>
+              <a:rPr lang="es-ES" sz="1600" dirty="0">
+                <a:solidFill>
+                  <a:schemeClr val="bg1">
+                    <a:lumMod val="95000"/>
+                  </a:schemeClr>
+                </a:solidFill>
+              </a:rPr>
+            </a:br>
+            <a:r>
+              <a:rPr lang="es-ES" sz="1600" dirty="0">
+                <a:solidFill>
+                  <a:schemeClr val="bg1">
+                    <a:lumMod val="95000"/>
+                  </a:schemeClr>
+                </a:solidFill>
+              </a:rPr>
+              <a:t>    console.log(`</a:t>
+            </a:r>
+            <a:r>
+              <a:rPr lang="es-ES" sz="1600" dirty="0" err="1">
+                <a:solidFill>
+                  <a:schemeClr val="bg1">
+                    <a:lumMod val="95000"/>
+                  </a:schemeClr>
+                </a:solidFill>
+              </a:rPr>
+              <a:t>Payload</a:t>
+            </a:r>
+            <a:r>
+              <a:rPr lang="es-ES" sz="1600" dirty="0">
+                <a:solidFill>
+                  <a:schemeClr val="bg1">
+                    <a:lumMod val="95000"/>
+                  </a:schemeClr>
+                </a:solidFill>
+              </a:rPr>
+              <a:t>: ${</a:t>
+            </a:r>
+            <a:r>
+              <a:rPr lang="es-ES" sz="1600" dirty="0" err="1">
+                <a:solidFill>
+                  <a:schemeClr val="bg1">
+                    <a:lumMod val="95000"/>
+                  </a:schemeClr>
+                </a:solidFill>
+              </a:rPr>
+              <a:t>event.payload.toString</a:t>
+            </a:r>
+            <a:r>
+              <a:rPr lang="es-ES" sz="1600" dirty="0">
+                <a:solidFill>
+                  <a:schemeClr val="bg1">
+                    <a:lumMod val="95000"/>
+                  </a:schemeClr>
+                </a:solidFill>
+              </a:rPr>
+              <a:t>()}`);</a:t>
+            </a:r>
+            <a:br>
+              <a:rPr lang="es-ES" sz="1600" dirty="0">
+                <a:solidFill>
+                  <a:schemeClr val="bg1">
+                    <a:lumMod val="95000"/>
+                  </a:schemeClr>
+                </a:solidFill>
+              </a:rPr>
+            </a:br>
+            <a:r>
+              <a:rPr lang="es-ES" sz="1600" dirty="0">
+                <a:solidFill>
+                  <a:schemeClr val="bg1">
+                    <a:lumMod val="95000"/>
+                  </a:schemeClr>
+                </a:solidFill>
+              </a:rPr>
               <a:t>});</a:t>
             </a:r>
+            <a:endParaRPr lang="es-ES" sz="1600" dirty="0"/>
+          </a:p>
+        </p:txBody>
+      </p:sp>
+      <p:sp>
+        <p:nvSpPr>
+          <p:cNvPr id="11" name="Rectángulo 10">
+            <a:extLst>
+              <a:ext uri="{FF2B5EF4-FFF2-40B4-BE49-F238E27FC236}">
+                <a16:creationId xmlns:a16="http://schemas.microsoft.com/office/drawing/2014/main" id="{38CF326F-D019-3A59-B7D1-4F4B9DE2949A}"/>
+              </a:ext>
+            </a:extLst>
+          </p:cNvPr>
+          <p:cNvSpPr/>
+          <p:nvPr/>
+        </p:nvSpPr>
+        <p:spPr>
+          <a:xfrm>
+            <a:off x="6579220" y="1417320"/>
+            <a:ext cx="45719" cy="5120640"/>
+          </a:xfrm>
+          <a:prstGeom prst="rect">
+            <a:avLst/>
+          </a:prstGeom>
+        </p:spPr>
+        <p:style>
+          <a:lnRef idx="1">
+            <a:schemeClr val="accent1"/>
+          </a:lnRef>
+          <a:fillRef idx="3">
+            <a:schemeClr val="accent1"/>
+          </a:fillRef>
+          <a:effectRef idx="2">
+            <a:schemeClr val="accent1"/>
+          </a:effectRef>
+          <a:fontRef idx="minor">
+            <a:schemeClr val="lt1"/>
+          </a:fontRef>
+        </p:style>
+        <p:txBody>
+          <a:bodyPr rtlCol="0" anchor="ctr"/>
+          <a:lstStyle/>
+          <a:p>
+            <a:pPr algn="ctr"/>
+            <a:endParaRPr lang="es-ES"/>
           </a:p>
         </p:txBody>
       </p:sp>
@@ -9413,7 +14600,7 @@
 </file>
 
 <file path=ppt/slides/slide8.xml><?xml version="1.0" encoding="utf-8"?>
-<p:sld xmlns:a="http://schemas.openxmlformats.org/drawingml/2006/main" xmlns:p="http://schemas.openxmlformats.org/presentationml/2006/main" xmlns:r="http://schemas.openxmlformats.org/officeDocument/2006/relationships">
+<p:sld xmlns:a="http://schemas.openxmlformats.org/drawingml/2006/main" xmlns:r="http://schemas.openxmlformats.org/officeDocument/2006/relationships" xmlns:p="http://schemas.openxmlformats.org/presentationml/2006/main">
   <p:cSld>
     <p:spTree>
       <p:nvGrpSpPr>
@@ -9421,7 +14608,14 @@
         <p:cNvGrpSpPr/>
         <p:nvPr/>
       </p:nvGrpSpPr>
-      <p:grpSpPr/>
+      <p:grpSpPr>
+        <a:xfrm>
+          <a:off x="0" y="0"/>
+          <a:ext cx="0" cy="0"/>
+          <a:chOff x="0" y="0"/>
+          <a:chExt cx="0" cy="0"/>
+        </a:xfrm>
+      </p:grpSpPr>
       <p:sp>
         <p:nvSpPr>
           <p:cNvPr id="2" name="Rectangle 1"/>
@@ -9462,6 +14656,7 @@
           <a:lstStyle/>
           <a:p>
             <a:pPr algn="ctr"/>
+            <a:endParaRPr/>
           </a:p>
         </p:txBody>
       </p:sp>
@@ -9573,6 +14768,7 @@
           <a:lstStyle/>
           <a:p>
             <a:pPr algn="ctr"/>
+            <a:endParaRPr/>
           </a:p>
         </p:txBody>
       </p:sp>
@@ -9650,6 +14846,7 @@
           <a:lstStyle/>
           <a:p>
             <a:pPr algn="ctr"/>
+            <a:endParaRPr/>
           </a:p>
         </p:txBody>
       </p:sp>
@@ -9662,7 +14859,7 @@
         <p:spPr>
           <a:xfrm>
             <a:off x="731520" y="1600200"/>
-            <a:ext cx="10698480" cy="4754880"/>
+            <a:ext cx="5033660" cy="4754880"/>
           </a:xfrm>
           <a:prstGeom prst="rect">
             <a:avLst/>
@@ -9673,125 +14870,1286 @@
           <a:bodyPr wrap="square"/>
           <a:lstStyle/>
           <a:p>
-            <a:br/>
-            <a:pPr algn="l">
-              <a:defRPr sz="1500" b="0">
-                <a:solidFill>
-                  <a:srgbClr val="D4D4D4"/>
-                </a:solidFill>
-                <a:latin typeface="Consolas"/>
-              </a:defRPr>
-            </a:pPr>
-            <a:r>
+            <a:br>
+              <a:rPr sz="1600" dirty="0">
+                <a:solidFill>
+                  <a:schemeClr val="bg1">
+                    <a:lumMod val="95000"/>
+                  </a:schemeClr>
+                </a:solidFill>
+              </a:rPr>
+            </a:br>
+            <a:r>
+              <a:rPr sz="1600" dirty="0">
+                <a:solidFill>
+                  <a:schemeClr val="bg1">
+                    <a:lumMod val="95000"/>
+                  </a:schemeClr>
+                </a:solidFill>
+              </a:rPr>
               <a:t>package main</a:t>
             </a:r>
-            <a:br/>
-            <a:br/>
-            <a:r>
+            <a:br>
+              <a:rPr sz="1600" dirty="0">
+                <a:solidFill>
+                  <a:schemeClr val="bg1">
+                    <a:lumMod val="95000"/>
+                  </a:schemeClr>
+                </a:solidFill>
+              </a:rPr>
+            </a:br>
+            <a:br>
+              <a:rPr sz="1600" dirty="0">
+                <a:solidFill>
+                  <a:schemeClr val="bg1">
+                    <a:lumMod val="95000"/>
+                  </a:schemeClr>
+                </a:solidFill>
+              </a:rPr>
+            </a:br>
+            <a:r>
+              <a:rPr sz="1600" dirty="0">
+                <a:solidFill>
+                  <a:schemeClr val="bg1">
+                    <a:lumMod val="95000"/>
+                  </a:schemeClr>
+                </a:solidFill>
+              </a:rPr>
               <a:t>import (</a:t>
             </a:r>
-            <a:br/>
-            <a:r>
-              <a:t>    "github.com/hyperledger/fabric-gateway/pkg/client"</a:t>
-            </a:r>
-            <a:br/>
-            <a:r>
-              <a:t>    "google.golang.org/grpc"</a:t>
-            </a:r>
-            <a:br/>
-            <a:r>
+            <a:br>
+              <a:rPr sz="1600" dirty="0">
+                <a:solidFill>
+                  <a:schemeClr val="bg1">
+                    <a:lumMod val="95000"/>
+                  </a:schemeClr>
+                </a:solidFill>
+              </a:rPr>
+            </a:br>
+            <a:r>
+              <a:rPr sz="1600" dirty="0">
+                <a:solidFill>
+                  <a:schemeClr val="bg1">
+                    <a:lumMod val="95000"/>
+                  </a:schemeClr>
+                </a:solidFill>
+              </a:rPr>
+              <a:t>    "github.com/</a:t>
+            </a:r>
+            <a:r>
+              <a:rPr sz="1600" dirty="0" err="1">
+                <a:solidFill>
+                  <a:schemeClr val="bg1">
+                    <a:lumMod val="95000"/>
+                  </a:schemeClr>
+                </a:solidFill>
+              </a:rPr>
+              <a:t>hyperledger</a:t>
+            </a:r>
+            <a:r>
+              <a:rPr sz="1600" dirty="0">
+                <a:solidFill>
+                  <a:schemeClr val="bg1">
+                    <a:lumMod val="95000"/>
+                  </a:schemeClr>
+                </a:solidFill>
+              </a:rPr>
+              <a:t>/fabric-gateway/pkg/client"</a:t>
+            </a:r>
+            <a:br>
+              <a:rPr sz="1600" dirty="0">
+                <a:solidFill>
+                  <a:schemeClr val="bg1">
+                    <a:lumMod val="95000"/>
+                  </a:schemeClr>
+                </a:solidFill>
+              </a:rPr>
+            </a:br>
+            <a:r>
+              <a:rPr sz="1600" dirty="0">
+                <a:solidFill>
+                  <a:schemeClr val="bg1">
+                    <a:lumMod val="95000"/>
+                  </a:schemeClr>
+                </a:solidFill>
+              </a:rPr>
+              <a:t>    "google.golang.org/</a:t>
+            </a:r>
+            <a:r>
+              <a:rPr sz="1600" dirty="0" err="1">
+                <a:solidFill>
+                  <a:schemeClr val="bg1">
+                    <a:lumMod val="95000"/>
+                  </a:schemeClr>
+                </a:solidFill>
+              </a:rPr>
+              <a:t>grpc</a:t>
+            </a:r>
+            <a:r>
+              <a:rPr sz="1600" dirty="0">
+                <a:solidFill>
+                  <a:schemeClr val="bg1">
+                    <a:lumMod val="95000"/>
+                  </a:schemeClr>
+                </a:solidFill>
+              </a:rPr>
+              <a:t>"</a:t>
+            </a:r>
+            <a:br>
+              <a:rPr sz="1600" dirty="0">
+                <a:solidFill>
+                  <a:schemeClr val="bg1">
+                    <a:lumMod val="95000"/>
+                  </a:schemeClr>
+                </a:solidFill>
+              </a:rPr>
+            </a:br>
+            <a:r>
+              <a:rPr sz="1600" dirty="0">
+                <a:solidFill>
+                  <a:schemeClr val="bg1">
+                    <a:lumMod val="95000"/>
+                  </a:schemeClr>
+                </a:solidFill>
+              </a:rPr>
               <a:t>    "crypto/x509"</a:t>
             </a:r>
-            <a:br/>
-            <a:r>
+            <a:br>
+              <a:rPr sz="1600" dirty="0">
+                <a:solidFill>
+                  <a:schemeClr val="bg1">
+                    <a:lumMod val="95000"/>
+                  </a:schemeClr>
+                </a:solidFill>
+              </a:rPr>
+            </a:br>
+            <a:r>
+              <a:rPr sz="1600" dirty="0">
+                <a:solidFill>
+                  <a:schemeClr val="bg1">
+                    <a:lumMod val="95000"/>
+                  </a:schemeClr>
+                </a:solidFill>
+              </a:rPr>
               <a:t>)</a:t>
             </a:r>
-            <a:br/>
-            <a:br/>
-            <a:r>
-              <a:t>func main() {</a:t>
-            </a:r>
-            <a:br/>
-            <a:r>
-              <a:t>    // 1. Conexion gRPC al peer</a:t>
-            </a:r>
-            <a:br/>
-            <a:r>
-              <a:t>    clientConnection, _ := grpc.NewClient("localhost:7051", grpc.WithTransportCredentials(...))</a:t>
-            </a:r>
-            <a:br/>
-            <a:r>
-              <a:t>    defer clientConnection.Close()</a:t>
-            </a:r>
-            <a:br/>
-            <a:br/>
-            <a:r>
-              <a:t>    // 2. Crear identidad</a:t>
-            </a:r>
-            <a:br/>
-            <a:r>
+            <a:br>
+              <a:rPr sz="1600" dirty="0">
+                <a:solidFill>
+                  <a:schemeClr val="bg1">
+                    <a:lumMod val="95000"/>
+                  </a:schemeClr>
+                </a:solidFill>
+              </a:rPr>
+            </a:br>
+            <a:br>
+              <a:rPr sz="1600" dirty="0">
+                <a:solidFill>
+                  <a:schemeClr val="bg1">
+                    <a:lumMod val="95000"/>
+                  </a:schemeClr>
+                </a:solidFill>
+              </a:rPr>
+            </a:br>
+            <a:r>
+              <a:rPr sz="1600" dirty="0" err="1">
+                <a:solidFill>
+                  <a:schemeClr val="bg1">
+                    <a:lumMod val="95000"/>
+                  </a:schemeClr>
+                </a:solidFill>
+              </a:rPr>
+              <a:t>func</a:t>
+            </a:r>
+            <a:r>
+              <a:rPr sz="1600" dirty="0">
+                <a:solidFill>
+                  <a:schemeClr val="bg1">
+                    <a:lumMod val="95000"/>
+                  </a:schemeClr>
+                </a:solidFill>
+              </a:rPr>
+              <a:t> main() {</a:t>
+            </a:r>
+            <a:br>
+              <a:rPr sz="1600" dirty="0">
+                <a:solidFill>
+                  <a:schemeClr val="bg1">
+                    <a:lumMod val="95000"/>
+                  </a:schemeClr>
+                </a:solidFill>
+              </a:rPr>
+            </a:br>
+            <a:r>
+              <a:rPr sz="1600" dirty="0">
+                <a:solidFill>
+                  <a:schemeClr val="bg1">
+                    <a:lumMod val="95000"/>
+                  </a:schemeClr>
+                </a:solidFill>
+              </a:rPr>
+              <a:t>    // 1. Conexion </a:t>
+            </a:r>
+            <a:r>
+              <a:rPr sz="1600" dirty="0" err="1">
+                <a:solidFill>
+                  <a:schemeClr val="bg1">
+                    <a:lumMod val="95000"/>
+                  </a:schemeClr>
+                </a:solidFill>
+              </a:rPr>
+              <a:t>gRPC</a:t>
+            </a:r>
+            <a:r>
+              <a:rPr sz="1600" dirty="0">
+                <a:solidFill>
+                  <a:schemeClr val="bg1">
+                    <a:lumMod val="95000"/>
+                  </a:schemeClr>
+                </a:solidFill>
+              </a:rPr>
+              <a:t> al peer</a:t>
+            </a:r>
+            <a:br>
+              <a:rPr sz="1600" dirty="0">
+                <a:solidFill>
+                  <a:schemeClr val="bg1">
+                    <a:lumMod val="95000"/>
+                  </a:schemeClr>
+                </a:solidFill>
+              </a:rPr>
+            </a:br>
+            <a:r>
+              <a:rPr sz="1600" dirty="0">
+                <a:solidFill>
+                  <a:schemeClr val="bg1">
+                    <a:lumMod val="95000"/>
+                  </a:schemeClr>
+                </a:solidFill>
+              </a:rPr>
+              <a:t>    </a:t>
+            </a:r>
+            <a:r>
+              <a:rPr sz="1600" dirty="0" err="1">
+                <a:solidFill>
+                  <a:schemeClr val="bg1">
+                    <a:lumMod val="95000"/>
+                  </a:schemeClr>
+                </a:solidFill>
+              </a:rPr>
+              <a:t>clientConnection</a:t>
+            </a:r>
+            <a:r>
+              <a:rPr sz="1600" dirty="0">
+                <a:solidFill>
+                  <a:schemeClr val="bg1">
+                    <a:lumMod val="95000"/>
+                  </a:schemeClr>
+                </a:solidFill>
+              </a:rPr>
+              <a:t>, _ := </a:t>
+            </a:r>
+            <a:r>
+              <a:rPr sz="1600" dirty="0" err="1">
+                <a:solidFill>
+                  <a:schemeClr val="bg1">
+                    <a:lumMod val="95000"/>
+                  </a:schemeClr>
+                </a:solidFill>
+              </a:rPr>
+              <a:t>grpc.NewClient</a:t>
+            </a:r>
+            <a:r>
+              <a:rPr sz="1600" dirty="0">
+                <a:solidFill>
+                  <a:schemeClr val="bg1">
+                    <a:lumMod val="95000"/>
+                  </a:schemeClr>
+                </a:solidFill>
+              </a:rPr>
+              <a:t>("localhost:7051", </a:t>
+            </a:r>
+            <a:r>
+              <a:rPr sz="1600" dirty="0" err="1">
+                <a:solidFill>
+                  <a:schemeClr val="bg1">
+                    <a:lumMod val="95000"/>
+                  </a:schemeClr>
+                </a:solidFill>
+              </a:rPr>
+              <a:t>grpc.WithTransportCredentials</a:t>
+            </a:r>
+            <a:r>
+              <a:rPr sz="1600" dirty="0">
+                <a:solidFill>
+                  <a:schemeClr val="bg1">
+                    <a:lumMod val="95000"/>
+                  </a:schemeClr>
+                </a:solidFill>
+              </a:rPr>
+              <a:t>(...))</a:t>
+            </a:r>
+            <a:br>
+              <a:rPr sz="1600" dirty="0">
+                <a:solidFill>
+                  <a:schemeClr val="bg1">
+                    <a:lumMod val="95000"/>
+                  </a:schemeClr>
+                </a:solidFill>
+              </a:rPr>
+            </a:br>
+            <a:r>
+              <a:rPr sz="1600" dirty="0">
+                <a:solidFill>
+                  <a:schemeClr val="bg1">
+                    <a:lumMod val="95000"/>
+                  </a:schemeClr>
+                </a:solidFill>
+              </a:rPr>
+              <a:t>    defer </a:t>
+            </a:r>
+            <a:r>
+              <a:rPr sz="1600" dirty="0" err="1">
+                <a:solidFill>
+                  <a:schemeClr val="bg1">
+                    <a:lumMod val="95000"/>
+                  </a:schemeClr>
+                </a:solidFill>
+              </a:rPr>
+              <a:t>clientConnection.Close</a:t>
+            </a:r>
+            <a:r>
+              <a:rPr sz="1600" dirty="0">
+                <a:solidFill>
+                  <a:schemeClr val="bg1">
+                    <a:lumMod val="95000"/>
+                  </a:schemeClr>
+                </a:solidFill>
+              </a:rPr>
+              <a:t>()</a:t>
+            </a:r>
+            <a:br>
+              <a:rPr sz="1600" dirty="0">
+                <a:solidFill>
+                  <a:schemeClr val="bg1">
+                    <a:lumMod val="95000"/>
+                  </a:schemeClr>
+                </a:solidFill>
+              </a:rPr>
+            </a:br>
+            <a:br>
+              <a:rPr sz="1600" dirty="0">
+                <a:solidFill>
+                  <a:schemeClr val="bg1">
+                    <a:lumMod val="95000"/>
+                  </a:schemeClr>
+                </a:solidFill>
+              </a:rPr>
+            </a:br>
+            <a:r>
+              <a:rPr sz="1600" dirty="0">
+                <a:solidFill>
+                  <a:schemeClr val="bg1">
+                    <a:lumMod val="95000"/>
+                  </a:schemeClr>
+                </a:solidFill>
+              </a:rPr>
+              <a:t>    // 2. Crear </a:t>
+            </a:r>
+            <a:r>
+              <a:rPr sz="1600" dirty="0" err="1">
+                <a:solidFill>
+                  <a:schemeClr val="bg1">
+                    <a:lumMod val="95000"/>
+                  </a:schemeClr>
+                </a:solidFill>
+              </a:rPr>
+              <a:t>identidad</a:t>
+            </a:r>
+            <a:br>
+              <a:rPr sz="1600" dirty="0">
+                <a:solidFill>
+                  <a:schemeClr val="bg1">
+                    <a:lumMod val="95000"/>
+                  </a:schemeClr>
+                </a:solidFill>
+              </a:rPr>
+            </a:br>
+            <a:r>
+              <a:rPr sz="1600" dirty="0">
+                <a:solidFill>
+                  <a:schemeClr val="bg1">
+                    <a:lumMod val="95000"/>
+                  </a:schemeClr>
+                </a:solidFill>
+              </a:rPr>
               <a:t>    id := client.NewX509Identity("Org1MSP", certificate)</a:t>
             </a:r>
-            <a:br/>
-            <a:r>
-              <a:t>    sign, _ := client.NewSign(privateKey)</a:t>
-            </a:r>
-            <a:br/>
-            <a:br/>
-            <a:r>
+            <a:br>
+              <a:rPr sz="1600" dirty="0">
+                <a:solidFill>
+                  <a:schemeClr val="bg1">
+                    <a:lumMod val="95000"/>
+                  </a:schemeClr>
+                </a:solidFill>
+              </a:rPr>
+            </a:br>
+            <a:r>
+              <a:rPr sz="1600" dirty="0">
+                <a:solidFill>
+                  <a:schemeClr val="bg1">
+                    <a:lumMod val="95000"/>
+                  </a:schemeClr>
+                </a:solidFill>
+              </a:rPr>
+              <a:t>    sign, _ := </a:t>
+            </a:r>
+            <a:r>
+              <a:rPr sz="1600" dirty="0" err="1">
+                <a:solidFill>
+                  <a:schemeClr val="bg1">
+                    <a:lumMod val="95000"/>
+                  </a:schemeClr>
+                </a:solidFill>
+              </a:rPr>
+              <a:t>client.NewSign</a:t>
+            </a:r>
+            <a:r>
+              <a:rPr sz="1600" dirty="0">
+                <a:solidFill>
+                  <a:schemeClr val="bg1">
+                    <a:lumMod val="95000"/>
+                  </a:schemeClr>
+                </a:solidFill>
+              </a:rPr>
+              <a:t>(</a:t>
+            </a:r>
+            <a:r>
+              <a:rPr sz="1600" dirty="0" err="1">
+                <a:solidFill>
+                  <a:schemeClr val="bg1">
+                    <a:lumMod val="95000"/>
+                  </a:schemeClr>
+                </a:solidFill>
+              </a:rPr>
+              <a:t>privateKey</a:t>
+            </a:r>
+            <a:r>
+              <a:rPr sz="1600" dirty="0">
+                <a:solidFill>
+                  <a:schemeClr val="bg1">
+                    <a:lumMod val="95000"/>
+                  </a:schemeClr>
+                </a:solidFill>
+              </a:rPr>
+              <a:t>)</a:t>
+            </a:r>
+            <a:br>
+              <a:rPr sz="1600" dirty="0">
+                <a:solidFill>
+                  <a:schemeClr val="bg1">
+                    <a:lumMod val="95000"/>
+                  </a:schemeClr>
+                </a:solidFill>
+              </a:rPr>
+            </a:br>
+            <a:endParaRPr sz="1600" dirty="0">
+              <a:solidFill>
+                <a:schemeClr val="bg1">
+                  <a:lumMod val="95000"/>
+                </a:schemeClr>
+              </a:solidFill>
+            </a:endParaRPr>
+          </a:p>
+        </p:txBody>
+      </p:sp>
+      <p:sp>
+        <p:nvSpPr>
+          <p:cNvPr id="10" name="CuadroTexto 9">
+            <a:extLst>
+              <a:ext uri="{FF2B5EF4-FFF2-40B4-BE49-F238E27FC236}">
+                <a16:creationId xmlns:a16="http://schemas.microsoft.com/office/drawing/2014/main" id="{DFA50F25-D815-9AD5-1E1E-3BC823DB4936}"/>
+              </a:ext>
+            </a:extLst>
+          </p:cNvPr>
+          <p:cNvSpPr txBox="1"/>
+          <p:nvPr/>
+        </p:nvSpPr>
+        <p:spPr>
+          <a:xfrm>
+            <a:off x="6423646" y="1828800"/>
+            <a:ext cx="6138746" cy="4278094"/>
+          </a:xfrm>
+          <a:prstGeom prst="rect">
+            <a:avLst/>
+          </a:prstGeom>
+          <a:noFill/>
+        </p:spPr>
+        <p:txBody>
+          <a:bodyPr wrap="square">
+            <a:spAutoFit/>
+          </a:bodyPr>
+          <a:lstStyle/>
+          <a:p>
+            <a:br>
+              <a:rPr lang="es-ES" sz="1600" dirty="0">
+                <a:solidFill>
+                  <a:schemeClr val="bg1">
+                    <a:lumMod val="95000"/>
+                  </a:schemeClr>
+                </a:solidFill>
+              </a:rPr>
+            </a:br>
+            <a:r>
+              <a:rPr lang="es-ES" sz="1600" dirty="0">
+                <a:solidFill>
+                  <a:schemeClr val="bg1">
+                    <a:lumMod val="95000"/>
+                  </a:schemeClr>
+                </a:solidFill>
+              </a:rPr>
               <a:t>    // 3. Conectar al Gateway</a:t>
             </a:r>
-            <a:br/>
-            <a:r>
-              <a:t>    gw, _ := client.Connect(id, client.WithSign(sign),</a:t>
-            </a:r>
-            <a:br/>
-            <a:r>
-              <a:t>        client.WithClientConnection(clientConnection))</a:t>
-            </a:r>
-            <a:br/>
-            <a:r>
-              <a:t>    defer gw.Close()</a:t>
-            </a:r>
-            <a:br/>
-            <a:br/>
-            <a:r>
+            <a:br>
+              <a:rPr lang="es-ES" sz="1600" dirty="0">
+                <a:solidFill>
+                  <a:schemeClr val="bg1">
+                    <a:lumMod val="95000"/>
+                  </a:schemeClr>
+                </a:solidFill>
+              </a:rPr>
+            </a:br>
+            <a:r>
+              <a:rPr lang="es-ES" sz="1600" dirty="0">
+                <a:solidFill>
+                  <a:schemeClr val="bg1">
+                    <a:lumMod val="95000"/>
+                  </a:schemeClr>
+                </a:solidFill>
+              </a:rPr>
+              <a:t>    </a:t>
+            </a:r>
+            <a:r>
+              <a:rPr lang="es-ES" sz="1600" dirty="0" err="1">
+                <a:solidFill>
+                  <a:schemeClr val="bg1">
+                    <a:lumMod val="95000"/>
+                  </a:schemeClr>
+                </a:solidFill>
+              </a:rPr>
+              <a:t>gw</a:t>
+            </a:r>
+            <a:r>
+              <a:rPr lang="es-ES" sz="1600" dirty="0">
+                <a:solidFill>
+                  <a:schemeClr val="bg1">
+                    <a:lumMod val="95000"/>
+                  </a:schemeClr>
+                </a:solidFill>
+              </a:rPr>
+              <a:t>, _ := </a:t>
+            </a:r>
+            <a:r>
+              <a:rPr lang="es-ES" sz="1600" dirty="0" err="1">
+                <a:solidFill>
+                  <a:schemeClr val="bg1">
+                    <a:lumMod val="95000"/>
+                  </a:schemeClr>
+                </a:solidFill>
+              </a:rPr>
+              <a:t>client.Connect</a:t>
+            </a:r>
+            <a:r>
+              <a:rPr lang="es-ES" sz="1600" dirty="0">
+                <a:solidFill>
+                  <a:schemeClr val="bg1">
+                    <a:lumMod val="95000"/>
+                  </a:schemeClr>
+                </a:solidFill>
+              </a:rPr>
+              <a:t>(id, </a:t>
+            </a:r>
+            <a:r>
+              <a:rPr lang="es-ES" sz="1600" dirty="0" err="1">
+                <a:solidFill>
+                  <a:schemeClr val="bg1">
+                    <a:lumMod val="95000"/>
+                  </a:schemeClr>
+                </a:solidFill>
+              </a:rPr>
+              <a:t>client.WithSign</a:t>
+            </a:r>
+            <a:r>
+              <a:rPr lang="es-ES" sz="1600" dirty="0">
+                <a:solidFill>
+                  <a:schemeClr val="bg1">
+                    <a:lumMod val="95000"/>
+                  </a:schemeClr>
+                </a:solidFill>
+              </a:rPr>
+              <a:t>(</a:t>
+            </a:r>
+            <a:r>
+              <a:rPr lang="es-ES" sz="1600" dirty="0" err="1">
+                <a:solidFill>
+                  <a:schemeClr val="bg1">
+                    <a:lumMod val="95000"/>
+                  </a:schemeClr>
+                </a:solidFill>
+              </a:rPr>
+              <a:t>sign</a:t>
+            </a:r>
+            <a:r>
+              <a:rPr lang="es-ES" sz="1600" dirty="0">
+                <a:solidFill>
+                  <a:schemeClr val="bg1">
+                    <a:lumMod val="95000"/>
+                  </a:schemeClr>
+                </a:solidFill>
+              </a:rPr>
+              <a:t>),</a:t>
+            </a:r>
+            <a:br>
+              <a:rPr lang="es-ES" sz="1600" dirty="0">
+                <a:solidFill>
+                  <a:schemeClr val="bg1">
+                    <a:lumMod val="95000"/>
+                  </a:schemeClr>
+                </a:solidFill>
+              </a:rPr>
+            </a:br>
+            <a:r>
+              <a:rPr lang="es-ES" sz="1600" dirty="0">
+                <a:solidFill>
+                  <a:schemeClr val="bg1">
+                    <a:lumMod val="95000"/>
+                  </a:schemeClr>
+                </a:solidFill>
+              </a:rPr>
+              <a:t>        </a:t>
+            </a:r>
+            <a:r>
+              <a:rPr lang="es-ES" sz="1600" dirty="0" err="1">
+                <a:solidFill>
+                  <a:schemeClr val="bg1">
+                    <a:lumMod val="95000"/>
+                  </a:schemeClr>
+                </a:solidFill>
+              </a:rPr>
+              <a:t>client.WithClientConnection</a:t>
+            </a:r>
+            <a:r>
+              <a:rPr lang="es-ES" sz="1600" dirty="0">
+                <a:solidFill>
+                  <a:schemeClr val="bg1">
+                    <a:lumMod val="95000"/>
+                  </a:schemeClr>
+                </a:solidFill>
+              </a:rPr>
+              <a:t>(</a:t>
+            </a:r>
+            <a:r>
+              <a:rPr lang="es-ES" sz="1600" dirty="0" err="1">
+                <a:solidFill>
+                  <a:schemeClr val="bg1">
+                    <a:lumMod val="95000"/>
+                  </a:schemeClr>
+                </a:solidFill>
+              </a:rPr>
+              <a:t>clientConnection</a:t>
+            </a:r>
+            <a:r>
+              <a:rPr lang="es-ES" sz="1600" dirty="0">
+                <a:solidFill>
+                  <a:schemeClr val="bg1">
+                    <a:lumMod val="95000"/>
+                  </a:schemeClr>
+                </a:solidFill>
+              </a:rPr>
+              <a:t>))</a:t>
+            </a:r>
+            <a:br>
+              <a:rPr lang="es-ES" sz="1600" dirty="0">
+                <a:solidFill>
+                  <a:schemeClr val="bg1">
+                    <a:lumMod val="95000"/>
+                  </a:schemeClr>
+                </a:solidFill>
+              </a:rPr>
+            </a:br>
+            <a:r>
+              <a:rPr lang="es-ES" sz="1600" dirty="0">
+                <a:solidFill>
+                  <a:schemeClr val="bg1">
+                    <a:lumMod val="95000"/>
+                  </a:schemeClr>
+                </a:solidFill>
+              </a:rPr>
+              <a:t>    </a:t>
+            </a:r>
+            <a:r>
+              <a:rPr lang="es-ES" sz="1600" dirty="0" err="1">
+                <a:solidFill>
+                  <a:schemeClr val="bg1">
+                    <a:lumMod val="95000"/>
+                  </a:schemeClr>
+                </a:solidFill>
+              </a:rPr>
+              <a:t>defer</a:t>
+            </a:r>
+            <a:r>
+              <a:rPr lang="es-ES" sz="1600" dirty="0">
+                <a:solidFill>
+                  <a:schemeClr val="bg1">
+                    <a:lumMod val="95000"/>
+                  </a:schemeClr>
+                </a:solidFill>
+              </a:rPr>
+              <a:t> </a:t>
+            </a:r>
+            <a:r>
+              <a:rPr lang="es-ES" sz="1600" dirty="0" err="1">
+                <a:solidFill>
+                  <a:schemeClr val="bg1">
+                    <a:lumMod val="95000"/>
+                  </a:schemeClr>
+                </a:solidFill>
+              </a:rPr>
+              <a:t>gw.Close</a:t>
+            </a:r>
+            <a:r>
+              <a:rPr lang="es-ES" sz="1600" dirty="0">
+                <a:solidFill>
+                  <a:schemeClr val="bg1">
+                    <a:lumMod val="95000"/>
+                  </a:schemeClr>
+                </a:solidFill>
+              </a:rPr>
+              <a:t>()</a:t>
+            </a:r>
+            <a:br>
+              <a:rPr lang="es-ES" sz="1600" dirty="0">
+                <a:solidFill>
+                  <a:schemeClr val="bg1">
+                    <a:lumMod val="95000"/>
+                  </a:schemeClr>
+                </a:solidFill>
+              </a:rPr>
+            </a:br>
+            <a:br>
+              <a:rPr lang="es-ES" sz="1600" dirty="0">
+                <a:solidFill>
+                  <a:schemeClr val="bg1">
+                    <a:lumMod val="95000"/>
+                  </a:schemeClr>
+                </a:solidFill>
+              </a:rPr>
+            </a:br>
+            <a:r>
+              <a:rPr lang="es-ES" sz="1600" dirty="0">
+                <a:solidFill>
+                  <a:schemeClr val="bg1">
+                    <a:lumMod val="95000"/>
+                  </a:schemeClr>
+                </a:solidFill>
+              </a:rPr>
               <a:t>    // 4. Obtener canal y contrato</a:t>
             </a:r>
-            <a:br/>
-            <a:r>
-              <a:t>    network := gw.GetNetwork("mychannel")</a:t>
-            </a:r>
-            <a:br/>
-            <a:r>
-              <a:t>    contract := network.GetContract("foodtrace")</a:t>
-            </a:r>
-            <a:br/>
-            <a:br/>
-            <a:r>
+            <a:br>
+              <a:rPr lang="es-ES" sz="1600" dirty="0">
+                <a:solidFill>
+                  <a:schemeClr val="bg1">
+                    <a:lumMod val="95000"/>
+                  </a:schemeClr>
+                </a:solidFill>
+              </a:rPr>
+            </a:br>
+            <a:r>
+              <a:rPr lang="es-ES" sz="1600" dirty="0">
+                <a:solidFill>
+                  <a:schemeClr val="bg1">
+                    <a:lumMod val="95000"/>
+                  </a:schemeClr>
+                </a:solidFill>
+              </a:rPr>
+              <a:t>    </a:t>
+            </a:r>
+            <a:r>
+              <a:rPr lang="es-ES" sz="1600" dirty="0" err="1">
+                <a:solidFill>
+                  <a:schemeClr val="bg1">
+                    <a:lumMod val="95000"/>
+                  </a:schemeClr>
+                </a:solidFill>
+              </a:rPr>
+              <a:t>network</a:t>
+            </a:r>
+            <a:r>
+              <a:rPr lang="es-ES" sz="1600" dirty="0">
+                <a:solidFill>
+                  <a:schemeClr val="bg1">
+                    <a:lumMod val="95000"/>
+                  </a:schemeClr>
+                </a:solidFill>
+              </a:rPr>
+              <a:t> := </a:t>
+            </a:r>
+            <a:r>
+              <a:rPr lang="es-ES" sz="1600" dirty="0" err="1">
+                <a:solidFill>
+                  <a:schemeClr val="bg1">
+                    <a:lumMod val="95000"/>
+                  </a:schemeClr>
+                </a:solidFill>
+              </a:rPr>
+              <a:t>gw.GetNetwork</a:t>
+            </a:r>
+            <a:r>
+              <a:rPr lang="es-ES" sz="1600" dirty="0">
+                <a:solidFill>
+                  <a:schemeClr val="bg1">
+                    <a:lumMod val="95000"/>
+                  </a:schemeClr>
+                </a:solidFill>
+              </a:rPr>
+              <a:t>("</a:t>
+            </a:r>
+            <a:r>
+              <a:rPr lang="es-ES" sz="1600" dirty="0" err="1">
+                <a:solidFill>
+                  <a:schemeClr val="bg1">
+                    <a:lumMod val="95000"/>
+                  </a:schemeClr>
+                </a:solidFill>
+              </a:rPr>
+              <a:t>mychannel</a:t>
+            </a:r>
+            <a:r>
+              <a:rPr lang="es-ES" sz="1600" dirty="0">
+                <a:solidFill>
+                  <a:schemeClr val="bg1">
+                    <a:lumMod val="95000"/>
+                  </a:schemeClr>
+                </a:solidFill>
+              </a:rPr>
+              <a:t>")</a:t>
+            </a:r>
+            <a:br>
+              <a:rPr lang="es-ES" sz="1600" dirty="0">
+                <a:solidFill>
+                  <a:schemeClr val="bg1">
+                    <a:lumMod val="95000"/>
+                  </a:schemeClr>
+                </a:solidFill>
+              </a:rPr>
+            </a:br>
+            <a:r>
+              <a:rPr lang="es-ES" sz="1600" dirty="0">
+                <a:solidFill>
+                  <a:schemeClr val="bg1">
+                    <a:lumMod val="95000"/>
+                  </a:schemeClr>
+                </a:solidFill>
+              </a:rPr>
+              <a:t>    </a:t>
+            </a:r>
+            <a:r>
+              <a:rPr lang="es-ES" sz="1600" dirty="0" err="1">
+                <a:solidFill>
+                  <a:schemeClr val="bg1">
+                    <a:lumMod val="95000"/>
+                  </a:schemeClr>
+                </a:solidFill>
+              </a:rPr>
+              <a:t>contract</a:t>
+            </a:r>
+            <a:r>
+              <a:rPr lang="es-ES" sz="1600" dirty="0">
+                <a:solidFill>
+                  <a:schemeClr val="bg1">
+                    <a:lumMod val="95000"/>
+                  </a:schemeClr>
+                </a:solidFill>
+              </a:rPr>
+              <a:t> := </a:t>
+            </a:r>
+            <a:r>
+              <a:rPr lang="es-ES" sz="1600" dirty="0" err="1">
+                <a:solidFill>
+                  <a:schemeClr val="bg1">
+                    <a:lumMod val="95000"/>
+                  </a:schemeClr>
+                </a:solidFill>
+              </a:rPr>
+              <a:t>network.GetContract</a:t>
+            </a:r>
+            <a:r>
+              <a:rPr lang="es-ES" sz="1600" dirty="0">
+                <a:solidFill>
+                  <a:schemeClr val="bg1">
+                    <a:lumMod val="95000"/>
+                  </a:schemeClr>
+                </a:solidFill>
+              </a:rPr>
+              <a:t>("</a:t>
+            </a:r>
+            <a:r>
+              <a:rPr lang="es-ES" sz="1600" dirty="0" err="1">
+                <a:solidFill>
+                  <a:schemeClr val="bg1">
+                    <a:lumMod val="95000"/>
+                  </a:schemeClr>
+                </a:solidFill>
+              </a:rPr>
+              <a:t>foodtrace</a:t>
+            </a:r>
+            <a:r>
+              <a:rPr lang="es-ES" sz="1600" dirty="0">
+                <a:solidFill>
+                  <a:schemeClr val="bg1">
+                    <a:lumMod val="95000"/>
+                  </a:schemeClr>
+                </a:solidFill>
+              </a:rPr>
+              <a:t>")</a:t>
+            </a:r>
+            <a:br>
+              <a:rPr lang="es-ES" sz="1600" dirty="0">
+                <a:solidFill>
+                  <a:schemeClr val="bg1">
+                    <a:lumMod val="95000"/>
+                  </a:schemeClr>
+                </a:solidFill>
+              </a:rPr>
+            </a:br>
+            <a:br>
+              <a:rPr lang="es-ES" sz="1600" dirty="0">
+                <a:solidFill>
+                  <a:schemeClr val="bg1">
+                    <a:lumMod val="95000"/>
+                  </a:schemeClr>
+                </a:solidFill>
+              </a:rPr>
+            </a:br>
+            <a:r>
+              <a:rPr lang="es-ES" sz="1600" dirty="0">
+                <a:solidFill>
+                  <a:schemeClr val="bg1">
+                    <a:lumMod val="95000"/>
+                  </a:schemeClr>
+                </a:solidFill>
+              </a:rPr>
               <a:t>    // 5. Evaluar (lectura)</a:t>
             </a:r>
-            <a:br/>
-            <a:r>
-              <a:t>    result, _ := contract.EvaluateTransaction("GetAllLots")</a:t>
-            </a:r>
-            <a:br/>
-            <a:br/>
-            <a:r>
-              <a:t>    // 6. Submit (escritura)</a:t>
-            </a:r>
-            <a:br/>
-            <a:r>
-              <a:t>    _, err := contract.SubmitTransaction("ProduceLot",</a:t>
-            </a:r>
-            <a:br/>
-            <a:r>
-              <a:t>        "LOT-001", "mango", "Spain", "500.0")</a:t>
-            </a:r>
-            <a:br/>
-            <a:r>
+            <a:br>
+              <a:rPr lang="es-ES" sz="1600" dirty="0">
+                <a:solidFill>
+                  <a:schemeClr val="bg1">
+                    <a:lumMod val="95000"/>
+                  </a:schemeClr>
+                </a:solidFill>
+              </a:rPr>
+            </a:br>
+            <a:r>
+              <a:rPr lang="es-ES" sz="1600" dirty="0">
+                <a:solidFill>
+                  <a:schemeClr val="bg1">
+                    <a:lumMod val="95000"/>
+                  </a:schemeClr>
+                </a:solidFill>
+              </a:rPr>
+              <a:t>    </a:t>
+            </a:r>
+            <a:r>
+              <a:rPr lang="es-ES" sz="1600" dirty="0" err="1">
+                <a:solidFill>
+                  <a:schemeClr val="bg1">
+                    <a:lumMod val="95000"/>
+                  </a:schemeClr>
+                </a:solidFill>
+              </a:rPr>
+              <a:t>result</a:t>
+            </a:r>
+            <a:r>
+              <a:rPr lang="es-ES" sz="1600" dirty="0">
+                <a:solidFill>
+                  <a:schemeClr val="bg1">
+                    <a:lumMod val="95000"/>
+                  </a:schemeClr>
+                </a:solidFill>
+              </a:rPr>
+              <a:t>, _ := </a:t>
+            </a:r>
+            <a:r>
+              <a:rPr lang="es-ES" sz="1600" dirty="0" err="1">
+                <a:solidFill>
+                  <a:schemeClr val="bg1">
+                    <a:lumMod val="95000"/>
+                  </a:schemeClr>
+                </a:solidFill>
+              </a:rPr>
+              <a:t>contract.EvaluateTransaction</a:t>
+            </a:r>
+            <a:r>
+              <a:rPr lang="es-ES" sz="1600" dirty="0">
+                <a:solidFill>
+                  <a:schemeClr val="bg1">
+                    <a:lumMod val="95000"/>
+                  </a:schemeClr>
+                </a:solidFill>
+              </a:rPr>
+              <a:t>("</a:t>
+            </a:r>
+            <a:r>
+              <a:rPr lang="es-ES" sz="1600" dirty="0" err="1">
+                <a:solidFill>
+                  <a:schemeClr val="bg1">
+                    <a:lumMod val="95000"/>
+                  </a:schemeClr>
+                </a:solidFill>
+              </a:rPr>
+              <a:t>GetAllLots</a:t>
+            </a:r>
+            <a:r>
+              <a:rPr lang="es-ES" sz="1600" dirty="0">
+                <a:solidFill>
+                  <a:schemeClr val="bg1">
+                    <a:lumMod val="95000"/>
+                  </a:schemeClr>
+                </a:solidFill>
+              </a:rPr>
+              <a:t>")</a:t>
+            </a:r>
+            <a:br>
+              <a:rPr lang="es-ES" sz="1600" dirty="0">
+                <a:solidFill>
+                  <a:schemeClr val="bg1">
+                    <a:lumMod val="95000"/>
+                  </a:schemeClr>
+                </a:solidFill>
+              </a:rPr>
+            </a:br>
+            <a:br>
+              <a:rPr lang="es-ES" sz="1600" dirty="0">
+                <a:solidFill>
+                  <a:schemeClr val="bg1">
+                    <a:lumMod val="95000"/>
+                  </a:schemeClr>
+                </a:solidFill>
+              </a:rPr>
+            </a:br>
+            <a:r>
+              <a:rPr lang="es-ES" sz="1600" dirty="0">
+                <a:solidFill>
+                  <a:schemeClr val="bg1">
+                    <a:lumMod val="95000"/>
+                  </a:schemeClr>
+                </a:solidFill>
+              </a:rPr>
+              <a:t>    // 6. </a:t>
+            </a:r>
+            <a:r>
+              <a:rPr lang="es-ES" sz="1600" dirty="0" err="1">
+                <a:solidFill>
+                  <a:schemeClr val="bg1">
+                    <a:lumMod val="95000"/>
+                  </a:schemeClr>
+                </a:solidFill>
+              </a:rPr>
+              <a:t>Submit</a:t>
+            </a:r>
+            <a:r>
+              <a:rPr lang="es-ES" sz="1600" dirty="0">
+                <a:solidFill>
+                  <a:schemeClr val="bg1">
+                    <a:lumMod val="95000"/>
+                  </a:schemeClr>
+                </a:solidFill>
+              </a:rPr>
+              <a:t> (escritura)</a:t>
+            </a:r>
+            <a:br>
+              <a:rPr lang="es-ES" sz="1600" dirty="0">
+                <a:solidFill>
+                  <a:schemeClr val="bg1">
+                    <a:lumMod val="95000"/>
+                  </a:schemeClr>
+                </a:solidFill>
+              </a:rPr>
+            </a:br>
+            <a:r>
+              <a:rPr lang="es-ES" sz="1600" dirty="0">
+                <a:solidFill>
+                  <a:schemeClr val="bg1">
+                    <a:lumMod val="95000"/>
+                  </a:schemeClr>
+                </a:solidFill>
+              </a:rPr>
+              <a:t>    _, </a:t>
+            </a:r>
+            <a:r>
+              <a:rPr lang="es-ES" sz="1600" dirty="0" err="1">
+                <a:solidFill>
+                  <a:schemeClr val="bg1">
+                    <a:lumMod val="95000"/>
+                  </a:schemeClr>
+                </a:solidFill>
+              </a:rPr>
+              <a:t>err</a:t>
+            </a:r>
+            <a:r>
+              <a:rPr lang="es-ES" sz="1600" dirty="0">
+                <a:solidFill>
+                  <a:schemeClr val="bg1">
+                    <a:lumMod val="95000"/>
+                  </a:schemeClr>
+                </a:solidFill>
+              </a:rPr>
+              <a:t> := </a:t>
+            </a:r>
+            <a:r>
+              <a:rPr lang="es-ES" sz="1600" dirty="0" err="1">
+                <a:solidFill>
+                  <a:schemeClr val="bg1">
+                    <a:lumMod val="95000"/>
+                  </a:schemeClr>
+                </a:solidFill>
+              </a:rPr>
+              <a:t>contract.SubmitTransaction</a:t>
+            </a:r>
+            <a:r>
+              <a:rPr lang="es-ES" sz="1600" dirty="0">
+                <a:solidFill>
+                  <a:schemeClr val="bg1">
+                    <a:lumMod val="95000"/>
+                  </a:schemeClr>
+                </a:solidFill>
+              </a:rPr>
+              <a:t>("</a:t>
+            </a:r>
+            <a:r>
+              <a:rPr lang="es-ES" sz="1600" dirty="0" err="1">
+                <a:solidFill>
+                  <a:schemeClr val="bg1">
+                    <a:lumMod val="95000"/>
+                  </a:schemeClr>
+                </a:solidFill>
+              </a:rPr>
+              <a:t>ProduceLot</a:t>
+            </a:r>
+            <a:r>
+              <a:rPr lang="es-ES" sz="1600" dirty="0">
+                <a:solidFill>
+                  <a:schemeClr val="bg1">
+                    <a:lumMod val="95000"/>
+                  </a:schemeClr>
+                </a:solidFill>
+              </a:rPr>
+              <a:t>",</a:t>
+            </a:r>
+            <a:br>
+              <a:rPr lang="es-ES" sz="1600" dirty="0">
+                <a:solidFill>
+                  <a:schemeClr val="bg1">
+                    <a:lumMod val="95000"/>
+                  </a:schemeClr>
+                </a:solidFill>
+              </a:rPr>
+            </a:br>
+            <a:r>
+              <a:rPr lang="es-ES" sz="1600" dirty="0">
+                <a:solidFill>
+                  <a:schemeClr val="bg1">
+                    <a:lumMod val="95000"/>
+                  </a:schemeClr>
+                </a:solidFill>
+              </a:rPr>
+              <a:t>        "LOT-001", "mango", "</a:t>
+            </a:r>
+            <a:r>
+              <a:rPr lang="es-ES" sz="1600" dirty="0" err="1">
+                <a:solidFill>
+                  <a:schemeClr val="bg1">
+                    <a:lumMod val="95000"/>
+                  </a:schemeClr>
+                </a:solidFill>
+              </a:rPr>
+              <a:t>Spain</a:t>
+            </a:r>
+            <a:r>
+              <a:rPr lang="es-ES" sz="1600" dirty="0">
+                <a:solidFill>
+                  <a:schemeClr val="bg1">
+                    <a:lumMod val="95000"/>
+                  </a:schemeClr>
+                </a:solidFill>
+              </a:rPr>
+              <a:t>", "500.0")</a:t>
+            </a:r>
+            <a:br>
+              <a:rPr lang="es-ES" sz="1600" dirty="0">
+                <a:solidFill>
+                  <a:schemeClr val="bg1">
+                    <a:lumMod val="95000"/>
+                  </a:schemeClr>
+                </a:solidFill>
+              </a:rPr>
+            </a:br>
+            <a:r>
+              <a:rPr lang="es-ES" sz="1600" dirty="0">
+                <a:solidFill>
+                  <a:schemeClr val="bg1">
+                    <a:lumMod val="95000"/>
+                  </a:schemeClr>
+                </a:solidFill>
+              </a:rPr>
               <a:t>}</a:t>
             </a:r>
+            <a:endParaRPr lang="es-ES" sz="1600" dirty="0"/>
+          </a:p>
+        </p:txBody>
+      </p:sp>
+      <p:sp>
+        <p:nvSpPr>
+          <p:cNvPr id="11" name="Rectángulo 10">
+            <a:extLst>
+              <a:ext uri="{FF2B5EF4-FFF2-40B4-BE49-F238E27FC236}">
+                <a16:creationId xmlns:a16="http://schemas.microsoft.com/office/drawing/2014/main" id="{EAC94543-FE6B-BA06-8123-B69AD510B4C2}"/>
+              </a:ext>
+            </a:extLst>
+          </p:cNvPr>
+          <p:cNvSpPr/>
+          <p:nvPr/>
+        </p:nvSpPr>
+        <p:spPr>
+          <a:xfrm>
+            <a:off x="5932449" y="1417320"/>
+            <a:ext cx="45719" cy="5120640"/>
+          </a:xfrm>
+          <a:prstGeom prst="rect">
+            <a:avLst/>
+          </a:prstGeom>
+        </p:spPr>
+        <p:style>
+          <a:lnRef idx="1">
+            <a:schemeClr val="accent1"/>
+          </a:lnRef>
+          <a:fillRef idx="3">
+            <a:schemeClr val="accent1"/>
+          </a:fillRef>
+          <a:effectRef idx="2">
+            <a:schemeClr val="accent1"/>
+          </a:effectRef>
+          <a:fontRef idx="minor">
+            <a:schemeClr val="lt1"/>
+          </a:fontRef>
+        </p:style>
+        <p:txBody>
+          <a:bodyPr rtlCol="0" anchor="ctr"/>
+          <a:lstStyle/>
+          <a:p>
+            <a:pPr algn="ctr"/>
+            <a:endParaRPr lang="es-ES"/>
           </a:p>
         </p:txBody>
       </p:sp>
@@ -9804,7 +16162,7 @@
 </file>
 
 <file path=ppt/slides/slide9.xml><?xml version="1.0" encoding="utf-8"?>
-<p:sld xmlns:a="http://schemas.openxmlformats.org/drawingml/2006/main" xmlns:p="http://schemas.openxmlformats.org/presentationml/2006/main" xmlns:r="http://schemas.openxmlformats.org/officeDocument/2006/relationships">
+<p:sld xmlns:a="http://schemas.openxmlformats.org/drawingml/2006/main" xmlns:r="http://schemas.openxmlformats.org/officeDocument/2006/relationships" xmlns:p="http://schemas.openxmlformats.org/presentationml/2006/main">
   <p:cSld>
     <p:spTree>
       <p:nvGrpSpPr>
@@ -9812,7 +16170,14 @@
         <p:cNvGrpSpPr/>
         <p:nvPr/>
       </p:nvGrpSpPr>
-      <p:grpSpPr/>
+      <p:grpSpPr>
+        <a:xfrm>
+          <a:off x="0" y="0"/>
+          <a:ext cx="0" cy="0"/>
+          <a:chOff x="0" y="0"/>
+          <a:chExt cx="0" cy="0"/>
+        </a:xfrm>
+      </p:grpSpPr>
       <p:sp>
         <p:nvSpPr>
           <p:cNvPr id="2" name="Rectangle 1"/>
@@ -9853,6 +16218,7 @@
           <a:lstStyle/>
           <a:p>
             <a:pPr algn="ctr"/>
+            <a:endParaRPr/>
           </a:p>
         </p:txBody>
       </p:sp>
@@ -9930,6 +16296,7 @@
           <a:lstStyle/>
           <a:p>
             <a:pPr algn="ctr"/>
+            <a:endParaRPr/>
           </a:p>
         </p:txBody>
       </p:sp>

--- a/docs/slides/Modulo 4/dia_6.pptx
+++ b/docs/slides/Modulo 4/dia_6.pptx
@@ -27,6 +27,10 @@
     <p:sldId id="275" r:id="rId21"/>
     <p:sldId id="276" r:id="rId22"/>
     <p:sldId id="277" r:id="rId23"/>
+    <p:sldId id="278" r:id="rId28"/>
+    <p:sldId id="279" r:id="rId29"/>
+    <p:sldId id="280" r:id="rId30"/>
+    <p:sldId id="281" r:id="rId31"/>
   </p:sldIdLst>
   <p:sldSz cx="12188825" cy="6858000"/>
   <p:notesSz cx="6858000" cy="9144000"/>
@@ -4031,7 +4035,7 @@
               </a:defRPr>
             </a:pPr>
             <a:r>
-              <a:t>Unit test con mock del Stub (Go)</a:t>
+              <a:t>Unit test con mock del Stub (Node.js)</a:t>
             </a:r>
           </a:p>
         </p:txBody>
@@ -4143,7 +4147,7 @@
               </a:defRPr>
             </a:pPr>
             <a:r>
-              <a:t>GO</a:t>
+              <a:t>NODE.JS</a:t>
             </a:r>
           </a:p>
         </p:txBody>
@@ -4212,15 +4216,7 @@
           <a:bodyPr wrap="square"/>
           <a:lstStyle/>
           <a:p>
-            <a:br>
-              <a:rPr sz="1600" dirty="0">
-                <a:solidFill>
-                  <a:schemeClr val="bg1">
-                    <a:lumMod val="95000"/>
-                  </a:schemeClr>
-                </a:solidFill>
-              </a:rPr>
-            </a:br>
+            <a:pPr/>
             <a:r>
               <a:rPr sz="1600" dirty="0" err="1">
                 <a:solidFill>
@@ -4229,18 +4225,11 @@
                   </a:schemeClr>
                 </a:solidFill>
               </a:rPr>
-              <a:t>func</a:t>
-            </a:r>
-            <a:r>
-              <a:rPr sz="1600" dirty="0">
-                <a:solidFill>
-                  <a:schemeClr val="bg1">
-                    <a:lumMod val="95000"/>
-                  </a:schemeClr>
-                </a:solidFill>
-              </a:rPr>
-              <a:t> </a:t>
-            </a:r>
+              <a:t>const { expect } = require('chai');</a:t>
+            </a:r>
+          </a:p>
+          <a:p>
+            <a:pPr/>
             <a:r>
               <a:rPr sz="1600" dirty="0" err="1">
                 <a:solidFill>
@@ -4249,18 +4238,11 @@
                   </a:schemeClr>
                 </a:solidFill>
               </a:rPr>
-              <a:t>TestCreateProperty</a:t>
-            </a:r>
-            <a:r>
-              <a:rPr sz="1600" dirty="0">
-                <a:solidFill>
-                  <a:schemeClr val="bg1">
-                    <a:lumMod val="95000"/>
-                  </a:schemeClr>
-                </a:solidFill>
-              </a:rPr>
-              <a:t>(t *</a:t>
-            </a:r>
+              <a:t>const sinon = require('sinon');</a:t>
+            </a:r>
+          </a:p>
+          <a:p>
+            <a:pPr/>
             <a:r>
               <a:rPr sz="1600" dirty="0" err="1">
                 <a:solidFill>
@@ -4269,37 +4251,11 @@
                   </a:schemeClr>
                 </a:solidFill>
               </a:rPr>
-              <a:t>testing.T</a:t>
-            </a:r>
-            <a:r>
-              <a:rPr sz="1600" dirty="0">
-                <a:solidFill>
-                  <a:schemeClr val="bg1">
-                    <a:lumMod val="95000"/>
-                  </a:schemeClr>
-                </a:solidFill>
-              </a:rPr>
-              <a:t>) {</a:t>
-            </a:r>
-            <a:br>
-              <a:rPr sz="1600" dirty="0">
-                <a:solidFill>
-                  <a:schemeClr val="bg1">
-                    <a:lumMod val="95000"/>
-                  </a:schemeClr>
-                </a:solidFill>
-              </a:rPr>
-            </a:br>
-            <a:r>
-              <a:rPr sz="1600" dirty="0">
-                <a:solidFill>
-                  <a:schemeClr val="bg1">
-                    <a:lumMod val="95000"/>
-                  </a:schemeClr>
-                </a:solidFill>
-              </a:rPr>
-              <a:t>    // Crear mock del </a:t>
-            </a:r>
+              <a:t>const { SmartContract } = require('../lib/smartContract');</a:t>
+            </a:r>
+          </a:p>
+          <a:p>
+            <a:pPr/>
             <a:r>
               <a:rPr sz="1600" dirty="0" err="1">
                 <a:solidFill>
@@ -4308,37 +4264,11 @@
                   </a:schemeClr>
                 </a:solidFill>
               </a:rPr>
-              <a:t>TransactionContext</a:t>
-            </a:r>
-            <a:r>
-              <a:rPr sz="1600" dirty="0">
-                <a:solidFill>
-                  <a:schemeClr val="bg1">
-                    <a:lumMod val="95000"/>
-                  </a:schemeClr>
-                </a:solidFill>
-              </a:rPr>
-              <a:t> y del Stub</a:t>
-            </a:r>
-            <a:br>
-              <a:rPr sz="1600" dirty="0">
-                <a:solidFill>
-                  <a:schemeClr val="bg1">
-                    <a:lumMod val="95000"/>
-                  </a:schemeClr>
-                </a:solidFill>
-              </a:rPr>
-            </a:br>
-            <a:r>
-              <a:rPr sz="1600" dirty="0">
-                <a:solidFill>
-                  <a:schemeClr val="bg1">
-                    <a:lumMod val="95000"/>
-                  </a:schemeClr>
-                </a:solidFill>
-              </a:rPr>
-              <a:t>    </a:t>
-            </a:r>
+              <a:t/>
+            </a:r>
+          </a:p>
+          <a:p>
+            <a:pPr/>
             <a:r>
               <a:rPr sz="1600" dirty="0" err="1">
                 <a:solidFill>
@@ -4347,18 +4277,11 @@
                   </a:schemeClr>
                 </a:solidFill>
               </a:rPr>
-              <a:t>mockCtx</a:t>
-            </a:r>
-            <a:r>
-              <a:rPr sz="1600" dirty="0">
-                <a:solidFill>
-                  <a:schemeClr val="bg1">
-                    <a:lumMod val="95000"/>
-                  </a:schemeClr>
-                </a:solidFill>
-              </a:rPr>
-              <a:t> := new(</a:t>
-            </a:r>
+              <a:t>describe('CreateProperty', () =&gt; {</a:t>
+            </a:r>
+          </a:p>
+          <a:p>
+            <a:pPr/>
             <a:r>
               <a:rPr sz="1600" dirty="0" err="1">
                 <a:solidFill>
@@ -4367,37 +4290,11 @@
                   </a:schemeClr>
                 </a:solidFill>
               </a:rPr>
-              <a:t>mocks.TransactionContext</a:t>
-            </a:r>
-            <a:r>
-              <a:rPr sz="1600" dirty="0">
-                <a:solidFill>
-                  <a:schemeClr val="bg1">
-                    <a:lumMod val="95000"/>
-                  </a:schemeClr>
-                </a:solidFill>
-              </a:rPr>
-              <a:t>)</a:t>
-            </a:r>
-            <a:br>
-              <a:rPr sz="1600" dirty="0">
-                <a:solidFill>
-                  <a:schemeClr val="bg1">
-                    <a:lumMod val="95000"/>
-                  </a:schemeClr>
-                </a:solidFill>
-              </a:rPr>
-            </a:br>
-            <a:r>
-              <a:rPr sz="1600" dirty="0">
-                <a:solidFill>
-                  <a:schemeClr val="bg1">
-                    <a:lumMod val="95000"/>
-                  </a:schemeClr>
-                </a:solidFill>
-              </a:rPr>
-              <a:t>    </a:t>
-            </a:r>
+              <a:t>    let ctx, stub, identity;</a:t>
+            </a:r>
+          </a:p>
+          <a:p>
+            <a:pPr/>
             <a:r>
               <a:rPr sz="1600" dirty="0" err="1">
                 <a:solidFill>
@@ -4406,18 +4303,11 @@
                   </a:schemeClr>
                 </a:solidFill>
               </a:rPr>
-              <a:t>mockStub</a:t>
-            </a:r>
-            <a:r>
-              <a:rPr sz="1600" dirty="0">
-                <a:solidFill>
-                  <a:schemeClr val="bg1">
-                    <a:lumMod val="95000"/>
-                  </a:schemeClr>
-                </a:solidFill>
-              </a:rPr>
-              <a:t> := new(</a:t>
-            </a:r>
+              <a:t/>
+            </a:r>
+          </a:p>
+          <a:p>
+            <a:pPr/>
             <a:r>
               <a:rPr sz="1600" dirty="0" err="1">
                 <a:solidFill>
@@ -4426,37 +4316,11 @@
                   </a:schemeClr>
                 </a:solidFill>
               </a:rPr>
-              <a:t>mocks.ChaincodeStub</a:t>
-            </a:r>
-            <a:r>
-              <a:rPr sz="1600" dirty="0">
-                <a:solidFill>
-                  <a:schemeClr val="bg1">
-                    <a:lumMod val="95000"/>
-                  </a:schemeClr>
-                </a:solidFill>
-              </a:rPr>
-              <a:t>)</a:t>
-            </a:r>
-            <a:br>
-              <a:rPr sz="1600" dirty="0">
-                <a:solidFill>
-                  <a:schemeClr val="bg1">
-                    <a:lumMod val="95000"/>
-                  </a:schemeClr>
-                </a:solidFill>
-              </a:rPr>
-            </a:br>
-            <a:r>
-              <a:rPr sz="1600" dirty="0">
-                <a:solidFill>
-                  <a:schemeClr val="bg1">
-                    <a:lumMod val="95000"/>
-                  </a:schemeClr>
-                </a:solidFill>
-              </a:rPr>
-              <a:t>    </a:t>
-            </a:r>
+              <a:t>    beforeEach(() =&gt; {</a:t>
+            </a:r>
+          </a:p>
+          <a:p>
+            <a:pPr/>
             <a:r>
               <a:rPr sz="1600" dirty="0" err="1">
                 <a:solidFill>
@@ -4465,18 +4329,11 @@
                   </a:schemeClr>
                 </a:solidFill>
               </a:rPr>
-              <a:t>mockIdentity</a:t>
-            </a:r>
-            <a:r>
-              <a:rPr sz="1600" dirty="0">
-                <a:solidFill>
-                  <a:schemeClr val="bg1">
-                    <a:lumMod val="95000"/>
-                  </a:schemeClr>
-                </a:solidFill>
-              </a:rPr>
-              <a:t> := new(</a:t>
-            </a:r>
+              <a:t>        stub = {</a:t>
+            </a:r>
+          </a:p>
+          <a:p>
+            <a:pPr/>
             <a:r>
               <a:rPr sz="1600" dirty="0" err="1">
                 <a:solidFill>
@@ -4485,46 +4342,11 @@
                   </a:schemeClr>
                 </a:solidFill>
               </a:rPr>
-              <a:t>mocks.ClientIdentity</a:t>
-            </a:r>
-            <a:r>
-              <a:rPr sz="1600" dirty="0">
-                <a:solidFill>
-                  <a:schemeClr val="bg1">
-                    <a:lumMod val="95000"/>
-                  </a:schemeClr>
-                </a:solidFill>
-              </a:rPr>
-              <a:t>)</a:t>
-            </a:r>
-            <a:br>
-              <a:rPr sz="1600" dirty="0">
-                <a:solidFill>
-                  <a:schemeClr val="bg1">
-                    <a:lumMod val="95000"/>
-                  </a:schemeClr>
-                </a:solidFill>
-              </a:rPr>
-            </a:br>
-            <a:br>
-              <a:rPr sz="1600" dirty="0">
-                <a:solidFill>
-                  <a:schemeClr val="bg1">
-                    <a:lumMod val="95000"/>
-                  </a:schemeClr>
-                </a:solidFill>
-              </a:rPr>
-            </a:br>
-            <a:r>
-              <a:rPr sz="1600" dirty="0">
-                <a:solidFill>
-                  <a:schemeClr val="bg1">
-                    <a:lumMod val="95000"/>
-                  </a:schemeClr>
-                </a:solidFill>
-              </a:rPr>
-              <a:t>    </a:t>
-            </a:r>
+              <a:t>            getState: sinon.stub(),</a:t>
+            </a:r>
+          </a:p>
+          <a:p>
+            <a:pPr/>
             <a:r>
               <a:rPr sz="1600" dirty="0" err="1">
                 <a:solidFill>
@@ -4533,18 +4355,11 @@
                   </a:schemeClr>
                 </a:solidFill>
               </a:rPr>
-              <a:t>mockCtx.On</a:t>
-            </a:r>
-            <a:r>
-              <a:rPr sz="1600" dirty="0">
-                <a:solidFill>
-                  <a:schemeClr val="bg1">
-                    <a:lumMod val="95000"/>
-                  </a:schemeClr>
-                </a:solidFill>
-              </a:rPr>
-              <a:t>("</a:t>
-            </a:r>
+              <a:t>            putState: sinon.stub(),</a:t>
+            </a:r>
+          </a:p>
+          <a:p>
+            <a:pPr/>
             <a:r>
               <a:rPr sz="1600" dirty="0" err="1">
                 <a:solidFill>
@@ -4553,18 +4368,11 @@
                   </a:schemeClr>
                 </a:solidFill>
               </a:rPr>
-              <a:t>GetStub</a:t>
-            </a:r>
-            <a:r>
-              <a:rPr sz="1600" dirty="0">
-                <a:solidFill>
-                  <a:schemeClr val="bg1">
-                    <a:lumMod val="95000"/>
-                  </a:schemeClr>
-                </a:solidFill>
-              </a:rPr>
-              <a:t>").Return(</a:t>
-            </a:r>
+              <a:t>        };</a:t>
+            </a:r>
+          </a:p>
+          <a:p>
+            <a:pPr/>
             <a:r>
               <a:rPr sz="1600" dirty="0" err="1">
                 <a:solidFill>
@@ -4573,37 +4381,11 @@
                   </a:schemeClr>
                 </a:solidFill>
               </a:rPr>
-              <a:t>mockStub</a:t>
-            </a:r>
-            <a:r>
-              <a:rPr sz="1600" dirty="0">
-                <a:solidFill>
-                  <a:schemeClr val="bg1">
-                    <a:lumMod val="95000"/>
-                  </a:schemeClr>
-                </a:solidFill>
-              </a:rPr>
-              <a:t>)</a:t>
-            </a:r>
-            <a:br>
-              <a:rPr sz="1600" dirty="0">
-                <a:solidFill>
-                  <a:schemeClr val="bg1">
-                    <a:lumMod val="95000"/>
-                  </a:schemeClr>
-                </a:solidFill>
-              </a:rPr>
-            </a:br>
-            <a:r>
-              <a:rPr sz="1600" dirty="0">
-                <a:solidFill>
-                  <a:schemeClr val="bg1">
-                    <a:lumMod val="95000"/>
-                  </a:schemeClr>
-                </a:solidFill>
-              </a:rPr>
-              <a:t>    </a:t>
-            </a:r>
+              <a:t>        identity = {</a:t>
+            </a:r>
+          </a:p>
+          <a:p>
+            <a:pPr/>
             <a:r>
               <a:rPr sz="1600" dirty="0" err="1">
                 <a:solidFill>
@@ -4612,18 +4394,11 @@
                   </a:schemeClr>
                 </a:solidFill>
               </a:rPr>
-              <a:t>mockCtx.On</a:t>
-            </a:r>
-            <a:r>
-              <a:rPr sz="1600" dirty="0">
-                <a:solidFill>
-                  <a:schemeClr val="bg1">
-                    <a:lumMod val="95000"/>
-                  </a:schemeClr>
-                </a:solidFill>
-              </a:rPr>
-              <a:t>("</a:t>
-            </a:r>
+              <a:t>            getMSPID: sinon.stub().returns('Org1MSP'),</a:t>
+            </a:r>
+          </a:p>
+          <a:p>
+            <a:pPr/>
             <a:r>
               <a:rPr sz="1600" dirty="0" err="1">
                 <a:solidFill>
@@ -4632,18 +4407,11 @@
                   </a:schemeClr>
                 </a:solidFill>
               </a:rPr>
-              <a:t>GetClientIdentity</a:t>
-            </a:r>
-            <a:r>
-              <a:rPr sz="1600" dirty="0">
-                <a:solidFill>
-                  <a:schemeClr val="bg1">
-                    <a:lumMod val="95000"/>
-                  </a:schemeClr>
-                </a:solidFill>
-              </a:rPr>
-              <a:t>").Return(</a:t>
-            </a:r>
+              <a:t>        };</a:t>
+            </a:r>
+          </a:p>
+          <a:p>
+            <a:pPr/>
             <a:r>
               <a:rPr sz="1600" dirty="0" err="1">
                 <a:solidFill>
@@ -4652,37 +4420,11 @@
                   </a:schemeClr>
                 </a:solidFill>
               </a:rPr>
-              <a:t>mockIdentity</a:t>
-            </a:r>
-            <a:r>
-              <a:rPr sz="1600" dirty="0">
-                <a:solidFill>
-                  <a:schemeClr val="bg1">
-                    <a:lumMod val="95000"/>
-                  </a:schemeClr>
-                </a:solidFill>
-              </a:rPr>
-              <a:t>)</a:t>
-            </a:r>
-            <a:br>
-              <a:rPr sz="1600" dirty="0">
-                <a:solidFill>
-                  <a:schemeClr val="bg1">
-                    <a:lumMod val="95000"/>
-                  </a:schemeClr>
-                </a:solidFill>
-              </a:rPr>
-            </a:br>
-            <a:r>
-              <a:rPr sz="1600" dirty="0">
-                <a:solidFill>
-                  <a:schemeClr val="bg1">
-                    <a:lumMod val="95000"/>
-                  </a:schemeClr>
-                </a:solidFill>
-              </a:rPr>
-              <a:t>    </a:t>
-            </a:r>
+              <a:t>        ctx = {</a:t>
+            </a:r>
+          </a:p>
+          <a:p>
+            <a:pPr/>
             <a:r>
               <a:rPr sz="1600" dirty="0" err="1">
                 <a:solidFill>
@@ -4691,18 +4433,11 @@
                   </a:schemeClr>
                 </a:solidFill>
               </a:rPr>
-              <a:t>mockIdentity.On</a:t>
-            </a:r>
-            <a:r>
-              <a:rPr sz="1600" dirty="0">
-                <a:solidFill>
-                  <a:schemeClr val="bg1">
-                    <a:lumMod val="95000"/>
-                  </a:schemeClr>
-                </a:solidFill>
-              </a:rPr>
-              <a:t>("</a:t>
-            </a:r>
+              <a:t>            stub,</a:t>
+            </a:r>
+          </a:p>
+          <a:p>
+            <a:pPr/>
             <a:r>
               <a:rPr sz="1600" dirty="0" err="1">
                 <a:solidFill>
@@ -4711,37 +4446,11 @@
                   </a:schemeClr>
                 </a:solidFill>
               </a:rPr>
-              <a:t>GetMSPID</a:t>
-            </a:r>
-            <a:r>
-              <a:rPr sz="1600" dirty="0">
-                <a:solidFill>
-                  <a:schemeClr val="bg1">
-                    <a:lumMod val="95000"/>
-                  </a:schemeClr>
-                </a:solidFill>
-              </a:rPr>
-              <a:t>").Return("Org1MSP", nil)</a:t>
-            </a:r>
-            <a:br>
-              <a:rPr sz="1600" dirty="0">
-                <a:solidFill>
-                  <a:schemeClr val="bg1">
-                    <a:lumMod val="95000"/>
-                  </a:schemeClr>
-                </a:solidFill>
-              </a:rPr>
-            </a:br>
-            <a:r>
-              <a:rPr sz="1600" dirty="0">
-                <a:solidFill>
-                  <a:schemeClr val="bg1">
-                    <a:lumMod val="95000"/>
-                  </a:schemeClr>
-                </a:solidFill>
-              </a:rPr>
-              <a:t>    </a:t>
-            </a:r>
+              <a:t>            clientIdentity: identity</a:t>
+            </a:r>
+          </a:p>
+          <a:p>
+            <a:pPr/>
             <a:r>
               <a:rPr sz="1600" dirty="0" err="1">
                 <a:solidFill>
@@ -4750,18 +4459,11 @@
                   </a:schemeClr>
                 </a:solidFill>
               </a:rPr>
-              <a:t>mockIdentity.On</a:t>
-            </a:r>
-            <a:r>
-              <a:rPr sz="1600" dirty="0">
-                <a:solidFill>
-                  <a:schemeClr val="bg1">
-                    <a:lumMod val="95000"/>
-                  </a:schemeClr>
-                </a:solidFill>
-              </a:rPr>
-              <a:t>("AssertAttributeValue", "role", "</a:t>
-            </a:r>
+              <a:t>        };</a:t>
+            </a:r>
+          </a:p>
+          <a:p>
+            <a:pPr/>
             <a:r>
               <a:rPr sz="1600" dirty="0" err="1">
                 <a:solidFill>
@@ -4770,53 +4472,8 @@
                   </a:schemeClr>
                 </a:solidFill>
               </a:rPr>
-              <a:t>registrador</a:t>
-            </a:r>
-            <a:r>
-              <a:rPr sz="1600" dirty="0">
-                <a:solidFill>
-                  <a:schemeClr val="bg1">
-                    <a:lumMod val="95000"/>
-                  </a:schemeClr>
-                </a:solidFill>
-              </a:rPr>
-              <a:t>").</a:t>
-            </a:r>
-            <a:br>
-              <a:rPr sz="1600" dirty="0">
-                <a:solidFill>
-                  <a:schemeClr val="bg1">
-                    <a:lumMod val="95000"/>
-                  </a:schemeClr>
-                </a:solidFill>
-              </a:rPr>
-            </a:br>
-            <a:r>
-              <a:rPr sz="1600" dirty="0">
-                <a:solidFill>
-                  <a:schemeClr val="bg1">
-                    <a:lumMod val="95000"/>
-                  </a:schemeClr>
-                </a:solidFill>
-              </a:rPr>
-              <a:t>        Return(nil)</a:t>
-            </a:r>
-            <a:br>
-              <a:rPr sz="1600" dirty="0">
-                <a:solidFill>
-                  <a:schemeClr val="bg1">
-                    <a:lumMod val="95000"/>
-                  </a:schemeClr>
-                </a:solidFill>
-              </a:rPr>
-            </a:br>
-            <a:endParaRPr sz="1600" dirty="0">
-              <a:solidFill>
-                <a:schemeClr val="bg1">
-                  <a:lumMod val="95000"/>
-                </a:schemeClr>
-              </a:solidFill>
-            </a:endParaRPr>
+              <a:t>    });</a:t>
+            </a:r>
           </a:p>
         </p:txBody>
       </p:sp>
@@ -4848,7 +4505,8 @@
           </a:bodyPr>
           <a:lstStyle/>
           <a:p>
-            <a:br>
+            <a:pPr/>
+            <a:r>
               <a:rPr lang="es-ES" sz="1600" dirty="0">
                 <a:solidFill>
                   <a:schemeClr val="bg1">
@@ -4856,7 +4514,11 @@
                   </a:schemeClr>
                 </a:solidFill>
               </a:rPr>
-            </a:br>
+              <a:t>    it('crea propiedad cuando no existe', async () =&gt; {</a:t>
+            </a:r>
+          </a:p>
+          <a:p>
+            <a:pPr/>
             <a:r>
               <a:rPr lang="es-ES" sz="1600" dirty="0">
                 <a:solidFill>
@@ -4865,18 +4527,11 @@
                   </a:schemeClr>
                 </a:solidFill>
               </a:rPr>
-              <a:t>    // </a:t>
-            </a:r>
-            <a:r>
-              <a:rPr lang="es-ES" sz="1600" dirty="0" err="1">
-                <a:solidFill>
-                  <a:schemeClr val="bg1">
-                    <a:lumMod val="95000"/>
-                  </a:schemeClr>
-                </a:solidFill>
-              </a:rPr>
-              <a:t>GetState</a:t>
-            </a:r>
+              <a:t>        // getState devuelve null (propiedad no existe)</a:t>
+            </a:r>
+          </a:p>
+          <a:p>
+            <a:pPr/>
             <a:r>
               <a:rPr lang="es-ES" sz="1600" dirty="0">
                 <a:solidFill>
@@ -4885,18 +4540,11 @@
                   </a:schemeClr>
                 </a:solidFill>
               </a:rPr>
-              <a:t> devuelve </a:t>
-            </a:r>
-            <a:r>
-              <a:rPr lang="es-ES" sz="1600" dirty="0" err="1">
-                <a:solidFill>
-                  <a:schemeClr val="bg1">
-                    <a:lumMod val="95000"/>
-                  </a:schemeClr>
-                </a:solidFill>
-              </a:rPr>
-              <a:t>nil</a:t>
-            </a:r>
+              <a:t>        stub.getState.resolves(null);</a:t>
+            </a:r>
+          </a:p>
+          <a:p>
+            <a:pPr/>
             <a:r>
               <a:rPr lang="es-ES" sz="1600" dirty="0">
                 <a:solidFill>
@@ -4905,9 +4553,12 @@
                   </a:schemeClr>
                 </a:solidFill>
               </a:rPr>
-              <a:t> (propiedad no existe)</a:t>
-            </a:r>
-            <a:br>
+              <a:t>        // putState acepta cualquier valor</a:t>
+            </a:r>
+          </a:p>
+          <a:p>
+            <a:pPr/>
+            <a:r>
               <a:rPr lang="es-ES" sz="1600" dirty="0">
                 <a:solidFill>
                   <a:schemeClr val="bg1">
@@ -4915,7 +4566,11 @@
                   </a:schemeClr>
                 </a:solidFill>
               </a:rPr>
-            </a:br>
+              <a:t>        stub.putState.resolves();</a:t>
+            </a:r>
+          </a:p>
+          <a:p>
+            <a:pPr/>
             <a:r>
               <a:rPr lang="es-ES" sz="1600" dirty="0">
                 <a:solidFill>
@@ -4924,18 +4579,11 @@
                   </a:schemeClr>
                 </a:solidFill>
               </a:rPr>
-              <a:t>    </a:t>
-            </a:r>
-            <a:r>
-              <a:rPr lang="es-ES" sz="1600" dirty="0" err="1">
-                <a:solidFill>
-                  <a:schemeClr val="bg1">
-                    <a:lumMod val="95000"/>
-                  </a:schemeClr>
-                </a:solidFill>
-              </a:rPr>
-              <a:t>mockStub.On</a:t>
-            </a:r>
+              <a:t/>
+            </a:r>
+          </a:p>
+          <a:p>
+            <a:pPr/>
             <a:r>
               <a:rPr lang="es-ES" sz="1600" dirty="0">
                 <a:solidFill>
@@ -4944,18 +4592,11 @@
                   </a:schemeClr>
                 </a:solidFill>
               </a:rPr>
-              <a:t>("</a:t>
-            </a:r>
-            <a:r>
-              <a:rPr lang="es-ES" sz="1600" dirty="0" err="1">
-                <a:solidFill>
-                  <a:schemeClr val="bg1">
-                    <a:lumMod val="95000"/>
-                  </a:schemeClr>
-                </a:solidFill>
-              </a:rPr>
-              <a:t>GetState</a:t>
-            </a:r>
+              <a:t>        // Ejecutar</a:t>
+            </a:r>
+          </a:p>
+          <a:p>
+            <a:pPr/>
             <a:r>
               <a:rPr lang="es-ES" sz="1600" dirty="0">
                 <a:solidFill>
@@ -4964,18 +4605,11 @@
                   </a:schemeClr>
                 </a:solidFill>
               </a:rPr>
-              <a:t>", "PROP001").</a:t>
-            </a:r>
-            <a:r>
-              <a:rPr lang="es-ES" sz="1600" dirty="0" err="1">
-                <a:solidFill>
-                  <a:schemeClr val="bg1">
-                    <a:lumMod val="95000"/>
-                  </a:schemeClr>
-                </a:solidFill>
-              </a:rPr>
-              <a:t>Return</a:t>
-            </a:r>
+              <a:t>        const contract = new SmartContract();</a:t>
+            </a:r>
+          </a:p>
+          <a:p>
+            <a:pPr/>
             <a:r>
               <a:rPr lang="es-ES" sz="1600" dirty="0">
                 <a:solidFill>
@@ -4984,18 +4618,11 @@
                   </a:schemeClr>
                 </a:solidFill>
               </a:rPr>
-              <a:t>(</a:t>
-            </a:r>
-            <a:r>
-              <a:rPr lang="es-ES" sz="1600" dirty="0" err="1">
-                <a:solidFill>
-                  <a:schemeClr val="bg1">
-                    <a:lumMod val="95000"/>
-                  </a:schemeClr>
-                </a:solidFill>
-              </a:rPr>
-              <a:t>nil</a:t>
-            </a:r>
+              <a:t>        await contract.CreateProperty(ctx,</a:t>
+            </a:r>
+          </a:p>
+          <a:p>
+            <a:pPr/>
             <a:r>
               <a:rPr lang="es-ES" sz="1600" dirty="0">
                 <a:solidFill>
@@ -5004,18 +4631,11 @@
                   </a:schemeClr>
                 </a:solidFill>
               </a:rPr>
-              <a:t>, </a:t>
-            </a:r>
-            <a:r>
-              <a:rPr lang="es-ES" sz="1600" dirty="0" err="1">
-                <a:solidFill>
-                  <a:schemeClr val="bg1">
-                    <a:lumMod val="95000"/>
-                  </a:schemeClr>
-                </a:solidFill>
-              </a:rPr>
-              <a:t>nil</a:t>
-            </a:r>
+              <a:t>            'PROP001', 'Calle Mayor 1', 'Org1MSP',</a:t>
+            </a:r>
+          </a:p>
+          <a:p>
+            <a:pPr/>
             <a:r>
               <a:rPr lang="es-ES" sz="1600" dirty="0">
                 <a:solidFill>
@@ -5024,9 +4644,12 @@
                   </a:schemeClr>
                 </a:solidFill>
               </a:rPr>
-              <a:t>)</a:t>
-            </a:r>
-            <a:br>
+              <a:t>            120, 'apartment', 250000);</a:t>
+            </a:r>
+          </a:p>
+          <a:p>
+            <a:pPr/>
+            <a:r>
               <a:rPr lang="es-ES" sz="1600" dirty="0">
                 <a:solidFill>
                   <a:schemeClr val="bg1">
@@ -5034,7 +4657,11 @@
                   </a:schemeClr>
                 </a:solidFill>
               </a:rPr>
-            </a:br>
+              <a:t/>
+            </a:r>
+          </a:p>
+          <a:p>
+            <a:pPr/>
             <a:r>
               <a:rPr lang="es-ES" sz="1600" dirty="0">
                 <a:solidFill>
@@ -5043,18 +4670,11 @@
                   </a:schemeClr>
                 </a:solidFill>
               </a:rPr>
-              <a:t>    // </a:t>
-            </a:r>
-            <a:r>
-              <a:rPr lang="es-ES" sz="1600" dirty="0" err="1">
-                <a:solidFill>
-                  <a:schemeClr val="bg1">
-                    <a:lumMod val="95000"/>
-                  </a:schemeClr>
-                </a:solidFill>
-              </a:rPr>
-              <a:t>PutState</a:t>
-            </a:r>
+              <a:t>        // Verificar</a:t>
+            </a:r>
+          </a:p>
+          <a:p>
+            <a:pPr/>
             <a:r>
               <a:rPr lang="es-ES" sz="1600" dirty="0">
                 <a:solidFill>
@@ -5063,9 +4683,12 @@
                   </a:schemeClr>
                 </a:solidFill>
               </a:rPr>
-              <a:t> acepta cualquier valor</a:t>
-            </a:r>
-            <a:br>
+              <a:t>        expect(stub.putState.calledOnce).to.be.true;</a:t>
+            </a:r>
+          </a:p>
+          <a:p>
+            <a:pPr/>
+            <a:r>
               <a:rPr lang="es-ES" sz="1600" dirty="0">
                 <a:solidFill>
                   <a:schemeClr val="bg1">
@@ -5073,7 +4696,11 @@
                   </a:schemeClr>
                 </a:solidFill>
               </a:rPr>
-            </a:br>
+              <a:t>    });</a:t>
+            </a:r>
+          </a:p>
+          <a:p>
+            <a:pPr/>
             <a:r>
               <a:rPr lang="es-ES" sz="1600" dirty="0">
                 <a:solidFill>
@@ -5082,499 +4709,8 @@
                   </a:schemeClr>
                 </a:solidFill>
               </a:rPr>
-              <a:t>    </a:t>
-            </a:r>
-            <a:r>
-              <a:rPr lang="es-ES" sz="1600" dirty="0" err="1">
-                <a:solidFill>
-                  <a:schemeClr val="bg1">
-                    <a:lumMod val="95000"/>
-                  </a:schemeClr>
-                </a:solidFill>
-              </a:rPr>
-              <a:t>mockStub.On</a:t>
-            </a:r>
-            <a:r>
-              <a:rPr lang="es-ES" sz="1600" dirty="0">
-                <a:solidFill>
-                  <a:schemeClr val="bg1">
-                    <a:lumMod val="95000"/>
-                  </a:schemeClr>
-                </a:solidFill>
-              </a:rPr>
-              <a:t>("</a:t>
-            </a:r>
-            <a:r>
-              <a:rPr lang="es-ES" sz="1600" dirty="0" err="1">
-                <a:solidFill>
-                  <a:schemeClr val="bg1">
-                    <a:lumMod val="95000"/>
-                  </a:schemeClr>
-                </a:solidFill>
-              </a:rPr>
-              <a:t>PutState</a:t>
-            </a:r>
-            <a:r>
-              <a:rPr lang="es-ES" sz="1600" dirty="0">
-                <a:solidFill>
-                  <a:schemeClr val="bg1">
-                    <a:lumMod val="95000"/>
-                  </a:schemeClr>
-                </a:solidFill>
-              </a:rPr>
-              <a:t>", "PROP001", </a:t>
-            </a:r>
-            <a:r>
-              <a:rPr lang="es-ES" sz="1600" dirty="0" err="1">
-                <a:solidFill>
-                  <a:schemeClr val="bg1">
-                    <a:lumMod val="95000"/>
-                  </a:schemeClr>
-                </a:solidFill>
-              </a:rPr>
-              <a:t>mock.Anything</a:t>
-            </a:r>
-            <a:r>
-              <a:rPr lang="es-ES" sz="1600" dirty="0">
-                <a:solidFill>
-                  <a:schemeClr val="bg1">
-                    <a:lumMod val="95000"/>
-                  </a:schemeClr>
-                </a:solidFill>
-              </a:rPr>
-              <a:t>).</a:t>
-            </a:r>
-            <a:r>
-              <a:rPr lang="es-ES" sz="1600" dirty="0" err="1">
-                <a:solidFill>
-                  <a:schemeClr val="bg1">
-                    <a:lumMod val="95000"/>
-                  </a:schemeClr>
-                </a:solidFill>
-              </a:rPr>
-              <a:t>Return</a:t>
-            </a:r>
-            <a:r>
-              <a:rPr lang="es-ES" sz="1600" dirty="0">
-                <a:solidFill>
-                  <a:schemeClr val="bg1">
-                    <a:lumMod val="95000"/>
-                  </a:schemeClr>
-                </a:solidFill>
-              </a:rPr>
-              <a:t>(</a:t>
-            </a:r>
-            <a:r>
-              <a:rPr lang="es-ES" sz="1600" dirty="0" err="1">
-                <a:solidFill>
-                  <a:schemeClr val="bg1">
-                    <a:lumMod val="95000"/>
-                  </a:schemeClr>
-                </a:solidFill>
-              </a:rPr>
-              <a:t>nil</a:t>
-            </a:r>
-            <a:r>
-              <a:rPr lang="es-ES" sz="1600" dirty="0">
-                <a:solidFill>
-                  <a:schemeClr val="bg1">
-                    <a:lumMod val="95000"/>
-                  </a:schemeClr>
-                </a:solidFill>
-              </a:rPr>
-              <a:t>)</a:t>
-            </a:r>
-            <a:br>
-              <a:rPr lang="es-ES" sz="1600" dirty="0">
-                <a:solidFill>
-                  <a:schemeClr val="bg1">
-                    <a:lumMod val="95000"/>
-                  </a:schemeClr>
-                </a:solidFill>
-              </a:rPr>
-            </a:br>
-            <a:br>
-              <a:rPr lang="es-ES" sz="1600" dirty="0">
-                <a:solidFill>
-                  <a:schemeClr val="bg1">
-                    <a:lumMod val="95000"/>
-                  </a:schemeClr>
-                </a:solidFill>
-              </a:rPr>
-            </a:br>
-            <a:r>
-              <a:rPr lang="es-ES" sz="1600" dirty="0">
-                <a:solidFill>
-                  <a:schemeClr val="bg1">
-                    <a:lumMod val="95000"/>
-                  </a:schemeClr>
-                </a:solidFill>
-              </a:rPr>
-              <a:t>    // Ejecutar</a:t>
-            </a:r>
-            <a:br>
-              <a:rPr lang="es-ES" sz="1600" dirty="0">
-                <a:solidFill>
-                  <a:schemeClr val="bg1">
-                    <a:lumMod val="95000"/>
-                  </a:schemeClr>
-                </a:solidFill>
-              </a:rPr>
-            </a:br>
-            <a:r>
-              <a:rPr lang="es-ES" sz="1600" dirty="0">
-                <a:solidFill>
-                  <a:schemeClr val="bg1">
-                    <a:lumMod val="95000"/>
-                  </a:schemeClr>
-                </a:solidFill>
-              </a:rPr>
-              <a:t>    </a:t>
-            </a:r>
-            <a:r>
-              <a:rPr lang="es-ES" sz="1600" dirty="0" err="1">
-                <a:solidFill>
-                  <a:schemeClr val="bg1">
-                    <a:lumMod val="95000"/>
-                  </a:schemeClr>
-                </a:solidFill>
-              </a:rPr>
-              <a:t>contract</a:t>
-            </a:r>
-            <a:r>
-              <a:rPr lang="es-ES" sz="1600" dirty="0">
-                <a:solidFill>
-                  <a:schemeClr val="bg1">
-                    <a:lumMod val="95000"/>
-                  </a:schemeClr>
-                </a:solidFill>
-              </a:rPr>
-              <a:t> := </a:t>
-            </a:r>
-            <a:r>
-              <a:rPr lang="es-ES" sz="1600" dirty="0" err="1">
-                <a:solidFill>
-                  <a:schemeClr val="bg1">
-                    <a:lumMod val="95000"/>
-                  </a:schemeClr>
-                </a:solidFill>
-              </a:rPr>
-              <a:t>SmartContract</a:t>
-            </a:r>
-            <a:r>
-              <a:rPr lang="es-ES" sz="1600" dirty="0">
-                <a:solidFill>
-                  <a:schemeClr val="bg1">
-                    <a:lumMod val="95000"/>
-                  </a:schemeClr>
-                </a:solidFill>
-              </a:rPr>
-              <a:t>{}</a:t>
-            </a:r>
-            <a:br>
-              <a:rPr lang="es-ES" sz="1600" dirty="0">
-                <a:solidFill>
-                  <a:schemeClr val="bg1">
-                    <a:lumMod val="95000"/>
-                  </a:schemeClr>
-                </a:solidFill>
-              </a:rPr>
-            </a:br>
-            <a:r>
-              <a:rPr lang="es-ES" sz="1600" dirty="0">
-                <a:solidFill>
-                  <a:schemeClr val="bg1">
-                    <a:lumMod val="95000"/>
-                  </a:schemeClr>
-                </a:solidFill>
-              </a:rPr>
-              <a:t>    </a:t>
-            </a:r>
-            <a:r>
-              <a:rPr lang="es-ES" sz="1600" dirty="0" err="1">
-                <a:solidFill>
-                  <a:schemeClr val="bg1">
-                    <a:lumMod val="95000"/>
-                  </a:schemeClr>
-                </a:solidFill>
-              </a:rPr>
-              <a:t>err</a:t>
-            </a:r>
-            <a:r>
-              <a:rPr lang="es-ES" sz="1600" dirty="0">
-                <a:solidFill>
-                  <a:schemeClr val="bg1">
-                    <a:lumMod val="95000"/>
-                  </a:schemeClr>
-                </a:solidFill>
-              </a:rPr>
-              <a:t> := </a:t>
-            </a:r>
-            <a:r>
-              <a:rPr lang="es-ES" sz="1600" dirty="0" err="1">
-                <a:solidFill>
-                  <a:schemeClr val="bg1">
-                    <a:lumMod val="95000"/>
-                  </a:schemeClr>
-                </a:solidFill>
-              </a:rPr>
-              <a:t>contract.CreateProperty</a:t>
-            </a:r>
-            <a:r>
-              <a:rPr lang="es-ES" sz="1600" dirty="0">
-                <a:solidFill>
-                  <a:schemeClr val="bg1">
-                    <a:lumMod val="95000"/>
-                  </a:schemeClr>
-                </a:solidFill>
-              </a:rPr>
-              <a:t>(</a:t>
-            </a:r>
-            <a:r>
-              <a:rPr lang="es-ES" sz="1600" dirty="0" err="1">
-                <a:solidFill>
-                  <a:schemeClr val="bg1">
-                    <a:lumMod val="95000"/>
-                  </a:schemeClr>
-                </a:solidFill>
-              </a:rPr>
-              <a:t>mockCtx</a:t>
-            </a:r>
-            <a:r>
-              <a:rPr lang="es-ES" sz="1600" dirty="0">
-                <a:solidFill>
-                  <a:schemeClr val="bg1">
-                    <a:lumMod val="95000"/>
-                  </a:schemeClr>
-                </a:solidFill>
-              </a:rPr>
-              <a:t>,</a:t>
-            </a:r>
-            <a:br>
-              <a:rPr lang="es-ES" sz="1600" dirty="0">
-                <a:solidFill>
-                  <a:schemeClr val="bg1">
-                    <a:lumMod val="95000"/>
-                  </a:schemeClr>
-                </a:solidFill>
-              </a:rPr>
-            </a:br>
-            <a:r>
-              <a:rPr lang="es-ES" sz="1600" dirty="0">
-                <a:solidFill>
-                  <a:schemeClr val="bg1">
-                    <a:lumMod val="95000"/>
-                  </a:schemeClr>
-                </a:solidFill>
-              </a:rPr>
-              <a:t>        "PROP001", "Calle Mayor 1", "Org1MSP", 120, "</a:t>
-            </a:r>
-            <a:r>
-              <a:rPr lang="es-ES" sz="1600" dirty="0" err="1">
-                <a:solidFill>
-                  <a:schemeClr val="bg1">
-                    <a:lumMod val="95000"/>
-                  </a:schemeClr>
-                </a:solidFill>
-              </a:rPr>
-              <a:t>apartment</a:t>
-            </a:r>
-            <a:r>
-              <a:rPr lang="es-ES" sz="1600" dirty="0">
-                <a:solidFill>
-                  <a:schemeClr val="bg1">
-                    <a:lumMod val="95000"/>
-                  </a:schemeClr>
-                </a:solidFill>
-              </a:rPr>
-              <a:t>", 250000)</a:t>
-            </a:r>
-            <a:br>
-              <a:rPr lang="es-ES" sz="1600" dirty="0">
-                <a:solidFill>
-                  <a:schemeClr val="bg1">
-                    <a:lumMod val="95000"/>
-                  </a:schemeClr>
-                </a:solidFill>
-              </a:rPr>
-            </a:br>
-            <a:br>
-              <a:rPr lang="es-ES" sz="1600" dirty="0">
-                <a:solidFill>
-                  <a:schemeClr val="bg1">
-                    <a:lumMod val="95000"/>
-                  </a:schemeClr>
-                </a:solidFill>
-              </a:rPr>
-            </a:br>
-            <a:r>
-              <a:rPr lang="es-ES" sz="1600" dirty="0">
-                <a:solidFill>
-                  <a:schemeClr val="bg1">
-                    <a:lumMod val="95000"/>
-                  </a:schemeClr>
-                </a:solidFill>
-              </a:rPr>
-              <a:t>    // Verificar</a:t>
-            </a:r>
-            <a:br>
-              <a:rPr lang="es-ES" sz="1600" dirty="0">
-                <a:solidFill>
-                  <a:schemeClr val="bg1">
-                    <a:lumMod val="95000"/>
-                  </a:schemeClr>
-                </a:solidFill>
-              </a:rPr>
-            </a:br>
-            <a:r>
-              <a:rPr lang="es-ES" sz="1600" dirty="0">
-                <a:solidFill>
-                  <a:schemeClr val="bg1">
-                    <a:lumMod val="95000"/>
-                  </a:schemeClr>
-                </a:solidFill>
-              </a:rPr>
-              <a:t>    </a:t>
-            </a:r>
-            <a:r>
-              <a:rPr lang="es-ES" sz="1600" dirty="0" err="1">
-                <a:solidFill>
-                  <a:schemeClr val="bg1">
-                    <a:lumMod val="95000"/>
-                  </a:schemeClr>
-                </a:solidFill>
-              </a:rPr>
-              <a:t>assert.NoError</a:t>
-            </a:r>
-            <a:r>
-              <a:rPr lang="es-ES" sz="1600" dirty="0">
-                <a:solidFill>
-                  <a:schemeClr val="bg1">
-                    <a:lumMod val="95000"/>
-                  </a:schemeClr>
-                </a:solidFill>
-              </a:rPr>
-              <a:t>(t, </a:t>
-            </a:r>
-            <a:r>
-              <a:rPr lang="es-ES" sz="1600" dirty="0" err="1">
-                <a:solidFill>
-                  <a:schemeClr val="bg1">
-                    <a:lumMod val="95000"/>
-                  </a:schemeClr>
-                </a:solidFill>
-              </a:rPr>
-              <a:t>err</a:t>
-            </a:r>
-            <a:r>
-              <a:rPr lang="es-ES" sz="1600" dirty="0">
-                <a:solidFill>
-                  <a:schemeClr val="bg1">
-                    <a:lumMod val="95000"/>
-                  </a:schemeClr>
-                </a:solidFill>
-              </a:rPr>
-              <a:t>)</a:t>
-            </a:r>
-            <a:br>
-              <a:rPr lang="es-ES" sz="1600" dirty="0">
-                <a:solidFill>
-                  <a:schemeClr val="bg1">
-                    <a:lumMod val="95000"/>
-                  </a:schemeClr>
-                </a:solidFill>
-              </a:rPr>
-            </a:br>
-            <a:r>
-              <a:rPr lang="es-ES" sz="1600" dirty="0">
-                <a:solidFill>
-                  <a:schemeClr val="bg1">
-                    <a:lumMod val="95000"/>
-                  </a:schemeClr>
-                </a:solidFill>
-              </a:rPr>
-              <a:t>    </a:t>
-            </a:r>
-            <a:r>
-              <a:rPr lang="es-ES" sz="1600" dirty="0" err="1">
-                <a:solidFill>
-                  <a:schemeClr val="bg1">
-                    <a:lumMod val="95000"/>
-                  </a:schemeClr>
-                </a:solidFill>
-              </a:rPr>
-              <a:t>mockStub.AssertCalled</a:t>
-            </a:r>
-            <a:r>
-              <a:rPr lang="es-ES" sz="1600" dirty="0">
-                <a:solidFill>
-                  <a:schemeClr val="bg1">
-                    <a:lumMod val="95000"/>
-                  </a:schemeClr>
-                </a:solidFill>
-              </a:rPr>
-              <a:t>(t, "</a:t>
-            </a:r>
-            <a:r>
-              <a:rPr lang="es-ES" sz="1600" dirty="0" err="1">
-                <a:solidFill>
-                  <a:schemeClr val="bg1">
-                    <a:lumMod val="95000"/>
-                  </a:schemeClr>
-                </a:solidFill>
-              </a:rPr>
-              <a:t>PutState</a:t>
-            </a:r>
-            <a:r>
-              <a:rPr lang="es-ES" sz="1600" dirty="0">
-                <a:solidFill>
-                  <a:schemeClr val="bg1">
-                    <a:lumMod val="95000"/>
-                  </a:schemeClr>
-                </a:solidFill>
-              </a:rPr>
-              <a:t>", "PROP001", </a:t>
-            </a:r>
-            <a:r>
-              <a:rPr lang="es-ES" sz="1600" dirty="0" err="1">
-                <a:solidFill>
-                  <a:schemeClr val="bg1">
-                    <a:lumMod val="95000"/>
-                  </a:schemeClr>
-                </a:solidFill>
-              </a:rPr>
-              <a:t>mock.Anything</a:t>
-            </a:r>
-            <a:r>
-              <a:rPr lang="es-ES" sz="1600" dirty="0">
-                <a:solidFill>
-                  <a:schemeClr val="bg1">
-                    <a:lumMod val="95000"/>
-                  </a:schemeClr>
-                </a:solidFill>
-              </a:rPr>
-              <a:t>)</a:t>
-            </a:r>
-            <a:br>
-              <a:rPr lang="es-ES" sz="1600" dirty="0">
-                <a:solidFill>
-                  <a:schemeClr val="bg1">
-                    <a:lumMod val="95000"/>
-                  </a:schemeClr>
-                </a:solidFill>
-              </a:rPr>
-            </a:br>
-            <a:r>
-              <a:rPr lang="es-ES" sz="1600" dirty="0">
-                <a:solidFill>
-                  <a:schemeClr val="bg1">
-                    <a:lumMod val="95000"/>
-                  </a:schemeClr>
-                </a:solidFill>
-              </a:rPr>
-              <a:t>}</a:t>
-            </a:r>
-            <a:endParaRPr lang="es-ES" sz="1600" dirty="0"/>
+              <a:t>});</a:t>
+            </a:r>
           </a:p>
         </p:txBody>
       </p:sp>
@@ -10494,6 +9630,1738 @@
 </p:sld>
 </file>
 
+<file path=ppt/slides/slide23.xml><?xml version="1.0" encoding="utf-8"?>
+<p:sld xmlns:a="http://schemas.openxmlformats.org/drawingml/2006/main" xmlns:p="http://schemas.openxmlformats.org/presentationml/2006/main" xmlns:r="http://schemas.openxmlformats.org/officeDocument/2006/relationships">
+  <p:cSld>
+    <p:spTree>
+      <p:nvGrpSpPr>
+        <p:cNvPr id="1" name=""/>
+        <p:cNvGrpSpPr/>
+        <p:nvPr/>
+      </p:nvGrpSpPr>
+      <p:grpSpPr/>
+      <p:sp>
+        <p:nvSpPr>
+          <p:cNvPr id="2" name="Rectangle 1"/>
+          <p:cNvSpPr/>
+          <p:nvPr/>
+        </p:nvSpPr>
+        <p:spPr>
+          <a:xfrm>
+            <a:off x="0" y="0"/>
+            <a:ext cx="12188952" cy="73152"/>
+          </a:xfrm>
+          <a:prstGeom prst="rect">
+            <a:avLst/>
+          </a:prstGeom>
+          <a:solidFill>
+            <a:srgbClr val="22627E"/>
+          </a:solidFill>
+          <a:ln>
+            <a:noFill/>
+          </a:ln>
+        </p:spPr>
+        <p:style>
+          <a:lnRef idx="1">
+            <a:schemeClr val="accent1"/>
+          </a:lnRef>
+          <a:fillRef idx="3">
+            <a:schemeClr val="accent1"/>
+          </a:fillRef>
+          <a:effectRef idx="2">
+            <a:schemeClr val="accent1"/>
+          </a:effectRef>
+          <a:fontRef idx="minor">
+            <a:schemeClr val="lt1"/>
+          </a:fontRef>
+        </p:style>
+        <p:txBody>
+          <a:bodyPr rtlCol="0" anchor="ctr"/>
+          <a:lstStyle/>
+          <a:p>
+            <a:pPr algn="ctr"/>
+          </a:p>
+        </p:txBody>
+      </p:sp>
+      <p:sp>
+        <p:nvSpPr>
+          <p:cNvPr id="3" name="TextBox 2"/>
+          <p:cNvSpPr txBox="1"/>
+          <p:nvPr/>
+        </p:nvSpPr>
+        <p:spPr>
+          <a:xfrm>
+            <a:off x="457200" y="274320"/>
+            <a:ext cx="10972800" cy="731520"/>
+          </a:xfrm>
+          <a:prstGeom prst="rect">
+            <a:avLst/>
+          </a:prstGeom>
+          <a:noFill/>
+        </p:spPr>
+        <p:txBody>
+          <a:bodyPr wrap="square"/>
+          <a:lstStyle/>
+          <a:p>
+            <a:pPr algn="l">
+              <a:defRPr sz="3200" b="1">
+                <a:solidFill>
+                  <a:srgbClr val="22627E"/>
+                </a:solidFill>
+                <a:latin typeface="Calibri"/>
+              </a:defRPr>
+            </a:pPr>
+            <a:r>
+              <a:t>Respuestas al debate (1/2)</a:t>
+            </a:r>
+          </a:p>
+        </p:txBody>
+      </p:sp>
+      <p:sp>
+        <p:nvSpPr>
+          <p:cNvPr id="4" name="Rectangle 3"/>
+          <p:cNvSpPr/>
+          <p:nvPr/>
+        </p:nvSpPr>
+        <p:spPr>
+          <a:xfrm>
+            <a:off x="457200" y="1051560"/>
+            <a:ext cx="10972800" cy="27432"/>
+          </a:xfrm>
+          <a:prstGeom prst="rect">
+            <a:avLst/>
+          </a:prstGeom>
+          <a:solidFill>
+            <a:srgbClr val="22627E"/>
+          </a:solidFill>
+          <a:ln>
+            <a:noFill/>
+          </a:ln>
+        </p:spPr>
+        <p:style>
+          <a:lnRef idx="1">
+            <a:schemeClr val="accent1"/>
+          </a:lnRef>
+          <a:fillRef idx="3">
+            <a:schemeClr val="accent1"/>
+          </a:fillRef>
+          <a:effectRef idx="2">
+            <a:schemeClr val="accent1"/>
+          </a:effectRef>
+          <a:fontRef idx="minor">
+            <a:schemeClr val="lt1"/>
+          </a:fontRef>
+        </p:style>
+        <p:txBody>
+          <a:bodyPr rtlCol="0" anchor="ctr"/>
+          <a:lstStyle/>
+          <a:p>
+            <a:pPr algn="ctr"/>
+          </a:p>
+        </p:txBody>
+      </p:sp>
+      <p:sp>
+        <p:nvSpPr>
+          <p:cNvPr id="5" name="TextBox 4"/>
+          <p:cNvSpPr txBox="1"/>
+          <p:nvPr/>
+        </p:nvSpPr>
+        <p:spPr>
+          <a:xfrm>
+            <a:off x="640080" y="1280160"/>
+            <a:ext cx="10515600" cy="5029200"/>
+          </a:xfrm>
+          <a:prstGeom prst="rect">
+            <a:avLst/>
+          </a:prstGeom>
+          <a:noFill/>
+        </p:spPr>
+        <p:txBody>
+          <a:bodyPr wrap="square">
+            <a:spAutoFit/>
+          </a:bodyPr>
+          <a:lstStyle/>
+          <a:p>
+            <a:pPr>
+              <a:spcAft>
+                <a:spcPts val="800"/>
+              </a:spcAft>
+              <a:defRPr sz="2000">
+                <a:solidFill>
+                  <a:srgbClr val="333333"/>
+                </a:solidFill>
+                <a:latin typeface="Calibri"/>
+              </a:defRPr>
+            </a:pPr>
+            <a:r>
+              <a:t>1. Lo mas complejo / lo mas util del modulo:</a:t>
+            </a:r>
+          </a:p>
+          <a:p>
+            <a:pPr lvl="1">
+              <a:spcAft>
+                <a:spcPts val="400"/>
+              </a:spcAft>
+              <a:defRPr sz="1700">
+                <a:solidFill>
+                  <a:srgbClr val="666666"/>
+                </a:solidFill>
+                <a:latin typeface="Calibri"/>
+              </a:defRPr>
+            </a:pPr>
+            <a:r>
+              <a:t>    Complejo: el lifecycle de chaincodes (4 pasos) y el determinismo (errores silenciosos).</a:t>
+            </a:r>
+          </a:p>
+          <a:p>
+            <a:pPr lvl="1">
+              <a:spcAft>
+                <a:spcPts val="400"/>
+              </a:spcAft>
+              <a:defRPr sz="1700">
+                <a:solidFill>
+                  <a:srgbClr val="666666"/>
+                </a:solidFill>
+                <a:latin typeface="Calibri"/>
+              </a:defRPr>
+            </a:pPr>
+            <a:r>
+              <a:t>    Util: la capacidad de razonar sobre permisos antes de tocar codigo (MSPID/ABAC).</a:t>
+            </a:r>
+          </a:p>
+          <a:p>
+            <a:pPr lvl="1">
+              <a:spcAft>
+                <a:spcPts val="400"/>
+              </a:spcAft>
+              <a:defRPr sz="1700">
+                <a:solidFill>
+                  <a:srgbClr val="666666"/>
+                </a:solidFill>
+                <a:latin typeface="Calibri"/>
+              </a:defRPr>
+            </a:pPr>
+            <a:r>
+              <a:t>    No hay respuesta unica — depende del background (EVM vs Fabric).</a:t>
+            </a:r>
+          </a:p>
+          <a:p>
+            <a:pPr lvl="1">
+              <a:spcAft>
+                <a:spcPts val="400"/>
+              </a:spcAft>
+              <a:defRPr sz="1700">
+                <a:solidFill>
+                  <a:srgbClr val="666666"/>
+                </a:solidFill>
+                <a:latin typeface="Calibri"/>
+              </a:defRPr>
+            </a:pPr>
+            <a:r>
+              <a:t>    La mayoria coincide: los conceptos son simples, la operacion es donde esta la dificultad.</a:t>
+            </a:r>
+          </a:p>
+          <a:p>
+            <a:pPr>
+              <a:spcAft>
+                <a:spcPts val="800"/>
+              </a:spcAft>
+              <a:defRPr sz="2000">
+                <a:solidFill>
+                  <a:srgbClr val="333333"/>
+                </a:solidFill>
+                <a:latin typeface="Calibri"/>
+              </a:defRPr>
+            </a:pPr>
+            <a:r>
+              <a:t>2. Aplicacion real en vuestro sector:</a:t>
+            </a:r>
+          </a:p>
+          <a:p>
+            <a:pPr lvl="1">
+              <a:spcAft>
+                <a:spcPts val="400"/>
+              </a:spcAft>
+              <a:defRPr sz="1700">
+                <a:solidFill>
+                  <a:srgbClr val="666666"/>
+                </a:solidFill>
+                <a:latin typeface="Calibri"/>
+              </a:defRPr>
+            </a:pPr>
+            <a:r>
+              <a:t>    Depende del sector: trazabilidad, KYC compartido, tokenizacion B2B, registros regulados.</a:t>
+            </a:r>
+          </a:p>
+          <a:p>
+            <a:pPr lvl="1">
+              <a:spcAft>
+                <a:spcPts val="400"/>
+              </a:spcAft>
+              <a:defRPr sz="1700">
+                <a:solidFill>
+                  <a:srgbClr val="666666"/>
+                </a:solidFill>
+                <a:latin typeface="Calibri"/>
+              </a:defRPr>
+            </a:pPr>
+            <a:r>
+              <a:t>    Regla de oro: hay multiples orgs con desconfianza mutua + necesidad de auditoria.</a:t>
+            </a:r>
+          </a:p>
+          <a:p>
+            <a:pPr lvl="1">
+              <a:spcAft>
+                <a:spcPts val="400"/>
+              </a:spcAft>
+              <a:defRPr sz="1700">
+                <a:solidFill>
+                  <a:srgbClr val="666666"/>
+                </a:solidFill>
+                <a:latin typeface="Calibri"/>
+              </a:defRPr>
+            </a:pPr>
+            <a:r>
+              <a:t>    Si un solo actor es suficiente, una base de datos normal es mejor opcion.</a:t>
+            </a:r>
+          </a:p>
+          <a:p>
+            <a:pPr>
+              <a:spcAft>
+                <a:spcPts val="800"/>
+              </a:spcAft>
+              <a:defRPr sz="2000">
+                <a:solidFill>
+                  <a:srgbClr val="333333"/>
+                </a:solidFill>
+                <a:latin typeface="Calibri"/>
+              </a:defRPr>
+            </a:pPr>
+            <a:r>
+              <a:t>3. ¿Que echais en falta en Fabric vs Ethereum (y al reves)?</a:t>
+            </a:r>
+          </a:p>
+          <a:p>
+            <a:pPr lvl="1">
+              <a:spcAft>
+                <a:spcPts val="400"/>
+              </a:spcAft>
+              <a:defRPr sz="1700">
+                <a:solidFill>
+                  <a:srgbClr val="666666"/>
+                </a:solidFill>
+                <a:latin typeface="Calibri"/>
+              </a:defRPr>
+            </a:pPr>
+            <a:r>
+              <a:t>    Lo que Fabric NO tiene vs Ethereum: ecosistema DeFi, liquidez, interoperabilidad publica,</a:t>
+            </a:r>
+          </a:p>
+          <a:p>
+            <a:pPr lvl="1">
+              <a:spcAft>
+                <a:spcPts val="400"/>
+              </a:spcAft>
+              <a:defRPr sz="1700">
+                <a:solidFill>
+                  <a:srgbClr val="666666"/>
+                </a:solidFill>
+                <a:latin typeface="Calibri"/>
+              </a:defRPr>
+            </a:pPr>
+            <a:r>
+              <a:t>      wallets universales, stablecoins establecidas, herramientas DevTools maduras.</a:t>
+            </a:r>
+          </a:p>
+          <a:p>
+            <a:pPr lvl="1">
+              <a:spcAft>
+                <a:spcPts val="400"/>
+              </a:spcAft>
+              <a:defRPr sz="1700">
+                <a:solidFill>
+                  <a:srgbClr val="666666"/>
+                </a:solidFill>
+                <a:latin typeface="Calibri"/>
+              </a:defRPr>
+            </a:pPr>
+            <a:r>
+              <a:t>    Lo que Fabric SI tiene vs Ethereum: privacidad nativa, rendimiento, gobernanza controlada,</a:t>
+            </a:r>
+          </a:p>
+          <a:p>
+            <a:pPr lvl="1">
+              <a:spcAft>
+                <a:spcPts val="400"/>
+              </a:spcAft>
+              <a:defRPr sz="1700">
+                <a:solidFill>
+                  <a:srgbClr val="666666"/>
+                </a:solidFill>
+                <a:latin typeface="Calibri"/>
+              </a:defRPr>
+            </a:pPr>
+            <a:r>
+              <a:t>      identidades reales, integracion con sistemas legacy, cumplimiento regulatorio.</a:t>
+            </a:r>
+          </a:p>
+          <a:p>
+            <a:pPr lvl="1">
+              <a:spcAft>
+                <a:spcPts val="400"/>
+              </a:spcAft>
+              <a:defRPr sz="1700">
+                <a:solidFill>
+                  <a:srgbClr val="666666"/>
+                </a:solidFill>
+                <a:latin typeface="Calibri"/>
+              </a:defRPr>
+            </a:pPr>
+            <a:r>
+              <a:t>    Conclusion: son para casos de uso distintos, no compiten directamente.</a:t>
+            </a:r>
+          </a:p>
+        </p:txBody>
+      </p:sp>
+    </p:spTree>
+  </p:cSld>
+  <p:clrMapOvr>
+    <a:masterClrMapping/>
+  </p:clrMapOvr>
+</p:sld>
+</file>
+
+<file path=ppt/slides/slide24.xml><?xml version="1.0" encoding="utf-8"?>
+<p:sld xmlns:a="http://schemas.openxmlformats.org/drawingml/2006/main" xmlns:p="http://schemas.openxmlformats.org/presentationml/2006/main" xmlns:r="http://schemas.openxmlformats.org/officeDocument/2006/relationships">
+  <p:cSld>
+    <p:spTree>
+      <p:nvGrpSpPr>
+        <p:cNvPr id="1" name=""/>
+        <p:cNvGrpSpPr/>
+        <p:nvPr/>
+      </p:nvGrpSpPr>
+      <p:grpSpPr/>
+      <p:sp>
+        <p:nvSpPr>
+          <p:cNvPr id="2" name="Rectangle 1"/>
+          <p:cNvSpPr/>
+          <p:nvPr/>
+        </p:nvSpPr>
+        <p:spPr>
+          <a:xfrm>
+            <a:off x="0" y="0"/>
+            <a:ext cx="12188952" cy="73152"/>
+          </a:xfrm>
+          <a:prstGeom prst="rect">
+            <a:avLst/>
+          </a:prstGeom>
+          <a:solidFill>
+            <a:srgbClr val="22627E"/>
+          </a:solidFill>
+          <a:ln>
+            <a:noFill/>
+          </a:ln>
+        </p:spPr>
+        <p:style>
+          <a:lnRef idx="1">
+            <a:schemeClr val="accent1"/>
+          </a:lnRef>
+          <a:fillRef idx="3">
+            <a:schemeClr val="accent1"/>
+          </a:fillRef>
+          <a:effectRef idx="2">
+            <a:schemeClr val="accent1"/>
+          </a:effectRef>
+          <a:fontRef idx="minor">
+            <a:schemeClr val="lt1"/>
+          </a:fontRef>
+        </p:style>
+        <p:txBody>
+          <a:bodyPr rtlCol="0" anchor="ctr"/>
+          <a:lstStyle/>
+          <a:p>
+            <a:pPr algn="ctr"/>
+          </a:p>
+        </p:txBody>
+      </p:sp>
+      <p:sp>
+        <p:nvSpPr>
+          <p:cNvPr id="3" name="TextBox 2"/>
+          <p:cNvSpPr txBox="1"/>
+          <p:nvPr/>
+        </p:nvSpPr>
+        <p:spPr>
+          <a:xfrm>
+            <a:off x="457200" y="274320"/>
+            <a:ext cx="10972800" cy="731520"/>
+          </a:xfrm>
+          <a:prstGeom prst="rect">
+            <a:avLst/>
+          </a:prstGeom>
+          <a:noFill/>
+        </p:spPr>
+        <p:txBody>
+          <a:bodyPr wrap="square"/>
+          <a:lstStyle/>
+          <a:p>
+            <a:pPr algn="l">
+              <a:defRPr sz="3200" b="1">
+                <a:solidFill>
+                  <a:srgbClr val="22627E"/>
+                </a:solidFill>
+                <a:latin typeface="Calibri"/>
+              </a:defRPr>
+            </a:pPr>
+            <a:r>
+              <a:t>Respuestas al debate (2/2)</a:t>
+            </a:r>
+          </a:p>
+        </p:txBody>
+      </p:sp>
+      <p:sp>
+        <p:nvSpPr>
+          <p:cNvPr id="4" name="Rectangle 3"/>
+          <p:cNvSpPr/>
+          <p:nvPr/>
+        </p:nvSpPr>
+        <p:spPr>
+          <a:xfrm>
+            <a:off x="457200" y="1051560"/>
+            <a:ext cx="10972800" cy="27432"/>
+          </a:xfrm>
+          <a:prstGeom prst="rect">
+            <a:avLst/>
+          </a:prstGeom>
+          <a:solidFill>
+            <a:srgbClr val="22627E"/>
+          </a:solidFill>
+          <a:ln>
+            <a:noFill/>
+          </a:ln>
+        </p:spPr>
+        <p:style>
+          <a:lnRef idx="1">
+            <a:schemeClr val="accent1"/>
+          </a:lnRef>
+          <a:fillRef idx="3">
+            <a:schemeClr val="accent1"/>
+          </a:fillRef>
+          <a:effectRef idx="2">
+            <a:schemeClr val="accent1"/>
+          </a:effectRef>
+          <a:fontRef idx="minor">
+            <a:schemeClr val="lt1"/>
+          </a:fontRef>
+        </p:style>
+        <p:txBody>
+          <a:bodyPr rtlCol="0" anchor="ctr"/>
+          <a:lstStyle/>
+          <a:p>
+            <a:pPr algn="ctr"/>
+          </a:p>
+        </p:txBody>
+      </p:sp>
+      <p:sp>
+        <p:nvSpPr>
+          <p:cNvPr id="5" name="TextBox 4"/>
+          <p:cNvSpPr txBox="1"/>
+          <p:nvPr/>
+        </p:nvSpPr>
+        <p:spPr>
+          <a:xfrm>
+            <a:off x="640080" y="1280160"/>
+            <a:ext cx="10515600" cy="5029200"/>
+          </a:xfrm>
+          <a:prstGeom prst="rect">
+            <a:avLst/>
+          </a:prstGeom>
+          <a:noFill/>
+        </p:spPr>
+        <p:txBody>
+          <a:bodyPr wrap="square">
+            <a:spAutoFit/>
+          </a:bodyPr>
+          <a:lstStyle/>
+          <a:p>
+            <a:pPr>
+              <a:spcAft>
+                <a:spcPts val="800"/>
+              </a:spcAft>
+              <a:defRPr sz="2000">
+                <a:solidFill>
+                  <a:srgbClr val="333333"/>
+                </a:solidFill>
+                <a:latin typeface="Calibri"/>
+              </a:defRPr>
+            </a:pPr>
+            <a:r>
+              <a:t>4. Arquitectura para un proyecto real manana:</a:t>
+            </a:r>
+          </a:p>
+          <a:p>
+            <a:pPr lvl="1">
+              <a:spcAft>
+                <a:spcPts val="400"/>
+              </a:spcAft>
+              <a:defRPr sz="1700">
+                <a:solidFill>
+                  <a:srgbClr val="666666"/>
+                </a:solidFill>
+                <a:latin typeface="Calibri"/>
+              </a:defRPr>
+            </a:pPr>
+            <a:r>
+              <a:t>    Empezar pequeno: MVP con 2 orgs, 1 canal, 1 chaincode simple.</a:t>
+            </a:r>
+          </a:p>
+          <a:p>
+            <a:pPr lvl="1">
+              <a:spcAft>
+                <a:spcPts val="400"/>
+              </a:spcAft>
+              <a:defRPr sz="1700">
+                <a:solidFill>
+                  <a:srgbClr val="666666"/>
+                </a:solidFill>
+                <a:latin typeface="Calibri"/>
+              </a:defRPr>
+            </a:pPr>
+            <a:r>
+              <a:t>    Cryptogen para desarrollo, Fabric CA para produccion.</a:t>
+            </a:r>
+          </a:p>
+          <a:p>
+            <a:pPr lvl="1">
+              <a:spcAft>
+                <a:spcPts val="400"/>
+              </a:spcAft>
+              <a:defRPr sz="1700">
+                <a:solidFill>
+                  <a:srgbClr val="666666"/>
+                </a:solidFill>
+                <a:latin typeface="Calibri"/>
+              </a:defRPr>
+            </a:pPr>
+            <a:r>
+              <a:t>    CouchDB si necesitas rich queries (la mayoria de casos).</a:t>
+            </a:r>
+          </a:p>
+          <a:p>
+            <a:pPr lvl="1">
+              <a:spcAft>
+                <a:spcPts val="400"/>
+              </a:spcAft>
+              <a:defRPr sz="1700">
+                <a:solidFill>
+                  <a:srgbClr val="666666"/>
+                </a:solidFill>
+                <a:latin typeface="Calibri"/>
+              </a:defRPr>
+            </a:pPr>
+            <a:r>
+              <a:t>    Gateway SDK en el cliente (ya no se usa el SDK antiguo).</a:t>
+            </a:r>
+          </a:p>
+          <a:p>
+            <a:pPr lvl="1">
+              <a:spcAft>
+                <a:spcPts val="400"/>
+              </a:spcAft>
+              <a:defRPr sz="1700">
+                <a:solidFill>
+                  <a:srgbClr val="666666"/>
+                </a:solidFill>
+                <a:latin typeface="Calibri"/>
+              </a:defRPr>
+            </a:pPr>
+            <a:r>
+              <a:t>    Monitorizacion desde el dia 1: Prometheus + Grafana.</a:t>
+            </a:r>
+          </a:p>
+          <a:p>
+            <a:pPr lvl="1">
+              <a:spcAft>
+                <a:spcPts val="400"/>
+              </a:spcAft>
+              <a:defRPr sz="1700">
+                <a:solidFill>
+                  <a:srgbClr val="666666"/>
+                </a:solidFill>
+                <a:latin typeface="Calibri"/>
+              </a:defRPr>
+            </a:pPr>
+            <a:r>
+              <a:t>    Gobernanza clara ANTES de la tecnologia: ¿quien decide? ¿quien paga?</a:t>
+            </a:r>
+          </a:p>
+          <a:p>
+            <a:pPr>
+              <a:spcAft>
+                <a:spcPts val="800"/>
+              </a:spcAft>
+              <a:defRPr sz="2000">
+                <a:solidFill>
+                  <a:srgbClr val="333333"/>
+                </a:solidFill>
+                <a:latin typeface="Calibri"/>
+              </a:defRPr>
+            </a:pPr>
+            <a:r>
+              <a:t>5. Papel de la IA en el desarrollo de chaincodes:</a:t>
+            </a:r>
+          </a:p>
+          <a:p>
+            <a:pPr lvl="1">
+              <a:spcAft>
+                <a:spcPts val="400"/>
+              </a:spcAft>
+              <a:defRPr sz="1700">
+                <a:solidFill>
+                  <a:srgbClr val="666666"/>
+                </a:solidFill>
+                <a:latin typeface="Calibri"/>
+              </a:defRPr>
+            </a:pPr>
+            <a:r>
+              <a:t>    Generacion de chaincode basico desde especificacion (prompts -&gt; codigo).</a:t>
+            </a:r>
+          </a:p>
+          <a:p>
+            <a:pPr lvl="1">
+              <a:spcAft>
+                <a:spcPts val="400"/>
+              </a:spcAft>
+              <a:defRPr sz="1700">
+                <a:solidFill>
+                  <a:srgbClr val="666666"/>
+                </a:solidFill>
+                <a:latin typeface="Calibri"/>
+              </a:defRPr>
+            </a:pPr>
+            <a:r>
+              <a:t>    Auditoria automatica: detectar errores de determinismo, validaciones faltantes.</a:t>
+            </a:r>
+          </a:p>
+          <a:p>
+            <a:pPr lvl="1">
+              <a:spcAft>
+                <a:spcPts val="400"/>
+              </a:spcAft>
+              <a:defRPr sz="1700">
+                <a:solidFill>
+                  <a:srgbClr val="666666"/>
+                </a:solidFill>
+                <a:latin typeface="Calibri"/>
+              </a:defRPr>
+            </a:pPr>
+            <a:r>
+              <a:t>    Tests generados automaticamente a partir del codigo.</a:t>
+            </a:r>
+          </a:p>
+          <a:p>
+            <a:pPr lvl="1">
+              <a:spcAft>
+                <a:spcPts val="400"/>
+              </a:spcAft>
+              <a:defRPr sz="1700">
+                <a:solidFill>
+                  <a:srgbClr val="666666"/>
+                </a:solidFill>
+                <a:latin typeface="Calibri"/>
+              </a:defRPr>
+            </a:pPr>
+            <a:r>
+              <a:t>    Documentacion y diagramas generados.</a:t>
+            </a:r>
+          </a:p>
+          <a:p>
+            <a:pPr lvl="1">
+              <a:spcAft>
+                <a:spcPts val="400"/>
+              </a:spcAft>
+              <a:defRPr sz="1700">
+                <a:solidFill>
+                  <a:srgbClr val="666666"/>
+                </a:solidFill>
+                <a:latin typeface="Calibri"/>
+              </a:defRPr>
+            </a:pPr>
+            <a:r>
+              <a:t>    Riesgos: la IA no entiende el contexto de negocio, puede generar codigo plausible pero</a:t>
+            </a:r>
+          </a:p>
+          <a:p>
+            <a:pPr lvl="1">
+              <a:spcAft>
+                <a:spcPts val="400"/>
+              </a:spcAft>
+              <a:defRPr sz="1700">
+                <a:solidFill>
+                  <a:srgbClr val="666666"/>
+                </a:solidFill>
+                <a:latin typeface="Calibri"/>
+              </a:defRPr>
+            </a:pPr>
+            <a:r>
+              <a:t>      incorrecto. Siempre revisar manualmente, especialmente validaciones y control de acceso.</a:t>
+            </a:r>
+          </a:p>
+        </p:txBody>
+      </p:sp>
+    </p:spTree>
+  </p:cSld>
+  <p:clrMapOvr>
+    <a:masterClrMapping/>
+  </p:clrMapOvr>
+</p:sld>
+</file>
+
+<file path=ppt/slides/slide25.xml><?xml version="1.0" encoding="utf-8"?>
+<p:sld xmlns:a="http://schemas.openxmlformats.org/drawingml/2006/main" xmlns:p="http://schemas.openxmlformats.org/presentationml/2006/main" xmlns:r="http://schemas.openxmlformats.org/officeDocument/2006/relationships">
+  <p:cSld>
+    <p:spTree>
+      <p:nvGrpSpPr>
+        <p:cNvPr id="1" name=""/>
+        <p:cNvGrpSpPr/>
+        <p:nvPr/>
+      </p:nvGrpSpPr>
+      <p:grpSpPr/>
+      <p:sp>
+        <p:nvSpPr>
+          <p:cNvPr id="2" name="Rectangle 1"/>
+          <p:cNvSpPr/>
+          <p:nvPr/>
+        </p:nvSpPr>
+        <p:spPr>
+          <a:xfrm>
+            <a:off x="0" y="0"/>
+            <a:ext cx="12188952" cy="73152"/>
+          </a:xfrm>
+          <a:prstGeom prst="rect">
+            <a:avLst/>
+          </a:prstGeom>
+          <a:solidFill>
+            <a:srgbClr val="22627E"/>
+          </a:solidFill>
+          <a:ln>
+            <a:noFill/>
+          </a:ln>
+        </p:spPr>
+        <p:style>
+          <a:lnRef idx="1">
+            <a:schemeClr val="accent1"/>
+          </a:lnRef>
+          <a:fillRef idx="3">
+            <a:schemeClr val="accent1"/>
+          </a:fillRef>
+          <a:effectRef idx="2">
+            <a:schemeClr val="accent1"/>
+          </a:effectRef>
+          <a:fontRef idx="minor">
+            <a:schemeClr val="lt1"/>
+          </a:fontRef>
+        </p:style>
+        <p:txBody>
+          <a:bodyPr rtlCol="0" anchor="ctr"/>
+          <a:lstStyle/>
+          <a:p>
+            <a:pPr algn="ctr"/>
+          </a:p>
+        </p:txBody>
+      </p:sp>
+      <p:sp>
+        <p:nvSpPr>
+          <p:cNvPr id="3" name="TextBox 2"/>
+          <p:cNvSpPr txBox="1"/>
+          <p:nvPr/>
+        </p:nvSpPr>
+        <p:spPr>
+          <a:xfrm>
+            <a:off x="457200" y="274320"/>
+            <a:ext cx="10972800" cy="731520"/>
+          </a:xfrm>
+          <a:prstGeom prst="rect">
+            <a:avLst/>
+          </a:prstGeom>
+          <a:noFill/>
+        </p:spPr>
+        <p:txBody>
+          <a:bodyPr wrap="square"/>
+          <a:lstStyle/>
+          <a:p>
+            <a:pPr algn="l">
+              <a:defRPr sz="3200" b="1">
+                <a:solidFill>
+                  <a:srgbClr val="22627E"/>
+                </a:solidFill>
+                <a:latin typeface="Calibri"/>
+              </a:defRPr>
+            </a:pPr>
+            <a:r>
+              <a:t>Respuestas al repaso (1/2)</a:t>
+            </a:r>
+          </a:p>
+        </p:txBody>
+      </p:sp>
+      <p:sp>
+        <p:nvSpPr>
+          <p:cNvPr id="4" name="Rectangle 3"/>
+          <p:cNvSpPr/>
+          <p:nvPr/>
+        </p:nvSpPr>
+        <p:spPr>
+          <a:xfrm>
+            <a:off x="457200" y="1051560"/>
+            <a:ext cx="10972800" cy="27432"/>
+          </a:xfrm>
+          <a:prstGeom prst="rect">
+            <a:avLst/>
+          </a:prstGeom>
+          <a:solidFill>
+            <a:srgbClr val="22627E"/>
+          </a:solidFill>
+          <a:ln>
+            <a:noFill/>
+          </a:ln>
+        </p:spPr>
+        <p:style>
+          <a:lnRef idx="1">
+            <a:schemeClr val="accent1"/>
+          </a:lnRef>
+          <a:fillRef idx="3">
+            <a:schemeClr val="accent1"/>
+          </a:fillRef>
+          <a:effectRef idx="2">
+            <a:schemeClr val="accent1"/>
+          </a:effectRef>
+          <a:fontRef idx="minor">
+            <a:schemeClr val="lt1"/>
+          </a:fontRef>
+        </p:style>
+        <p:txBody>
+          <a:bodyPr rtlCol="0" anchor="ctr"/>
+          <a:lstStyle/>
+          <a:p>
+            <a:pPr algn="ctr"/>
+          </a:p>
+        </p:txBody>
+      </p:sp>
+      <p:sp>
+        <p:nvSpPr>
+          <p:cNvPr id="5" name="TextBox 4"/>
+          <p:cNvSpPr txBox="1"/>
+          <p:nvPr/>
+        </p:nvSpPr>
+        <p:spPr>
+          <a:xfrm>
+            <a:off x="640080" y="1280160"/>
+            <a:ext cx="10515600" cy="5029200"/>
+          </a:xfrm>
+          <a:prstGeom prst="rect">
+            <a:avLst/>
+          </a:prstGeom>
+          <a:noFill/>
+        </p:spPr>
+        <p:txBody>
+          <a:bodyPr wrap="square">
+            <a:spAutoFit/>
+          </a:bodyPr>
+          <a:lstStyle/>
+          <a:p>
+            <a:pPr>
+              <a:spcAft>
+                <a:spcPts val="800"/>
+              </a:spcAft>
+              <a:defRPr sz="2000">
+                <a:solidFill>
+                  <a:srgbClr val="333333"/>
+                </a:solidFill>
+                <a:latin typeface="Calibri"/>
+              </a:defRPr>
+            </a:pPr>
+            <a:r>
+              <a:t>1. Tokenizacion Fabric vs Ethereum:</a:t>
+            </a:r>
+          </a:p>
+          <a:p>
+            <a:pPr lvl="1">
+              <a:spcAft>
+                <a:spcPts val="400"/>
+              </a:spcAft>
+              <a:defRPr sz="1700">
+                <a:solidFill>
+                  <a:srgbClr val="666666"/>
+                </a:solidFill>
+                <a:latin typeface="Calibri"/>
+              </a:defRPr>
+            </a:pPr>
+            <a:r>
+              <a:t>    Ethereum: ERC-20/721/1155 estandar, publico, anyone-can-deploy.</a:t>
+            </a:r>
+          </a:p>
+          <a:p>
+            <a:pPr lvl="1">
+              <a:spcAft>
+                <a:spcPts val="400"/>
+              </a:spcAft>
+              <a:defRPr sz="1700">
+                <a:solidFill>
+                  <a:srgbClr val="666666"/>
+                </a:solidFill>
+                <a:latin typeface="Calibri"/>
+              </a:defRPr>
+            </a:pPr>
+            <a:r>
+              <a:t>    Fabric: sin estandar (aun), permissioned, identidades con certificado.</a:t>
+            </a:r>
+          </a:p>
+          <a:p>
+            <a:pPr>
+              <a:spcAft>
+                <a:spcPts val="800"/>
+              </a:spcAft>
+              <a:defRPr sz="2000">
+                <a:solidFill>
+                  <a:srgbClr val="333333"/>
+                </a:solidFill>
+                <a:latin typeface="Calibri"/>
+              </a:defRPr>
+            </a:pPr>
+            <a:r>
+              <a:t>2. Tres formas de implementar tokens en Fabric:</a:t>
+            </a:r>
+          </a:p>
+          <a:p>
+            <a:pPr lvl="1">
+              <a:spcAft>
+                <a:spcPts val="400"/>
+              </a:spcAft>
+              <a:defRPr sz="1700">
+                <a:solidFill>
+                  <a:srgbClr val="666666"/>
+                </a:solidFill>
+                <a:latin typeface="Calibri"/>
+              </a:defRPr>
+            </a:pPr>
+            <a:r>
+              <a:t>    Chaincode custom desde cero (maximo control).</a:t>
+            </a:r>
+          </a:p>
+          <a:p>
+            <a:pPr lvl="1">
+              <a:spcAft>
+                <a:spcPts val="400"/>
+              </a:spcAft>
+              <a:defRPr sz="1700">
+                <a:solidFill>
+                  <a:srgbClr val="666666"/>
+                </a:solidFill>
+                <a:latin typeface="Calibri"/>
+              </a:defRPr>
+            </a:pPr>
+            <a:r>
+              <a:t>    Fabric Token SDK (UTXO, mejor privacidad).</a:t>
+            </a:r>
+          </a:p>
+          <a:p>
+            <a:pPr lvl="1">
+              <a:spcAft>
+                <a:spcPts val="400"/>
+              </a:spcAft>
+              <a:defRPr sz="1700">
+                <a:solidFill>
+                  <a:srgbClr val="666666"/>
+                </a:solidFill>
+                <a:latin typeface="Calibri"/>
+              </a:defRPr>
+            </a:pPr>
+            <a:r>
+              <a:t>    fabric-samples/token-erc-20 (modelo de cuentas, mas simple).</a:t>
+            </a:r>
+          </a:p>
+          <a:p>
+            <a:pPr>
+              <a:spcAft>
+                <a:spcPts val="800"/>
+              </a:spcAft>
+              <a:defRPr sz="2000">
+                <a:solidFill>
+                  <a:srgbClr val="333333"/>
+                </a:solidFill>
+                <a:latin typeface="Calibri"/>
+              </a:defRPr>
+            </a:pPr>
+            <a:r>
+              <a:t>3. Anatomia de un chaincode:</a:t>
+            </a:r>
+          </a:p>
+          <a:p>
+            <a:pPr lvl="1">
+              <a:spcAft>
+                <a:spcPts val="400"/>
+              </a:spcAft>
+              <a:defRPr sz="1700">
+                <a:solidFill>
+                  <a:srgbClr val="666666"/>
+                </a:solidFill>
+                <a:latin typeface="Calibri"/>
+              </a:defRPr>
+            </a:pPr>
+            <a:r>
+              <a:t>    Struct con contractapi.Contract embebido (Go) o clase que extiende Contract (Node.js).</a:t>
+            </a:r>
+          </a:p>
+          <a:p>
+            <a:pPr lvl="1">
+              <a:spcAft>
+                <a:spcPts val="400"/>
+              </a:spcAft>
+              <a:defRPr sz="1700">
+                <a:solidFill>
+                  <a:srgbClr val="666666"/>
+                </a:solidFill>
+                <a:latin typeface="Calibri"/>
+              </a:defRPr>
+            </a:pPr>
+            <a:r>
+              <a:t>    Funciones reciben ctx: TransactionContextInterface (da acceso al Stub e Identity).</a:t>
+            </a:r>
+          </a:p>
+          <a:p>
+            <a:pPr lvl="1">
+              <a:spcAft>
+                <a:spcPts val="400"/>
+              </a:spcAft>
+              <a:defRPr sz="1700">
+                <a:solidFill>
+                  <a:srgbClr val="666666"/>
+                </a:solidFill>
+                <a:latin typeface="Calibri"/>
+              </a:defRPr>
+            </a:pPr>
+            <a:r>
+              <a:t>    Stub API: GetState, PutState, DelState, GetQueryResult, SetEvent, etc.</a:t>
+            </a:r>
+          </a:p>
+          <a:p>
+            <a:pPr>
+              <a:spcAft>
+                <a:spcPts val="800"/>
+              </a:spcAft>
+              <a:defRPr sz="2000">
+                <a:solidFill>
+                  <a:srgbClr val="333333"/>
+                </a:solidFill>
+                <a:latin typeface="Calibri"/>
+              </a:defRPr>
+            </a:pPr>
+            <a:r>
+              <a:t>4. CRUD + modelado de datos:</a:t>
+            </a:r>
+          </a:p>
+          <a:p>
+            <a:pPr lvl="1">
+              <a:spcAft>
+                <a:spcPts val="400"/>
+              </a:spcAft>
+              <a:defRPr sz="1700">
+                <a:solidFill>
+                  <a:srgbClr val="666666"/>
+                </a:solidFill>
+                <a:latin typeface="Calibri"/>
+              </a:defRPr>
+            </a:pPr>
+            <a:r>
+              <a:t>    CRUD = Create, Read, Update, Delete (logico).</a:t>
+            </a:r>
+          </a:p>
+          <a:p>
+            <a:pPr lvl="1">
+              <a:spcAft>
+                <a:spcPts val="400"/>
+              </a:spcAft>
+              <a:defRPr sz="1700">
+                <a:solidFill>
+                  <a:srgbClr val="666666"/>
+                </a:solidFill>
+                <a:latin typeface="Calibri"/>
+              </a:defRPr>
+            </a:pPr>
+            <a:r>
+              <a:t>    Usar docType en JSON para queries CouchDB.</a:t>
+            </a:r>
+          </a:p>
+          <a:p>
+            <a:pPr lvl="1">
+              <a:spcAft>
+                <a:spcPts val="400"/>
+              </a:spcAft>
+              <a:defRPr sz="1700">
+                <a:solidFill>
+                  <a:srgbClr val="666666"/>
+                </a:solidFill>
+                <a:latin typeface="Calibri"/>
+              </a:defRPr>
+            </a:pPr>
+            <a:r>
+              <a:t>    Composite keys cuando necesitas indices secundarios.</a:t>
+            </a:r>
+          </a:p>
+          <a:p>
+            <a:pPr lvl="1">
+              <a:spcAft>
+                <a:spcPts val="400"/>
+              </a:spcAft>
+              <a:defRPr sz="1700">
+                <a:solidFill>
+                  <a:srgbClr val="666666"/>
+                </a:solidFill>
+                <a:latin typeface="Calibri"/>
+              </a:defRPr>
+            </a:pPr>
+            <a:r>
+              <a:t>    Paginar queries grandes con GetStateByRangeWithPagination.</a:t>
+            </a:r>
+          </a:p>
+          <a:p>
+            <a:pPr>
+              <a:spcAft>
+                <a:spcPts val="800"/>
+              </a:spcAft>
+              <a:defRPr sz="2000">
+                <a:solidFill>
+                  <a:srgbClr val="333333"/>
+                </a:solidFill>
+                <a:latin typeface="Calibri"/>
+              </a:defRPr>
+            </a:pPr>
+            <a:r>
+              <a:t>5. Control de acceso (MSPID + ABAC):</a:t>
+            </a:r>
+          </a:p>
+          <a:p>
+            <a:pPr lvl="1">
+              <a:spcAft>
+                <a:spcPts val="400"/>
+              </a:spcAft>
+              <a:defRPr sz="1700">
+                <a:solidFill>
+                  <a:srgbClr val="666666"/>
+                </a:solidFill>
+                <a:latin typeface="Calibri"/>
+              </a:defRPr>
+            </a:pPr>
+            <a:r>
+              <a:t>    MSPID: que organizacion llama (HotelMSP, CafeteriaMSP).</a:t>
+            </a:r>
+          </a:p>
+          <a:p>
+            <a:pPr lvl="1">
+              <a:spcAft>
+                <a:spcPts val="400"/>
+              </a:spcAft>
+              <a:defRPr sz="1700">
+                <a:solidFill>
+                  <a:srgbClr val="666666"/>
+                </a:solidFill>
+                <a:latin typeface="Calibri"/>
+              </a:defRPr>
+            </a:pPr>
+            <a:r>
+              <a:t>    ABAC: atributos custom del certificado X.509 (role=minter, etc.).</a:t>
+            </a:r>
+          </a:p>
+          <a:p>
+            <a:pPr lvl="1">
+              <a:spcAft>
+                <a:spcPts val="400"/>
+              </a:spcAft>
+              <a:defRPr sz="1700">
+                <a:solidFill>
+                  <a:srgbClr val="666666"/>
+                </a:solidFill>
+                <a:latin typeface="Calibri"/>
+              </a:defRPr>
+            </a:pPr>
+            <a:r>
+              <a:t>    MSPID para separar orgs, ABAC para separar roles dentro de una org.</a:t>
+            </a:r>
+          </a:p>
+        </p:txBody>
+      </p:sp>
+    </p:spTree>
+  </p:cSld>
+  <p:clrMapOvr>
+    <a:masterClrMapping/>
+  </p:clrMapOvr>
+</p:sld>
+</file>
+
+<file path=ppt/slides/slide26.xml><?xml version="1.0" encoding="utf-8"?>
+<p:sld xmlns:a="http://schemas.openxmlformats.org/drawingml/2006/main" xmlns:p="http://schemas.openxmlformats.org/presentationml/2006/main" xmlns:r="http://schemas.openxmlformats.org/officeDocument/2006/relationships">
+  <p:cSld>
+    <p:spTree>
+      <p:nvGrpSpPr>
+        <p:cNvPr id="1" name=""/>
+        <p:cNvGrpSpPr/>
+        <p:nvPr/>
+      </p:nvGrpSpPr>
+      <p:grpSpPr/>
+      <p:sp>
+        <p:nvSpPr>
+          <p:cNvPr id="2" name="Rectangle 1"/>
+          <p:cNvSpPr/>
+          <p:nvPr/>
+        </p:nvSpPr>
+        <p:spPr>
+          <a:xfrm>
+            <a:off x="0" y="0"/>
+            <a:ext cx="12188952" cy="73152"/>
+          </a:xfrm>
+          <a:prstGeom prst="rect">
+            <a:avLst/>
+          </a:prstGeom>
+          <a:solidFill>
+            <a:srgbClr val="22627E"/>
+          </a:solidFill>
+          <a:ln>
+            <a:noFill/>
+          </a:ln>
+        </p:spPr>
+        <p:style>
+          <a:lnRef idx="1">
+            <a:schemeClr val="accent1"/>
+          </a:lnRef>
+          <a:fillRef idx="3">
+            <a:schemeClr val="accent1"/>
+          </a:fillRef>
+          <a:effectRef idx="2">
+            <a:schemeClr val="accent1"/>
+          </a:effectRef>
+          <a:fontRef idx="minor">
+            <a:schemeClr val="lt1"/>
+          </a:fontRef>
+        </p:style>
+        <p:txBody>
+          <a:bodyPr rtlCol="0" anchor="ctr"/>
+          <a:lstStyle/>
+          <a:p>
+            <a:pPr algn="ctr"/>
+          </a:p>
+        </p:txBody>
+      </p:sp>
+      <p:sp>
+        <p:nvSpPr>
+          <p:cNvPr id="3" name="TextBox 2"/>
+          <p:cNvSpPr txBox="1"/>
+          <p:nvPr/>
+        </p:nvSpPr>
+        <p:spPr>
+          <a:xfrm>
+            <a:off x="457200" y="274320"/>
+            <a:ext cx="10972800" cy="731520"/>
+          </a:xfrm>
+          <a:prstGeom prst="rect">
+            <a:avLst/>
+          </a:prstGeom>
+          <a:noFill/>
+        </p:spPr>
+        <p:txBody>
+          <a:bodyPr wrap="square"/>
+          <a:lstStyle/>
+          <a:p>
+            <a:pPr algn="l">
+              <a:defRPr sz="3200" b="1">
+                <a:solidFill>
+                  <a:srgbClr val="22627E"/>
+                </a:solidFill>
+                <a:latin typeface="Calibri"/>
+              </a:defRPr>
+            </a:pPr>
+            <a:r>
+              <a:t>Respuestas al repaso (2/2)</a:t>
+            </a:r>
+          </a:p>
+        </p:txBody>
+      </p:sp>
+      <p:sp>
+        <p:nvSpPr>
+          <p:cNvPr id="4" name="Rectangle 3"/>
+          <p:cNvSpPr/>
+          <p:nvPr/>
+        </p:nvSpPr>
+        <p:spPr>
+          <a:xfrm>
+            <a:off x="457200" y="1051560"/>
+            <a:ext cx="10972800" cy="27432"/>
+          </a:xfrm>
+          <a:prstGeom prst="rect">
+            <a:avLst/>
+          </a:prstGeom>
+          <a:solidFill>
+            <a:srgbClr val="22627E"/>
+          </a:solidFill>
+          <a:ln>
+            <a:noFill/>
+          </a:ln>
+        </p:spPr>
+        <p:style>
+          <a:lnRef idx="1">
+            <a:schemeClr val="accent1"/>
+          </a:lnRef>
+          <a:fillRef idx="3">
+            <a:schemeClr val="accent1"/>
+          </a:fillRef>
+          <a:effectRef idx="2">
+            <a:schemeClr val="accent1"/>
+          </a:effectRef>
+          <a:fontRef idx="minor">
+            <a:schemeClr val="lt1"/>
+          </a:fontRef>
+        </p:style>
+        <p:txBody>
+          <a:bodyPr rtlCol="0" anchor="ctr"/>
+          <a:lstStyle/>
+          <a:p>
+            <a:pPr algn="ctr"/>
+          </a:p>
+        </p:txBody>
+      </p:sp>
+      <p:sp>
+        <p:nvSpPr>
+          <p:cNvPr id="5" name="TextBox 4"/>
+          <p:cNvSpPr txBox="1"/>
+          <p:nvPr/>
+        </p:nvSpPr>
+        <p:spPr>
+          <a:xfrm>
+            <a:off x="640080" y="1280160"/>
+            <a:ext cx="10515600" cy="5029200"/>
+          </a:xfrm>
+          <a:prstGeom prst="rect">
+            <a:avLst/>
+          </a:prstGeom>
+          <a:noFill/>
+        </p:spPr>
+        <p:txBody>
+          <a:bodyPr wrap="square">
+            <a:spAutoFit/>
+          </a:bodyPr>
+          <a:lstStyle/>
+          <a:p>
+            <a:pPr>
+              <a:spcAft>
+                <a:spcPts val="800"/>
+              </a:spcAft>
+              <a:defRPr sz="2000">
+                <a:solidFill>
+                  <a:srgbClr val="333333"/>
+                </a:solidFill>
+                <a:latin typeface="Calibri"/>
+              </a:defRPr>
+            </a:pPr>
+            <a:r>
+              <a:t>6. Private Data Collections:</a:t>
+            </a:r>
+          </a:p>
+          <a:p>
+            <a:pPr lvl="1">
+              <a:spcAft>
+                <a:spcPts val="400"/>
+              </a:spcAft>
+              <a:defRPr sz="1700">
+                <a:solidFill>
+                  <a:srgbClr val="666666"/>
+                </a:solidFill>
+                <a:latin typeface="Calibri"/>
+              </a:defRPr>
+            </a:pPr>
+            <a:r>
+              <a:t>    Compartir datos entre un subconjunto de orgs (no todo el canal).</a:t>
+            </a:r>
+          </a:p>
+          <a:p>
+            <a:pPr lvl="1">
+              <a:spcAft>
+                <a:spcPts val="400"/>
+              </a:spcAft>
+              <a:defRPr sz="1700">
+                <a:solidFill>
+                  <a:srgbClr val="666666"/>
+                </a:solidFill>
+                <a:latin typeface="Calibri"/>
+              </a:defRPr>
+            </a:pPr>
+            <a:r>
+              <a:t>    Definidas en collections_config.json: nombre, policy, blockToLive.</a:t>
+            </a:r>
+          </a:p>
+          <a:p>
+            <a:pPr lvl="1">
+              <a:spcAft>
+                <a:spcPts val="400"/>
+              </a:spcAft>
+              <a:defRPr sz="1700">
+                <a:solidFill>
+                  <a:srgbClr val="666666"/>
+                </a:solidFill>
+                <a:latin typeface="Calibri"/>
+              </a:defRPr>
+            </a:pPr>
+            <a:r>
+              <a:t>    Datos reales en la BD privada del peer, hash en el ledger publico.</a:t>
+            </a:r>
+          </a:p>
+          <a:p>
+            <a:pPr>
+              <a:spcAft>
+                <a:spcPts val="800"/>
+              </a:spcAft>
+              <a:defRPr sz="2000">
+                <a:solidFill>
+                  <a:srgbClr val="333333"/>
+                </a:solidFill>
+                <a:latin typeface="Calibri"/>
+              </a:defRPr>
+            </a:pPr>
+            <a:r>
+              <a:t>7. Tokens fungibles vs NFT en Fabric:</a:t>
+            </a:r>
+          </a:p>
+          <a:p>
+            <a:pPr lvl="1">
+              <a:spcAft>
+                <a:spcPts val="400"/>
+              </a:spcAft>
+              <a:defRPr sz="1700">
+                <a:solidFill>
+                  <a:srgbClr val="666666"/>
+                </a:solidFill>
+                <a:latin typeface="Calibri"/>
+              </a:defRPr>
+            </a:pPr>
+            <a:r>
+              <a:t>    Fungible: balance por cuenta, tipo ERC-20.</a:t>
+            </a:r>
+          </a:p>
+          <a:p>
+            <a:pPr lvl="1">
+              <a:spcAft>
+                <a:spcPts val="400"/>
+              </a:spcAft>
+              <a:defRPr sz="1700">
+                <a:solidFill>
+                  <a:srgbClr val="666666"/>
+                </a:solidFill>
+                <a:latin typeface="Calibri"/>
+              </a:defRPr>
+            </a:pPr>
+            <a:r>
+              <a:t>    NFT: cada token unico con tokenID y metadata, composite keys por owner.</a:t>
+            </a:r>
+          </a:p>
+          <a:p>
+            <a:pPr>
+              <a:spcAft>
+                <a:spcPts val="800"/>
+              </a:spcAft>
+              <a:defRPr sz="2000">
+                <a:solidFill>
+                  <a:srgbClr val="333333"/>
+                </a:solidFill>
+                <a:latin typeface="Calibri"/>
+              </a:defRPr>
+            </a:pPr>
+            <a:r>
+              <a:t>8. Seguridad (determinismo, MVCC, checklist):</a:t>
+            </a:r>
+          </a:p>
+          <a:p>
+            <a:pPr lvl="1">
+              <a:spcAft>
+                <a:spcPts val="400"/>
+              </a:spcAft>
+              <a:defRPr sz="1700">
+                <a:solidFill>
+                  <a:srgbClr val="666666"/>
+                </a:solidFill>
+                <a:latin typeface="Calibri"/>
+              </a:defRPr>
+            </a:pPr>
+            <a:r>
+              <a:t>    Determinismo: no usar time.Now, rand, http, map iteration.</a:t>
+            </a:r>
+          </a:p>
+          <a:p>
+            <a:pPr lvl="1">
+              <a:spcAft>
+                <a:spcPts val="400"/>
+              </a:spcAft>
+              <a:defRPr sz="1700">
+                <a:solidFill>
+                  <a:srgbClr val="666666"/>
+                </a:solidFill>
+                <a:latin typeface="Calibri"/>
+              </a:defRPr>
+            </a:pPr>
+            <a:r>
+              <a:t>    MVCC: conflicto cuando 2 transacciones tocan las mismas keys.</a:t>
+            </a:r>
+          </a:p>
+          <a:p>
+            <a:pPr lvl="1">
+              <a:spcAft>
+                <a:spcPts val="400"/>
+              </a:spcAft>
+              <a:defRPr sz="1700">
+                <a:solidFill>
+                  <a:srgbClr val="666666"/>
+                </a:solidFill>
+                <a:latin typeface="Calibri"/>
+              </a:defRPr>
+            </a:pPr>
+            <a:r>
+              <a:t>    Checklist: verificar identidad, validar inputs, paginar queries, no loguear secretos.</a:t>
+            </a:r>
+          </a:p>
+          <a:p>
+            <a:pPr>
+              <a:spcAft>
+                <a:spcPts val="800"/>
+              </a:spcAft>
+              <a:defRPr sz="2000">
+                <a:solidFill>
+                  <a:srgbClr val="333333"/>
+                </a:solidFill>
+                <a:latin typeface="Calibri"/>
+              </a:defRPr>
+            </a:pPr>
+            <a:r>
+              <a:t>9. Gateway SDK:</a:t>
+            </a:r>
+          </a:p>
+          <a:p>
+            <a:pPr lvl="1">
+              <a:spcAft>
+                <a:spcPts val="400"/>
+              </a:spcAft>
+              <a:defRPr sz="1700">
+                <a:solidFill>
+                  <a:srgbClr val="666666"/>
+                </a:solidFill>
+                <a:latin typeface="Calibri"/>
+              </a:defRPr>
+            </a:pPr>
+            <a:r>
+              <a:t>    Libreria cliente para conectar apps con la red Fabric.</a:t>
+            </a:r>
+          </a:p>
+          <a:p>
+            <a:pPr lvl="1">
+              <a:spcAft>
+                <a:spcPts val="400"/>
+              </a:spcAft>
+              <a:defRPr sz="1700">
+                <a:solidFill>
+                  <a:srgbClr val="666666"/>
+                </a:solidFill>
+                <a:latin typeface="Calibri"/>
+              </a:defRPr>
+            </a:pPr>
+            <a:r>
+              <a:t>    Flujo: wallet -&gt; gateway -&gt; peer -&gt; chaincode.</a:t>
+            </a:r>
+          </a:p>
+          <a:p>
+            <a:pPr lvl="1">
+              <a:spcAft>
+                <a:spcPts val="400"/>
+              </a:spcAft>
+              <a:defRPr sz="1700">
+                <a:solidFill>
+                  <a:srgbClr val="666666"/>
+                </a:solidFill>
+                <a:latin typeface="Calibri"/>
+              </a:defRPr>
+            </a:pPr>
+            <a:r>
+              <a:t>    submitTransaction (escritura) vs evaluateTransaction (lectura).</a:t>
+            </a:r>
+          </a:p>
+          <a:p>
+            <a:pPr>
+              <a:spcAft>
+                <a:spcPts val="800"/>
+              </a:spcAft>
+              <a:defRPr sz="2000">
+                <a:solidFill>
+                  <a:srgbClr val="333333"/>
+                </a:solidFill>
+                <a:latin typeface="Calibri"/>
+              </a:defRPr>
+            </a:pPr>
+            <a:r>
+              <a:t>10. Testing con mocks:</a:t>
+            </a:r>
+          </a:p>
+          <a:p>
+            <a:pPr lvl="1">
+              <a:spcAft>
+                <a:spcPts val="400"/>
+              </a:spcAft>
+              <a:defRPr sz="1700">
+                <a:solidFill>
+                  <a:srgbClr val="666666"/>
+                </a:solidFill>
+                <a:latin typeface="Calibri"/>
+              </a:defRPr>
+            </a:pPr>
+            <a:r>
+              <a:t>    Mockear ctx, stub e clientIdentity con sinon/testify.</a:t>
+            </a:r>
+          </a:p>
+          <a:p>
+            <a:pPr lvl="1">
+              <a:spcAft>
+                <a:spcPts val="400"/>
+              </a:spcAft>
+              <a:defRPr sz="1700">
+                <a:solidFill>
+                  <a:srgbClr val="666666"/>
+                </a:solidFill>
+                <a:latin typeface="Calibri"/>
+              </a:defRPr>
+            </a:pPr>
+            <a:r>
+              <a:t>    Configurar respuestas esperadas: getState.resolves(...), etc.</a:t>
+            </a:r>
+          </a:p>
+          <a:p>
+            <a:pPr lvl="1">
+              <a:spcAft>
+                <a:spcPts val="400"/>
+              </a:spcAft>
+              <a:defRPr sz="1700">
+                <a:solidFill>
+                  <a:srgbClr val="666666"/>
+                </a:solidFill>
+                <a:latin typeface="Calibri"/>
+              </a:defRPr>
+            </a:pPr>
+            <a:r>
+              <a:t>    Verificar que se llamaron las funciones correctas (putState, setEvent).</a:t>
+            </a:r>
+          </a:p>
+        </p:txBody>
+      </p:sp>
+    </p:spTree>
+  </p:cSld>
+  <p:clrMapOvr>
+    <a:masterClrMapping/>
+  </p:clrMapOvr>
+</p:sld>
+</file>
+
 <file path=ppt/slides/slide3.xml><?xml version="1.0" encoding="utf-8"?>
 <p:sld xmlns:a="http://schemas.openxmlformats.org/drawingml/2006/main" xmlns:r="http://schemas.openxmlformats.org/officeDocument/2006/relationships" xmlns:p="http://schemas.openxmlformats.org/presentationml/2006/main">
   <p:cSld>
@@ -14689,7 +15557,7 @@
               </a:defRPr>
             </a:pPr>
             <a:r>
-              <a:t>Gateway SDK: conexion en Go</a:t>
+              <a:t>Gateway SDK: conexion en Node.js</a:t>
             </a:r>
           </a:p>
         </p:txBody>
@@ -14801,7 +15669,7 @@
               </a:defRPr>
             </a:pPr>
             <a:r>
-              <a:t>GO</a:t>
+              <a:t>NODE.JS</a:t>
             </a:r>
           </a:p>
         </p:txBody>
@@ -14870,7 +15738,8 @@
           <a:bodyPr wrap="square"/>
           <a:lstStyle/>
           <a:p>
-            <a:br>
+            <a:pPr/>
+            <a:r>
               <a:rPr sz="1600" dirty="0">
                 <a:solidFill>
                   <a:schemeClr val="bg1">
@@ -14878,7 +15747,11 @@
                   </a:schemeClr>
                 </a:solidFill>
               </a:rPr>
-            </a:br>
+              <a:t>const { connect, signers } = require(</a:t>
+            </a:r>
+          </a:p>
+          <a:p>
+            <a:pPr/>
             <a:r>
               <a:rPr sz="1600" dirty="0">
                 <a:solidFill>
@@ -14887,9 +15760,12 @@
                   </a:schemeClr>
                 </a:solidFill>
               </a:rPr>
-              <a:t>package main</a:t>
-            </a:r>
-            <a:br>
+              <a:t>    '@hyperledger/fabric-gateway');</a:t>
+            </a:r>
+          </a:p>
+          <a:p>
+            <a:pPr/>
+            <a:r>
               <a:rPr sz="1600" dirty="0">
                 <a:solidFill>
                   <a:schemeClr val="bg1">
@@ -14897,8 +15773,12 @@
                   </a:schemeClr>
                 </a:solidFill>
               </a:rPr>
-            </a:br>
-            <a:br>
+              <a:t>const grpc = require('@grpc/grpc-js');</a:t>
+            </a:r>
+          </a:p>
+          <a:p>
+            <a:pPr/>
+            <a:r>
               <a:rPr sz="1600" dirty="0">
                 <a:solidFill>
                   <a:schemeClr val="bg1">
@@ -14906,7 +15786,11 @@
                   </a:schemeClr>
                 </a:solidFill>
               </a:rPr>
-            </a:br>
+              <a:t>const crypto = require('crypto');</a:t>
+            </a:r>
+          </a:p>
+          <a:p>
+            <a:pPr/>
             <a:r>
               <a:rPr sz="1600" dirty="0">
                 <a:solidFill>
@@ -14915,9 +15799,12 @@
                   </a:schemeClr>
                 </a:solidFill>
               </a:rPr>
-              <a:t>import (</a:t>
-            </a:r>
-            <a:br>
+              <a:t/>
+            </a:r>
+          </a:p>
+          <a:p>
+            <a:pPr/>
+            <a:r>
               <a:rPr sz="1600" dirty="0">
                 <a:solidFill>
                   <a:schemeClr val="bg1">
@@ -14925,7 +15812,11 @@
                   </a:schemeClr>
                 </a:solidFill>
               </a:rPr>
-            </a:br>
+              <a:t>async function main() {</a:t>
+            </a:r>
+          </a:p>
+          <a:p>
+            <a:pPr/>
             <a:r>
               <a:rPr sz="1600" dirty="0">
                 <a:solidFill>
@@ -14934,18 +15825,11 @@
                   </a:schemeClr>
                 </a:solidFill>
               </a:rPr>
-              <a:t>    "github.com/</a:t>
-            </a:r>
-            <a:r>
-              <a:rPr sz="1600" dirty="0" err="1">
-                <a:solidFill>
-                  <a:schemeClr val="bg1">
-                    <a:lumMod val="95000"/>
-                  </a:schemeClr>
-                </a:solidFill>
-              </a:rPr>
-              <a:t>hyperledger</a:t>
-            </a:r>
+              <a:t>    // 1. Conexion gRPC al peer</a:t>
+            </a:r>
+          </a:p>
+          <a:p>
+            <a:pPr/>
             <a:r>
               <a:rPr sz="1600" dirty="0">
                 <a:solidFill>
@@ -14954,9 +15838,12 @@
                   </a:schemeClr>
                 </a:solidFill>
               </a:rPr>
-              <a:t>/fabric-gateway/pkg/client"</a:t>
-            </a:r>
-            <a:br>
+              <a:t>    const client = new grpc.Client(</a:t>
+            </a:r>
+          </a:p>
+          <a:p>
+            <a:pPr/>
+            <a:r>
               <a:rPr sz="1600" dirty="0">
                 <a:solidFill>
                   <a:schemeClr val="bg1">
@@ -14964,7 +15851,11 @@
                   </a:schemeClr>
                 </a:solidFill>
               </a:rPr>
-            </a:br>
+              <a:t>        'localhost:7051',</a:t>
+            </a:r>
+          </a:p>
+          <a:p>
+            <a:pPr/>
             <a:r>
               <a:rPr sz="1600" dirty="0">
                 <a:solidFill>
@@ -14973,18 +15864,11 @@
                   </a:schemeClr>
                 </a:solidFill>
               </a:rPr>
-              <a:t>    "google.golang.org/</a:t>
-            </a:r>
-            <a:r>
-              <a:rPr sz="1600" dirty="0" err="1">
-                <a:solidFill>
-                  <a:schemeClr val="bg1">
-                    <a:lumMod val="95000"/>
-                  </a:schemeClr>
-                </a:solidFill>
-              </a:rPr>
-              <a:t>grpc</a:t>
-            </a:r>
+              <a:t>        grpc.credentials.createSsl(tlsRootCert));</a:t>
+            </a:r>
+          </a:p>
+          <a:p>
+            <a:pPr/>
             <a:r>
               <a:rPr sz="1600" dirty="0">
                 <a:solidFill>
@@ -14993,9 +15877,12 @@
                   </a:schemeClr>
                 </a:solidFill>
               </a:rPr>
-              <a:t>"</a:t>
-            </a:r>
-            <a:br>
+              <a:t/>
+            </a:r>
+          </a:p>
+          <a:p>
+            <a:pPr/>
+            <a:r>
               <a:rPr sz="1600" dirty="0">
                 <a:solidFill>
                   <a:schemeClr val="bg1">
@@ -15003,7 +15890,11 @@
                   </a:schemeClr>
                 </a:solidFill>
               </a:rPr>
-            </a:br>
+              <a:t>    // 2. Crear identidad</a:t>
+            </a:r>
+          </a:p>
+          <a:p>
+            <a:pPr/>
             <a:r>
               <a:rPr sz="1600" dirty="0">
                 <a:solidFill>
@@ -15012,9 +15903,12 @@
                   </a:schemeClr>
                 </a:solidFill>
               </a:rPr>
-              <a:t>    "crypto/x509"</a:t>
-            </a:r>
-            <a:br>
+              <a:t>    const identity = {</a:t>
+            </a:r>
+          </a:p>
+          <a:p>
+            <a:pPr/>
+            <a:r>
               <a:rPr sz="1600" dirty="0">
                 <a:solidFill>
                   <a:schemeClr val="bg1">
@@ -15022,7 +15916,11 @@
                   </a:schemeClr>
                 </a:solidFill>
               </a:rPr>
-            </a:br>
+              <a:t>        mspId: 'Org1MSP',</a:t>
+            </a:r>
+          </a:p>
+          <a:p>
+            <a:pPr/>
             <a:r>
               <a:rPr sz="1600" dirty="0">
                 <a:solidFill>
@@ -15031,9 +15929,12 @@
                   </a:schemeClr>
                 </a:solidFill>
               </a:rPr>
-              <a:t>)</a:t>
-            </a:r>
-            <a:br>
+              <a:t>        credentials: certificate</a:t>
+            </a:r>
+          </a:p>
+          <a:p>
+            <a:pPr/>
+            <a:r>
               <a:rPr sz="1600" dirty="0">
                 <a:solidFill>
                   <a:schemeClr val="bg1">
@@ -15041,8 +15942,12 @@
                   </a:schemeClr>
                 </a:solidFill>
               </a:rPr>
-            </a:br>
-            <a:br>
+              <a:t>    };</a:t>
+            </a:r>
+          </a:p>
+          <a:p>
+            <a:pPr/>
+            <a:r>
               <a:rPr sz="1600" dirty="0">
                 <a:solidFill>
                   <a:schemeClr val="bg1">
@@ -15050,316 +15955,8 @@
                   </a:schemeClr>
                 </a:solidFill>
               </a:rPr>
-            </a:br>
-            <a:r>
-              <a:rPr sz="1600" dirty="0" err="1">
-                <a:solidFill>
-                  <a:schemeClr val="bg1">
-                    <a:lumMod val="95000"/>
-                  </a:schemeClr>
-                </a:solidFill>
-              </a:rPr>
-              <a:t>func</a:t>
-            </a:r>
-            <a:r>
-              <a:rPr sz="1600" dirty="0">
-                <a:solidFill>
-                  <a:schemeClr val="bg1">
-                    <a:lumMod val="95000"/>
-                  </a:schemeClr>
-                </a:solidFill>
-              </a:rPr>
-              <a:t> main() {</a:t>
-            </a:r>
-            <a:br>
-              <a:rPr sz="1600" dirty="0">
-                <a:solidFill>
-                  <a:schemeClr val="bg1">
-                    <a:lumMod val="95000"/>
-                  </a:schemeClr>
-                </a:solidFill>
-              </a:rPr>
-            </a:br>
-            <a:r>
-              <a:rPr sz="1600" dirty="0">
-                <a:solidFill>
-                  <a:schemeClr val="bg1">
-                    <a:lumMod val="95000"/>
-                  </a:schemeClr>
-                </a:solidFill>
-              </a:rPr>
-              <a:t>    // 1. Conexion </a:t>
-            </a:r>
-            <a:r>
-              <a:rPr sz="1600" dirty="0" err="1">
-                <a:solidFill>
-                  <a:schemeClr val="bg1">
-                    <a:lumMod val="95000"/>
-                  </a:schemeClr>
-                </a:solidFill>
-              </a:rPr>
-              <a:t>gRPC</a:t>
-            </a:r>
-            <a:r>
-              <a:rPr sz="1600" dirty="0">
-                <a:solidFill>
-                  <a:schemeClr val="bg1">
-                    <a:lumMod val="95000"/>
-                  </a:schemeClr>
-                </a:solidFill>
-              </a:rPr>
-              <a:t> al peer</a:t>
-            </a:r>
-            <a:br>
-              <a:rPr sz="1600" dirty="0">
-                <a:solidFill>
-                  <a:schemeClr val="bg1">
-                    <a:lumMod val="95000"/>
-                  </a:schemeClr>
-                </a:solidFill>
-              </a:rPr>
-            </a:br>
-            <a:r>
-              <a:rPr sz="1600" dirty="0">
-                <a:solidFill>
-                  <a:schemeClr val="bg1">
-                    <a:lumMod val="95000"/>
-                  </a:schemeClr>
-                </a:solidFill>
-              </a:rPr>
-              <a:t>    </a:t>
-            </a:r>
-            <a:r>
-              <a:rPr sz="1600" dirty="0" err="1">
-                <a:solidFill>
-                  <a:schemeClr val="bg1">
-                    <a:lumMod val="95000"/>
-                  </a:schemeClr>
-                </a:solidFill>
-              </a:rPr>
-              <a:t>clientConnection</a:t>
-            </a:r>
-            <a:r>
-              <a:rPr sz="1600" dirty="0">
-                <a:solidFill>
-                  <a:schemeClr val="bg1">
-                    <a:lumMod val="95000"/>
-                  </a:schemeClr>
-                </a:solidFill>
-              </a:rPr>
-              <a:t>, _ := </a:t>
-            </a:r>
-            <a:r>
-              <a:rPr sz="1600" dirty="0" err="1">
-                <a:solidFill>
-                  <a:schemeClr val="bg1">
-                    <a:lumMod val="95000"/>
-                  </a:schemeClr>
-                </a:solidFill>
-              </a:rPr>
-              <a:t>grpc.NewClient</a:t>
-            </a:r>
-            <a:r>
-              <a:rPr sz="1600" dirty="0">
-                <a:solidFill>
-                  <a:schemeClr val="bg1">
-                    <a:lumMod val="95000"/>
-                  </a:schemeClr>
-                </a:solidFill>
-              </a:rPr>
-              <a:t>("localhost:7051", </a:t>
-            </a:r>
-            <a:r>
-              <a:rPr sz="1600" dirty="0" err="1">
-                <a:solidFill>
-                  <a:schemeClr val="bg1">
-                    <a:lumMod val="95000"/>
-                  </a:schemeClr>
-                </a:solidFill>
-              </a:rPr>
-              <a:t>grpc.WithTransportCredentials</a:t>
-            </a:r>
-            <a:r>
-              <a:rPr sz="1600" dirty="0">
-                <a:solidFill>
-                  <a:schemeClr val="bg1">
-                    <a:lumMod val="95000"/>
-                  </a:schemeClr>
-                </a:solidFill>
-              </a:rPr>
-              <a:t>(...))</a:t>
-            </a:r>
-            <a:br>
-              <a:rPr sz="1600" dirty="0">
-                <a:solidFill>
-                  <a:schemeClr val="bg1">
-                    <a:lumMod val="95000"/>
-                  </a:schemeClr>
-                </a:solidFill>
-              </a:rPr>
-            </a:br>
-            <a:r>
-              <a:rPr sz="1600" dirty="0">
-                <a:solidFill>
-                  <a:schemeClr val="bg1">
-                    <a:lumMod val="95000"/>
-                  </a:schemeClr>
-                </a:solidFill>
-              </a:rPr>
-              <a:t>    defer </a:t>
-            </a:r>
-            <a:r>
-              <a:rPr sz="1600" dirty="0" err="1">
-                <a:solidFill>
-                  <a:schemeClr val="bg1">
-                    <a:lumMod val="95000"/>
-                  </a:schemeClr>
-                </a:solidFill>
-              </a:rPr>
-              <a:t>clientConnection.Close</a:t>
-            </a:r>
-            <a:r>
-              <a:rPr sz="1600" dirty="0">
-                <a:solidFill>
-                  <a:schemeClr val="bg1">
-                    <a:lumMod val="95000"/>
-                  </a:schemeClr>
-                </a:solidFill>
-              </a:rPr>
-              <a:t>()</a:t>
-            </a:r>
-            <a:br>
-              <a:rPr sz="1600" dirty="0">
-                <a:solidFill>
-                  <a:schemeClr val="bg1">
-                    <a:lumMod val="95000"/>
-                  </a:schemeClr>
-                </a:solidFill>
-              </a:rPr>
-            </a:br>
-            <a:br>
-              <a:rPr sz="1600" dirty="0">
-                <a:solidFill>
-                  <a:schemeClr val="bg1">
-                    <a:lumMod val="95000"/>
-                  </a:schemeClr>
-                </a:solidFill>
-              </a:rPr>
-            </a:br>
-            <a:r>
-              <a:rPr sz="1600" dirty="0">
-                <a:solidFill>
-                  <a:schemeClr val="bg1">
-                    <a:lumMod val="95000"/>
-                  </a:schemeClr>
-                </a:solidFill>
-              </a:rPr>
-              <a:t>    // 2. Crear </a:t>
-            </a:r>
-            <a:r>
-              <a:rPr sz="1600" dirty="0" err="1">
-                <a:solidFill>
-                  <a:schemeClr val="bg1">
-                    <a:lumMod val="95000"/>
-                  </a:schemeClr>
-                </a:solidFill>
-              </a:rPr>
-              <a:t>identidad</a:t>
-            </a:r>
-            <a:br>
-              <a:rPr sz="1600" dirty="0">
-                <a:solidFill>
-                  <a:schemeClr val="bg1">
-                    <a:lumMod val="95000"/>
-                  </a:schemeClr>
-                </a:solidFill>
-              </a:rPr>
-            </a:br>
-            <a:r>
-              <a:rPr sz="1600" dirty="0">
-                <a:solidFill>
-                  <a:schemeClr val="bg1">
-                    <a:lumMod val="95000"/>
-                  </a:schemeClr>
-                </a:solidFill>
-              </a:rPr>
-              <a:t>    id := client.NewX509Identity("Org1MSP", certificate)</a:t>
-            </a:r>
-            <a:br>
-              <a:rPr sz="1600" dirty="0">
-                <a:solidFill>
-                  <a:schemeClr val="bg1">
-                    <a:lumMod val="95000"/>
-                  </a:schemeClr>
-                </a:solidFill>
-              </a:rPr>
-            </a:br>
-            <a:r>
-              <a:rPr sz="1600" dirty="0">
-                <a:solidFill>
-                  <a:schemeClr val="bg1">
-                    <a:lumMod val="95000"/>
-                  </a:schemeClr>
-                </a:solidFill>
-              </a:rPr>
-              <a:t>    sign, _ := </a:t>
-            </a:r>
-            <a:r>
-              <a:rPr sz="1600" dirty="0" err="1">
-                <a:solidFill>
-                  <a:schemeClr val="bg1">
-                    <a:lumMod val="95000"/>
-                  </a:schemeClr>
-                </a:solidFill>
-              </a:rPr>
-              <a:t>client.NewSign</a:t>
-            </a:r>
-            <a:r>
-              <a:rPr sz="1600" dirty="0">
-                <a:solidFill>
-                  <a:schemeClr val="bg1">
-                    <a:lumMod val="95000"/>
-                  </a:schemeClr>
-                </a:solidFill>
-              </a:rPr>
-              <a:t>(</a:t>
-            </a:r>
-            <a:r>
-              <a:rPr sz="1600" dirty="0" err="1">
-                <a:solidFill>
-                  <a:schemeClr val="bg1">
-                    <a:lumMod val="95000"/>
-                  </a:schemeClr>
-                </a:solidFill>
-              </a:rPr>
-              <a:t>privateKey</a:t>
-            </a:r>
-            <a:r>
-              <a:rPr sz="1600" dirty="0">
-                <a:solidFill>
-                  <a:schemeClr val="bg1">
-                    <a:lumMod val="95000"/>
-                  </a:schemeClr>
-                </a:solidFill>
-              </a:rPr>
-              <a:t>)</a:t>
-            </a:r>
-            <a:br>
-              <a:rPr sz="1600" dirty="0">
-                <a:solidFill>
-                  <a:schemeClr val="bg1">
-                    <a:lumMod val="95000"/>
-                  </a:schemeClr>
-                </a:solidFill>
-              </a:rPr>
-            </a:br>
-            <a:endParaRPr sz="1600" dirty="0">
-              <a:solidFill>
-                <a:schemeClr val="bg1">
-                  <a:lumMod val="95000"/>
-                </a:schemeClr>
-              </a:solidFill>
-            </a:endParaRPr>
+              <a:t>    const signer = signers.newPrivateKeySigner(privateKey);</a:t>
+            </a:r>
           </a:p>
         </p:txBody>
       </p:sp>
@@ -15391,7 +15988,8 @@
           </a:bodyPr>
           <a:lstStyle/>
           <a:p>
-            <a:br>
+            <a:pPr/>
+            <a:r>
               <a:rPr lang="es-ES" sz="1600" dirty="0">
                 <a:solidFill>
                   <a:schemeClr val="bg1">
@@ -15399,7 +15997,11 @@
                   </a:schemeClr>
                 </a:solidFill>
               </a:rPr>
-            </a:br>
+              <a:t>    // 3. Conectar al Gateway</a:t>
+            </a:r>
+          </a:p>
+          <a:p>
+            <a:pPr/>
             <a:r>
               <a:rPr lang="es-ES" sz="1600" dirty="0">
                 <a:solidFill>
@@ -15408,9 +16010,12 @@
                   </a:schemeClr>
                 </a:solidFill>
               </a:rPr>
-              <a:t>    // 3. Conectar al Gateway</a:t>
-            </a:r>
-            <a:br>
+              <a:t>    const gateway = connect({ client, identity, signer });</a:t>
+            </a:r>
+          </a:p>
+          <a:p>
+            <a:pPr/>
+            <a:r>
               <a:rPr lang="es-ES" sz="1600" dirty="0">
                 <a:solidFill>
                   <a:schemeClr val="bg1">
@@ -15418,7 +16023,11 @@
                   </a:schemeClr>
                 </a:solidFill>
               </a:rPr>
-            </a:br>
+              <a:t/>
+            </a:r>
+          </a:p>
+          <a:p>
+            <a:pPr/>
             <a:r>
               <a:rPr lang="es-ES" sz="1600" dirty="0">
                 <a:solidFill>
@@ -15427,18 +16036,11 @@
                   </a:schemeClr>
                 </a:solidFill>
               </a:rPr>
-              <a:t>    </a:t>
-            </a:r>
-            <a:r>
-              <a:rPr lang="es-ES" sz="1600" dirty="0" err="1">
-                <a:solidFill>
-                  <a:schemeClr val="bg1">
-                    <a:lumMod val="95000"/>
-                  </a:schemeClr>
-                </a:solidFill>
-              </a:rPr>
-              <a:t>gw</a:t>
-            </a:r>
+              <a:t>    // 4. Obtener canal y contrato</a:t>
+            </a:r>
+          </a:p>
+          <a:p>
+            <a:pPr/>
             <a:r>
               <a:rPr lang="es-ES" sz="1600" dirty="0">
                 <a:solidFill>
@@ -15447,18 +16049,11 @@
                   </a:schemeClr>
                 </a:solidFill>
               </a:rPr>
-              <a:t>, _ := </a:t>
-            </a:r>
-            <a:r>
-              <a:rPr lang="es-ES" sz="1600" dirty="0" err="1">
-                <a:solidFill>
-                  <a:schemeClr val="bg1">
-                    <a:lumMod val="95000"/>
-                  </a:schemeClr>
-                </a:solidFill>
-              </a:rPr>
-              <a:t>client.Connect</a:t>
-            </a:r>
+              <a:t>    const network = gateway.getNetwork('mychannel');</a:t>
+            </a:r>
+          </a:p>
+          <a:p>
+            <a:pPr/>
             <a:r>
               <a:rPr lang="es-ES" sz="1600" dirty="0">
                 <a:solidFill>
@@ -15467,18 +16062,11 @@
                   </a:schemeClr>
                 </a:solidFill>
               </a:rPr>
-              <a:t>(id, </a:t>
-            </a:r>
-            <a:r>
-              <a:rPr lang="es-ES" sz="1600" dirty="0" err="1">
-                <a:solidFill>
-                  <a:schemeClr val="bg1">
-                    <a:lumMod val="95000"/>
-                  </a:schemeClr>
-                </a:solidFill>
-              </a:rPr>
-              <a:t>client.WithSign</a:t>
-            </a:r>
+              <a:t>    const contract = network.getContract('foodtrace');</a:t>
+            </a:r>
+          </a:p>
+          <a:p>
+            <a:pPr/>
             <a:r>
               <a:rPr lang="es-ES" sz="1600" dirty="0">
                 <a:solidFill>
@@ -15487,18 +16075,11 @@
                   </a:schemeClr>
                 </a:solidFill>
               </a:rPr>
-              <a:t>(</a:t>
-            </a:r>
-            <a:r>
-              <a:rPr lang="es-ES" sz="1600" dirty="0" err="1">
-                <a:solidFill>
-                  <a:schemeClr val="bg1">
-                    <a:lumMod val="95000"/>
-                  </a:schemeClr>
-                </a:solidFill>
-              </a:rPr>
-              <a:t>sign</a:t>
-            </a:r>
+              <a:t/>
+            </a:r>
+          </a:p>
+          <a:p>
+            <a:pPr/>
             <a:r>
               <a:rPr lang="es-ES" sz="1600" dirty="0">
                 <a:solidFill>
@@ -15507,9 +16088,12 @@
                   </a:schemeClr>
                 </a:solidFill>
               </a:rPr>
-              <a:t>),</a:t>
-            </a:r>
-            <a:br>
+              <a:t>    // 5. Evaluar (lectura)</a:t>
+            </a:r>
+          </a:p>
+          <a:p>
+            <a:pPr/>
+            <a:r>
               <a:rPr lang="es-ES" sz="1600" dirty="0">
                 <a:solidFill>
                   <a:schemeClr val="bg1">
@@ -15517,7 +16101,11 @@
                   </a:schemeClr>
                 </a:solidFill>
               </a:rPr>
-            </a:br>
+              <a:t>    const result = await contract.evaluateTransaction(</a:t>
+            </a:r>
+          </a:p>
+          <a:p>
+            <a:pPr/>
             <a:r>
               <a:rPr lang="es-ES" sz="1600" dirty="0">
                 <a:solidFill>
@@ -15526,18 +16114,11 @@
                   </a:schemeClr>
                 </a:solidFill>
               </a:rPr>
-              <a:t>        </a:t>
-            </a:r>
-            <a:r>
-              <a:rPr lang="es-ES" sz="1600" dirty="0" err="1">
-                <a:solidFill>
-                  <a:schemeClr val="bg1">
-                    <a:lumMod val="95000"/>
-                  </a:schemeClr>
-                </a:solidFill>
-              </a:rPr>
-              <a:t>client.WithClientConnection</a:t>
-            </a:r>
+              <a:t>        'GetAllLots');</a:t>
+            </a:r>
+          </a:p>
+          <a:p>
+            <a:pPr/>
             <a:r>
               <a:rPr lang="es-ES" sz="1600" dirty="0">
                 <a:solidFill>
@@ -15546,18 +16127,11 @@
                   </a:schemeClr>
                 </a:solidFill>
               </a:rPr>
-              <a:t>(</a:t>
-            </a:r>
-            <a:r>
-              <a:rPr lang="es-ES" sz="1600" dirty="0" err="1">
-                <a:solidFill>
-                  <a:schemeClr val="bg1">
-                    <a:lumMod val="95000"/>
-                  </a:schemeClr>
-                </a:solidFill>
-              </a:rPr>
-              <a:t>clientConnection</a:t>
-            </a:r>
+              <a:t>    console.log(new TextDecoder().decode(result));</a:t>
+            </a:r>
+          </a:p>
+          <a:p>
+            <a:pPr/>
             <a:r>
               <a:rPr lang="es-ES" sz="1600" dirty="0">
                 <a:solidFill>
@@ -15566,9 +16140,12 @@
                   </a:schemeClr>
                 </a:solidFill>
               </a:rPr>
-              <a:t>))</a:t>
-            </a:r>
-            <a:br>
+              <a:t/>
+            </a:r>
+          </a:p>
+          <a:p>
+            <a:pPr/>
+            <a:r>
               <a:rPr lang="es-ES" sz="1600" dirty="0">
                 <a:solidFill>
                   <a:schemeClr val="bg1">
@@ -15576,7 +16153,11 @@
                   </a:schemeClr>
                 </a:solidFill>
               </a:rPr>
-            </a:br>
+              <a:t>    // 6. Submit (escritura)</a:t>
+            </a:r>
+          </a:p>
+          <a:p>
+            <a:pPr/>
             <a:r>
               <a:rPr lang="es-ES" sz="1600" dirty="0">
                 <a:solidFill>
@@ -15585,18 +16166,11 @@
                   </a:schemeClr>
                 </a:solidFill>
               </a:rPr>
-              <a:t>    </a:t>
-            </a:r>
-            <a:r>
-              <a:rPr lang="es-ES" sz="1600" dirty="0" err="1">
-                <a:solidFill>
-                  <a:schemeClr val="bg1">
-                    <a:lumMod val="95000"/>
-                  </a:schemeClr>
-                </a:solidFill>
-              </a:rPr>
-              <a:t>defer</a:t>
-            </a:r>
+              <a:t>    await contract.submitTransaction('ProduceLot',</a:t>
+            </a:r>
+          </a:p>
+          <a:p>
+            <a:pPr/>
             <a:r>
               <a:rPr lang="es-ES" sz="1600" dirty="0">
                 <a:solidFill>
@@ -15605,18 +16179,11 @@
                   </a:schemeClr>
                 </a:solidFill>
               </a:rPr>
-              <a:t> </a:t>
-            </a:r>
-            <a:r>
-              <a:rPr lang="es-ES" sz="1600" dirty="0" err="1">
-                <a:solidFill>
-                  <a:schemeClr val="bg1">
-                    <a:lumMod val="95000"/>
-                  </a:schemeClr>
-                </a:solidFill>
-              </a:rPr>
-              <a:t>gw.Close</a:t>
-            </a:r>
+              <a:t>        'LOT-001', 'mango', 'Spain', '500.0');</a:t>
+            </a:r>
+          </a:p>
+          <a:p>
+            <a:pPr/>
             <a:r>
               <a:rPr lang="es-ES" sz="1600" dirty="0">
                 <a:solidFill>
@@ -15625,9 +16192,12 @@
                   </a:schemeClr>
                 </a:solidFill>
               </a:rPr>
-              <a:t>()</a:t>
-            </a:r>
-            <a:br>
+              <a:t>}</a:t>
+            </a:r>
+          </a:p>
+          <a:p>
+            <a:pPr/>
+            <a:r>
               <a:rPr lang="es-ES" sz="1600" dirty="0">
                 <a:solidFill>
                   <a:schemeClr val="bg1">
@@ -15635,8 +16205,12 @@
                   </a:schemeClr>
                 </a:solidFill>
               </a:rPr>
-            </a:br>
-            <a:br>
+              <a:t/>
+            </a:r>
+          </a:p>
+          <a:p>
+            <a:pPr/>
+            <a:r>
               <a:rPr lang="es-ES" sz="1600" dirty="0">
                 <a:solidFill>
                   <a:schemeClr val="bg1">
@@ -15644,468 +16218,8 @@
                   </a:schemeClr>
                 </a:solidFill>
               </a:rPr>
-            </a:br>
-            <a:r>
-              <a:rPr lang="es-ES" sz="1600" dirty="0">
-                <a:solidFill>
-                  <a:schemeClr val="bg1">
-                    <a:lumMod val="95000"/>
-                  </a:schemeClr>
-                </a:solidFill>
-              </a:rPr>
-              <a:t>    // 4. Obtener canal y contrato</a:t>
-            </a:r>
-            <a:br>
-              <a:rPr lang="es-ES" sz="1600" dirty="0">
-                <a:solidFill>
-                  <a:schemeClr val="bg1">
-                    <a:lumMod val="95000"/>
-                  </a:schemeClr>
-                </a:solidFill>
-              </a:rPr>
-            </a:br>
-            <a:r>
-              <a:rPr lang="es-ES" sz="1600" dirty="0">
-                <a:solidFill>
-                  <a:schemeClr val="bg1">
-                    <a:lumMod val="95000"/>
-                  </a:schemeClr>
-                </a:solidFill>
-              </a:rPr>
-              <a:t>    </a:t>
-            </a:r>
-            <a:r>
-              <a:rPr lang="es-ES" sz="1600" dirty="0" err="1">
-                <a:solidFill>
-                  <a:schemeClr val="bg1">
-                    <a:lumMod val="95000"/>
-                  </a:schemeClr>
-                </a:solidFill>
-              </a:rPr>
-              <a:t>network</a:t>
-            </a:r>
-            <a:r>
-              <a:rPr lang="es-ES" sz="1600" dirty="0">
-                <a:solidFill>
-                  <a:schemeClr val="bg1">
-                    <a:lumMod val="95000"/>
-                  </a:schemeClr>
-                </a:solidFill>
-              </a:rPr>
-              <a:t> := </a:t>
-            </a:r>
-            <a:r>
-              <a:rPr lang="es-ES" sz="1600" dirty="0" err="1">
-                <a:solidFill>
-                  <a:schemeClr val="bg1">
-                    <a:lumMod val="95000"/>
-                  </a:schemeClr>
-                </a:solidFill>
-              </a:rPr>
-              <a:t>gw.GetNetwork</a:t>
-            </a:r>
-            <a:r>
-              <a:rPr lang="es-ES" sz="1600" dirty="0">
-                <a:solidFill>
-                  <a:schemeClr val="bg1">
-                    <a:lumMod val="95000"/>
-                  </a:schemeClr>
-                </a:solidFill>
-              </a:rPr>
-              <a:t>("</a:t>
-            </a:r>
-            <a:r>
-              <a:rPr lang="es-ES" sz="1600" dirty="0" err="1">
-                <a:solidFill>
-                  <a:schemeClr val="bg1">
-                    <a:lumMod val="95000"/>
-                  </a:schemeClr>
-                </a:solidFill>
-              </a:rPr>
-              <a:t>mychannel</a:t>
-            </a:r>
-            <a:r>
-              <a:rPr lang="es-ES" sz="1600" dirty="0">
-                <a:solidFill>
-                  <a:schemeClr val="bg1">
-                    <a:lumMod val="95000"/>
-                  </a:schemeClr>
-                </a:solidFill>
-              </a:rPr>
-              <a:t>")</a:t>
-            </a:r>
-            <a:br>
-              <a:rPr lang="es-ES" sz="1600" dirty="0">
-                <a:solidFill>
-                  <a:schemeClr val="bg1">
-                    <a:lumMod val="95000"/>
-                  </a:schemeClr>
-                </a:solidFill>
-              </a:rPr>
-            </a:br>
-            <a:r>
-              <a:rPr lang="es-ES" sz="1600" dirty="0">
-                <a:solidFill>
-                  <a:schemeClr val="bg1">
-                    <a:lumMod val="95000"/>
-                  </a:schemeClr>
-                </a:solidFill>
-              </a:rPr>
-              <a:t>    </a:t>
-            </a:r>
-            <a:r>
-              <a:rPr lang="es-ES" sz="1600" dirty="0" err="1">
-                <a:solidFill>
-                  <a:schemeClr val="bg1">
-                    <a:lumMod val="95000"/>
-                  </a:schemeClr>
-                </a:solidFill>
-              </a:rPr>
-              <a:t>contract</a:t>
-            </a:r>
-            <a:r>
-              <a:rPr lang="es-ES" sz="1600" dirty="0">
-                <a:solidFill>
-                  <a:schemeClr val="bg1">
-                    <a:lumMod val="95000"/>
-                  </a:schemeClr>
-                </a:solidFill>
-              </a:rPr>
-              <a:t> := </a:t>
-            </a:r>
-            <a:r>
-              <a:rPr lang="es-ES" sz="1600" dirty="0" err="1">
-                <a:solidFill>
-                  <a:schemeClr val="bg1">
-                    <a:lumMod val="95000"/>
-                  </a:schemeClr>
-                </a:solidFill>
-              </a:rPr>
-              <a:t>network.GetContract</a:t>
-            </a:r>
-            <a:r>
-              <a:rPr lang="es-ES" sz="1600" dirty="0">
-                <a:solidFill>
-                  <a:schemeClr val="bg1">
-                    <a:lumMod val="95000"/>
-                  </a:schemeClr>
-                </a:solidFill>
-              </a:rPr>
-              <a:t>("</a:t>
-            </a:r>
-            <a:r>
-              <a:rPr lang="es-ES" sz="1600" dirty="0" err="1">
-                <a:solidFill>
-                  <a:schemeClr val="bg1">
-                    <a:lumMod val="95000"/>
-                  </a:schemeClr>
-                </a:solidFill>
-              </a:rPr>
-              <a:t>foodtrace</a:t>
-            </a:r>
-            <a:r>
-              <a:rPr lang="es-ES" sz="1600" dirty="0">
-                <a:solidFill>
-                  <a:schemeClr val="bg1">
-                    <a:lumMod val="95000"/>
-                  </a:schemeClr>
-                </a:solidFill>
-              </a:rPr>
-              <a:t>")</a:t>
-            </a:r>
-            <a:br>
-              <a:rPr lang="es-ES" sz="1600" dirty="0">
-                <a:solidFill>
-                  <a:schemeClr val="bg1">
-                    <a:lumMod val="95000"/>
-                  </a:schemeClr>
-                </a:solidFill>
-              </a:rPr>
-            </a:br>
-            <a:br>
-              <a:rPr lang="es-ES" sz="1600" dirty="0">
-                <a:solidFill>
-                  <a:schemeClr val="bg1">
-                    <a:lumMod val="95000"/>
-                  </a:schemeClr>
-                </a:solidFill>
-              </a:rPr>
-            </a:br>
-            <a:r>
-              <a:rPr lang="es-ES" sz="1600" dirty="0">
-                <a:solidFill>
-                  <a:schemeClr val="bg1">
-                    <a:lumMod val="95000"/>
-                  </a:schemeClr>
-                </a:solidFill>
-              </a:rPr>
-              <a:t>    // 5. Evaluar (lectura)</a:t>
-            </a:r>
-            <a:br>
-              <a:rPr lang="es-ES" sz="1600" dirty="0">
-                <a:solidFill>
-                  <a:schemeClr val="bg1">
-                    <a:lumMod val="95000"/>
-                  </a:schemeClr>
-                </a:solidFill>
-              </a:rPr>
-            </a:br>
-            <a:r>
-              <a:rPr lang="es-ES" sz="1600" dirty="0">
-                <a:solidFill>
-                  <a:schemeClr val="bg1">
-                    <a:lumMod val="95000"/>
-                  </a:schemeClr>
-                </a:solidFill>
-              </a:rPr>
-              <a:t>    </a:t>
-            </a:r>
-            <a:r>
-              <a:rPr lang="es-ES" sz="1600" dirty="0" err="1">
-                <a:solidFill>
-                  <a:schemeClr val="bg1">
-                    <a:lumMod val="95000"/>
-                  </a:schemeClr>
-                </a:solidFill>
-              </a:rPr>
-              <a:t>result</a:t>
-            </a:r>
-            <a:r>
-              <a:rPr lang="es-ES" sz="1600" dirty="0">
-                <a:solidFill>
-                  <a:schemeClr val="bg1">
-                    <a:lumMod val="95000"/>
-                  </a:schemeClr>
-                </a:solidFill>
-              </a:rPr>
-              <a:t>, _ := </a:t>
-            </a:r>
-            <a:r>
-              <a:rPr lang="es-ES" sz="1600" dirty="0" err="1">
-                <a:solidFill>
-                  <a:schemeClr val="bg1">
-                    <a:lumMod val="95000"/>
-                  </a:schemeClr>
-                </a:solidFill>
-              </a:rPr>
-              <a:t>contract.EvaluateTransaction</a:t>
-            </a:r>
-            <a:r>
-              <a:rPr lang="es-ES" sz="1600" dirty="0">
-                <a:solidFill>
-                  <a:schemeClr val="bg1">
-                    <a:lumMod val="95000"/>
-                  </a:schemeClr>
-                </a:solidFill>
-              </a:rPr>
-              <a:t>("</a:t>
-            </a:r>
-            <a:r>
-              <a:rPr lang="es-ES" sz="1600" dirty="0" err="1">
-                <a:solidFill>
-                  <a:schemeClr val="bg1">
-                    <a:lumMod val="95000"/>
-                  </a:schemeClr>
-                </a:solidFill>
-              </a:rPr>
-              <a:t>GetAllLots</a:t>
-            </a:r>
-            <a:r>
-              <a:rPr lang="es-ES" sz="1600" dirty="0">
-                <a:solidFill>
-                  <a:schemeClr val="bg1">
-                    <a:lumMod val="95000"/>
-                  </a:schemeClr>
-                </a:solidFill>
-              </a:rPr>
-              <a:t>")</a:t>
-            </a:r>
-            <a:br>
-              <a:rPr lang="es-ES" sz="1600" dirty="0">
-                <a:solidFill>
-                  <a:schemeClr val="bg1">
-                    <a:lumMod val="95000"/>
-                  </a:schemeClr>
-                </a:solidFill>
-              </a:rPr>
-            </a:br>
-            <a:br>
-              <a:rPr lang="es-ES" sz="1600" dirty="0">
-                <a:solidFill>
-                  <a:schemeClr val="bg1">
-                    <a:lumMod val="95000"/>
-                  </a:schemeClr>
-                </a:solidFill>
-              </a:rPr>
-            </a:br>
-            <a:r>
-              <a:rPr lang="es-ES" sz="1600" dirty="0">
-                <a:solidFill>
-                  <a:schemeClr val="bg1">
-                    <a:lumMod val="95000"/>
-                  </a:schemeClr>
-                </a:solidFill>
-              </a:rPr>
-              <a:t>    // 6. </a:t>
-            </a:r>
-            <a:r>
-              <a:rPr lang="es-ES" sz="1600" dirty="0" err="1">
-                <a:solidFill>
-                  <a:schemeClr val="bg1">
-                    <a:lumMod val="95000"/>
-                  </a:schemeClr>
-                </a:solidFill>
-              </a:rPr>
-              <a:t>Submit</a:t>
-            </a:r>
-            <a:r>
-              <a:rPr lang="es-ES" sz="1600" dirty="0">
-                <a:solidFill>
-                  <a:schemeClr val="bg1">
-                    <a:lumMod val="95000"/>
-                  </a:schemeClr>
-                </a:solidFill>
-              </a:rPr>
-              <a:t> (escritura)</a:t>
-            </a:r>
-            <a:br>
-              <a:rPr lang="es-ES" sz="1600" dirty="0">
-                <a:solidFill>
-                  <a:schemeClr val="bg1">
-                    <a:lumMod val="95000"/>
-                  </a:schemeClr>
-                </a:solidFill>
-              </a:rPr>
-            </a:br>
-            <a:r>
-              <a:rPr lang="es-ES" sz="1600" dirty="0">
-                <a:solidFill>
-                  <a:schemeClr val="bg1">
-                    <a:lumMod val="95000"/>
-                  </a:schemeClr>
-                </a:solidFill>
-              </a:rPr>
-              <a:t>    _, </a:t>
-            </a:r>
-            <a:r>
-              <a:rPr lang="es-ES" sz="1600" dirty="0" err="1">
-                <a:solidFill>
-                  <a:schemeClr val="bg1">
-                    <a:lumMod val="95000"/>
-                  </a:schemeClr>
-                </a:solidFill>
-              </a:rPr>
-              <a:t>err</a:t>
-            </a:r>
-            <a:r>
-              <a:rPr lang="es-ES" sz="1600" dirty="0">
-                <a:solidFill>
-                  <a:schemeClr val="bg1">
-                    <a:lumMod val="95000"/>
-                  </a:schemeClr>
-                </a:solidFill>
-              </a:rPr>
-              <a:t> := </a:t>
-            </a:r>
-            <a:r>
-              <a:rPr lang="es-ES" sz="1600" dirty="0" err="1">
-                <a:solidFill>
-                  <a:schemeClr val="bg1">
-                    <a:lumMod val="95000"/>
-                  </a:schemeClr>
-                </a:solidFill>
-              </a:rPr>
-              <a:t>contract.SubmitTransaction</a:t>
-            </a:r>
-            <a:r>
-              <a:rPr lang="es-ES" sz="1600" dirty="0">
-                <a:solidFill>
-                  <a:schemeClr val="bg1">
-                    <a:lumMod val="95000"/>
-                  </a:schemeClr>
-                </a:solidFill>
-              </a:rPr>
-              <a:t>("</a:t>
-            </a:r>
-            <a:r>
-              <a:rPr lang="es-ES" sz="1600" dirty="0" err="1">
-                <a:solidFill>
-                  <a:schemeClr val="bg1">
-                    <a:lumMod val="95000"/>
-                  </a:schemeClr>
-                </a:solidFill>
-              </a:rPr>
-              <a:t>ProduceLot</a:t>
-            </a:r>
-            <a:r>
-              <a:rPr lang="es-ES" sz="1600" dirty="0">
-                <a:solidFill>
-                  <a:schemeClr val="bg1">
-                    <a:lumMod val="95000"/>
-                  </a:schemeClr>
-                </a:solidFill>
-              </a:rPr>
-              <a:t>",</a:t>
-            </a:r>
-            <a:br>
-              <a:rPr lang="es-ES" sz="1600" dirty="0">
-                <a:solidFill>
-                  <a:schemeClr val="bg1">
-                    <a:lumMod val="95000"/>
-                  </a:schemeClr>
-                </a:solidFill>
-              </a:rPr>
-            </a:br>
-            <a:r>
-              <a:rPr lang="es-ES" sz="1600" dirty="0">
-                <a:solidFill>
-                  <a:schemeClr val="bg1">
-                    <a:lumMod val="95000"/>
-                  </a:schemeClr>
-                </a:solidFill>
-              </a:rPr>
-              <a:t>        "LOT-001", "mango", "</a:t>
-            </a:r>
-            <a:r>
-              <a:rPr lang="es-ES" sz="1600" dirty="0" err="1">
-                <a:solidFill>
-                  <a:schemeClr val="bg1">
-                    <a:lumMod val="95000"/>
-                  </a:schemeClr>
-                </a:solidFill>
-              </a:rPr>
-              <a:t>Spain</a:t>
-            </a:r>
-            <a:r>
-              <a:rPr lang="es-ES" sz="1600" dirty="0">
-                <a:solidFill>
-                  <a:schemeClr val="bg1">
-                    <a:lumMod val="95000"/>
-                  </a:schemeClr>
-                </a:solidFill>
-              </a:rPr>
-              <a:t>", "500.0")</a:t>
-            </a:r>
-            <a:br>
-              <a:rPr lang="es-ES" sz="1600" dirty="0">
-                <a:solidFill>
-                  <a:schemeClr val="bg1">
-                    <a:lumMod val="95000"/>
-                  </a:schemeClr>
-                </a:solidFill>
-              </a:rPr>
-            </a:br>
-            <a:r>
-              <a:rPr lang="es-ES" sz="1600" dirty="0">
-                <a:solidFill>
-                  <a:schemeClr val="bg1">
-                    <a:lumMod val="95000"/>
-                  </a:schemeClr>
-                </a:solidFill>
-              </a:rPr>
-              <a:t>}</a:t>
-            </a:r>
-            <a:endParaRPr lang="es-ES" sz="1600" dirty="0"/>
+              <a:t>main().catch(console.error);</a:t>
+            </a:r>
           </a:p>
         </p:txBody>
       </p:sp>
